--- a/docs/chartpack/latest.pptx
+++ b/docs/chartpack/latest.pptx
@@ -3210,7 +3210,7 @@
               </a:defRPr>
             </a:pPr>
             <a:r>
-              <a:t>Trade Date: 2026-03-11</a:t>
+              <a:t>Trade Date: 2026-03-23</a:t>
             </a:r>
           </a:p>
         </p:txBody>
@@ -3505,7 +3505,7 @@
               </a:defRPr>
             </a:pPr>
             <a:r>
-              <a:t>East/West Base &amp; Peak monthly contracts (2026-03-11)</a:t>
+              <a:t>East/West Base &amp; Peak monthly contracts (2026-03-23)</a:t>
             </a:r>
           </a:p>
         </p:txBody>
@@ -3711,7 +3711,7 @@
               </a:defRPr>
             </a:pPr>
             <a:r>
-              <a:t>Front-month settlement prices as of 2026-03-11</a:t>
+              <a:t>Front-month settlement prices as of 2026-03-23</a:t>
             </a:r>
           </a:p>
         </p:txBody>
@@ -3989,7 +3989,7 @@
                         </a:defRPr>
                       </a:pPr>
                       <a:r>
-                        <a:t>95,600.00</a:t>
+                        <a:t>115,900.00</a:t>
                       </a:r>
                     </a:p>
                   </a:txBody>
@@ -4030,35 +4030,35 @@
                       <a:pPr algn="ctr">
                         <a:defRPr sz="800">
                           <a:solidFill>
-                            <a:srgbClr val="10B981"/>
-                          </a:solidFill>
-                        </a:defRPr>
-                      </a:pPr>
-                      <a:r>
-                        <a:t>+1600.00</a:t>
-                      </a:r>
-                    </a:p>
-                  </a:txBody>
-                  <a:tcPr anchor="ctr">
-                    <a:solidFill>
-                      <a:srgbClr val="141820"/>
-                    </a:solidFill>
-                  </a:tcPr>
-                </a:tc>
-                <a:tc>
-                  <a:txBody>
-                    <a:bodyPr/>
-                    <a:lstStyle/>
-                    <a:p>
-                      <a:pPr algn="ctr">
-                        <a:defRPr sz="800">
-                          <a:solidFill>
-                            <a:srgbClr val="10B981"/>
-                          </a:solidFill>
-                        </a:defRPr>
-                      </a:pPr>
-                      <a:r>
-                        <a:t>+1.70%</a:t>
+                            <a:srgbClr val="F0F2F5"/>
+                          </a:solidFill>
+                        </a:defRPr>
+                      </a:pPr>
+                      <a:r>
+                        <a:t>+0.00</a:t>
+                      </a:r>
+                    </a:p>
+                  </a:txBody>
+                  <a:tcPr anchor="ctr">
+                    <a:solidFill>
+                      <a:srgbClr val="141820"/>
+                    </a:solidFill>
+                  </a:tcPr>
+                </a:tc>
+                <a:tc>
+                  <a:txBody>
+                    <a:bodyPr/>
+                    <a:lstStyle/>
+                    <a:p>
+                      <a:pPr algn="ctr">
+                        <a:defRPr sz="800">
+                          <a:solidFill>
+                            <a:srgbClr val="F0F2F5"/>
+                          </a:solidFill>
+                        </a:defRPr>
+                      </a:pPr>
+                      <a:r>
+                        <a:t>+0.00%</a:t>
                       </a:r>
                     </a:p>
                   </a:txBody>
@@ -4152,7 +4152,7 @@
                         </a:defRPr>
                       </a:pPr>
                       <a:r>
-                        <a:t>110,000.00</a:t>
+                        <a:t>150,000.00</a:t>
                       </a:r>
                     </a:p>
                   </a:txBody>
@@ -4315,7 +4315,7 @@
                         </a:defRPr>
                       </a:pPr>
                       <a:r>
-                        <a:t>108,000.00</a:t>
+                        <a:t>140,000.00</a:t>
                       </a:r>
                     </a:p>
                   </a:txBody>
@@ -4478,7 +4478,7 @@
                         </a:defRPr>
                       </a:pPr>
                       <a:r>
-                        <a:t>100,000.00</a:t>
+                        <a:t>140,000.00</a:t>
                       </a:r>
                     </a:p>
                   </a:txBody>
@@ -4641,7 +4641,7 @@
                         </a:defRPr>
                       </a:pPr>
                       <a:r>
-                        <a:t>94,000.00</a:t>
+                        <a:t>130,000.00</a:t>
                       </a:r>
                     </a:p>
                   </a:txBody>
@@ -4804,7 +4804,7 @@
                         </a:defRPr>
                       </a:pPr>
                       <a:r>
-                        <a:t>104,930.00</a:t>
+                        <a:t>136,060.00</a:t>
                       </a:r>
                     </a:p>
                   </a:txBody>
@@ -4850,7 +4850,7 @@
                         </a:defRPr>
                       </a:pPr>
                       <a:r>
-                        <a:t>+4930.00</a:t>
+                        <a:t>+220.00</a:t>
                       </a:r>
                     </a:p>
                   </a:txBody>
@@ -4873,7 +4873,7 @@
                         </a:defRPr>
                       </a:pPr>
                       <a:r>
-                        <a:t>+4.93%</a:t>
+                        <a:t>+0.16%</a:t>
                       </a:r>
                     </a:p>
                   </a:txBody>
@@ -4944,30 +4944,30 @@
                         </a:defRPr>
                       </a:pPr>
                       <a:r>
-                        <a:t>202604</a:t>
-                      </a:r>
-                    </a:p>
-                  </a:txBody>
-                  <a:tcPr anchor="ctr">
-                    <a:solidFill>
-                      <a:srgbClr val="141820"/>
-                    </a:solidFill>
-                  </a:tcPr>
-                </a:tc>
-                <a:tc>
-                  <a:txBody>
-                    <a:bodyPr/>
-                    <a:lstStyle/>
-                    <a:p>
-                      <a:pPr algn="ctr">
-                        <a:defRPr sz="800">
-                          <a:solidFill>
-                            <a:srgbClr val="F0F2F5"/>
-                          </a:solidFill>
-                        </a:defRPr>
-                      </a:pPr>
-                      <a:r>
-                        <a:t>2,756.00</a:t>
+                        <a:t>202605</a:t>
+                      </a:r>
+                    </a:p>
+                  </a:txBody>
+                  <a:tcPr anchor="ctr">
+                    <a:solidFill>
+                      <a:srgbClr val="141820"/>
+                    </a:solidFill>
+                  </a:tcPr>
+                </a:tc>
+                <a:tc>
+                  <a:txBody>
+                    <a:bodyPr/>
+                    <a:lstStyle/>
+                    <a:p>
+                      <a:pPr algn="ctr">
+                        <a:defRPr sz="800">
+                          <a:solidFill>
+                            <a:srgbClr val="F0F2F5"/>
+                          </a:solidFill>
+                        </a:defRPr>
+                      </a:pPr>
+                      <a:r>
+                        <a:t>3,467.00</a:t>
                       </a:r>
                     </a:p>
                   </a:txBody>
@@ -5008,35 +5008,35 @@
                       <a:pPr algn="ctr">
                         <a:defRPr sz="800">
                           <a:solidFill>
-                            <a:srgbClr val="EF4444"/>
-                          </a:solidFill>
-                        </a:defRPr>
-                      </a:pPr>
-                      <a:r>
-                        <a:t>-261.00</a:t>
-                      </a:r>
-                    </a:p>
-                  </a:txBody>
-                  <a:tcPr anchor="ctr">
-                    <a:solidFill>
-                      <a:srgbClr val="141820"/>
-                    </a:solidFill>
-                  </a:tcPr>
-                </a:tc>
-                <a:tc>
-                  <a:txBody>
-                    <a:bodyPr/>
-                    <a:lstStyle/>
-                    <a:p>
-                      <a:pPr algn="ctr">
-                        <a:defRPr sz="800">
-                          <a:solidFill>
-                            <a:srgbClr val="EF4444"/>
-                          </a:solidFill>
-                        </a:defRPr>
-                      </a:pPr>
-                      <a:r>
-                        <a:t>-8.65%</a:t>
+                            <a:srgbClr val="10B981"/>
+                          </a:solidFill>
+                        </a:defRPr>
+                      </a:pPr>
+                      <a:r>
+                        <a:t>+257.00</a:t>
+                      </a:r>
+                    </a:p>
+                  </a:txBody>
+                  <a:tcPr anchor="ctr">
+                    <a:solidFill>
+                      <a:srgbClr val="141820"/>
+                    </a:solidFill>
+                  </a:tcPr>
+                </a:tc>
+                <a:tc>
+                  <a:txBody>
+                    <a:bodyPr/>
+                    <a:lstStyle/>
+                    <a:p>
+                      <a:pPr algn="ctr">
+                        <a:defRPr sz="800">
+                          <a:solidFill>
+                            <a:srgbClr val="10B981"/>
+                          </a:solidFill>
+                        </a:defRPr>
+                      </a:pPr>
+                      <a:r>
+                        <a:t>+8.01%</a:t>
                       </a:r>
                     </a:p>
                   </a:txBody>
@@ -5130,7 +5130,7 @@
                         </a:defRPr>
                       </a:pPr>
                       <a:r>
-                        <a:t>26,099.00</a:t>
+                        <a:t>21,683.00</a:t>
                       </a:r>
                     </a:p>
                   </a:txBody>
@@ -5171,12 +5171,12 @@
                       <a:pPr algn="ctr">
                         <a:defRPr sz="800">
                           <a:solidFill>
-                            <a:srgbClr val="10B981"/>
-                          </a:solidFill>
-                        </a:defRPr>
-                      </a:pPr>
-                      <a:r>
-                        <a:t>+154.00</a:t>
+                            <a:srgbClr val="EF4444"/>
+                          </a:solidFill>
+                        </a:defRPr>
+                      </a:pPr>
+                      <a:r>
+                        <a:t>-3048.00</a:t>
                       </a:r>
                     </a:p>
                   </a:txBody>
@@ -5194,12 +5194,12 @@
                       <a:pPr algn="ctr">
                         <a:defRPr sz="800">
                           <a:solidFill>
-                            <a:srgbClr val="10B981"/>
-                          </a:solidFill>
-                        </a:defRPr>
-                      </a:pPr>
-                      <a:r>
-                        <a:t>+0.59%</a:t>
+                            <a:srgbClr val="EF4444"/>
+                          </a:solidFill>
+                        </a:defRPr>
+                      </a:pPr>
+                      <a:r>
+                        <a:t>-12.32%</a:t>
                       </a:r>
                     </a:p>
                   </a:txBody>
@@ -5293,7 +5293,7 @@
                         </a:defRPr>
                       </a:pPr>
                       <a:r>
-                        <a:t>8,500.00</a:t>
+                        <a:t>7,200.00</a:t>
                       </a:r>
                     </a:p>
                   </a:txBody>
@@ -5334,35 +5334,35 @@
                       <a:pPr algn="ctr">
                         <a:defRPr sz="800">
                           <a:solidFill>
-                            <a:srgbClr val="F0F2F5"/>
-                          </a:solidFill>
-                        </a:defRPr>
-                      </a:pPr>
-                      <a:r>
-                        <a:t>+0.00</a:t>
-                      </a:r>
-                    </a:p>
-                  </a:txBody>
-                  <a:tcPr anchor="ctr">
-                    <a:solidFill>
-                      <a:srgbClr val="141820"/>
-                    </a:solidFill>
-                  </a:tcPr>
-                </a:tc>
-                <a:tc>
-                  <a:txBody>
-                    <a:bodyPr/>
-                    <a:lstStyle/>
-                    <a:p>
-                      <a:pPr algn="ctr">
-                        <a:defRPr sz="800">
-                          <a:solidFill>
-                            <a:srgbClr val="F0F2F5"/>
-                          </a:solidFill>
-                        </a:defRPr>
-                      </a:pPr>
-                      <a:r>
-                        <a:t>+0.00%</a:t>
+                            <a:srgbClr val="EF4444"/>
+                          </a:solidFill>
+                        </a:defRPr>
+                      </a:pPr>
+                      <a:r>
+                        <a:t>-600.00</a:t>
+                      </a:r>
+                    </a:p>
+                  </a:txBody>
+                  <a:tcPr anchor="ctr">
+                    <a:solidFill>
+                      <a:srgbClr val="141820"/>
+                    </a:solidFill>
+                  </a:tcPr>
+                </a:tc>
+                <a:tc>
+                  <a:txBody>
+                    <a:bodyPr/>
+                    <a:lstStyle/>
+                    <a:p>
+                      <a:pPr algn="ctr">
+                        <a:defRPr sz="800">
+                          <a:solidFill>
+                            <a:srgbClr val="EF4444"/>
+                          </a:solidFill>
+                        </a:defRPr>
+                      </a:pPr>
+                      <a:r>
+                        <a:t>-7.69%</a:t>
                       </a:r>
                     </a:p>
                   </a:txBody>
@@ -5456,7 +5456,7 @@
                         </a:defRPr>
                       </a:pPr>
                       <a:r>
-                        <a:t>10,966.00</a:t>
+                        <a:t>8,776.00</a:t>
                       </a:r>
                     </a:p>
                   </a:txBody>
@@ -5502,7 +5502,7 @@
                         </a:defRPr>
                       </a:pPr>
                       <a:r>
-                        <a:t>-19.00</a:t>
+                        <a:t>-901.00</a:t>
                       </a:r>
                     </a:p>
                   </a:txBody>
@@ -5525,7 +5525,7 @@
                         </a:defRPr>
                       </a:pPr>
                       <a:r>
-                        <a:t>-0.17%</a:t>
+                        <a:t>-9.31%</a:t>
                       </a:r>
                     </a:p>
                   </a:txBody>
@@ -5619,7 +5619,7 @@
                         </a:defRPr>
                       </a:pPr>
                       <a:r>
-                        <a:t>420.00</a:t>
+                        <a:t>350.00</a:t>
                       </a:r>
                     </a:p>
                   </a:txBody>
@@ -5660,35 +5660,35 @@
                       <a:pPr algn="ctr">
                         <a:defRPr sz="800">
                           <a:solidFill>
-                            <a:srgbClr val="F0F2F5"/>
-                          </a:solidFill>
-                        </a:defRPr>
-                      </a:pPr>
-                      <a:r>
-                        <a:t>+0.00</a:t>
-                      </a:r>
-                    </a:p>
-                  </a:txBody>
-                  <a:tcPr anchor="ctr">
-                    <a:solidFill>
-                      <a:srgbClr val="141820"/>
-                    </a:solidFill>
-                  </a:tcPr>
-                </a:tc>
-                <a:tc>
-                  <a:txBody>
-                    <a:bodyPr/>
-                    <a:lstStyle/>
-                    <a:p>
-                      <a:pPr algn="ctr">
-                        <a:defRPr sz="800">
-                          <a:solidFill>
-                            <a:srgbClr val="F0F2F5"/>
-                          </a:solidFill>
-                        </a:defRPr>
-                      </a:pPr>
-                      <a:r>
-                        <a:t>+0.00%</a:t>
+                            <a:srgbClr val="EF4444"/>
+                          </a:solidFill>
+                        </a:defRPr>
+                      </a:pPr>
+                      <a:r>
+                        <a:t>-50.00</a:t>
+                      </a:r>
+                    </a:p>
+                  </a:txBody>
+                  <a:tcPr anchor="ctr">
+                    <a:solidFill>
+                      <a:srgbClr val="141820"/>
+                    </a:solidFill>
+                  </a:tcPr>
+                </a:tc>
+                <a:tc>
+                  <a:txBody>
+                    <a:bodyPr/>
+                    <a:lstStyle/>
+                    <a:p>
+                      <a:pPr algn="ctr">
+                        <a:defRPr sz="800">
+                          <a:solidFill>
+                            <a:srgbClr val="EF4444"/>
+                          </a:solidFill>
+                        </a:defRPr>
+                      </a:pPr>
+                      <a:r>
+                        <a:t>-12.50%</a:t>
                       </a:r>
                     </a:p>
                   </a:txBody>
@@ -5782,7 +5782,7 @@
                         </a:defRPr>
                       </a:pPr>
                       <a:r>
-                        <a:t>374.50</a:t>
+                        <a:t>370.00</a:t>
                       </a:r>
                     </a:p>
                   </a:txBody>
@@ -5823,12 +5823,12 @@
                       <a:pPr algn="ctr">
                         <a:defRPr sz="800">
                           <a:solidFill>
-                            <a:srgbClr val="10B981"/>
-                          </a:solidFill>
-                        </a:defRPr>
-                      </a:pPr>
-                      <a:r>
-                        <a:t>+1.50</a:t>
+                            <a:srgbClr val="EF4444"/>
+                          </a:solidFill>
+                        </a:defRPr>
+                      </a:pPr>
+                      <a:r>
+                        <a:t>-5.00</a:t>
                       </a:r>
                     </a:p>
                   </a:txBody>
@@ -5846,12 +5846,12 @@
                       <a:pPr algn="ctr">
                         <a:defRPr sz="800">
                           <a:solidFill>
-                            <a:srgbClr val="10B981"/>
-                          </a:solidFill>
-                        </a:defRPr>
-                      </a:pPr>
-                      <a:r>
-                        <a:t>+0.40%</a:t>
+                            <a:srgbClr val="EF4444"/>
+                          </a:solidFill>
+                        </a:defRPr>
+                      </a:pPr>
+                      <a:r>
+                        <a:t>-1.33%</a:t>
                       </a:r>
                     </a:p>
                   </a:txBody>
@@ -5945,7 +5945,7 @@
                         </a:defRPr>
                       </a:pPr>
                       <a:r>
-                        <a:t>310.00</a:t>
+                        <a:t>307.00</a:t>
                       </a:r>
                     </a:p>
                   </a:txBody>
@@ -5986,35 +5986,35 @@
                       <a:pPr algn="ctr">
                         <a:defRPr sz="800">
                           <a:solidFill>
-                            <a:srgbClr val="F0F2F5"/>
-                          </a:solidFill>
-                        </a:defRPr>
-                      </a:pPr>
-                      <a:r>
-                        <a:t>+0.00</a:t>
-                      </a:r>
-                    </a:p>
-                  </a:txBody>
-                  <a:tcPr anchor="ctr">
-                    <a:solidFill>
-                      <a:srgbClr val="141820"/>
-                    </a:solidFill>
-                  </a:tcPr>
-                </a:tc>
-                <a:tc>
-                  <a:txBody>
-                    <a:bodyPr/>
-                    <a:lstStyle/>
-                    <a:p>
-                      <a:pPr algn="ctr">
-                        <a:defRPr sz="800">
-                          <a:solidFill>
-                            <a:srgbClr val="F0F2F5"/>
-                          </a:solidFill>
-                        </a:defRPr>
-                      </a:pPr>
-                      <a:r>
-                        <a:t>+0.00%</a:t>
+                            <a:srgbClr val="EF4444"/>
+                          </a:solidFill>
+                        </a:defRPr>
+                      </a:pPr>
+                      <a:r>
+                        <a:t>-3.00</a:t>
+                      </a:r>
+                    </a:p>
+                  </a:txBody>
+                  <a:tcPr anchor="ctr">
+                    <a:solidFill>
+                      <a:srgbClr val="141820"/>
+                    </a:solidFill>
+                  </a:tcPr>
+                </a:tc>
+                <a:tc>
+                  <a:txBody>
+                    <a:bodyPr/>
+                    <a:lstStyle/>
+                    <a:p>
+                      <a:pPr algn="ctr">
+                        <a:defRPr sz="800">
+                          <a:solidFill>
+                            <a:srgbClr val="EF4444"/>
+                          </a:solidFill>
+                        </a:defRPr>
+                      </a:pPr>
+                      <a:r>
+                        <a:t>-0.97%</a:t>
                       </a:r>
                     </a:p>
                   </a:txBody>
@@ -6108,7 +6108,7 @@
                         </a:defRPr>
                       </a:pPr>
                       <a:r>
-                        <a:t>17,125.00</a:t>
+                        <a:t>16,130.00</a:t>
                       </a:r>
                     </a:p>
                   </a:txBody>
@@ -6154,7 +6154,7 @@
                         </a:defRPr>
                       </a:pPr>
                       <a:r>
-                        <a:t>+40.00</a:t>
+                        <a:t>+95.00</a:t>
                       </a:r>
                     </a:p>
                   </a:txBody>
@@ -6177,7 +6177,7 @@
                         </a:defRPr>
                       </a:pPr>
                       <a:r>
-                        <a:t>+0.23%</a:t>
+                        <a:t>+0.59%</a:t>
                       </a:r>
                     </a:p>
                   </a:txBody>
@@ -6858,7 +6858,7 @@
               </a:defRPr>
             </a:pPr>
             <a:r>
-              <a:t>Gold &amp; Platinum (2026-03-11)</a:t>
+              <a:t>Gold &amp; Platinum (2026-03-23)</a:t>
             </a:r>
           </a:p>
         </p:txBody>
@@ -7064,7 +7064,7 @@
               </a:defRPr>
             </a:pPr>
             <a:r>
-              <a:t>Dubai Crude Oil &amp; LNG Platts JKM (2026-03-11)</a:t>
+              <a:t>Dubai Crude Oil &amp; LNG Platts JKM (2026-03-23)</a:t>
             </a:r>
           </a:p>
         </p:txBody>
@@ -7476,7 +7476,7 @@
               </a:defRPr>
             </a:pPr>
             <a:r>
-              <a:t>Largest absolute settlement price changes vs previous day (2026-03-11)</a:t>
+              <a:t>Largest absolute settlement price changes vs previous day (2026-03-23)</a:t>
             </a:r>
           </a:p>
         </p:txBody>
@@ -7685,145 +7685,145 @@
                         </a:defRPr>
                       </a:pPr>
                       <a:r>
-                        <a:t>FUT_EWB_260730</a:t>
-                      </a:r>
-                    </a:p>
-                  </a:txBody>
-                  <a:tcPr anchor="ctr">
-                    <a:solidFill>
-                      <a:srgbClr val="141820"/>
-                    </a:solidFill>
-                  </a:tcPr>
-                </a:tc>
-                <a:tc>
-                  <a:txBody>
-                    <a:bodyPr/>
-                    <a:lstStyle/>
-                    <a:p>
-                      <a:pPr algn="ctr">
-                        <a:defRPr sz="800">
-                          <a:solidFill>
-                            <a:srgbClr val="F0F2F5"/>
-                          </a:solidFill>
-                        </a:defRPr>
-                      </a:pPr>
-                      <a:r>
-                        <a:t>Power West Base (Monthly)</a:t>
-                      </a:r>
-                    </a:p>
-                  </a:txBody>
-                  <a:tcPr anchor="ctr">
-                    <a:solidFill>
-                      <a:srgbClr val="141820"/>
-                    </a:solidFill>
-                  </a:tcPr>
-                </a:tc>
-                <a:tc>
-                  <a:txBody>
-                    <a:bodyPr/>
-                    <a:lstStyle/>
-                    <a:p>
-                      <a:pPr algn="ctr">
-                        <a:defRPr sz="800">
-                          <a:solidFill>
-                            <a:srgbClr val="F0F2F5"/>
-                          </a:solidFill>
-                        </a:defRPr>
-                      </a:pPr>
-                      <a:r>
-                        <a:t>202607</a:t>
-                      </a:r>
-                    </a:p>
-                  </a:txBody>
-                  <a:tcPr anchor="ctr">
-                    <a:solidFill>
-                      <a:srgbClr val="141820"/>
-                    </a:solidFill>
-                  </a:tcPr>
-                </a:tc>
-                <a:tc>
-                  <a:txBody>
-                    <a:bodyPr/>
-                    <a:lstStyle/>
-                    <a:p>
-                      <a:pPr algn="ctr">
-                        <a:defRPr sz="800">
-                          <a:solidFill>
-                            <a:srgbClr val="F0F2F5"/>
-                          </a:solidFill>
-                        </a:defRPr>
-                      </a:pPr>
-                      <a:r>
-                        <a:t>16.03</a:t>
-                      </a:r>
-                    </a:p>
-                  </a:txBody>
-                  <a:tcPr anchor="ctr">
-                    <a:solidFill>
-                      <a:srgbClr val="141820"/>
-                    </a:solidFill>
-                  </a:tcPr>
-                </a:tc>
-                <a:tc>
-                  <a:txBody>
-                    <a:bodyPr/>
-                    <a:lstStyle/>
-                    <a:p>
-                      <a:pPr algn="ctr">
-                        <a:defRPr sz="800">
-                          <a:solidFill>
-                            <a:srgbClr val="F0F2F5"/>
-                          </a:solidFill>
-                        </a:defRPr>
-                      </a:pPr>
-                      <a:r>
-                        <a:t>18.39</a:t>
-                      </a:r>
-                    </a:p>
-                  </a:txBody>
-                  <a:tcPr anchor="ctr">
-                    <a:solidFill>
-                      <a:srgbClr val="141820"/>
-                    </a:solidFill>
-                  </a:tcPr>
-                </a:tc>
-                <a:tc>
-                  <a:txBody>
-                    <a:bodyPr/>
-                    <a:lstStyle/>
-                    <a:p>
-                      <a:pPr algn="ctr">
-                        <a:defRPr sz="800">
-                          <a:solidFill>
-                            <a:srgbClr val="EF4444"/>
-                          </a:solidFill>
-                        </a:defRPr>
-                      </a:pPr>
-                      <a:r>
-                        <a:t>-2.36</a:t>
-                      </a:r>
-                    </a:p>
-                  </a:txBody>
-                  <a:tcPr anchor="ctr">
-                    <a:solidFill>
-                      <a:srgbClr val="141820"/>
-                    </a:solidFill>
-                  </a:tcPr>
-                </a:tc>
-                <a:tc>
-                  <a:txBody>
-                    <a:bodyPr/>
-                    <a:lstStyle/>
-                    <a:p>
-                      <a:pPr algn="ctr">
-                        <a:defRPr sz="800">
-                          <a:solidFill>
-                            <a:srgbClr val="EF4444"/>
-                          </a:solidFill>
-                        </a:defRPr>
-                      </a:pPr>
-                      <a:r>
-                        <a:t>-12.83%</a:t>
+                        <a:t>FUT_EEP_260828</a:t>
+                      </a:r>
+                    </a:p>
+                  </a:txBody>
+                  <a:tcPr anchor="ctr">
+                    <a:solidFill>
+                      <a:srgbClr val="141820"/>
+                    </a:solidFill>
+                  </a:tcPr>
+                </a:tc>
+                <a:tc>
+                  <a:txBody>
+                    <a:bodyPr/>
+                    <a:lstStyle/>
+                    <a:p>
+                      <a:pPr algn="ctr">
+                        <a:defRPr sz="800">
+                          <a:solidFill>
+                            <a:srgbClr val="F0F2F5"/>
+                          </a:solidFill>
+                        </a:defRPr>
+                      </a:pPr>
+                      <a:r>
+                        <a:t>Power East Peak (Monthly)</a:t>
+                      </a:r>
+                    </a:p>
+                  </a:txBody>
+                  <a:tcPr anchor="ctr">
+                    <a:solidFill>
+                      <a:srgbClr val="141820"/>
+                    </a:solidFill>
+                  </a:tcPr>
+                </a:tc>
+                <a:tc>
+                  <a:txBody>
+                    <a:bodyPr/>
+                    <a:lstStyle/>
+                    <a:p>
+                      <a:pPr algn="ctr">
+                        <a:defRPr sz="800">
+                          <a:solidFill>
+                            <a:srgbClr val="F0F2F5"/>
+                          </a:solidFill>
+                        </a:defRPr>
+                      </a:pPr>
+                      <a:r>
+                        <a:t>202608</a:t>
+                      </a:r>
+                    </a:p>
+                  </a:txBody>
+                  <a:tcPr anchor="ctr">
+                    <a:solidFill>
+                      <a:srgbClr val="141820"/>
+                    </a:solidFill>
+                  </a:tcPr>
+                </a:tc>
+                <a:tc>
+                  <a:txBody>
+                    <a:bodyPr/>
+                    <a:lstStyle/>
+                    <a:p>
+                      <a:pPr algn="ctr">
+                        <a:defRPr sz="800">
+                          <a:solidFill>
+                            <a:srgbClr val="F0F2F5"/>
+                          </a:solidFill>
+                        </a:defRPr>
+                      </a:pPr>
+                      <a:r>
+                        <a:t>29.12</a:t>
+                      </a:r>
+                    </a:p>
+                  </a:txBody>
+                  <a:tcPr anchor="ctr">
+                    <a:solidFill>
+                      <a:srgbClr val="141820"/>
+                    </a:solidFill>
+                  </a:tcPr>
+                </a:tc>
+                <a:tc>
+                  <a:txBody>
+                    <a:bodyPr/>
+                    <a:lstStyle/>
+                    <a:p>
+                      <a:pPr algn="ctr">
+                        <a:defRPr sz="800">
+                          <a:solidFill>
+                            <a:srgbClr val="F0F2F5"/>
+                          </a:solidFill>
+                        </a:defRPr>
+                      </a:pPr>
+                      <a:r>
+                        <a:t>24.39</a:t>
+                      </a:r>
+                    </a:p>
+                  </a:txBody>
+                  <a:tcPr anchor="ctr">
+                    <a:solidFill>
+                      <a:srgbClr val="141820"/>
+                    </a:solidFill>
+                  </a:tcPr>
+                </a:tc>
+                <a:tc>
+                  <a:txBody>
+                    <a:bodyPr/>
+                    <a:lstStyle/>
+                    <a:p>
+                      <a:pPr algn="ctr">
+                        <a:defRPr sz="800">
+                          <a:solidFill>
+                            <a:srgbClr val="10B981"/>
+                          </a:solidFill>
+                        </a:defRPr>
+                      </a:pPr>
+                      <a:r>
+                        <a:t>+4.73</a:t>
+                      </a:r>
+                    </a:p>
+                  </a:txBody>
+                  <a:tcPr anchor="ctr">
+                    <a:solidFill>
+                      <a:srgbClr val="141820"/>
+                    </a:solidFill>
+                  </a:tcPr>
+                </a:tc>
+                <a:tc>
+                  <a:txBody>
+                    <a:bodyPr/>
+                    <a:lstStyle/>
+                    <a:p>
+                      <a:pPr algn="ctr">
+                        <a:defRPr sz="800">
+                          <a:solidFill>
+                            <a:srgbClr val="10B981"/>
+                          </a:solidFill>
+                        </a:defRPr>
+                      </a:pPr>
+                      <a:r>
+                        <a:t>+19.39%</a:t>
                       </a:r>
                     </a:p>
                   </a:txBody>
@@ -7848,7 +7848,7 @@
                         </a:defRPr>
                       </a:pPr>
                       <a:r>
-                        <a:t>FUT_EWB_260828</a:t>
+                        <a:t>FUT_EEP_260929</a:t>
                       </a:r>
                     </a:p>
                   </a:txBody>
@@ -7871,7 +7871,7 @@
                         </a:defRPr>
                       </a:pPr>
                       <a:r>
-                        <a:t>Power West Base (Monthly)</a:t>
+                        <a:t>Power East Peak (Monthly)</a:t>
                       </a:r>
                     </a:p>
                   </a:txBody>
@@ -7894,7 +7894,7 @@
                         </a:defRPr>
                       </a:pPr>
                       <a:r>
-                        <a:t>202608</a:t>
+                        <a:t>202609</a:t>
                       </a:r>
                     </a:p>
                   </a:txBody>
@@ -7917,7 +7917,7 @@
                         </a:defRPr>
                       </a:pPr>
                       <a:r>
-                        <a:t>15.98</a:t>
+                        <a:t>28.97</a:t>
                       </a:r>
                     </a:p>
                   </a:txBody>
@@ -7940,7 +7940,7 @@
                         </a:defRPr>
                       </a:pPr>
                       <a:r>
-                        <a:t>18.10</a:t>
+                        <a:t>24.30</a:t>
                       </a:r>
                     </a:p>
                   </a:txBody>
@@ -7958,12 +7958,12 @@
                       <a:pPr algn="ctr">
                         <a:defRPr sz="800">
                           <a:solidFill>
-                            <a:srgbClr val="EF4444"/>
-                          </a:solidFill>
-                        </a:defRPr>
-                      </a:pPr>
-                      <a:r>
-                        <a:t>-2.12</a:t>
+                            <a:srgbClr val="10B981"/>
+                          </a:solidFill>
+                        </a:defRPr>
+                      </a:pPr>
+                      <a:r>
+                        <a:t>+4.67</a:t>
                       </a:r>
                     </a:p>
                   </a:txBody>
@@ -7981,12 +7981,12 @@
                       <a:pPr algn="ctr">
                         <a:defRPr sz="800">
                           <a:solidFill>
-                            <a:srgbClr val="EF4444"/>
-                          </a:solidFill>
-                        </a:defRPr>
-                      </a:pPr>
-                      <a:r>
-                        <a:t>-11.71%</a:t>
+                            <a:srgbClr val="10B981"/>
+                          </a:solidFill>
+                        </a:defRPr>
+                      </a:pPr>
+                      <a:r>
+                        <a:t>+19.22%</a:t>
                       </a:r>
                     </a:p>
                   </a:txBody>
@@ -8011,145 +8011,145 @@
                         </a:defRPr>
                       </a:pPr>
                       <a:r>
-                        <a:t>FUT_EEPW_260312</a:t>
-                      </a:r>
-                    </a:p>
-                  </a:txBody>
-                  <a:tcPr anchor="ctr">
-                    <a:solidFill>
-                      <a:srgbClr val="141820"/>
-                    </a:solidFill>
-                  </a:tcPr>
-                </a:tc>
-                <a:tc>
-                  <a:txBody>
-                    <a:bodyPr/>
-                    <a:lstStyle/>
-                    <a:p>
-                      <a:pPr algn="ctr">
-                        <a:defRPr sz="800">
-                          <a:solidFill>
-                            <a:srgbClr val="F0F2F5"/>
-                          </a:solidFill>
-                        </a:defRPr>
-                      </a:pPr>
-                      <a:r>
-                        <a:t>Power East Peak (Weekly)</a:t>
-                      </a:r>
-                    </a:p>
-                  </a:txBody>
-                  <a:tcPr anchor="ctr">
-                    <a:solidFill>
-                      <a:srgbClr val="141820"/>
-                    </a:solidFill>
-                  </a:tcPr>
-                </a:tc>
-                <a:tc>
-                  <a:txBody>
-                    <a:bodyPr/>
-                    <a:lstStyle/>
-                    <a:p>
-                      <a:pPr algn="ctr">
-                        <a:defRPr sz="800">
-                          <a:solidFill>
-                            <a:srgbClr val="F0F2F5"/>
-                          </a:solidFill>
-                        </a:defRPr>
-                      </a:pPr>
-                      <a:r>
-                        <a:t>20260313</a:t>
-                      </a:r>
-                    </a:p>
-                  </a:txBody>
-                  <a:tcPr anchor="ctr">
-                    <a:solidFill>
-                      <a:srgbClr val="141820"/>
-                    </a:solidFill>
-                  </a:tcPr>
-                </a:tc>
-                <a:tc>
-                  <a:txBody>
-                    <a:bodyPr/>
-                    <a:lstStyle/>
-                    <a:p>
-                      <a:pPr algn="ctr">
-                        <a:defRPr sz="800">
-                          <a:solidFill>
-                            <a:srgbClr val="F0F2F5"/>
-                          </a:solidFill>
-                        </a:defRPr>
-                      </a:pPr>
-                      <a:r>
-                        <a:t>13.96</a:t>
-                      </a:r>
-                    </a:p>
-                  </a:txBody>
-                  <a:tcPr anchor="ctr">
-                    <a:solidFill>
-                      <a:srgbClr val="141820"/>
-                    </a:solidFill>
-                  </a:tcPr>
-                </a:tc>
-                <a:tc>
-                  <a:txBody>
-                    <a:bodyPr/>
-                    <a:lstStyle/>
-                    <a:p>
-                      <a:pPr algn="ctr">
-                        <a:defRPr sz="800">
-                          <a:solidFill>
-                            <a:srgbClr val="F0F2F5"/>
-                          </a:solidFill>
-                        </a:defRPr>
-                      </a:pPr>
-                      <a:r>
-                        <a:t>15.96</a:t>
-                      </a:r>
-                    </a:p>
-                  </a:txBody>
-                  <a:tcPr anchor="ctr">
-                    <a:solidFill>
-                      <a:srgbClr val="141820"/>
-                    </a:solidFill>
-                  </a:tcPr>
-                </a:tc>
-                <a:tc>
-                  <a:txBody>
-                    <a:bodyPr/>
-                    <a:lstStyle/>
-                    <a:p>
-                      <a:pPr algn="ctr">
-                        <a:defRPr sz="800">
-                          <a:solidFill>
-                            <a:srgbClr val="EF4444"/>
-                          </a:solidFill>
-                        </a:defRPr>
-                      </a:pPr>
-                      <a:r>
-                        <a:t>-2.00</a:t>
-                      </a:r>
-                    </a:p>
-                  </a:txBody>
-                  <a:tcPr anchor="ctr">
-                    <a:solidFill>
-                      <a:srgbClr val="141820"/>
-                    </a:solidFill>
-                  </a:tcPr>
-                </a:tc>
-                <a:tc>
-                  <a:txBody>
-                    <a:bodyPr/>
-                    <a:lstStyle/>
-                    <a:p>
-                      <a:pPr algn="ctr">
-                        <a:defRPr sz="800">
-                          <a:solidFill>
-                            <a:srgbClr val="EF4444"/>
-                          </a:solidFill>
-                        </a:defRPr>
-                      </a:pPr>
-                      <a:r>
-                        <a:t>-12.53%</a:t>
+                        <a:t>FUT_EEP_260730</a:t>
+                      </a:r>
+                    </a:p>
+                  </a:txBody>
+                  <a:tcPr anchor="ctr">
+                    <a:solidFill>
+                      <a:srgbClr val="141820"/>
+                    </a:solidFill>
+                  </a:tcPr>
+                </a:tc>
+                <a:tc>
+                  <a:txBody>
+                    <a:bodyPr/>
+                    <a:lstStyle/>
+                    <a:p>
+                      <a:pPr algn="ctr">
+                        <a:defRPr sz="800">
+                          <a:solidFill>
+                            <a:srgbClr val="F0F2F5"/>
+                          </a:solidFill>
+                        </a:defRPr>
+                      </a:pPr>
+                      <a:r>
+                        <a:t>Power East Peak (Monthly)</a:t>
+                      </a:r>
+                    </a:p>
+                  </a:txBody>
+                  <a:tcPr anchor="ctr">
+                    <a:solidFill>
+                      <a:srgbClr val="141820"/>
+                    </a:solidFill>
+                  </a:tcPr>
+                </a:tc>
+                <a:tc>
+                  <a:txBody>
+                    <a:bodyPr/>
+                    <a:lstStyle/>
+                    <a:p>
+                      <a:pPr algn="ctr">
+                        <a:defRPr sz="800">
+                          <a:solidFill>
+                            <a:srgbClr val="F0F2F5"/>
+                          </a:solidFill>
+                        </a:defRPr>
+                      </a:pPr>
+                      <a:r>
+                        <a:t>202607</a:t>
+                      </a:r>
+                    </a:p>
+                  </a:txBody>
+                  <a:tcPr anchor="ctr">
+                    <a:solidFill>
+                      <a:srgbClr val="141820"/>
+                    </a:solidFill>
+                  </a:tcPr>
+                </a:tc>
+                <a:tc>
+                  <a:txBody>
+                    <a:bodyPr/>
+                    <a:lstStyle/>
+                    <a:p>
+                      <a:pPr algn="ctr">
+                        <a:defRPr sz="800">
+                          <a:solidFill>
+                            <a:srgbClr val="F0F2F5"/>
+                          </a:solidFill>
+                        </a:defRPr>
+                      </a:pPr>
+                      <a:r>
+                        <a:t>29.40</a:t>
+                      </a:r>
+                    </a:p>
+                  </a:txBody>
+                  <a:tcPr anchor="ctr">
+                    <a:solidFill>
+                      <a:srgbClr val="141820"/>
+                    </a:solidFill>
+                  </a:tcPr>
+                </a:tc>
+                <a:tc>
+                  <a:txBody>
+                    <a:bodyPr/>
+                    <a:lstStyle/>
+                    <a:p>
+                      <a:pPr algn="ctr">
+                        <a:defRPr sz="800">
+                          <a:solidFill>
+                            <a:srgbClr val="F0F2F5"/>
+                          </a:solidFill>
+                        </a:defRPr>
+                      </a:pPr>
+                      <a:r>
+                        <a:t>24.78</a:t>
+                      </a:r>
+                    </a:p>
+                  </a:txBody>
+                  <a:tcPr anchor="ctr">
+                    <a:solidFill>
+                      <a:srgbClr val="141820"/>
+                    </a:solidFill>
+                  </a:tcPr>
+                </a:tc>
+                <a:tc>
+                  <a:txBody>
+                    <a:bodyPr/>
+                    <a:lstStyle/>
+                    <a:p>
+                      <a:pPr algn="ctr">
+                        <a:defRPr sz="800">
+                          <a:solidFill>
+                            <a:srgbClr val="10B981"/>
+                          </a:solidFill>
+                        </a:defRPr>
+                      </a:pPr>
+                      <a:r>
+                        <a:t>+4.62</a:t>
+                      </a:r>
+                    </a:p>
+                  </a:txBody>
+                  <a:tcPr anchor="ctr">
+                    <a:solidFill>
+                      <a:srgbClr val="141820"/>
+                    </a:solidFill>
+                  </a:tcPr>
+                </a:tc>
+                <a:tc>
+                  <a:txBody>
+                    <a:bodyPr/>
+                    <a:lstStyle/>
+                    <a:p>
+                      <a:pPr algn="ctr">
+                        <a:defRPr sz="800">
+                          <a:solidFill>
+                            <a:srgbClr val="10B981"/>
+                          </a:solidFill>
+                        </a:defRPr>
+                      </a:pPr>
+                      <a:r>
+                        <a:t>+18.64%</a:t>
                       </a:r>
                     </a:p>
                   </a:txBody>
@@ -8174,7 +8174,7 @@
                         </a:defRPr>
                       </a:pPr>
                       <a:r>
-                        <a:t>FUT_EWB_260929</a:t>
+                        <a:t>FUT_EWB_260730</a:t>
                       </a:r>
                     </a:p>
                   </a:txBody>
@@ -8220,7 +8220,7 @@
                         </a:defRPr>
                       </a:pPr>
                       <a:r>
-                        <a:t>202609</a:t>
+                        <a:t>202607</a:t>
                       </a:r>
                     </a:p>
                   </a:txBody>
@@ -8243,7 +8243,7 @@
                         </a:defRPr>
                       </a:pPr>
                       <a:r>
-                        <a:t>15.76</a:t>
+                        <a:t>21.69</a:t>
                       </a:r>
                     </a:p>
                   </a:txBody>
@@ -8266,7 +8266,7 @@
                         </a:defRPr>
                       </a:pPr>
                       <a:r>
-                        <a:t>17.76</a:t>
+                        <a:t>17.56</a:t>
                       </a:r>
                     </a:p>
                   </a:txBody>
@@ -8284,12 +8284,12 @@
                       <a:pPr algn="ctr">
                         <a:defRPr sz="800">
                           <a:solidFill>
-                            <a:srgbClr val="EF4444"/>
-                          </a:solidFill>
-                        </a:defRPr>
-                      </a:pPr>
-                      <a:r>
-                        <a:t>-2.00</a:t>
+                            <a:srgbClr val="10B981"/>
+                          </a:solidFill>
+                        </a:defRPr>
+                      </a:pPr>
+                      <a:r>
+                        <a:t>+4.13</a:t>
                       </a:r>
                     </a:p>
                   </a:txBody>
@@ -8307,12 +8307,12 @@
                       <a:pPr algn="ctr">
                         <a:defRPr sz="800">
                           <a:solidFill>
-                            <a:srgbClr val="EF4444"/>
-                          </a:solidFill>
-                        </a:defRPr>
-                      </a:pPr>
-                      <a:r>
-                        <a:t>-11.26%</a:t>
+                            <a:srgbClr val="10B981"/>
+                          </a:solidFill>
+                        </a:defRPr>
+                      </a:pPr>
+                      <a:r>
+                        <a:t>+23.52%</a:t>
                       </a:r>
                     </a:p>
                   </a:txBody>
@@ -8337,7 +8337,7 @@
                         </a:defRPr>
                       </a:pPr>
                       <a:r>
-                        <a:t>FUT_EWB_260428</a:t>
+                        <a:t>FUT_EWB_260828</a:t>
                       </a:r>
                     </a:p>
                   </a:txBody>
@@ -8383,99 +8383,99 @@
                         </a:defRPr>
                       </a:pPr>
                       <a:r>
-                        <a:t>202604</a:t>
-                      </a:r>
-                    </a:p>
-                  </a:txBody>
-                  <a:tcPr anchor="ctr">
-                    <a:solidFill>
-                      <a:srgbClr val="141820"/>
-                    </a:solidFill>
-                  </a:tcPr>
-                </a:tc>
-                <a:tc>
-                  <a:txBody>
-                    <a:bodyPr/>
-                    <a:lstStyle/>
-                    <a:p>
-                      <a:pPr algn="ctr">
-                        <a:defRPr sz="800">
-                          <a:solidFill>
-                            <a:srgbClr val="F0F2F5"/>
-                          </a:solidFill>
-                        </a:defRPr>
-                      </a:pPr>
-                      <a:r>
-                        <a:t>16.26</a:t>
-                      </a:r>
-                    </a:p>
-                  </a:txBody>
-                  <a:tcPr anchor="ctr">
-                    <a:solidFill>
-                      <a:srgbClr val="141820"/>
-                    </a:solidFill>
-                  </a:tcPr>
-                </a:tc>
-                <a:tc>
-                  <a:txBody>
-                    <a:bodyPr/>
-                    <a:lstStyle/>
-                    <a:p>
-                      <a:pPr algn="ctr">
-                        <a:defRPr sz="800">
-                          <a:solidFill>
-                            <a:srgbClr val="F0F2F5"/>
-                          </a:solidFill>
-                        </a:defRPr>
-                      </a:pPr>
-                      <a:r>
-                        <a:t>18.25</a:t>
-                      </a:r>
-                    </a:p>
-                  </a:txBody>
-                  <a:tcPr anchor="ctr">
-                    <a:solidFill>
-                      <a:srgbClr val="141820"/>
-                    </a:solidFill>
-                  </a:tcPr>
-                </a:tc>
-                <a:tc>
-                  <a:txBody>
-                    <a:bodyPr/>
-                    <a:lstStyle/>
-                    <a:p>
-                      <a:pPr algn="ctr">
-                        <a:defRPr sz="800">
-                          <a:solidFill>
-                            <a:srgbClr val="EF4444"/>
-                          </a:solidFill>
-                        </a:defRPr>
-                      </a:pPr>
-                      <a:r>
-                        <a:t>-1.99</a:t>
-                      </a:r>
-                    </a:p>
-                  </a:txBody>
-                  <a:tcPr anchor="ctr">
-                    <a:solidFill>
-                      <a:srgbClr val="141820"/>
-                    </a:solidFill>
-                  </a:tcPr>
-                </a:tc>
-                <a:tc>
-                  <a:txBody>
-                    <a:bodyPr/>
-                    <a:lstStyle/>
-                    <a:p>
-                      <a:pPr algn="ctr">
-                        <a:defRPr sz="800">
-                          <a:solidFill>
-                            <a:srgbClr val="EF4444"/>
-                          </a:solidFill>
-                        </a:defRPr>
-                      </a:pPr>
-                      <a:r>
-                        <a:t>-10.90%</a:t>
+                        <a:t>202608</a:t>
+                      </a:r>
+                    </a:p>
+                  </a:txBody>
+                  <a:tcPr anchor="ctr">
+                    <a:solidFill>
+                      <a:srgbClr val="141820"/>
+                    </a:solidFill>
+                  </a:tcPr>
+                </a:tc>
+                <a:tc>
+                  <a:txBody>
+                    <a:bodyPr/>
+                    <a:lstStyle/>
+                    <a:p>
+                      <a:pPr algn="ctr">
+                        <a:defRPr sz="800">
+                          <a:solidFill>
+                            <a:srgbClr val="F0F2F5"/>
+                          </a:solidFill>
+                        </a:defRPr>
+                      </a:pPr>
+                      <a:r>
+                        <a:t>21.91</a:t>
+                      </a:r>
+                    </a:p>
+                  </a:txBody>
+                  <a:tcPr anchor="ctr">
+                    <a:solidFill>
+                      <a:srgbClr val="141820"/>
+                    </a:solidFill>
+                  </a:tcPr>
+                </a:tc>
+                <a:tc>
+                  <a:txBody>
+                    <a:bodyPr/>
+                    <a:lstStyle/>
+                    <a:p>
+                      <a:pPr algn="ctr">
+                        <a:defRPr sz="800">
+                          <a:solidFill>
+                            <a:srgbClr val="F0F2F5"/>
+                          </a:solidFill>
+                        </a:defRPr>
+                      </a:pPr>
+                      <a:r>
+                        <a:t>17.88</a:t>
+                      </a:r>
+                    </a:p>
+                  </a:txBody>
+                  <a:tcPr anchor="ctr">
+                    <a:solidFill>
+                      <a:srgbClr val="141820"/>
+                    </a:solidFill>
+                  </a:tcPr>
+                </a:tc>
+                <a:tc>
+                  <a:txBody>
+                    <a:bodyPr/>
+                    <a:lstStyle/>
+                    <a:p>
+                      <a:pPr algn="ctr">
+                        <a:defRPr sz="800">
+                          <a:solidFill>
+                            <a:srgbClr val="10B981"/>
+                          </a:solidFill>
+                        </a:defRPr>
+                      </a:pPr>
+                      <a:r>
+                        <a:t>+4.03</a:t>
+                      </a:r>
+                    </a:p>
+                  </a:txBody>
+                  <a:tcPr anchor="ctr">
+                    <a:solidFill>
+                      <a:srgbClr val="141820"/>
+                    </a:solidFill>
+                  </a:tcPr>
+                </a:tc>
+                <a:tc>
+                  <a:txBody>
+                    <a:bodyPr/>
+                    <a:lstStyle/>
+                    <a:p>
+                      <a:pPr algn="ctr">
+                        <a:defRPr sz="800">
+                          <a:solidFill>
+                            <a:srgbClr val="10B981"/>
+                          </a:solidFill>
+                        </a:defRPr>
+                      </a:pPr>
+                      <a:r>
+                        <a:t>+22.54%</a:t>
                       </a:r>
                     </a:p>
                   </a:txBody>
@@ -8500,7 +8500,7 @@
                         </a:defRPr>
                       </a:pPr>
                       <a:r>
-                        <a:t>FUT_EWB_260529</a:t>
+                        <a:t>FUT_EWB_260929</a:t>
                       </a:r>
                     </a:p>
                   </a:txBody>
@@ -8546,7 +8546,7 @@
                         </a:defRPr>
                       </a:pPr>
                       <a:r>
-                        <a:t>202605</a:t>
+                        <a:t>202609</a:t>
                       </a:r>
                     </a:p>
                   </a:txBody>
@@ -8569,7 +8569,7 @@
                         </a:defRPr>
                       </a:pPr>
                       <a:r>
-                        <a:t>15.94</a:t>
+                        <a:t>21.65</a:t>
                       </a:r>
                     </a:p>
                   </a:txBody>
@@ -8592,7 +8592,7 @@
                         </a:defRPr>
                       </a:pPr>
                       <a:r>
-                        <a:t>17.83</a:t>
+                        <a:t>17.65</a:t>
                       </a:r>
                     </a:p>
                   </a:txBody>
@@ -8610,12 +8610,12 @@
                       <a:pPr algn="ctr">
                         <a:defRPr sz="800">
                           <a:solidFill>
-                            <a:srgbClr val="EF4444"/>
-                          </a:solidFill>
-                        </a:defRPr>
-                      </a:pPr>
-                      <a:r>
-                        <a:t>-1.89</a:t>
+                            <a:srgbClr val="10B981"/>
+                          </a:solidFill>
+                        </a:defRPr>
+                      </a:pPr>
+                      <a:r>
+                        <a:t>+4.00</a:t>
                       </a:r>
                     </a:p>
                   </a:txBody>
@@ -8633,12 +8633,12 @@
                       <a:pPr algn="ctr">
                         <a:defRPr sz="800">
                           <a:solidFill>
-                            <a:srgbClr val="EF4444"/>
-                          </a:solidFill>
-                        </a:defRPr>
-                      </a:pPr>
-                      <a:r>
-                        <a:t>-10.60%</a:t>
+                            <a:srgbClr val="10B981"/>
+                          </a:solidFill>
+                        </a:defRPr>
+                      </a:pPr>
+                      <a:r>
+                        <a:t>+22.66%</a:t>
                       </a:r>
                     </a:p>
                   </a:txBody>
@@ -8663,7 +8663,7 @@
                         </a:defRPr>
                       </a:pPr>
                       <a:r>
-                        <a:t>FUT_EWB_260629</a:t>
+                        <a:t>FUT_EWB_261230</a:t>
                       </a:r>
                     </a:p>
                   </a:txBody>
@@ -8709,99 +8709,99 @@
                         </a:defRPr>
                       </a:pPr>
                       <a:r>
-                        <a:t>202606</a:t>
-                      </a:r>
-                    </a:p>
-                  </a:txBody>
-                  <a:tcPr anchor="ctr">
-                    <a:solidFill>
-                      <a:srgbClr val="141820"/>
-                    </a:solidFill>
-                  </a:tcPr>
-                </a:tc>
-                <a:tc>
-                  <a:txBody>
-                    <a:bodyPr/>
-                    <a:lstStyle/>
-                    <a:p>
-                      <a:pPr algn="ctr">
-                        <a:defRPr sz="800">
-                          <a:solidFill>
-                            <a:srgbClr val="F0F2F5"/>
-                          </a:solidFill>
-                        </a:defRPr>
-                      </a:pPr>
-                      <a:r>
-                        <a:t>15.90</a:t>
-                      </a:r>
-                    </a:p>
-                  </a:txBody>
-                  <a:tcPr anchor="ctr">
-                    <a:solidFill>
-                      <a:srgbClr val="141820"/>
-                    </a:solidFill>
-                  </a:tcPr>
-                </a:tc>
-                <a:tc>
-                  <a:txBody>
-                    <a:bodyPr/>
-                    <a:lstStyle/>
-                    <a:p>
-                      <a:pPr algn="ctr">
-                        <a:defRPr sz="800">
-                          <a:solidFill>
-                            <a:srgbClr val="F0F2F5"/>
-                          </a:solidFill>
-                        </a:defRPr>
-                      </a:pPr>
-                      <a:r>
-                        <a:t>17.70</a:t>
-                      </a:r>
-                    </a:p>
-                  </a:txBody>
-                  <a:tcPr anchor="ctr">
-                    <a:solidFill>
-                      <a:srgbClr val="141820"/>
-                    </a:solidFill>
-                  </a:tcPr>
-                </a:tc>
-                <a:tc>
-                  <a:txBody>
-                    <a:bodyPr/>
-                    <a:lstStyle/>
-                    <a:p>
-                      <a:pPr algn="ctr">
-                        <a:defRPr sz="800">
-                          <a:solidFill>
-                            <a:srgbClr val="EF4444"/>
-                          </a:solidFill>
-                        </a:defRPr>
-                      </a:pPr>
-                      <a:r>
-                        <a:t>-1.80</a:t>
-                      </a:r>
-                    </a:p>
-                  </a:txBody>
-                  <a:tcPr anchor="ctr">
-                    <a:solidFill>
-                      <a:srgbClr val="141820"/>
-                    </a:solidFill>
-                  </a:tcPr>
-                </a:tc>
-                <a:tc>
-                  <a:txBody>
-                    <a:bodyPr/>
-                    <a:lstStyle/>
-                    <a:p>
-                      <a:pPr algn="ctr">
-                        <a:defRPr sz="800">
-                          <a:solidFill>
-                            <a:srgbClr val="EF4444"/>
-                          </a:solidFill>
-                        </a:defRPr>
-                      </a:pPr>
-                      <a:r>
-                        <a:t>-10.17%</a:t>
+                        <a:t>202612</a:t>
+                      </a:r>
+                    </a:p>
+                  </a:txBody>
+                  <a:tcPr anchor="ctr">
+                    <a:solidFill>
+                      <a:srgbClr val="141820"/>
+                    </a:solidFill>
+                  </a:tcPr>
+                </a:tc>
+                <a:tc>
+                  <a:txBody>
+                    <a:bodyPr/>
+                    <a:lstStyle/>
+                    <a:p>
+                      <a:pPr algn="ctr">
+                        <a:defRPr sz="800">
+                          <a:solidFill>
+                            <a:srgbClr val="F0F2F5"/>
+                          </a:solidFill>
+                        </a:defRPr>
+                      </a:pPr>
+                      <a:r>
+                        <a:t>20.15</a:t>
+                      </a:r>
+                    </a:p>
+                  </a:txBody>
+                  <a:tcPr anchor="ctr">
+                    <a:solidFill>
+                      <a:srgbClr val="141820"/>
+                    </a:solidFill>
+                  </a:tcPr>
+                </a:tc>
+                <a:tc>
+                  <a:txBody>
+                    <a:bodyPr/>
+                    <a:lstStyle/>
+                    <a:p>
+                      <a:pPr algn="ctr">
+                        <a:defRPr sz="800">
+                          <a:solidFill>
+                            <a:srgbClr val="F0F2F5"/>
+                          </a:solidFill>
+                        </a:defRPr>
+                      </a:pPr>
+                      <a:r>
+                        <a:t>16.39</a:t>
+                      </a:r>
+                    </a:p>
+                  </a:txBody>
+                  <a:tcPr anchor="ctr">
+                    <a:solidFill>
+                      <a:srgbClr val="141820"/>
+                    </a:solidFill>
+                  </a:tcPr>
+                </a:tc>
+                <a:tc>
+                  <a:txBody>
+                    <a:bodyPr/>
+                    <a:lstStyle/>
+                    <a:p>
+                      <a:pPr algn="ctr">
+                        <a:defRPr sz="800">
+                          <a:solidFill>
+                            <a:srgbClr val="10B981"/>
+                          </a:solidFill>
+                        </a:defRPr>
+                      </a:pPr>
+                      <a:r>
+                        <a:t>+3.76</a:t>
+                      </a:r>
+                    </a:p>
+                  </a:txBody>
+                  <a:tcPr anchor="ctr">
+                    <a:solidFill>
+                      <a:srgbClr val="141820"/>
+                    </a:solidFill>
+                  </a:tcPr>
+                </a:tc>
+                <a:tc>
+                  <a:txBody>
+                    <a:bodyPr/>
+                    <a:lstStyle/>
+                    <a:p>
+                      <a:pPr algn="ctr">
+                        <a:defRPr sz="800">
+                          <a:solidFill>
+                            <a:srgbClr val="10B981"/>
+                          </a:solidFill>
+                        </a:defRPr>
+                      </a:pPr>
+                      <a:r>
+                        <a:t>+22.94%</a:t>
                       </a:r>
                     </a:p>
                   </a:txBody>
@@ -8826,7 +8826,7 @@
                         </a:defRPr>
                       </a:pPr>
                       <a:r>
-                        <a:t>FUT_EEP_260929</a:t>
+                        <a:t>FUT_EWB_270129</a:t>
                       </a:r>
                     </a:p>
                   </a:txBody>
@@ -8849,7 +8849,7 @@
                         </a:defRPr>
                       </a:pPr>
                       <a:r>
-                        <a:t>Power East Peak (Monthly)</a:t>
+                        <a:t>Power West Base (Monthly)</a:t>
                       </a:r>
                     </a:p>
                   </a:txBody>
@@ -8872,7 +8872,7 @@
                         </a:defRPr>
                       </a:pPr>
                       <a:r>
-                        <a:t>202609</a:t>
+                        <a:t>202701</a:t>
                       </a:r>
                     </a:p>
                   </a:txBody>
@@ -8895,7 +8895,7 @@
                         </a:defRPr>
                       </a:pPr>
                       <a:r>
-                        <a:t>23.69</a:t>
+                        <a:t>20.76</a:t>
                       </a:r>
                     </a:p>
                   </a:txBody>
@@ -8918,7 +8918,7 @@
                         </a:defRPr>
                       </a:pPr>
                       <a:r>
-                        <a:t>25.47</a:t>
+                        <a:t>17.04</a:t>
                       </a:r>
                     </a:p>
                   </a:txBody>
@@ -8936,12 +8936,12 @@
                       <a:pPr algn="ctr">
                         <a:defRPr sz="800">
                           <a:solidFill>
-                            <a:srgbClr val="EF4444"/>
-                          </a:solidFill>
-                        </a:defRPr>
-                      </a:pPr>
-                      <a:r>
-                        <a:t>-1.78</a:t>
+                            <a:srgbClr val="10B981"/>
+                          </a:solidFill>
+                        </a:defRPr>
+                      </a:pPr>
+                      <a:r>
+                        <a:t>+3.72</a:t>
                       </a:r>
                     </a:p>
                   </a:txBody>
@@ -8959,12 +8959,12 @@
                       <a:pPr algn="ctr">
                         <a:defRPr sz="800">
                           <a:solidFill>
-                            <a:srgbClr val="EF4444"/>
-                          </a:solidFill>
-                        </a:defRPr>
-                      </a:pPr>
-                      <a:r>
-                        <a:t>-6.99%</a:t>
+                            <a:srgbClr val="10B981"/>
+                          </a:solidFill>
+                        </a:defRPr>
+                      </a:pPr>
+                      <a:r>
+                        <a:t>+21.83%</a:t>
                       </a:r>
                     </a:p>
                   </a:txBody>
@@ -8989,145 +8989,145 @@
                         </a:defRPr>
                       </a:pPr>
                       <a:r>
-                        <a:t>FUT_EWBY_260326</a:t>
-                      </a:r>
-                    </a:p>
-                  </a:txBody>
-                  <a:tcPr anchor="ctr">
-                    <a:solidFill>
-                      <a:srgbClr val="141820"/>
-                    </a:solidFill>
-                  </a:tcPr>
-                </a:tc>
-                <a:tc>
-                  <a:txBody>
-                    <a:bodyPr/>
-                    <a:lstStyle/>
-                    <a:p>
-                      <a:pPr algn="ctr">
-                        <a:defRPr sz="800">
-                          <a:solidFill>
-                            <a:srgbClr val="F0F2F5"/>
-                          </a:solidFill>
-                        </a:defRPr>
-                      </a:pPr>
-                      <a:r>
-                        <a:t>Power West Base (Yearly)</a:t>
-                      </a:r>
-                    </a:p>
-                  </a:txBody>
-                  <a:tcPr anchor="ctr">
-                    <a:solidFill>
-                      <a:srgbClr val="141820"/>
-                    </a:solidFill>
-                  </a:tcPr>
-                </a:tc>
-                <a:tc>
-                  <a:txBody>
-                    <a:bodyPr/>
-                    <a:lstStyle/>
-                    <a:p>
-                      <a:pPr algn="ctr">
-                        <a:defRPr sz="800">
-                          <a:solidFill>
-                            <a:srgbClr val="F0F2F5"/>
-                          </a:solidFill>
-                        </a:defRPr>
-                      </a:pPr>
-                      <a:r>
-                        <a:t>202604</a:t>
-                      </a:r>
-                    </a:p>
-                  </a:txBody>
-                  <a:tcPr anchor="ctr">
-                    <a:solidFill>
-                      <a:srgbClr val="141820"/>
-                    </a:solidFill>
-                  </a:tcPr>
-                </a:tc>
-                <a:tc>
-                  <a:txBody>
-                    <a:bodyPr/>
-                    <a:lstStyle/>
-                    <a:p>
-                      <a:pPr algn="ctr">
-                        <a:defRPr sz="800">
-                          <a:solidFill>
-                            <a:srgbClr val="F0F2F5"/>
-                          </a:solidFill>
-                        </a:defRPr>
-                      </a:pPr>
-                      <a:r>
-                        <a:t>15.49</a:t>
-                      </a:r>
-                    </a:p>
-                  </a:txBody>
-                  <a:tcPr anchor="ctr">
-                    <a:solidFill>
-                      <a:srgbClr val="141820"/>
-                    </a:solidFill>
-                  </a:tcPr>
-                </a:tc>
-                <a:tc>
-                  <a:txBody>
-                    <a:bodyPr/>
-                    <a:lstStyle/>
-                    <a:p>
-                      <a:pPr algn="ctr">
-                        <a:defRPr sz="800">
-                          <a:solidFill>
-                            <a:srgbClr val="F0F2F5"/>
-                          </a:solidFill>
-                        </a:defRPr>
-                      </a:pPr>
-                      <a:r>
-                        <a:t>17.27</a:t>
-                      </a:r>
-                    </a:p>
-                  </a:txBody>
-                  <a:tcPr anchor="ctr">
-                    <a:solidFill>
-                      <a:srgbClr val="141820"/>
-                    </a:solidFill>
-                  </a:tcPr>
-                </a:tc>
-                <a:tc>
-                  <a:txBody>
-                    <a:bodyPr/>
-                    <a:lstStyle/>
-                    <a:p>
-                      <a:pPr algn="ctr">
-                        <a:defRPr sz="800">
-                          <a:solidFill>
-                            <a:srgbClr val="EF4444"/>
-                          </a:solidFill>
-                        </a:defRPr>
-                      </a:pPr>
-                      <a:r>
-                        <a:t>-1.78</a:t>
-                      </a:r>
-                    </a:p>
-                  </a:txBody>
-                  <a:tcPr anchor="ctr">
-                    <a:solidFill>
-                      <a:srgbClr val="141820"/>
-                    </a:solidFill>
-                  </a:tcPr>
-                </a:tc>
-                <a:tc>
-                  <a:txBody>
-                    <a:bodyPr/>
-                    <a:lstStyle/>
-                    <a:p>
-                      <a:pPr algn="ctr">
-                        <a:defRPr sz="800">
-                          <a:solidFill>
-                            <a:srgbClr val="EF4444"/>
-                          </a:solidFill>
-                        </a:defRPr>
-                      </a:pPr>
-                      <a:r>
-                        <a:t>-10.31%</a:t>
+                        <a:t>FUT_EWB_270226</a:t>
+                      </a:r>
+                    </a:p>
+                  </a:txBody>
+                  <a:tcPr anchor="ctr">
+                    <a:solidFill>
+                      <a:srgbClr val="141820"/>
+                    </a:solidFill>
+                  </a:tcPr>
+                </a:tc>
+                <a:tc>
+                  <a:txBody>
+                    <a:bodyPr/>
+                    <a:lstStyle/>
+                    <a:p>
+                      <a:pPr algn="ctr">
+                        <a:defRPr sz="800">
+                          <a:solidFill>
+                            <a:srgbClr val="F0F2F5"/>
+                          </a:solidFill>
+                        </a:defRPr>
+                      </a:pPr>
+                      <a:r>
+                        <a:t>Power West Base (Monthly)</a:t>
+                      </a:r>
+                    </a:p>
+                  </a:txBody>
+                  <a:tcPr anchor="ctr">
+                    <a:solidFill>
+                      <a:srgbClr val="141820"/>
+                    </a:solidFill>
+                  </a:tcPr>
+                </a:tc>
+                <a:tc>
+                  <a:txBody>
+                    <a:bodyPr/>
+                    <a:lstStyle/>
+                    <a:p>
+                      <a:pPr algn="ctr">
+                        <a:defRPr sz="800">
+                          <a:solidFill>
+                            <a:srgbClr val="F0F2F5"/>
+                          </a:solidFill>
+                        </a:defRPr>
+                      </a:pPr>
+                      <a:r>
+                        <a:t>202702</a:t>
+                      </a:r>
+                    </a:p>
+                  </a:txBody>
+                  <a:tcPr anchor="ctr">
+                    <a:solidFill>
+                      <a:srgbClr val="141820"/>
+                    </a:solidFill>
+                  </a:tcPr>
+                </a:tc>
+                <a:tc>
+                  <a:txBody>
+                    <a:bodyPr/>
+                    <a:lstStyle/>
+                    <a:p>
+                      <a:pPr algn="ctr">
+                        <a:defRPr sz="800">
+                          <a:solidFill>
+                            <a:srgbClr val="F0F2F5"/>
+                          </a:solidFill>
+                        </a:defRPr>
+                      </a:pPr>
+                      <a:r>
+                        <a:t>20.77</a:t>
+                      </a:r>
+                    </a:p>
+                  </a:txBody>
+                  <a:tcPr anchor="ctr">
+                    <a:solidFill>
+                      <a:srgbClr val="141820"/>
+                    </a:solidFill>
+                  </a:tcPr>
+                </a:tc>
+                <a:tc>
+                  <a:txBody>
+                    <a:bodyPr/>
+                    <a:lstStyle/>
+                    <a:p>
+                      <a:pPr algn="ctr">
+                        <a:defRPr sz="800">
+                          <a:solidFill>
+                            <a:srgbClr val="F0F2F5"/>
+                          </a:solidFill>
+                        </a:defRPr>
+                      </a:pPr>
+                      <a:r>
+                        <a:t>17.11</a:t>
+                      </a:r>
+                    </a:p>
+                  </a:txBody>
+                  <a:tcPr anchor="ctr">
+                    <a:solidFill>
+                      <a:srgbClr val="141820"/>
+                    </a:solidFill>
+                  </a:tcPr>
+                </a:tc>
+                <a:tc>
+                  <a:txBody>
+                    <a:bodyPr/>
+                    <a:lstStyle/>
+                    <a:p>
+                      <a:pPr algn="ctr">
+                        <a:defRPr sz="800">
+                          <a:solidFill>
+                            <a:srgbClr val="10B981"/>
+                          </a:solidFill>
+                        </a:defRPr>
+                      </a:pPr>
+                      <a:r>
+                        <a:t>+3.66</a:t>
+                      </a:r>
+                    </a:p>
+                  </a:txBody>
+                  <a:tcPr anchor="ctr">
+                    <a:solidFill>
+                      <a:srgbClr val="141820"/>
+                    </a:solidFill>
+                  </a:tcPr>
+                </a:tc>
+                <a:tc>
+                  <a:txBody>
+                    <a:bodyPr/>
+                    <a:lstStyle/>
+                    <a:p>
+                      <a:pPr algn="ctr">
+                        <a:defRPr sz="800">
+                          <a:solidFill>
+                            <a:srgbClr val="10B981"/>
+                          </a:solidFill>
+                        </a:defRPr>
+                      </a:pPr>
+                      <a:r>
+                        <a:t>+21.39%</a:t>
                       </a:r>
                     </a:p>
                   </a:txBody>
@@ -9152,7 +9152,7 @@
                         </a:defRPr>
                       </a:pPr>
                       <a:r>
-                        <a:t>FUT_EEP_260828</a:t>
+                        <a:t>FUT_EEB_260428</a:t>
                       </a:r>
                     </a:p>
                   </a:txBody>
@@ -9175,7 +9175,7 @@
                         </a:defRPr>
                       </a:pPr>
                       <a:r>
-                        <a:t>Power East Peak (Monthly)</a:t>
+                        <a:t>Power East Base (Monthly)</a:t>
                       </a:r>
                     </a:p>
                   </a:txBody>
@@ -9198,7 +9198,7 @@
                         </a:defRPr>
                       </a:pPr>
                       <a:r>
-                        <a:t>202608</a:t>
+                        <a:t>202604</a:t>
                       </a:r>
                     </a:p>
                   </a:txBody>
@@ -9221,7 +9221,7 @@
                         </a:defRPr>
                       </a:pPr>
                       <a:r>
-                        <a:t>23.40</a:t>
+                        <a:t>22.35</a:t>
                       </a:r>
                     </a:p>
                   </a:txBody>
@@ -9244,7 +9244,7 @@
                         </a:defRPr>
                       </a:pPr>
                       <a:r>
-                        <a:t>25.15</a:t>
+                        <a:t>18.82</a:t>
                       </a:r>
                     </a:p>
                   </a:txBody>
@@ -9262,12 +9262,12 @@
                       <a:pPr algn="ctr">
                         <a:defRPr sz="800">
                           <a:solidFill>
-                            <a:srgbClr val="EF4444"/>
-                          </a:solidFill>
-                        </a:defRPr>
-                      </a:pPr>
-                      <a:r>
-                        <a:t>-1.75</a:t>
+                            <a:srgbClr val="10B981"/>
+                          </a:solidFill>
+                        </a:defRPr>
+                      </a:pPr>
+                      <a:r>
+                        <a:t>+3.53</a:t>
                       </a:r>
                     </a:p>
                   </a:txBody>
@@ -9285,12 +9285,12 @@
                       <a:pPr algn="ctr">
                         <a:defRPr sz="800">
                           <a:solidFill>
-                            <a:srgbClr val="EF4444"/>
-                          </a:solidFill>
-                        </a:defRPr>
-                      </a:pPr>
-                      <a:r>
-                        <a:t>-6.96%</a:t>
+                            <a:srgbClr val="10B981"/>
+                          </a:solidFill>
+                        </a:defRPr>
+                      </a:pPr>
+                      <a:r>
+                        <a:t>+18.76%</a:t>
                       </a:r>
                     </a:p>
                   </a:txBody>
@@ -9315,145 +9315,145 @@
                         </a:defRPr>
                       </a:pPr>
                       <a:r>
-                        <a:t>FUT_EWB_270330</a:t>
-                      </a:r>
-                    </a:p>
-                  </a:txBody>
-                  <a:tcPr anchor="ctr">
-                    <a:solidFill>
-                      <a:srgbClr val="141820"/>
-                    </a:solidFill>
-                  </a:tcPr>
-                </a:tc>
-                <a:tc>
-                  <a:txBody>
-                    <a:bodyPr/>
-                    <a:lstStyle/>
-                    <a:p>
-                      <a:pPr algn="ctr">
-                        <a:defRPr sz="800">
-                          <a:solidFill>
-                            <a:srgbClr val="F0F2F5"/>
-                          </a:solidFill>
-                        </a:defRPr>
-                      </a:pPr>
-                      <a:r>
-                        <a:t>Power West Base (Monthly)</a:t>
-                      </a:r>
-                    </a:p>
-                  </a:txBody>
-                  <a:tcPr anchor="ctr">
-                    <a:solidFill>
-                      <a:srgbClr val="141820"/>
-                    </a:solidFill>
-                  </a:tcPr>
-                </a:tc>
-                <a:tc>
-                  <a:txBody>
-                    <a:bodyPr/>
-                    <a:lstStyle/>
-                    <a:p>
-                      <a:pPr algn="ctr">
-                        <a:defRPr sz="800">
-                          <a:solidFill>
-                            <a:srgbClr val="F0F2F5"/>
-                          </a:solidFill>
-                        </a:defRPr>
-                      </a:pPr>
-                      <a:r>
-                        <a:t>202703</a:t>
-                      </a:r>
-                    </a:p>
-                  </a:txBody>
-                  <a:tcPr anchor="ctr">
-                    <a:solidFill>
-                      <a:srgbClr val="141820"/>
-                    </a:solidFill>
-                  </a:tcPr>
-                </a:tc>
-                <a:tc>
-                  <a:txBody>
-                    <a:bodyPr/>
-                    <a:lstStyle/>
-                    <a:p>
-                      <a:pPr algn="ctr">
-                        <a:defRPr sz="800">
-                          <a:solidFill>
-                            <a:srgbClr val="F0F2F5"/>
-                          </a:solidFill>
-                        </a:defRPr>
-                      </a:pPr>
-                      <a:r>
-                        <a:t>14.37</a:t>
-                      </a:r>
-                    </a:p>
-                  </a:txBody>
-                  <a:tcPr anchor="ctr">
-                    <a:solidFill>
-                      <a:srgbClr val="141820"/>
-                    </a:solidFill>
-                  </a:tcPr>
-                </a:tc>
-                <a:tc>
-                  <a:txBody>
-                    <a:bodyPr/>
-                    <a:lstStyle/>
-                    <a:p>
-                      <a:pPr algn="ctr">
-                        <a:defRPr sz="800">
-                          <a:solidFill>
-                            <a:srgbClr val="F0F2F5"/>
-                          </a:solidFill>
-                        </a:defRPr>
-                      </a:pPr>
-                      <a:r>
-                        <a:t>16.07</a:t>
-                      </a:r>
-                    </a:p>
-                  </a:txBody>
-                  <a:tcPr anchor="ctr">
-                    <a:solidFill>
-                      <a:srgbClr val="141820"/>
-                    </a:solidFill>
-                  </a:tcPr>
-                </a:tc>
-                <a:tc>
-                  <a:txBody>
-                    <a:bodyPr/>
-                    <a:lstStyle/>
-                    <a:p>
-                      <a:pPr algn="ctr">
-                        <a:defRPr sz="800">
-                          <a:solidFill>
-                            <a:srgbClr val="EF4444"/>
-                          </a:solidFill>
-                        </a:defRPr>
-                      </a:pPr>
-                      <a:r>
-                        <a:t>-1.70</a:t>
-                      </a:r>
-                    </a:p>
-                  </a:txBody>
-                  <a:tcPr anchor="ctr">
-                    <a:solidFill>
-                      <a:srgbClr val="141820"/>
-                    </a:solidFill>
-                  </a:tcPr>
-                </a:tc>
-                <a:tc>
-                  <a:txBody>
-                    <a:bodyPr/>
-                    <a:lstStyle/>
-                    <a:p>
-                      <a:pPr algn="ctr">
-                        <a:defRPr sz="800">
-                          <a:solidFill>
-                            <a:srgbClr val="EF4444"/>
-                          </a:solidFill>
-                        </a:defRPr>
-                      </a:pPr>
-                      <a:r>
-                        <a:t>-10.58%</a:t>
+                        <a:t>FUT_EEB_260629</a:t>
+                      </a:r>
+                    </a:p>
+                  </a:txBody>
+                  <a:tcPr anchor="ctr">
+                    <a:solidFill>
+                      <a:srgbClr val="141820"/>
+                    </a:solidFill>
+                  </a:tcPr>
+                </a:tc>
+                <a:tc>
+                  <a:txBody>
+                    <a:bodyPr/>
+                    <a:lstStyle/>
+                    <a:p>
+                      <a:pPr algn="ctr">
+                        <a:defRPr sz="800">
+                          <a:solidFill>
+                            <a:srgbClr val="F0F2F5"/>
+                          </a:solidFill>
+                        </a:defRPr>
+                      </a:pPr>
+                      <a:r>
+                        <a:t>Power East Base (Monthly)</a:t>
+                      </a:r>
+                    </a:p>
+                  </a:txBody>
+                  <a:tcPr anchor="ctr">
+                    <a:solidFill>
+                      <a:srgbClr val="141820"/>
+                    </a:solidFill>
+                  </a:tcPr>
+                </a:tc>
+                <a:tc>
+                  <a:txBody>
+                    <a:bodyPr/>
+                    <a:lstStyle/>
+                    <a:p>
+                      <a:pPr algn="ctr">
+                        <a:defRPr sz="800">
+                          <a:solidFill>
+                            <a:srgbClr val="F0F2F5"/>
+                          </a:solidFill>
+                        </a:defRPr>
+                      </a:pPr>
+                      <a:r>
+                        <a:t>202606</a:t>
+                      </a:r>
+                    </a:p>
+                  </a:txBody>
+                  <a:tcPr anchor="ctr">
+                    <a:solidFill>
+                      <a:srgbClr val="141820"/>
+                    </a:solidFill>
+                  </a:tcPr>
+                </a:tc>
+                <a:tc>
+                  <a:txBody>
+                    <a:bodyPr/>
+                    <a:lstStyle/>
+                    <a:p>
+                      <a:pPr algn="ctr">
+                        <a:defRPr sz="800">
+                          <a:solidFill>
+                            <a:srgbClr val="F0F2F5"/>
+                          </a:solidFill>
+                        </a:defRPr>
+                      </a:pPr>
+                      <a:r>
+                        <a:t>23.42</a:t>
+                      </a:r>
+                    </a:p>
+                  </a:txBody>
+                  <a:tcPr anchor="ctr">
+                    <a:solidFill>
+                      <a:srgbClr val="141820"/>
+                    </a:solidFill>
+                  </a:tcPr>
+                </a:tc>
+                <a:tc>
+                  <a:txBody>
+                    <a:bodyPr/>
+                    <a:lstStyle/>
+                    <a:p>
+                      <a:pPr algn="ctr">
+                        <a:defRPr sz="800">
+                          <a:solidFill>
+                            <a:srgbClr val="F0F2F5"/>
+                          </a:solidFill>
+                        </a:defRPr>
+                      </a:pPr>
+                      <a:r>
+                        <a:t>19.89</a:t>
+                      </a:r>
+                    </a:p>
+                  </a:txBody>
+                  <a:tcPr anchor="ctr">
+                    <a:solidFill>
+                      <a:srgbClr val="141820"/>
+                    </a:solidFill>
+                  </a:tcPr>
+                </a:tc>
+                <a:tc>
+                  <a:txBody>
+                    <a:bodyPr/>
+                    <a:lstStyle/>
+                    <a:p>
+                      <a:pPr algn="ctr">
+                        <a:defRPr sz="800">
+                          <a:solidFill>
+                            <a:srgbClr val="10B981"/>
+                          </a:solidFill>
+                        </a:defRPr>
+                      </a:pPr>
+                      <a:r>
+                        <a:t>+3.53</a:t>
+                      </a:r>
+                    </a:p>
+                  </a:txBody>
+                  <a:tcPr anchor="ctr">
+                    <a:solidFill>
+                      <a:srgbClr val="141820"/>
+                    </a:solidFill>
+                  </a:tcPr>
+                </a:tc>
+                <a:tc>
+                  <a:txBody>
+                    <a:bodyPr/>
+                    <a:lstStyle/>
+                    <a:p>
+                      <a:pPr algn="ctr">
+                        <a:defRPr sz="800">
+                          <a:solidFill>
+                            <a:srgbClr val="10B981"/>
+                          </a:solidFill>
+                        </a:defRPr>
+                      </a:pPr>
+                      <a:r>
+                        <a:t>+17.75%</a:t>
                       </a:r>
                     </a:p>
                   </a:txBody>
@@ -9478,7 +9478,7 @@
                         </a:defRPr>
                       </a:pPr>
                       <a:r>
-                        <a:t>FUT_EWB_261030</a:t>
+                        <a:t>FUT_EEB_260730</a:t>
                       </a:r>
                     </a:p>
                   </a:txBody>
@@ -9501,7 +9501,7 @@
                         </a:defRPr>
                       </a:pPr>
                       <a:r>
-                        <a:t>Power West Base (Monthly)</a:t>
+                        <a:t>Power East Base (Monthly)</a:t>
                       </a:r>
                     </a:p>
                   </a:txBody>
@@ -9524,7 +9524,7 @@
                         </a:defRPr>
                       </a:pPr>
                       <a:r>
-                        <a:t>202610</a:t>
+                        <a:t>202607</a:t>
                       </a:r>
                     </a:p>
                   </a:txBody>
@@ -9547,7 +9547,7 @@
                         </a:defRPr>
                       </a:pPr>
                       <a:r>
-                        <a:t>14.24</a:t>
+                        <a:t>23.04</a:t>
                       </a:r>
                     </a:p>
                   </a:txBody>
@@ -9570,7 +9570,7 @@
                         </a:defRPr>
                       </a:pPr>
                       <a:r>
-                        <a:t>15.89</a:t>
+                        <a:t>19.52</a:t>
                       </a:r>
                     </a:p>
                   </a:txBody>
@@ -9588,12 +9588,12 @@
                       <a:pPr algn="ctr">
                         <a:defRPr sz="800">
                           <a:solidFill>
-                            <a:srgbClr val="EF4444"/>
-                          </a:solidFill>
-                        </a:defRPr>
-                      </a:pPr>
-                      <a:r>
-                        <a:t>-1.65</a:t>
+                            <a:srgbClr val="10B981"/>
+                          </a:solidFill>
+                        </a:defRPr>
+                      </a:pPr>
+                      <a:r>
+                        <a:t>+3.52</a:t>
                       </a:r>
                     </a:p>
                   </a:txBody>
@@ -9611,12 +9611,12 @@
                       <a:pPr algn="ctr">
                         <a:defRPr sz="800">
                           <a:solidFill>
-                            <a:srgbClr val="EF4444"/>
-                          </a:solidFill>
-                        </a:defRPr>
-                      </a:pPr>
-                      <a:r>
-                        <a:t>-10.38%</a:t>
+                            <a:srgbClr val="10B981"/>
+                          </a:solidFill>
+                        </a:defRPr>
+                      </a:pPr>
+                      <a:r>
+                        <a:t>+18.03%</a:t>
                       </a:r>
                     </a:p>
                   </a:txBody>
@@ -9641,145 +9641,145 @@
                         </a:defRPr>
                       </a:pPr>
                       <a:r>
-                        <a:t>FUT_EEP_260730</a:t>
-                      </a:r>
-                    </a:p>
-                  </a:txBody>
-                  <a:tcPr anchor="ctr">
-                    <a:solidFill>
-                      <a:srgbClr val="141820"/>
-                    </a:solidFill>
-                  </a:tcPr>
-                </a:tc>
-                <a:tc>
-                  <a:txBody>
-                    <a:bodyPr/>
-                    <a:lstStyle/>
-                    <a:p>
-                      <a:pPr algn="ctr">
-                        <a:defRPr sz="800">
-                          <a:solidFill>
-                            <a:srgbClr val="F0F2F5"/>
-                          </a:solidFill>
-                        </a:defRPr>
-                      </a:pPr>
-                      <a:r>
-                        <a:t>Power East Peak (Monthly)</a:t>
-                      </a:r>
-                    </a:p>
-                  </a:txBody>
-                  <a:tcPr anchor="ctr">
-                    <a:solidFill>
-                      <a:srgbClr val="141820"/>
-                    </a:solidFill>
-                  </a:tcPr>
-                </a:tc>
-                <a:tc>
-                  <a:txBody>
-                    <a:bodyPr/>
-                    <a:lstStyle/>
-                    <a:p>
-                      <a:pPr algn="ctr">
-                        <a:defRPr sz="800">
-                          <a:solidFill>
-                            <a:srgbClr val="F0F2F5"/>
-                          </a:solidFill>
-                        </a:defRPr>
-                      </a:pPr>
-                      <a:r>
-                        <a:t>202607</a:t>
-                      </a:r>
-                    </a:p>
-                  </a:txBody>
-                  <a:tcPr anchor="ctr">
-                    <a:solidFill>
-                      <a:srgbClr val="141820"/>
-                    </a:solidFill>
-                  </a:tcPr>
-                </a:tc>
-                <a:tc>
-                  <a:txBody>
-                    <a:bodyPr/>
-                    <a:lstStyle/>
-                    <a:p>
-                      <a:pPr algn="ctr">
-                        <a:defRPr sz="800">
-                          <a:solidFill>
-                            <a:srgbClr val="F0F2F5"/>
-                          </a:solidFill>
-                        </a:defRPr>
-                      </a:pPr>
-                      <a:r>
-                        <a:t>23.46</a:t>
-                      </a:r>
-                    </a:p>
-                  </a:txBody>
-                  <a:tcPr anchor="ctr">
-                    <a:solidFill>
-                      <a:srgbClr val="141820"/>
-                    </a:solidFill>
-                  </a:tcPr>
-                </a:tc>
-                <a:tc>
-                  <a:txBody>
-                    <a:bodyPr/>
-                    <a:lstStyle/>
-                    <a:p>
-                      <a:pPr algn="ctr">
-                        <a:defRPr sz="800">
-                          <a:solidFill>
-                            <a:srgbClr val="F0F2F5"/>
-                          </a:solidFill>
-                        </a:defRPr>
-                      </a:pPr>
-                      <a:r>
-                        <a:t>25.08</a:t>
-                      </a:r>
-                    </a:p>
-                  </a:txBody>
-                  <a:tcPr anchor="ctr">
-                    <a:solidFill>
-                      <a:srgbClr val="141820"/>
-                    </a:solidFill>
-                  </a:tcPr>
-                </a:tc>
-                <a:tc>
-                  <a:txBody>
-                    <a:bodyPr/>
-                    <a:lstStyle/>
-                    <a:p>
-                      <a:pPr algn="ctr">
-                        <a:defRPr sz="800">
-                          <a:solidFill>
-                            <a:srgbClr val="EF4444"/>
-                          </a:solidFill>
-                        </a:defRPr>
-                      </a:pPr>
-                      <a:r>
-                        <a:t>-1.62</a:t>
-                      </a:r>
-                    </a:p>
-                  </a:txBody>
-                  <a:tcPr anchor="ctr">
-                    <a:solidFill>
-                      <a:srgbClr val="141820"/>
-                    </a:solidFill>
-                  </a:tcPr>
-                </a:tc>
-                <a:tc>
-                  <a:txBody>
-                    <a:bodyPr/>
-                    <a:lstStyle/>
-                    <a:p>
-                      <a:pPr algn="ctr">
-                        <a:defRPr sz="800">
-                          <a:solidFill>
-                            <a:srgbClr val="EF4444"/>
-                          </a:solidFill>
-                        </a:defRPr>
-                      </a:pPr>
-                      <a:r>
-                        <a:t>-6.46%</a:t>
+                        <a:t>FUT_EEB_260529</a:t>
+                      </a:r>
+                    </a:p>
+                  </a:txBody>
+                  <a:tcPr anchor="ctr">
+                    <a:solidFill>
+                      <a:srgbClr val="141820"/>
+                    </a:solidFill>
+                  </a:tcPr>
+                </a:tc>
+                <a:tc>
+                  <a:txBody>
+                    <a:bodyPr/>
+                    <a:lstStyle/>
+                    <a:p>
+                      <a:pPr algn="ctr">
+                        <a:defRPr sz="800">
+                          <a:solidFill>
+                            <a:srgbClr val="F0F2F5"/>
+                          </a:solidFill>
+                        </a:defRPr>
+                      </a:pPr>
+                      <a:r>
+                        <a:t>Power East Base (Monthly)</a:t>
+                      </a:r>
+                    </a:p>
+                  </a:txBody>
+                  <a:tcPr anchor="ctr">
+                    <a:solidFill>
+                      <a:srgbClr val="141820"/>
+                    </a:solidFill>
+                  </a:tcPr>
+                </a:tc>
+                <a:tc>
+                  <a:txBody>
+                    <a:bodyPr/>
+                    <a:lstStyle/>
+                    <a:p>
+                      <a:pPr algn="ctr">
+                        <a:defRPr sz="800">
+                          <a:solidFill>
+                            <a:srgbClr val="F0F2F5"/>
+                          </a:solidFill>
+                        </a:defRPr>
+                      </a:pPr>
+                      <a:r>
+                        <a:t>202605</a:t>
+                      </a:r>
+                    </a:p>
+                  </a:txBody>
+                  <a:tcPr anchor="ctr">
+                    <a:solidFill>
+                      <a:srgbClr val="141820"/>
+                    </a:solidFill>
+                  </a:tcPr>
+                </a:tc>
+                <a:tc>
+                  <a:txBody>
+                    <a:bodyPr/>
+                    <a:lstStyle/>
+                    <a:p>
+                      <a:pPr algn="ctr">
+                        <a:defRPr sz="800">
+                          <a:solidFill>
+                            <a:srgbClr val="F0F2F5"/>
+                          </a:solidFill>
+                        </a:defRPr>
+                      </a:pPr>
+                      <a:r>
+                        <a:t>22.14</a:t>
+                      </a:r>
+                    </a:p>
+                  </a:txBody>
+                  <a:tcPr anchor="ctr">
+                    <a:solidFill>
+                      <a:srgbClr val="141820"/>
+                    </a:solidFill>
+                  </a:tcPr>
+                </a:tc>
+                <a:tc>
+                  <a:txBody>
+                    <a:bodyPr/>
+                    <a:lstStyle/>
+                    <a:p>
+                      <a:pPr algn="ctr">
+                        <a:defRPr sz="800">
+                          <a:solidFill>
+                            <a:srgbClr val="F0F2F5"/>
+                          </a:solidFill>
+                        </a:defRPr>
+                      </a:pPr>
+                      <a:r>
+                        <a:t>18.65</a:t>
+                      </a:r>
+                    </a:p>
+                  </a:txBody>
+                  <a:tcPr anchor="ctr">
+                    <a:solidFill>
+                      <a:srgbClr val="141820"/>
+                    </a:solidFill>
+                  </a:tcPr>
+                </a:tc>
+                <a:tc>
+                  <a:txBody>
+                    <a:bodyPr/>
+                    <a:lstStyle/>
+                    <a:p>
+                      <a:pPr algn="ctr">
+                        <a:defRPr sz="800">
+                          <a:solidFill>
+                            <a:srgbClr val="10B981"/>
+                          </a:solidFill>
+                        </a:defRPr>
+                      </a:pPr>
+                      <a:r>
+                        <a:t>+3.49</a:t>
+                      </a:r>
+                    </a:p>
+                  </a:txBody>
+                  <a:tcPr anchor="ctr">
+                    <a:solidFill>
+                      <a:srgbClr val="141820"/>
+                    </a:solidFill>
+                  </a:tcPr>
+                </a:tc>
+                <a:tc>
+                  <a:txBody>
+                    <a:bodyPr/>
+                    <a:lstStyle/>
+                    <a:p>
+                      <a:pPr algn="ctr">
+                        <a:defRPr sz="800">
+                          <a:solidFill>
+                            <a:srgbClr val="10B981"/>
+                          </a:solidFill>
+                        </a:defRPr>
+                      </a:pPr>
+                      <a:r>
+                        <a:t>+18.71%</a:t>
                       </a:r>
                     </a:p>
                   </a:txBody>
@@ -9804,7 +9804,7 @@
                         </a:defRPr>
                       </a:pPr>
                       <a:r>
-                        <a:t>FUT_EWB_261230</a:t>
+                        <a:t>FUT_EEB_260828</a:t>
                       </a:r>
                     </a:p>
                   </a:txBody>
@@ -9827,7 +9827,7 @@
                         </a:defRPr>
                       </a:pPr>
                       <a:r>
-                        <a:t>Power West Base (Monthly)</a:t>
+                        <a:t>Power East Base (Monthly)</a:t>
                       </a:r>
                     </a:p>
                   </a:txBody>
@@ -9850,7 +9850,7 @@
                         </a:defRPr>
                       </a:pPr>
                       <a:r>
-                        <a:t>202612</a:t>
+                        <a:t>202608</a:t>
                       </a:r>
                     </a:p>
                   </a:txBody>
@@ -9873,7 +9873,7 @@
                         </a:defRPr>
                       </a:pPr>
                       <a:r>
-                        <a:t>15.51</a:t>
+                        <a:t>23.23</a:t>
                       </a:r>
                     </a:p>
                   </a:txBody>
@@ -9896,7 +9896,7 @@
                         </a:defRPr>
                       </a:pPr>
                       <a:r>
-                        <a:t>17.03</a:t>
+                        <a:t>19.85</a:t>
                       </a:r>
                     </a:p>
                   </a:txBody>
@@ -9914,12 +9914,12 @@
                       <a:pPr algn="ctr">
                         <a:defRPr sz="800">
                           <a:solidFill>
-                            <a:srgbClr val="EF4444"/>
-                          </a:solidFill>
-                        </a:defRPr>
-                      </a:pPr>
-                      <a:r>
-                        <a:t>-1.52</a:t>
+                            <a:srgbClr val="10B981"/>
+                          </a:solidFill>
+                        </a:defRPr>
+                      </a:pPr>
+                      <a:r>
+                        <a:t>+3.38</a:t>
                       </a:r>
                     </a:p>
                   </a:txBody>
@@ -9937,12 +9937,12 @@
                       <a:pPr algn="ctr">
                         <a:defRPr sz="800">
                           <a:solidFill>
-                            <a:srgbClr val="EF4444"/>
-                          </a:solidFill>
-                        </a:defRPr>
-                      </a:pPr>
-                      <a:r>
-                        <a:t>-8.93%</a:t>
+                            <a:srgbClr val="10B981"/>
+                          </a:solidFill>
+                        </a:defRPr>
+                      </a:pPr>
+                      <a:r>
+                        <a:t>+17.03%</a:t>
                       </a:r>
                     </a:p>
                   </a:txBody>
@@ -9967,7 +9967,7 @@
                         </a:defRPr>
                       </a:pPr>
                       <a:r>
-                        <a:t>FUT_EEP_261029</a:t>
+                        <a:t>FUT_EEP_260629</a:t>
                       </a:r>
                     </a:p>
                   </a:txBody>
@@ -10013,99 +10013,99 @@
                         </a:defRPr>
                       </a:pPr>
                       <a:r>
-                        <a:t>202610</a:t>
-                      </a:r>
-                    </a:p>
-                  </a:txBody>
-                  <a:tcPr anchor="ctr">
-                    <a:solidFill>
-                      <a:srgbClr val="141820"/>
-                    </a:solidFill>
-                  </a:tcPr>
-                </a:tc>
-                <a:tc>
-                  <a:txBody>
-                    <a:bodyPr/>
-                    <a:lstStyle/>
-                    <a:p>
-                      <a:pPr algn="ctr">
-                        <a:defRPr sz="800">
-                          <a:solidFill>
-                            <a:srgbClr val="F0F2F5"/>
-                          </a:solidFill>
-                        </a:defRPr>
-                      </a:pPr>
-                      <a:r>
-                        <a:t>21.66</a:t>
-                      </a:r>
-                    </a:p>
-                  </a:txBody>
-                  <a:tcPr anchor="ctr">
-                    <a:solidFill>
-                      <a:srgbClr val="141820"/>
-                    </a:solidFill>
-                  </a:tcPr>
-                </a:tc>
-                <a:tc>
-                  <a:txBody>
-                    <a:bodyPr/>
-                    <a:lstStyle/>
-                    <a:p>
-                      <a:pPr algn="ctr">
-                        <a:defRPr sz="800">
-                          <a:solidFill>
-                            <a:srgbClr val="F0F2F5"/>
-                          </a:solidFill>
-                        </a:defRPr>
-                      </a:pPr>
-                      <a:r>
-                        <a:t>23.15</a:t>
-                      </a:r>
-                    </a:p>
-                  </a:txBody>
-                  <a:tcPr anchor="ctr">
-                    <a:solidFill>
-                      <a:srgbClr val="141820"/>
-                    </a:solidFill>
-                  </a:tcPr>
-                </a:tc>
-                <a:tc>
-                  <a:txBody>
-                    <a:bodyPr/>
-                    <a:lstStyle/>
-                    <a:p>
-                      <a:pPr algn="ctr">
-                        <a:defRPr sz="800">
-                          <a:solidFill>
-                            <a:srgbClr val="EF4444"/>
-                          </a:solidFill>
-                        </a:defRPr>
-                      </a:pPr>
-                      <a:r>
-                        <a:t>-1.49</a:t>
-                      </a:r>
-                    </a:p>
-                  </a:txBody>
-                  <a:tcPr anchor="ctr">
-                    <a:solidFill>
-                      <a:srgbClr val="141820"/>
-                    </a:solidFill>
-                  </a:tcPr>
-                </a:tc>
-                <a:tc>
-                  <a:txBody>
-                    <a:bodyPr/>
-                    <a:lstStyle/>
-                    <a:p>
-                      <a:pPr algn="ctr">
-                        <a:defRPr sz="800">
-                          <a:solidFill>
-                            <a:srgbClr val="EF4444"/>
-                          </a:solidFill>
-                        </a:defRPr>
-                      </a:pPr>
-                      <a:r>
-                        <a:t>-6.44%</a:t>
+                        <a:t>202606</a:t>
+                      </a:r>
+                    </a:p>
+                  </a:txBody>
+                  <a:tcPr anchor="ctr">
+                    <a:solidFill>
+                      <a:srgbClr val="141820"/>
+                    </a:solidFill>
+                  </a:tcPr>
+                </a:tc>
+                <a:tc>
+                  <a:txBody>
+                    <a:bodyPr/>
+                    <a:lstStyle/>
+                    <a:p>
+                      <a:pPr algn="ctr">
+                        <a:defRPr sz="800">
+                          <a:solidFill>
+                            <a:srgbClr val="F0F2F5"/>
+                          </a:solidFill>
+                        </a:defRPr>
+                      </a:pPr>
+                      <a:r>
+                        <a:t>26.36</a:t>
+                      </a:r>
+                    </a:p>
+                  </a:txBody>
+                  <a:tcPr anchor="ctr">
+                    <a:solidFill>
+                      <a:srgbClr val="141820"/>
+                    </a:solidFill>
+                  </a:tcPr>
+                </a:tc>
+                <a:tc>
+                  <a:txBody>
+                    <a:bodyPr/>
+                    <a:lstStyle/>
+                    <a:p>
+                      <a:pPr algn="ctr">
+                        <a:defRPr sz="800">
+                          <a:solidFill>
+                            <a:srgbClr val="F0F2F5"/>
+                          </a:solidFill>
+                        </a:defRPr>
+                      </a:pPr>
+                      <a:r>
+                        <a:t>23.00</a:t>
+                      </a:r>
+                    </a:p>
+                  </a:txBody>
+                  <a:tcPr anchor="ctr">
+                    <a:solidFill>
+                      <a:srgbClr val="141820"/>
+                    </a:solidFill>
+                  </a:tcPr>
+                </a:tc>
+                <a:tc>
+                  <a:txBody>
+                    <a:bodyPr/>
+                    <a:lstStyle/>
+                    <a:p>
+                      <a:pPr algn="ctr">
+                        <a:defRPr sz="800">
+                          <a:solidFill>
+                            <a:srgbClr val="10B981"/>
+                          </a:solidFill>
+                        </a:defRPr>
+                      </a:pPr>
+                      <a:r>
+                        <a:t>+3.36</a:t>
+                      </a:r>
+                    </a:p>
+                  </a:txBody>
+                  <a:tcPr anchor="ctr">
+                    <a:solidFill>
+                      <a:srgbClr val="141820"/>
+                    </a:solidFill>
+                  </a:tcPr>
+                </a:tc>
+                <a:tc>
+                  <a:txBody>
+                    <a:bodyPr/>
+                    <a:lstStyle/>
+                    <a:p>
+                      <a:pPr algn="ctr">
+                        <a:defRPr sz="800">
+                          <a:solidFill>
+                            <a:srgbClr val="10B981"/>
+                          </a:solidFill>
+                        </a:defRPr>
+                      </a:pPr>
+                      <a:r>
+                        <a:t>+14.61%</a:t>
                       </a:r>
                     </a:p>
                   </a:txBody>

--- a/docs/chartpack/latest.pptx
+++ b/docs/chartpack/latest.pptx
@@ -3210,7 +3210,7 @@
               </a:defRPr>
             </a:pPr>
             <a:r>
-              <a:t>Trade Date: 2026-03-23</a:t>
+              <a:t>Trade Date: 2026-03-24</a:t>
             </a:r>
           </a:p>
         </p:txBody>
@@ -3505,7 +3505,7 @@
               </a:defRPr>
             </a:pPr>
             <a:r>
-              <a:t>East/West Base &amp; Peak monthly contracts (2026-03-23)</a:t>
+              <a:t>East/West Base &amp; Peak monthly contracts (2026-03-24)</a:t>
             </a:r>
           </a:p>
         </p:txBody>
@@ -3711,7 +3711,7 @@
               </a:defRPr>
             </a:pPr>
             <a:r>
-              <a:t>Front-month settlement prices as of 2026-03-23</a:t>
+              <a:t>Front-month settlement prices as of 2026-03-24</a:t>
             </a:r>
           </a:p>
         </p:txBody>
@@ -3989,7 +3989,7 @@
                         </a:defRPr>
                       </a:pPr>
                       <a:r>
-                        <a:t>115,900.00</a:t>
+                        <a:t>112,900.00</a:t>
                       </a:r>
                     </a:p>
                   </a:txBody>
@@ -4030,35 +4030,35 @@
                       <a:pPr algn="ctr">
                         <a:defRPr sz="800">
                           <a:solidFill>
-                            <a:srgbClr val="F0F2F5"/>
-                          </a:solidFill>
-                        </a:defRPr>
-                      </a:pPr>
-                      <a:r>
-                        <a:t>+0.00</a:t>
-                      </a:r>
-                    </a:p>
-                  </a:txBody>
-                  <a:tcPr anchor="ctr">
-                    <a:solidFill>
-                      <a:srgbClr val="141820"/>
-                    </a:solidFill>
-                  </a:tcPr>
-                </a:tc>
-                <a:tc>
-                  <a:txBody>
-                    <a:bodyPr/>
-                    <a:lstStyle/>
-                    <a:p>
-                      <a:pPr algn="ctr">
-                        <a:defRPr sz="800">
-                          <a:solidFill>
-                            <a:srgbClr val="F0F2F5"/>
-                          </a:solidFill>
-                        </a:defRPr>
-                      </a:pPr>
-                      <a:r>
-                        <a:t>+0.00%</a:t>
+                            <a:srgbClr val="EF4444"/>
+                          </a:solidFill>
+                        </a:defRPr>
+                      </a:pPr>
+                      <a:r>
+                        <a:t>-3000.00</a:t>
+                      </a:r>
+                    </a:p>
+                  </a:txBody>
+                  <a:tcPr anchor="ctr">
+                    <a:solidFill>
+                      <a:srgbClr val="141820"/>
+                    </a:solidFill>
+                  </a:tcPr>
+                </a:tc>
+                <a:tc>
+                  <a:txBody>
+                    <a:bodyPr/>
+                    <a:lstStyle/>
+                    <a:p>
+                      <a:pPr algn="ctr">
+                        <a:defRPr sz="800">
+                          <a:solidFill>
+                            <a:srgbClr val="EF4444"/>
+                          </a:solidFill>
+                        </a:defRPr>
+                      </a:pPr>
+                      <a:r>
+                        <a:t>-2.59%</a:t>
                       </a:r>
                     </a:p>
                   </a:txBody>
@@ -4804,7 +4804,7 @@
                         </a:defRPr>
                       </a:pPr>
                       <a:r>
-                        <a:t>136,060.00</a:t>
+                        <a:t>134,680.00</a:t>
                       </a:r>
                     </a:p>
                   </a:txBody>
@@ -4845,12 +4845,12 @@
                       <a:pPr algn="ctr">
                         <a:defRPr sz="800">
                           <a:solidFill>
-                            <a:srgbClr val="10B981"/>
-                          </a:solidFill>
-                        </a:defRPr>
-                      </a:pPr>
-                      <a:r>
-                        <a:t>+220.00</a:t>
+                            <a:srgbClr val="EF4444"/>
+                          </a:solidFill>
+                        </a:defRPr>
+                      </a:pPr>
+                      <a:r>
+                        <a:t>-1380.00</a:t>
                       </a:r>
                     </a:p>
                   </a:txBody>
@@ -4868,12 +4868,12 @@
                       <a:pPr algn="ctr">
                         <a:defRPr sz="800">
                           <a:solidFill>
-                            <a:srgbClr val="10B981"/>
-                          </a:solidFill>
-                        </a:defRPr>
-                      </a:pPr>
-                      <a:r>
-                        <a:t>+0.16%</a:t>
+                            <a:srgbClr val="EF4444"/>
+                          </a:solidFill>
+                        </a:defRPr>
+                      </a:pPr>
+                      <a:r>
+                        <a:t>-1.01%</a:t>
                       </a:r>
                     </a:p>
                   </a:txBody>
@@ -4967,7 +4967,7 @@
                         </a:defRPr>
                       </a:pPr>
                       <a:r>
-                        <a:t>3,467.00</a:t>
+                        <a:t>3,335.00</a:t>
                       </a:r>
                     </a:p>
                   </a:txBody>
@@ -5008,35 +5008,35 @@
                       <a:pPr algn="ctr">
                         <a:defRPr sz="800">
                           <a:solidFill>
-                            <a:srgbClr val="10B981"/>
-                          </a:solidFill>
-                        </a:defRPr>
-                      </a:pPr>
-                      <a:r>
-                        <a:t>+257.00</a:t>
-                      </a:r>
-                    </a:p>
-                  </a:txBody>
-                  <a:tcPr anchor="ctr">
-                    <a:solidFill>
-                      <a:srgbClr val="141820"/>
-                    </a:solidFill>
-                  </a:tcPr>
-                </a:tc>
-                <a:tc>
-                  <a:txBody>
-                    <a:bodyPr/>
-                    <a:lstStyle/>
-                    <a:p>
-                      <a:pPr algn="ctr">
-                        <a:defRPr sz="800">
-                          <a:solidFill>
-                            <a:srgbClr val="10B981"/>
-                          </a:solidFill>
-                        </a:defRPr>
-                      </a:pPr>
-                      <a:r>
-                        <a:t>+8.01%</a:t>
+                            <a:srgbClr val="EF4444"/>
+                          </a:solidFill>
+                        </a:defRPr>
+                      </a:pPr>
+                      <a:r>
+                        <a:t>-132.00</a:t>
+                      </a:r>
+                    </a:p>
+                  </a:txBody>
+                  <a:tcPr anchor="ctr">
+                    <a:solidFill>
+                      <a:srgbClr val="141820"/>
+                    </a:solidFill>
+                  </a:tcPr>
+                </a:tc>
+                <a:tc>
+                  <a:txBody>
+                    <a:bodyPr/>
+                    <a:lstStyle/>
+                    <a:p>
+                      <a:pPr algn="ctr">
+                        <a:defRPr sz="800">
+                          <a:solidFill>
+                            <a:srgbClr val="EF4444"/>
+                          </a:solidFill>
+                        </a:defRPr>
+                      </a:pPr>
+                      <a:r>
+                        <a:t>-3.81%</a:t>
                       </a:r>
                     </a:p>
                   </a:txBody>
@@ -5130,7 +5130,7 @@
                         </a:defRPr>
                       </a:pPr>
                       <a:r>
-                        <a:t>21,683.00</a:t>
+                        <a:t>22,396.00</a:t>
                       </a:r>
                     </a:p>
                   </a:txBody>
@@ -5171,12 +5171,12 @@
                       <a:pPr algn="ctr">
                         <a:defRPr sz="800">
                           <a:solidFill>
-                            <a:srgbClr val="EF4444"/>
-                          </a:solidFill>
-                        </a:defRPr>
-                      </a:pPr>
-                      <a:r>
-                        <a:t>-3048.00</a:t>
+                            <a:srgbClr val="10B981"/>
+                          </a:solidFill>
+                        </a:defRPr>
+                      </a:pPr>
+                      <a:r>
+                        <a:t>+713.00</a:t>
                       </a:r>
                     </a:p>
                   </a:txBody>
@@ -5194,12 +5194,12 @@
                       <a:pPr algn="ctr">
                         <a:defRPr sz="800">
                           <a:solidFill>
-                            <a:srgbClr val="EF4444"/>
-                          </a:solidFill>
-                        </a:defRPr>
-                      </a:pPr>
-                      <a:r>
-                        <a:t>-12.32%</a:t>
+                            <a:srgbClr val="10B981"/>
+                          </a:solidFill>
+                        </a:defRPr>
+                      </a:pPr>
+                      <a:r>
+                        <a:t>+3.29%</a:t>
                       </a:r>
                     </a:p>
                   </a:txBody>
@@ -5334,35 +5334,35 @@
                       <a:pPr algn="ctr">
                         <a:defRPr sz="800">
                           <a:solidFill>
-                            <a:srgbClr val="EF4444"/>
-                          </a:solidFill>
-                        </a:defRPr>
-                      </a:pPr>
-                      <a:r>
-                        <a:t>-600.00</a:t>
-                      </a:r>
-                    </a:p>
-                  </a:txBody>
-                  <a:tcPr anchor="ctr">
-                    <a:solidFill>
-                      <a:srgbClr val="141820"/>
-                    </a:solidFill>
-                  </a:tcPr>
-                </a:tc>
-                <a:tc>
-                  <a:txBody>
-                    <a:bodyPr/>
-                    <a:lstStyle/>
-                    <a:p>
-                      <a:pPr algn="ctr">
-                        <a:defRPr sz="800">
-                          <a:solidFill>
-                            <a:srgbClr val="EF4444"/>
-                          </a:solidFill>
-                        </a:defRPr>
-                      </a:pPr>
-                      <a:r>
-                        <a:t>-7.69%</a:t>
+                            <a:srgbClr val="F0F2F5"/>
+                          </a:solidFill>
+                        </a:defRPr>
+                      </a:pPr>
+                      <a:r>
+                        <a:t>+0.00</a:t>
+                      </a:r>
+                    </a:p>
+                  </a:txBody>
+                  <a:tcPr anchor="ctr">
+                    <a:solidFill>
+                      <a:srgbClr val="141820"/>
+                    </a:solidFill>
+                  </a:tcPr>
+                </a:tc>
+                <a:tc>
+                  <a:txBody>
+                    <a:bodyPr/>
+                    <a:lstStyle/>
+                    <a:p>
+                      <a:pPr algn="ctr">
+                        <a:defRPr sz="800">
+                          <a:solidFill>
+                            <a:srgbClr val="F0F2F5"/>
+                          </a:solidFill>
+                        </a:defRPr>
+                      </a:pPr>
+                      <a:r>
+                        <a:t>+0.00%</a:t>
                       </a:r>
                     </a:p>
                   </a:txBody>
@@ -5456,7 +5456,7 @@
                         </a:defRPr>
                       </a:pPr>
                       <a:r>
-                        <a:t>8,776.00</a:t>
+                        <a:t>9,165.00</a:t>
                       </a:r>
                     </a:p>
                   </a:txBody>
@@ -5497,12 +5497,12 @@
                       <a:pPr algn="ctr">
                         <a:defRPr sz="800">
                           <a:solidFill>
-                            <a:srgbClr val="EF4444"/>
-                          </a:solidFill>
-                        </a:defRPr>
-                      </a:pPr>
-                      <a:r>
-                        <a:t>-901.00</a:t>
+                            <a:srgbClr val="10B981"/>
+                          </a:solidFill>
+                        </a:defRPr>
+                      </a:pPr>
+                      <a:r>
+                        <a:t>+389.00</a:t>
                       </a:r>
                     </a:p>
                   </a:txBody>
@@ -5520,12 +5520,12 @@
                       <a:pPr algn="ctr">
                         <a:defRPr sz="800">
                           <a:solidFill>
-                            <a:srgbClr val="EF4444"/>
-                          </a:solidFill>
-                        </a:defRPr>
-                      </a:pPr>
-                      <a:r>
-                        <a:t>-9.31%</a:t>
+                            <a:srgbClr val="10B981"/>
+                          </a:solidFill>
+                        </a:defRPr>
+                      </a:pPr>
+                      <a:r>
+                        <a:t>+4.43%</a:t>
                       </a:r>
                     </a:p>
                   </a:txBody>
@@ -5660,35 +5660,35 @@
                       <a:pPr algn="ctr">
                         <a:defRPr sz="800">
                           <a:solidFill>
-                            <a:srgbClr val="EF4444"/>
-                          </a:solidFill>
-                        </a:defRPr>
-                      </a:pPr>
-                      <a:r>
-                        <a:t>-50.00</a:t>
-                      </a:r>
-                    </a:p>
-                  </a:txBody>
-                  <a:tcPr anchor="ctr">
-                    <a:solidFill>
-                      <a:srgbClr val="141820"/>
-                    </a:solidFill>
-                  </a:tcPr>
-                </a:tc>
-                <a:tc>
-                  <a:txBody>
-                    <a:bodyPr/>
-                    <a:lstStyle/>
-                    <a:p>
-                      <a:pPr algn="ctr">
-                        <a:defRPr sz="800">
-                          <a:solidFill>
-                            <a:srgbClr val="EF4444"/>
-                          </a:solidFill>
-                        </a:defRPr>
-                      </a:pPr>
-                      <a:r>
-                        <a:t>-12.50%</a:t>
+                            <a:srgbClr val="F0F2F5"/>
+                          </a:solidFill>
+                        </a:defRPr>
+                      </a:pPr>
+                      <a:r>
+                        <a:t>+0.00</a:t>
+                      </a:r>
+                    </a:p>
+                  </a:txBody>
+                  <a:tcPr anchor="ctr">
+                    <a:solidFill>
+                      <a:srgbClr val="141820"/>
+                    </a:solidFill>
+                  </a:tcPr>
+                </a:tc>
+                <a:tc>
+                  <a:txBody>
+                    <a:bodyPr/>
+                    <a:lstStyle/>
+                    <a:p>
+                      <a:pPr algn="ctr">
+                        <a:defRPr sz="800">
+                          <a:solidFill>
+                            <a:srgbClr val="F0F2F5"/>
+                          </a:solidFill>
+                        </a:defRPr>
+                      </a:pPr>
+                      <a:r>
+                        <a:t>+0.00%</a:t>
                       </a:r>
                     </a:p>
                   </a:txBody>
@@ -5823,12 +5823,12 @@
                       <a:pPr algn="ctr">
                         <a:defRPr sz="800">
                           <a:solidFill>
-                            <a:srgbClr val="EF4444"/>
-                          </a:solidFill>
-                        </a:defRPr>
-                      </a:pPr>
-                      <a:r>
-                        <a:t>-5.00</a:t>
+                            <a:srgbClr val="F0F2F5"/>
+                          </a:solidFill>
+                        </a:defRPr>
+                      </a:pPr>
+                      <a:r>
+                        <a:t>+0.00</a:t>
                       </a:r>
                     </a:p>
                   </a:txBody>
@@ -5846,12 +5846,12 @@
                       <a:pPr algn="ctr">
                         <a:defRPr sz="800">
                           <a:solidFill>
-                            <a:srgbClr val="EF4444"/>
-                          </a:solidFill>
-                        </a:defRPr>
-                      </a:pPr>
-                      <a:r>
-                        <a:t>-1.33%</a:t>
+                            <a:srgbClr val="F0F2F5"/>
+                          </a:solidFill>
+                        </a:defRPr>
+                      </a:pPr>
+                      <a:r>
+                        <a:t>+0.00%</a:t>
                       </a:r>
                     </a:p>
                   </a:txBody>
@@ -5986,35 +5986,35 @@
                       <a:pPr algn="ctr">
                         <a:defRPr sz="800">
                           <a:solidFill>
-                            <a:srgbClr val="EF4444"/>
-                          </a:solidFill>
-                        </a:defRPr>
-                      </a:pPr>
-                      <a:r>
-                        <a:t>-3.00</a:t>
-                      </a:r>
-                    </a:p>
-                  </a:txBody>
-                  <a:tcPr anchor="ctr">
-                    <a:solidFill>
-                      <a:srgbClr val="141820"/>
-                    </a:solidFill>
-                  </a:tcPr>
-                </a:tc>
-                <a:tc>
-                  <a:txBody>
-                    <a:bodyPr/>
-                    <a:lstStyle/>
-                    <a:p>
-                      <a:pPr algn="ctr">
-                        <a:defRPr sz="800">
-                          <a:solidFill>
-                            <a:srgbClr val="EF4444"/>
-                          </a:solidFill>
-                        </a:defRPr>
-                      </a:pPr>
-                      <a:r>
-                        <a:t>-0.97%</a:t>
+                            <a:srgbClr val="F0F2F5"/>
+                          </a:solidFill>
+                        </a:defRPr>
+                      </a:pPr>
+                      <a:r>
+                        <a:t>+0.00</a:t>
+                      </a:r>
+                    </a:p>
+                  </a:txBody>
+                  <a:tcPr anchor="ctr">
+                    <a:solidFill>
+                      <a:srgbClr val="141820"/>
+                    </a:solidFill>
+                  </a:tcPr>
+                </a:tc>
+                <a:tc>
+                  <a:txBody>
+                    <a:bodyPr/>
+                    <a:lstStyle/>
+                    <a:p>
+                      <a:pPr algn="ctr">
+                        <a:defRPr sz="800">
+                          <a:solidFill>
+                            <a:srgbClr val="F0F2F5"/>
+                          </a:solidFill>
+                        </a:defRPr>
+                      </a:pPr>
+                      <a:r>
+                        <a:t>+0.00%</a:t>
                       </a:r>
                     </a:p>
                   </a:txBody>
@@ -6108,7 +6108,7 @@
                         </a:defRPr>
                       </a:pPr>
                       <a:r>
-                        <a:t>16,130.00</a:t>
+                        <a:t>16,245.00</a:t>
                       </a:r>
                     </a:p>
                   </a:txBody>
@@ -6154,7 +6154,7 @@
                         </a:defRPr>
                       </a:pPr>
                       <a:r>
-                        <a:t>+95.00</a:t>
+                        <a:t>+115.00</a:t>
                       </a:r>
                     </a:p>
                   </a:txBody>
@@ -6177,7 +6177,7 @@
                         </a:defRPr>
                       </a:pPr>
                       <a:r>
-                        <a:t>+0.59%</a:t>
+                        <a:t>+0.71%</a:t>
                       </a:r>
                     </a:p>
                   </a:txBody>
@@ -6858,7 +6858,7 @@
               </a:defRPr>
             </a:pPr>
             <a:r>
-              <a:t>Gold &amp; Platinum (2026-03-23)</a:t>
+              <a:t>Gold &amp; Platinum (2026-03-24)</a:t>
             </a:r>
           </a:p>
         </p:txBody>
@@ -7064,7 +7064,7 @@
               </a:defRPr>
             </a:pPr>
             <a:r>
-              <a:t>Dubai Crude Oil &amp; LNG Platts JKM (2026-03-23)</a:t>
+              <a:t>Dubai Crude Oil &amp; LNG Platts JKM (2026-03-24)</a:t>
             </a:r>
           </a:p>
         </p:txBody>
@@ -7476,7 +7476,7 @@
               </a:defRPr>
             </a:pPr>
             <a:r>
-              <a:t>Largest absolute settlement price changes vs previous day (2026-03-23)</a:t>
+              <a:t>Largest absolute settlement price changes vs previous day (2026-03-24)</a:t>
             </a:r>
           </a:p>
         </p:txBody>
@@ -7685,145 +7685,145 @@
                         </a:defRPr>
                       </a:pPr>
                       <a:r>
-                        <a:t>FUT_EEP_260828</a:t>
-                      </a:r>
-                    </a:p>
-                  </a:txBody>
-                  <a:tcPr anchor="ctr">
-                    <a:solidFill>
-                      <a:srgbClr val="141820"/>
-                    </a:solidFill>
-                  </a:tcPr>
-                </a:tc>
-                <a:tc>
-                  <a:txBody>
-                    <a:bodyPr/>
-                    <a:lstStyle/>
-                    <a:p>
-                      <a:pPr algn="ctr">
-                        <a:defRPr sz="800">
-                          <a:solidFill>
-                            <a:srgbClr val="F0F2F5"/>
-                          </a:solidFill>
-                        </a:defRPr>
-                      </a:pPr>
-                      <a:r>
-                        <a:t>Power East Peak (Monthly)</a:t>
-                      </a:r>
-                    </a:p>
-                  </a:txBody>
-                  <a:tcPr anchor="ctr">
-                    <a:solidFill>
-                      <a:srgbClr val="141820"/>
-                    </a:solidFill>
-                  </a:tcPr>
-                </a:tc>
-                <a:tc>
-                  <a:txBody>
-                    <a:bodyPr/>
-                    <a:lstStyle/>
-                    <a:p>
-                      <a:pPr algn="ctr">
-                        <a:defRPr sz="800">
-                          <a:solidFill>
-                            <a:srgbClr val="F0F2F5"/>
-                          </a:solidFill>
-                        </a:defRPr>
-                      </a:pPr>
-                      <a:r>
-                        <a:t>202608</a:t>
-                      </a:r>
-                    </a:p>
-                  </a:txBody>
-                  <a:tcPr anchor="ctr">
-                    <a:solidFill>
-                      <a:srgbClr val="141820"/>
-                    </a:solidFill>
-                  </a:tcPr>
-                </a:tc>
-                <a:tc>
-                  <a:txBody>
-                    <a:bodyPr/>
-                    <a:lstStyle/>
-                    <a:p>
-                      <a:pPr algn="ctr">
-                        <a:defRPr sz="800">
-                          <a:solidFill>
-                            <a:srgbClr val="F0F2F5"/>
-                          </a:solidFill>
-                        </a:defRPr>
-                      </a:pPr>
-                      <a:r>
-                        <a:t>29.12</a:t>
-                      </a:r>
-                    </a:p>
-                  </a:txBody>
-                  <a:tcPr anchor="ctr">
-                    <a:solidFill>
-                      <a:srgbClr val="141820"/>
-                    </a:solidFill>
-                  </a:tcPr>
-                </a:tc>
-                <a:tc>
-                  <a:txBody>
-                    <a:bodyPr/>
-                    <a:lstStyle/>
-                    <a:p>
-                      <a:pPr algn="ctr">
-                        <a:defRPr sz="800">
-                          <a:solidFill>
-                            <a:srgbClr val="F0F2F5"/>
-                          </a:solidFill>
-                        </a:defRPr>
-                      </a:pPr>
-                      <a:r>
-                        <a:t>24.39</a:t>
-                      </a:r>
-                    </a:p>
-                  </a:txBody>
-                  <a:tcPr anchor="ctr">
-                    <a:solidFill>
-                      <a:srgbClr val="141820"/>
-                    </a:solidFill>
-                  </a:tcPr>
-                </a:tc>
-                <a:tc>
-                  <a:txBody>
-                    <a:bodyPr/>
-                    <a:lstStyle/>
-                    <a:p>
-                      <a:pPr algn="ctr">
-                        <a:defRPr sz="800">
-                          <a:solidFill>
-                            <a:srgbClr val="10B981"/>
-                          </a:solidFill>
-                        </a:defRPr>
-                      </a:pPr>
-                      <a:r>
-                        <a:t>+4.73</a:t>
-                      </a:r>
-                    </a:p>
-                  </a:txBody>
-                  <a:tcPr anchor="ctr">
-                    <a:solidFill>
-                      <a:srgbClr val="141820"/>
-                    </a:solidFill>
-                  </a:tcPr>
-                </a:tc>
-                <a:tc>
-                  <a:txBody>
-                    <a:bodyPr/>
-                    <a:lstStyle/>
-                    <a:p>
-                      <a:pPr algn="ctr">
-                        <a:defRPr sz="800">
-                          <a:solidFill>
-                            <a:srgbClr val="10B981"/>
-                          </a:solidFill>
-                        </a:defRPr>
-                      </a:pPr>
-                      <a:r>
-                        <a:t>+19.39%</a:t>
+                        <a:t>FUT_EWB_260730</a:t>
+                      </a:r>
+                    </a:p>
+                  </a:txBody>
+                  <a:tcPr anchor="ctr">
+                    <a:solidFill>
+                      <a:srgbClr val="141820"/>
+                    </a:solidFill>
+                  </a:tcPr>
+                </a:tc>
+                <a:tc>
+                  <a:txBody>
+                    <a:bodyPr/>
+                    <a:lstStyle/>
+                    <a:p>
+                      <a:pPr algn="ctr">
+                        <a:defRPr sz="800">
+                          <a:solidFill>
+                            <a:srgbClr val="F0F2F5"/>
+                          </a:solidFill>
+                        </a:defRPr>
+                      </a:pPr>
+                      <a:r>
+                        <a:t>Power West Base (Monthly)</a:t>
+                      </a:r>
+                    </a:p>
+                  </a:txBody>
+                  <a:tcPr anchor="ctr">
+                    <a:solidFill>
+                      <a:srgbClr val="141820"/>
+                    </a:solidFill>
+                  </a:tcPr>
+                </a:tc>
+                <a:tc>
+                  <a:txBody>
+                    <a:bodyPr/>
+                    <a:lstStyle/>
+                    <a:p>
+                      <a:pPr algn="ctr">
+                        <a:defRPr sz="800">
+                          <a:solidFill>
+                            <a:srgbClr val="F0F2F5"/>
+                          </a:solidFill>
+                        </a:defRPr>
+                      </a:pPr>
+                      <a:r>
+                        <a:t>202607</a:t>
+                      </a:r>
+                    </a:p>
+                  </a:txBody>
+                  <a:tcPr anchor="ctr">
+                    <a:solidFill>
+                      <a:srgbClr val="141820"/>
+                    </a:solidFill>
+                  </a:tcPr>
+                </a:tc>
+                <a:tc>
+                  <a:txBody>
+                    <a:bodyPr/>
+                    <a:lstStyle/>
+                    <a:p>
+                      <a:pPr algn="ctr">
+                        <a:defRPr sz="800">
+                          <a:solidFill>
+                            <a:srgbClr val="F0F2F5"/>
+                          </a:solidFill>
+                        </a:defRPr>
+                      </a:pPr>
+                      <a:r>
+                        <a:t>19.82</a:t>
+                      </a:r>
+                    </a:p>
+                  </a:txBody>
+                  <a:tcPr anchor="ctr">
+                    <a:solidFill>
+                      <a:srgbClr val="141820"/>
+                    </a:solidFill>
+                  </a:tcPr>
+                </a:tc>
+                <a:tc>
+                  <a:txBody>
+                    <a:bodyPr/>
+                    <a:lstStyle/>
+                    <a:p>
+                      <a:pPr algn="ctr">
+                        <a:defRPr sz="800">
+                          <a:solidFill>
+                            <a:srgbClr val="F0F2F5"/>
+                          </a:solidFill>
+                        </a:defRPr>
+                      </a:pPr>
+                      <a:r>
+                        <a:t>21.69</a:t>
+                      </a:r>
+                    </a:p>
+                  </a:txBody>
+                  <a:tcPr anchor="ctr">
+                    <a:solidFill>
+                      <a:srgbClr val="141820"/>
+                    </a:solidFill>
+                  </a:tcPr>
+                </a:tc>
+                <a:tc>
+                  <a:txBody>
+                    <a:bodyPr/>
+                    <a:lstStyle/>
+                    <a:p>
+                      <a:pPr algn="ctr">
+                        <a:defRPr sz="800">
+                          <a:solidFill>
+                            <a:srgbClr val="EF4444"/>
+                          </a:solidFill>
+                        </a:defRPr>
+                      </a:pPr>
+                      <a:r>
+                        <a:t>-1.87</a:t>
+                      </a:r>
+                    </a:p>
+                  </a:txBody>
+                  <a:tcPr anchor="ctr">
+                    <a:solidFill>
+                      <a:srgbClr val="141820"/>
+                    </a:solidFill>
+                  </a:tcPr>
+                </a:tc>
+                <a:tc>
+                  <a:txBody>
+                    <a:bodyPr/>
+                    <a:lstStyle/>
+                    <a:p>
+                      <a:pPr algn="ctr">
+                        <a:defRPr sz="800">
+                          <a:solidFill>
+                            <a:srgbClr val="EF4444"/>
+                          </a:solidFill>
+                        </a:defRPr>
+                      </a:pPr>
+                      <a:r>
+                        <a:t>-8.62%</a:t>
                       </a:r>
                     </a:p>
                   </a:txBody>
@@ -7848,7 +7848,7 @@
                         </a:defRPr>
                       </a:pPr>
                       <a:r>
-                        <a:t>FUT_EEP_260929</a:t>
+                        <a:t>FUT_EWB_270129</a:t>
                       </a:r>
                     </a:p>
                   </a:txBody>
@@ -7871,7 +7871,7 @@
                         </a:defRPr>
                       </a:pPr>
                       <a:r>
-                        <a:t>Power East Peak (Monthly)</a:t>
+                        <a:t>Power West Base (Monthly)</a:t>
                       </a:r>
                     </a:p>
                   </a:txBody>
@@ -7894,7 +7894,7 @@
                         </a:defRPr>
                       </a:pPr>
                       <a:r>
-                        <a:t>202609</a:t>
+                        <a:t>202701</a:t>
                       </a:r>
                     </a:p>
                   </a:txBody>
@@ -7917,7 +7917,7 @@
                         </a:defRPr>
                       </a:pPr>
                       <a:r>
-                        <a:t>28.97</a:t>
+                        <a:t>18.89</a:t>
                       </a:r>
                     </a:p>
                   </a:txBody>
@@ -7940,7 +7940,7 @@
                         </a:defRPr>
                       </a:pPr>
                       <a:r>
-                        <a:t>24.30</a:t>
+                        <a:t>20.76</a:t>
                       </a:r>
                     </a:p>
                   </a:txBody>
@@ -7958,12 +7958,12 @@
                       <a:pPr algn="ctr">
                         <a:defRPr sz="800">
                           <a:solidFill>
-                            <a:srgbClr val="10B981"/>
-                          </a:solidFill>
-                        </a:defRPr>
-                      </a:pPr>
-                      <a:r>
-                        <a:t>+4.67</a:t>
+                            <a:srgbClr val="EF4444"/>
+                          </a:solidFill>
+                        </a:defRPr>
+                      </a:pPr>
+                      <a:r>
+                        <a:t>-1.87</a:t>
                       </a:r>
                     </a:p>
                   </a:txBody>
@@ -7981,12 +7981,12 @@
                       <a:pPr algn="ctr">
                         <a:defRPr sz="800">
                           <a:solidFill>
-                            <a:srgbClr val="10B981"/>
-                          </a:solidFill>
-                        </a:defRPr>
-                      </a:pPr>
-                      <a:r>
-                        <a:t>+19.22%</a:t>
+                            <a:srgbClr val="EF4444"/>
+                          </a:solidFill>
+                        </a:defRPr>
+                      </a:pPr>
+                      <a:r>
+                        <a:t>-9.01%</a:t>
                       </a:r>
                     </a:p>
                   </a:txBody>
@@ -8011,145 +8011,145 @@
                         </a:defRPr>
                       </a:pPr>
                       <a:r>
-                        <a:t>FUT_EEP_260730</a:t>
-                      </a:r>
-                    </a:p>
-                  </a:txBody>
-                  <a:tcPr anchor="ctr">
-                    <a:solidFill>
-                      <a:srgbClr val="141820"/>
-                    </a:solidFill>
-                  </a:tcPr>
-                </a:tc>
-                <a:tc>
-                  <a:txBody>
-                    <a:bodyPr/>
-                    <a:lstStyle/>
-                    <a:p>
-                      <a:pPr algn="ctr">
-                        <a:defRPr sz="800">
-                          <a:solidFill>
-                            <a:srgbClr val="F0F2F5"/>
-                          </a:solidFill>
-                        </a:defRPr>
-                      </a:pPr>
-                      <a:r>
-                        <a:t>Power East Peak (Monthly)</a:t>
-                      </a:r>
-                    </a:p>
-                  </a:txBody>
-                  <a:tcPr anchor="ctr">
-                    <a:solidFill>
-                      <a:srgbClr val="141820"/>
-                    </a:solidFill>
-                  </a:tcPr>
-                </a:tc>
-                <a:tc>
-                  <a:txBody>
-                    <a:bodyPr/>
-                    <a:lstStyle/>
-                    <a:p>
-                      <a:pPr algn="ctr">
-                        <a:defRPr sz="800">
-                          <a:solidFill>
-                            <a:srgbClr val="F0F2F5"/>
-                          </a:solidFill>
-                        </a:defRPr>
-                      </a:pPr>
-                      <a:r>
-                        <a:t>202607</a:t>
-                      </a:r>
-                    </a:p>
-                  </a:txBody>
-                  <a:tcPr anchor="ctr">
-                    <a:solidFill>
-                      <a:srgbClr val="141820"/>
-                    </a:solidFill>
-                  </a:tcPr>
-                </a:tc>
-                <a:tc>
-                  <a:txBody>
-                    <a:bodyPr/>
-                    <a:lstStyle/>
-                    <a:p>
-                      <a:pPr algn="ctr">
-                        <a:defRPr sz="800">
-                          <a:solidFill>
-                            <a:srgbClr val="F0F2F5"/>
-                          </a:solidFill>
-                        </a:defRPr>
-                      </a:pPr>
-                      <a:r>
-                        <a:t>29.40</a:t>
-                      </a:r>
-                    </a:p>
-                  </a:txBody>
-                  <a:tcPr anchor="ctr">
-                    <a:solidFill>
-                      <a:srgbClr val="141820"/>
-                    </a:solidFill>
-                  </a:tcPr>
-                </a:tc>
-                <a:tc>
-                  <a:txBody>
-                    <a:bodyPr/>
-                    <a:lstStyle/>
-                    <a:p>
-                      <a:pPr algn="ctr">
-                        <a:defRPr sz="800">
-                          <a:solidFill>
-                            <a:srgbClr val="F0F2F5"/>
-                          </a:solidFill>
-                        </a:defRPr>
-                      </a:pPr>
-                      <a:r>
-                        <a:t>24.78</a:t>
-                      </a:r>
-                    </a:p>
-                  </a:txBody>
-                  <a:tcPr anchor="ctr">
-                    <a:solidFill>
-                      <a:srgbClr val="141820"/>
-                    </a:solidFill>
-                  </a:tcPr>
-                </a:tc>
-                <a:tc>
-                  <a:txBody>
-                    <a:bodyPr/>
-                    <a:lstStyle/>
-                    <a:p>
-                      <a:pPr algn="ctr">
-                        <a:defRPr sz="800">
-                          <a:solidFill>
-                            <a:srgbClr val="10B981"/>
-                          </a:solidFill>
-                        </a:defRPr>
-                      </a:pPr>
-                      <a:r>
-                        <a:t>+4.62</a:t>
-                      </a:r>
-                    </a:p>
-                  </a:txBody>
-                  <a:tcPr anchor="ctr">
-                    <a:solidFill>
-                      <a:srgbClr val="141820"/>
-                    </a:solidFill>
-                  </a:tcPr>
-                </a:tc>
-                <a:tc>
-                  <a:txBody>
-                    <a:bodyPr/>
-                    <a:lstStyle/>
-                    <a:p>
-                      <a:pPr algn="ctr">
-                        <a:defRPr sz="800">
-                          <a:solidFill>
-                            <a:srgbClr val="10B981"/>
-                          </a:solidFill>
-                        </a:defRPr>
-                      </a:pPr>
-                      <a:r>
-                        <a:t>+18.64%</a:t>
+                        <a:t>FUT_EWB_270226</a:t>
+                      </a:r>
+                    </a:p>
+                  </a:txBody>
+                  <a:tcPr anchor="ctr">
+                    <a:solidFill>
+                      <a:srgbClr val="141820"/>
+                    </a:solidFill>
+                  </a:tcPr>
+                </a:tc>
+                <a:tc>
+                  <a:txBody>
+                    <a:bodyPr/>
+                    <a:lstStyle/>
+                    <a:p>
+                      <a:pPr algn="ctr">
+                        <a:defRPr sz="800">
+                          <a:solidFill>
+                            <a:srgbClr val="F0F2F5"/>
+                          </a:solidFill>
+                        </a:defRPr>
+                      </a:pPr>
+                      <a:r>
+                        <a:t>Power West Base (Monthly)</a:t>
+                      </a:r>
+                    </a:p>
+                  </a:txBody>
+                  <a:tcPr anchor="ctr">
+                    <a:solidFill>
+                      <a:srgbClr val="141820"/>
+                    </a:solidFill>
+                  </a:tcPr>
+                </a:tc>
+                <a:tc>
+                  <a:txBody>
+                    <a:bodyPr/>
+                    <a:lstStyle/>
+                    <a:p>
+                      <a:pPr algn="ctr">
+                        <a:defRPr sz="800">
+                          <a:solidFill>
+                            <a:srgbClr val="F0F2F5"/>
+                          </a:solidFill>
+                        </a:defRPr>
+                      </a:pPr>
+                      <a:r>
+                        <a:t>202702</a:t>
+                      </a:r>
+                    </a:p>
+                  </a:txBody>
+                  <a:tcPr anchor="ctr">
+                    <a:solidFill>
+                      <a:srgbClr val="141820"/>
+                    </a:solidFill>
+                  </a:tcPr>
+                </a:tc>
+                <a:tc>
+                  <a:txBody>
+                    <a:bodyPr/>
+                    <a:lstStyle/>
+                    <a:p>
+                      <a:pPr algn="ctr">
+                        <a:defRPr sz="800">
+                          <a:solidFill>
+                            <a:srgbClr val="F0F2F5"/>
+                          </a:solidFill>
+                        </a:defRPr>
+                      </a:pPr>
+                      <a:r>
+                        <a:t>18.92</a:t>
+                      </a:r>
+                    </a:p>
+                  </a:txBody>
+                  <a:tcPr anchor="ctr">
+                    <a:solidFill>
+                      <a:srgbClr val="141820"/>
+                    </a:solidFill>
+                  </a:tcPr>
+                </a:tc>
+                <a:tc>
+                  <a:txBody>
+                    <a:bodyPr/>
+                    <a:lstStyle/>
+                    <a:p>
+                      <a:pPr algn="ctr">
+                        <a:defRPr sz="800">
+                          <a:solidFill>
+                            <a:srgbClr val="F0F2F5"/>
+                          </a:solidFill>
+                        </a:defRPr>
+                      </a:pPr>
+                      <a:r>
+                        <a:t>20.77</a:t>
+                      </a:r>
+                    </a:p>
+                  </a:txBody>
+                  <a:tcPr anchor="ctr">
+                    <a:solidFill>
+                      <a:srgbClr val="141820"/>
+                    </a:solidFill>
+                  </a:tcPr>
+                </a:tc>
+                <a:tc>
+                  <a:txBody>
+                    <a:bodyPr/>
+                    <a:lstStyle/>
+                    <a:p>
+                      <a:pPr algn="ctr">
+                        <a:defRPr sz="800">
+                          <a:solidFill>
+                            <a:srgbClr val="EF4444"/>
+                          </a:solidFill>
+                        </a:defRPr>
+                      </a:pPr>
+                      <a:r>
+                        <a:t>-1.85</a:t>
+                      </a:r>
+                    </a:p>
+                  </a:txBody>
+                  <a:tcPr anchor="ctr">
+                    <a:solidFill>
+                      <a:srgbClr val="141820"/>
+                    </a:solidFill>
+                  </a:tcPr>
+                </a:tc>
+                <a:tc>
+                  <a:txBody>
+                    <a:bodyPr/>
+                    <a:lstStyle/>
+                    <a:p>
+                      <a:pPr algn="ctr">
+                        <a:defRPr sz="800">
+                          <a:solidFill>
+                            <a:srgbClr val="EF4444"/>
+                          </a:solidFill>
+                        </a:defRPr>
+                      </a:pPr>
+                      <a:r>
+                        <a:t>-8.91%</a:t>
                       </a:r>
                     </a:p>
                   </a:txBody>
@@ -8174,7 +8174,7 @@
                         </a:defRPr>
                       </a:pPr>
                       <a:r>
-                        <a:t>FUT_EWB_260730</a:t>
+                        <a:t>FUT_EWB_260828</a:t>
                       </a:r>
                     </a:p>
                   </a:txBody>
@@ -8220,7 +8220,7 @@
                         </a:defRPr>
                       </a:pPr>
                       <a:r>
-                        <a:t>202607</a:t>
+                        <a:t>202608</a:t>
                       </a:r>
                     </a:p>
                   </a:txBody>
@@ -8243,7 +8243,7 @@
                         </a:defRPr>
                       </a:pPr>
                       <a:r>
-                        <a:t>21.69</a:t>
+                        <a:t>20.20</a:t>
                       </a:r>
                     </a:p>
                   </a:txBody>
@@ -8266,7 +8266,7 @@
                         </a:defRPr>
                       </a:pPr>
                       <a:r>
-                        <a:t>17.56</a:t>
+                        <a:t>21.91</a:t>
                       </a:r>
                     </a:p>
                   </a:txBody>
@@ -8284,12 +8284,12 @@
                       <a:pPr algn="ctr">
                         <a:defRPr sz="800">
                           <a:solidFill>
-                            <a:srgbClr val="10B981"/>
-                          </a:solidFill>
-                        </a:defRPr>
-                      </a:pPr>
-                      <a:r>
-                        <a:t>+4.13</a:t>
+                            <a:srgbClr val="EF4444"/>
+                          </a:solidFill>
+                        </a:defRPr>
+                      </a:pPr>
+                      <a:r>
+                        <a:t>-1.71</a:t>
                       </a:r>
                     </a:p>
                   </a:txBody>
@@ -8307,12 +8307,12 @@
                       <a:pPr algn="ctr">
                         <a:defRPr sz="800">
                           <a:solidFill>
-                            <a:srgbClr val="10B981"/>
-                          </a:solidFill>
-                        </a:defRPr>
-                      </a:pPr>
-                      <a:r>
-                        <a:t>+23.52%</a:t>
+                            <a:srgbClr val="EF4444"/>
+                          </a:solidFill>
+                        </a:defRPr>
+                      </a:pPr>
+                      <a:r>
+                        <a:t>-7.80%</a:t>
                       </a:r>
                     </a:p>
                   </a:txBody>
@@ -8337,145 +8337,145 @@
                         </a:defRPr>
                       </a:pPr>
                       <a:r>
-                        <a:t>FUT_EWB_260828</a:t>
-                      </a:r>
-                    </a:p>
-                  </a:txBody>
-                  <a:tcPr anchor="ctr">
-                    <a:solidFill>
-                      <a:srgbClr val="141820"/>
-                    </a:solidFill>
-                  </a:tcPr>
-                </a:tc>
-                <a:tc>
-                  <a:txBody>
-                    <a:bodyPr/>
-                    <a:lstStyle/>
-                    <a:p>
-                      <a:pPr algn="ctr">
-                        <a:defRPr sz="800">
-                          <a:solidFill>
-                            <a:srgbClr val="F0F2F5"/>
-                          </a:solidFill>
-                        </a:defRPr>
-                      </a:pPr>
-                      <a:r>
-                        <a:t>Power West Base (Monthly)</a:t>
-                      </a:r>
-                    </a:p>
-                  </a:txBody>
-                  <a:tcPr anchor="ctr">
-                    <a:solidFill>
-                      <a:srgbClr val="141820"/>
-                    </a:solidFill>
-                  </a:tcPr>
-                </a:tc>
-                <a:tc>
-                  <a:txBody>
-                    <a:bodyPr/>
-                    <a:lstStyle/>
-                    <a:p>
-                      <a:pPr algn="ctr">
-                        <a:defRPr sz="800">
-                          <a:solidFill>
-                            <a:srgbClr val="F0F2F5"/>
-                          </a:solidFill>
-                        </a:defRPr>
-                      </a:pPr>
-                      <a:r>
-                        <a:t>202608</a:t>
-                      </a:r>
-                    </a:p>
-                  </a:txBody>
-                  <a:tcPr anchor="ctr">
-                    <a:solidFill>
-                      <a:srgbClr val="141820"/>
-                    </a:solidFill>
-                  </a:tcPr>
-                </a:tc>
-                <a:tc>
-                  <a:txBody>
-                    <a:bodyPr/>
-                    <a:lstStyle/>
-                    <a:p>
-                      <a:pPr algn="ctr">
-                        <a:defRPr sz="800">
-                          <a:solidFill>
-                            <a:srgbClr val="F0F2F5"/>
-                          </a:solidFill>
-                        </a:defRPr>
-                      </a:pPr>
-                      <a:r>
-                        <a:t>21.91</a:t>
-                      </a:r>
-                    </a:p>
-                  </a:txBody>
-                  <a:tcPr anchor="ctr">
-                    <a:solidFill>
-                      <a:srgbClr val="141820"/>
-                    </a:solidFill>
-                  </a:tcPr>
-                </a:tc>
-                <a:tc>
-                  <a:txBody>
-                    <a:bodyPr/>
-                    <a:lstStyle/>
-                    <a:p>
-                      <a:pPr algn="ctr">
-                        <a:defRPr sz="800">
-                          <a:solidFill>
-                            <a:srgbClr val="F0F2F5"/>
-                          </a:solidFill>
-                        </a:defRPr>
-                      </a:pPr>
-                      <a:r>
-                        <a:t>17.88</a:t>
-                      </a:r>
-                    </a:p>
-                  </a:txBody>
-                  <a:tcPr anchor="ctr">
-                    <a:solidFill>
-                      <a:srgbClr val="141820"/>
-                    </a:solidFill>
-                  </a:tcPr>
-                </a:tc>
-                <a:tc>
-                  <a:txBody>
-                    <a:bodyPr/>
-                    <a:lstStyle/>
-                    <a:p>
-                      <a:pPr algn="ctr">
-                        <a:defRPr sz="800">
-                          <a:solidFill>
-                            <a:srgbClr val="10B981"/>
-                          </a:solidFill>
-                        </a:defRPr>
-                      </a:pPr>
-                      <a:r>
-                        <a:t>+4.03</a:t>
-                      </a:r>
-                    </a:p>
-                  </a:txBody>
-                  <a:tcPr anchor="ctr">
-                    <a:solidFill>
-                      <a:srgbClr val="141820"/>
-                    </a:solidFill>
-                  </a:tcPr>
-                </a:tc>
-                <a:tc>
-                  <a:txBody>
-                    <a:bodyPr/>
-                    <a:lstStyle/>
-                    <a:p>
-                      <a:pPr algn="ctr">
-                        <a:defRPr sz="800">
-                          <a:solidFill>
-                            <a:srgbClr val="10B981"/>
-                          </a:solidFill>
-                        </a:defRPr>
-                      </a:pPr>
-                      <a:r>
-                        <a:t>+22.54%</a:t>
+                        <a:t>FUT_EEB_260428</a:t>
+                      </a:r>
+                    </a:p>
+                  </a:txBody>
+                  <a:tcPr anchor="ctr">
+                    <a:solidFill>
+                      <a:srgbClr val="141820"/>
+                    </a:solidFill>
+                  </a:tcPr>
+                </a:tc>
+                <a:tc>
+                  <a:txBody>
+                    <a:bodyPr/>
+                    <a:lstStyle/>
+                    <a:p>
+                      <a:pPr algn="ctr">
+                        <a:defRPr sz="800">
+                          <a:solidFill>
+                            <a:srgbClr val="F0F2F5"/>
+                          </a:solidFill>
+                        </a:defRPr>
+                      </a:pPr>
+                      <a:r>
+                        <a:t>Power East Base (Monthly)</a:t>
+                      </a:r>
+                    </a:p>
+                  </a:txBody>
+                  <a:tcPr anchor="ctr">
+                    <a:solidFill>
+                      <a:srgbClr val="141820"/>
+                    </a:solidFill>
+                  </a:tcPr>
+                </a:tc>
+                <a:tc>
+                  <a:txBody>
+                    <a:bodyPr/>
+                    <a:lstStyle/>
+                    <a:p>
+                      <a:pPr algn="ctr">
+                        <a:defRPr sz="800">
+                          <a:solidFill>
+                            <a:srgbClr val="F0F2F5"/>
+                          </a:solidFill>
+                        </a:defRPr>
+                      </a:pPr>
+                      <a:r>
+                        <a:t>202604</a:t>
+                      </a:r>
+                    </a:p>
+                  </a:txBody>
+                  <a:tcPr anchor="ctr">
+                    <a:solidFill>
+                      <a:srgbClr val="141820"/>
+                    </a:solidFill>
+                  </a:tcPr>
+                </a:tc>
+                <a:tc>
+                  <a:txBody>
+                    <a:bodyPr/>
+                    <a:lstStyle/>
+                    <a:p>
+                      <a:pPr algn="ctr">
+                        <a:defRPr sz="800">
+                          <a:solidFill>
+                            <a:srgbClr val="F0F2F5"/>
+                          </a:solidFill>
+                        </a:defRPr>
+                      </a:pPr>
+                      <a:r>
+                        <a:t>20.66</a:t>
+                      </a:r>
+                    </a:p>
+                  </a:txBody>
+                  <a:tcPr anchor="ctr">
+                    <a:solidFill>
+                      <a:srgbClr val="141820"/>
+                    </a:solidFill>
+                  </a:tcPr>
+                </a:tc>
+                <a:tc>
+                  <a:txBody>
+                    <a:bodyPr/>
+                    <a:lstStyle/>
+                    <a:p>
+                      <a:pPr algn="ctr">
+                        <a:defRPr sz="800">
+                          <a:solidFill>
+                            <a:srgbClr val="F0F2F5"/>
+                          </a:solidFill>
+                        </a:defRPr>
+                      </a:pPr>
+                      <a:r>
+                        <a:t>22.35</a:t>
+                      </a:r>
+                    </a:p>
+                  </a:txBody>
+                  <a:tcPr anchor="ctr">
+                    <a:solidFill>
+                      <a:srgbClr val="141820"/>
+                    </a:solidFill>
+                  </a:tcPr>
+                </a:tc>
+                <a:tc>
+                  <a:txBody>
+                    <a:bodyPr/>
+                    <a:lstStyle/>
+                    <a:p>
+                      <a:pPr algn="ctr">
+                        <a:defRPr sz="800">
+                          <a:solidFill>
+                            <a:srgbClr val="EF4444"/>
+                          </a:solidFill>
+                        </a:defRPr>
+                      </a:pPr>
+                      <a:r>
+                        <a:t>-1.69</a:t>
+                      </a:r>
+                    </a:p>
+                  </a:txBody>
+                  <a:tcPr anchor="ctr">
+                    <a:solidFill>
+                      <a:srgbClr val="141820"/>
+                    </a:solidFill>
+                  </a:tcPr>
+                </a:tc>
+                <a:tc>
+                  <a:txBody>
+                    <a:bodyPr/>
+                    <a:lstStyle/>
+                    <a:p>
+                      <a:pPr algn="ctr">
+                        <a:defRPr sz="800">
+                          <a:solidFill>
+                            <a:srgbClr val="EF4444"/>
+                          </a:solidFill>
+                        </a:defRPr>
+                      </a:pPr>
+                      <a:r>
+                        <a:t>-7.56%</a:t>
                       </a:r>
                     </a:p>
                   </a:txBody>
@@ -8500,7 +8500,7 @@
                         </a:defRPr>
                       </a:pPr>
                       <a:r>
-                        <a:t>FUT_EWB_260929</a:t>
+                        <a:t>FUT_EEP_260428</a:t>
                       </a:r>
                     </a:p>
                   </a:txBody>
@@ -8523,7 +8523,7 @@
                         </a:defRPr>
                       </a:pPr>
                       <a:r>
-                        <a:t>Power West Base (Monthly)</a:t>
+                        <a:t>Power East Peak (Monthly)</a:t>
                       </a:r>
                     </a:p>
                   </a:txBody>
@@ -8546,7 +8546,7 @@
                         </a:defRPr>
                       </a:pPr>
                       <a:r>
-                        <a:t>202609</a:t>
+                        <a:t>202604</a:t>
                       </a:r>
                     </a:p>
                   </a:txBody>
@@ -8569,7 +8569,7 @@
                         </a:defRPr>
                       </a:pPr>
                       <a:r>
-                        <a:t>21.65</a:t>
+                        <a:t>22.47</a:t>
                       </a:r>
                     </a:p>
                   </a:txBody>
@@ -8592,7 +8592,7 @@
                         </a:defRPr>
                       </a:pPr>
                       <a:r>
-                        <a:t>17.65</a:t>
+                        <a:t>24.14</a:t>
                       </a:r>
                     </a:p>
                   </a:txBody>
@@ -8610,12 +8610,12 @@
                       <a:pPr algn="ctr">
                         <a:defRPr sz="800">
                           <a:solidFill>
-                            <a:srgbClr val="10B981"/>
-                          </a:solidFill>
-                        </a:defRPr>
-                      </a:pPr>
-                      <a:r>
-                        <a:t>+4.00</a:t>
+                            <a:srgbClr val="EF4444"/>
+                          </a:solidFill>
+                        </a:defRPr>
+                      </a:pPr>
+                      <a:r>
+                        <a:t>-1.67</a:t>
                       </a:r>
                     </a:p>
                   </a:txBody>
@@ -8633,12 +8633,12 @@
                       <a:pPr algn="ctr">
                         <a:defRPr sz="800">
                           <a:solidFill>
-                            <a:srgbClr val="10B981"/>
-                          </a:solidFill>
-                        </a:defRPr>
-                      </a:pPr>
-                      <a:r>
-                        <a:t>+22.66%</a:t>
+                            <a:srgbClr val="EF4444"/>
+                          </a:solidFill>
+                        </a:defRPr>
+                      </a:pPr>
+                      <a:r>
+                        <a:t>-6.92%</a:t>
                       </a:r>
                     </a:p>
                   </a:txBody>
@@ -8663,7 +8663,7 @@
                         </a:defRPr>
                       </a:pPr>
                       <a:r>
-                        <a:t>FUT_EWB_261230</a:t>
+                        <a:t>FUT_EWB_260929</a:t>
                       </a:r>
                     </a:p>
                   </a:txBody>
@@ -8709,99 +8709,99 @@
                         </a:defRPr>
                       </a:pPr>
                       <a:r>
-                        <a:t>202612</a:t>
-                      </a:r>
-                    </a:p>
-                  </a:txBody>
-                  <a:tcPr anchor="ctr">
-                    <a:solidFill>
-                      <a:srgbClr val="141820"/>
-                    </a:solidFill>
-                  </a:tcPr>
-                </a:tc>
-                <a:tc>
-                  <a:txBody>
-                    <a:bodyPr/>
-                    <a:lstStyle/>
-                    <a:p>
-                      <a:pPr algn="ctr">
-                        <a:defRPr sz="800">
-                          <a:solidFill>
-                            <a:srgbClr val="F0F2F5"/>
-                          </a:solidFill>
-                        </a:defRPr>
-                      </a:pPr>
-                      <a:r>
-                        <a:t>20.15</a:t>
-                      </a:r>
-                    </a:p>
-                  </a:txBody>
-                  <a:tcPr anchor="ctr">
-                    <a:solidFill>
-                      <a:srgbClr val="141820"/>
-                    </a:solidFill>
-                  </a:tcPr>
-                </a:tc>
-                <a:tc>
-                  <a:txBody>
-                    <a:bodyPr/>
-                    <a:lstStyle/>
-                    <a:p>
-                      <a:pPr algn="ctr">
-                        <a:defRPr sz="800">
-                          <a:solidFill>
-                            <a:srgbClr val="F0F2F5"/>
-                          </a:solidFill>
-                        </a:defRPr>
-                      </a:pPr>
-                      <a:r>
-                        <a:t>16.39</a:t>
-                      </a:r>
-                    </a:p>
-                  </a:txBody>
-                  <a:tcPr anchor="ctr">
-                    <a:solidFill>
-                      <a:srgbClr val="141820"/>
-                    </a:solidFill>
-                  </a:tcPr>
-                </a:tc>
-                <a:tc>
-                  <a:txBody>
-                    <a:bodyPr/>
-                    <a:lstStyle/>
-                    <a:p>
-                      <a:pPr algn="ctr">
-                        <a:defRPr sz="800">
-                          <a:solidFill>
-                            <a:srgbClr val="10B981"/>
-                          </a:solidFill>
-                        </a:defRPr>
-                      </a:pPr>
-                      <a:r>
-                        <a:t>+3.76</a:t>
-                      </a:r>
-                    </a:p>
-                  </a:txBody>
-                  <a:tcPr anchor="ctr">
-                    <a:solidFill>
-                      <a:srgbClr val="141820"/>
-                    </a:solidFill>
-                  </a:tcPr>
-                </a:tc>
-                <a:tc>
-                  <a:txBody>
-                    <a:bodyPr/>
-                    <a:lstStyle/>
-                    <a:p>
-                      <a:pPr algn="ctr">
-                        <a:defRPr sz="800">
-                          <a:solidFill>
-                            <a:srgbClr val="10B981"/>
-                          </a:solidFill>
-                        </a:defRPr>
-                      </a:pPr>
-                      <a:r>
-                        <a:t>+22.94%</a:t>
+                        <a:t>202609</a:t>
+                      </a:r>
+                    </a:p>
+                  </a:txBody>
+                  <a:tcPr anchor="ctr">
+                    <a:solidFill>
+                      <a:srgbClr val="141820"/>
+                    </a:solidFill>
+                  </a:tcPr>
+                </a:tc>
+                <a:tc>
+                  <a:txBody>
+                    <a:bodyPr/>
+                    <a:lstStyle/>
+                    <a:p>
+                      <a:pPr algn="ctr">
+                        <a:defRPr sz="800">
+                          <a:solidFill>
+                            <a:srgbClr val="F0F2F5"/>
+                          </a:solidFill>
+                        </a:defRPr>
+                      </a:pPr>
+                      <a:r>
+                        <a:t>19.98</a:t>
+                      </a:r>
+                    </a:p>
+                  </a:txBody>
+                  <a:tcPr anchor="ctr">
+                    <a:solidFill>
+                      <a:srgbClr val="141820"/>
+                    </a:solidFill>
+                  </a:tcPr>
+                </a:tc>
+                <a:tc>
+                  <a:txBody>
+                    <a:bodyPr/>
+                    <a:lstStyle/>
+                    <a:p>
+                      <a:pPr algn="ctr">
+                        <a:defRPr sz="800">
+                          <a:solidFill>
+                            <a:srgbClr val="F0F2F5"/>
+                          </a:solidFill>
+                        </a:defRPr>
+                      </a:pPr>
+                      <a:r>
+                        <a:t>21.65</a:t>
+                      </a:r>
+                    </a:p>
+                  </a:txBody>
+                  <a:tcPr anchor="ctr">
+                    <a:solidFill>
+                      <a:srgbClr val="141820"/>
+                    </a:solidFill>
+                  </a:tcPr>
+                </a:tc>
+                <a:tc>
+                  <a:txBody>
+                    <a:bodyPr/>
+                    <a:lstStyle/>
+                    <a:p>
+                      <a:pPr algn="ctr">
+                        <a:defRPr sz="800">
+                          <a:solidFill>
+                            <a:srgbClr val="EF4444"/>
+                          </a:solidFill>
+                        </a:defRPr>
+                      </a:pPr>
+                      <a:r>
+                        <a:t>-1.67</a:t>
+                      </a:r>
+                    </a:p>
+                  </a:txBody>
+                  <a:tcPr anchor="ctr">
+                    <a:solidFill>
+                      <a:srgbClr val="141820"/>
+                    </a:solidFill>
+                  </a:tcPr>
+                </a:tc>
+                <a:tc>
+                  <a:txBody>
+                    <a:bodyPr/>
+                    <a:lstStyle/>
+                    <a:p>
+                      <a:pPr algn="ctr">
+                        <a:defRPr sz="800">
+                          <a:solidFill>
+                            <a:srgbClr val="EF4444"/>
+                          </a:solidFill>
+                        </a:defRPr>
+                      </a:pPr>
+                      <a:r>
+                        <a:t>-7.71%</a:t>
                       </a:r>
                     </a:p>
                   </a:txBody>
@@ -8826,7 +8826,7 @@
                         </a:defRPr>
                       </a:pPr>
                       <a:r>
-                        <a:t>FUT_EWB_270129</a:t>
+                        <a:t>FUT_EEP_260528</a:t>
                       </a:r>
                     </a:p>
                   </a:txBody>
@@ -8849,7 +8849,7 @@
                         </a:defRPr>
                       </a:pPr>
                       <a:r>
-                        <a:t>Power West Base (Monthly)</a:t>
+                        <a:t>Power East Peak (Monthly)</a:t>
                       </a:r>
                     </a:p>
                   </a:txBody>
@@ -8872,7 +8872,7 @@
                         </a:defRPr>
                       </a:pPr>
                       <a:r>
-                        <a:t>202701</a:t>
+                        <a:t>202605</a:t>
                       </a:r>
                     </a:p>
                   </a:txBody>
@@ -8895,7 +8895,7 @@
                         </a:defRPr>
                       </a:pPr>
                       <a:r>
-                        <a:t>20.76</a:t>
+                        <a:t>22.84</a:t>
                       </a:r>
                     </a:p>
                   </a:txBody>
@@ -8918,7 +8918,7 @@
                         </a:defRPr>
                       </a:pPr>
                       <a:r>
-                        <a:t>17.04</a:t>
+                        <a:t>24.48</a:t>
                       </a:r>
                     </a:p>
                   </a:txBody>
@@ -8936,12 +8936,12 @@
                       <a:pPr algn="ctr">
                         <a:defRPr sz="800">
                           <a:solidFill>
-                            <a:srgbClr val="10B981"/>
-                          </a:solidFill>
-                        </a:defRPr>
-                      </a:pPr>
-                      <a:r>
-                        <a:t>+3.72</a:t>
+                            <a:srgbClr val="EF4444"/>
+                          </a:solidFill>
+                        </a:defRPr>
+                      </a:pPr>
+                      <a:r>
+                        <a:t>-1.64</a:t>
                       </a:r>
                     </a:p>
                   </a:txBody>
@@ -8959,12 +8959,12 @@
                       <a:pPr algn="ctr">
                         <a:defRPr sz="800">
                           <a:solidFill>
-                            <a:srgbClr val="10B981"/>
-                          </a:solidFill>
-                        </a:defRPr>
-                      </a:pPr>
-                      <a:r>
-                        <a:t>+21.83%</a:t>
+                            <a:srgbClr val="EF4444"/>
+                          </a:solidFill>
+                        </a:defRPr>
+                      </a:pPr>
+                      <a:r>
+                        <a:t>-6.70%</a:t>
                       </a:r>
                     </a:p>
                   </a:txBody>
@@ -8989,145 +8989,145 @@
                         </a:defRPr>
                       </a:pPr>
                       <a:r>
-                        <a:t>FUT_EWB_270226</a:t>
-                      </a:r>
-                    </a:p>
-                  </a:txBody>
-                  <a:tcPr anchor="ctr">
-                    <a:solidFill>
-                      <a:srgbClr val="141820"/>
-                    </a:solidFill>
-                  </a:tcPr>
-                </a:tc>
-                <a:tc>
-                  <a:txBody>
-                    <a:bodyPr/>
-                    <a:lstStyle/>
-                    <a:p>
-                      <a:pPr algn="ctr">
-                        <a:defRPr sz="800">
-                          <a:solidFill>
-                            <a:srgbClr val="F0F2F5"/>
-                          </a:solidFill>
-                        </a:defRPr>
-                      </a:pPr>
-                      <a:r>
-                        <a:t>Power West Base (Monthly)</a:t>
-                      </a:r>
-                    </a:p>
-                  </a:txBody>
-                  <a:tcPr anchor="ctr">
-                    <a:solidFill>
-                      <a:srgbClr val="141820"/>
-                    </a:solidFill>
-                  </a:tcPr>
-                </a:tc>
-                <a:tc>
-                  <a:txBody>
-                    <a:bodyPr/>
-                    <a:lstStyle/>
-                    <a:p>
-                      <a:pPr algn="ctr">
-                        <a:defRPr sz="800">
-                          <a:solidFill>
-                            <a:srgbClr val="F0F2F5"/>
-                          </a:solidFill>
-                        </a:defRPr>
-                      </a:pPr>
-                      <a:r>
-                        <a:t>202702</a:t>
-                      </a:r>
-                    </a:p>
-                  </a:txBody>
-                  <a:tcPr anchor="ctr">
-                    <a:solidFill>
-                      <a:srgbClr val="141820"/>
-                    </a:solidFill>
-                  </a:tcPr>
-                </a:tc>
-                <a:tc>
-                  <a:txBody>
-                    <a:bodyPr/>
-                    <a:lstStyle/>
-                    <a:p>
-                      <a:pPr algn="ctr">
-                        <a:defRPr sz="800">
-                          <a:solidFill>
-                            <a:srgbClr val="F0F2F5"/>
-                          </a:solidFill>
-                        </a:defRPr>
-                      </a:pPr>
-                      <a:r>
-                        <a:t>20.77</a:t>
-                      </a:r>
-                    </a:p>
-                  </a:txBody>
-                  <a:tcPr anchor="ctr">
-                    <a:solidFill>
-                      <a:srgbClr val="141820"/>
-                    </a:solidFill>
-                  </a:tcPr>
-                </a:tc>
-                <a:tc>
-                  <a:txBody>
-                    <a:bodyPr/>
-                    <a:lstStyle/>
-                    <a:p>
-                      <a:pPr algn="ctr">
-                        <a:defRPr sz="800">
-                          <a:solidFill>
-                            <a:srgbClr val="F0F2F5"/>
-                          </a:solidFill>
-                        </a:defRPr>
-                      </a:pPr>
-                      <a:r>
-                        <a:t>17.11</a:t>
-                      </a:r>
-                    </a:p>
-                  </a:txBody>
-                  <a:tcPr anchor="ctr">
-                    <a:solidFill>
-                      <a:srgbClr val="141820"/>
-                    </a:solidFill>
-                  </a:tcPr>
-                </a:tc>
-                <a:tc>
-                  <a:txBody>
-                    <a:bodyPr/>
-                    <a:lstStyle/>
-                    <a:p>
-                      <a:pPr algn="ctr">
-                        <a:defRPr sz="800">
-                          <a:solidFill>
-                            <a:srgbClr val="10B981"/>
-                          </a:solidFill>
-                        </a:defRPr>
-                      </a:pPr>
-                      <a:r>
-                        <a:t>+3.66</a:t>
-                      </a:r>
-                    </a:p>
-                  </a:txBody>
-                  <a:tcPr anchor="ctr">
-                    <a:solidFill>
-                      <a:srgbClr val="141820"/>
-                    </a:solidFill>
-                  </a:tcPr>
-                </a:tc>
-                <a:tc>
-                  <a:txBody>
-                    <a:bodyPr/>
-                    <a:lstStyle/>
-                    <a:p>
-                      <a:pPr algn="ctr">
-                        <a:defRPr sz="800">
-                          <a:solidFill>
-                            <a:srgbClr val="10B981"/>
-                          </a:solidFill>
-                        </a:defRPr>
-                      </a:pPr>
-                      <a:r>
-                        <a:t>+21.39%</a:t>
+                        <a:t>FUT_EEB_260529</a:t>
+                      </a:r>
+                    </a:p>
+                  </a:txBody>
+                  <a:tcPr anchor="ctr">
+                    <a:solidFill>
+                      <a:srgbClr val="141820"/>
+                    </a:solidFill>
+                  </a:tcPr>
+                </a:tc>
+                <a:tc>
+                  <a:txBody>
+                    <a:bodyPr/>
+                    <a:lstStyle/>
+                    <a:p>
+                      <a:pPr algn="ctr">
+                        <a:defRPr sz="800">
+                          <a:solidFill>
+                            <a:srgbClr val="F0F2F5"/>
+                          </a:solidFill>
+                        </a:defRPr>
+                      </a:pPr>
+                      <a:r>
+                        <a:t>Power East Base (Monthly)</a:t>
+                      </a:r>
+                    </a:p>
+                  </a:txBody>
+                  <a:tcPr anchor="ctr">
+                    <a:solidFill>
+                      <a:srgbClr val="141820"/>
+                    </a:solidFill>
+                  </a:tcPr>
+                </a:tc>
+                <a:tc>
+                  <a:txBody>
+                    <a:bodyPr/>
+                    <a:lstStyle/>
+                    <a:p>
+                      <a:pPr algn="ctr">
+                        <a:defRPr sz="800">
+                          <a:solidFill>
+                            <a:srgbClr val="F0F2F5"/>
+                          </a:solidFill>
+                        </a:defRPr>
+                      </a:pPr>
+                      <a:r>
+                        <a:t>202605</a:t>
+                      </a:r>
+                    </a:p>
+                  </a:txBody>
+                  <a:tcPr anchor="ctr">
+                    <a:solidFill>
+                      <a:srgbClr val="141820"/>
+                    </a:solidFill>
+                  </a:tcPr>
+                </a:tc>
+                <a:tc>
+                  <a:txBody>
+                    <a:bodyPr/>
+                    <a:lstStyle/>
+                    <a:p>
+                      <a:pPr algn="ctr">
+                        <a:defRPr sz="800">
+                          <a:solidFill>
+                            <a:srgbClr val="F0F2F5"/>
+                          </a:solidFill>
+                        </a:defRPr>
+                      </a:pPr>
+                      <a:r>
+                        <a:t>20.51</a:t>
+                      </a:r>
+                    </a:p>
+                  </a:txBody>
+                  <a:tcPr anchor="ctr">
+                    <a:solidFill>
+                      <a:srgbClr val="141820"/>
+                    </a:solidFill>
+                  </a:tcPr>
+                </a:tc>
+                <a:tc>
+                  <a:txBody>
+                    <a:bodyPr/>
+                    <a:lstStyle/>
+                    <a:p>
+                      <a:pPr algn="ctr">
+                        <a:defRPr sz="800">
+                          <a:solidFill>
+                            <a:srgbClr val="F0F2F5"/>
+                          </a:solidFill>
+                        </a:defRPr>
+                      </a:pPr>
+                      <a:r>
+                        <a:t>22.14</a:t>
+                      </a:r>
+                    </a:p>
+                  </a:txBody>
+                  <a:tcPr anchor="ctr">
+                    <a:solidFill>
+                      <a:srgbClr val="141820"/>
+                    </a:solidFill>
+                  </a:tcPr>
+                </a:tc>
+                <a:tc>
+                  <a:txBody>
+                    <a:bodyPr/>
+                    <a:lstStyle/>
+                    <a:p>
+                      <a:pPr algn="ctr">
+                        <a:defRPr sz="800">
+                          <a:solidFill>
+                            <a:srgbClr val="EF4444"/>
+                          </a:solidFill>
+                        </a:defRPr>
+                      </a:pPr>
+                      <a:r>
+                        <a:t>-1.63</a:t>
+                      </a:r>
+                    </a:p>
+                  </a:txBody>
+                  <a:tcPr anchor="ctr">
+                    <a:solidFill>
+                      <a:srgbClr val="141820"/>
+                    </a:solidFill>
+                  </a:tcPr>
+                </a:tc>
+                <a:tc>
+                  <a:txBody>
+                    <a:bodyPr/>
+                    <a:lstStyle/>
+                    <a:p>
+                      <a:pPr algn="ctr">
+                        <a:defRPr sz="800">
+                          <a:solidFill>
+                            <a:srgbClr val="EF4444"/>
+                          </a:solidFill>
+                        </a:defRPr>
+                      </a:pPr>
+                      <a:r>
+                        <a:t>-7.36%</a:t>
                       </a:r>
                     </a:p>
                   </a:txBody>
@@ -9152,7 +9152,7 @@
                         </a:defRPr>
                       </a:pPr>
                       <a:r>
-                        <a:t>FUT_EEB_260428</a:t>
+                        <a:t>FUT_EWBW_260409</a:t>
                       </a:r>
                     </a:p>
                   </a:txBody>
@@ -9175,7 +9175,7 @@
                         </a:defRPr>
                       </a:pPr>
                       <a:r>
-                        <a:t>Power East Base (Monthly)</a:t>
+                        <a:t>Power West Base (Weekly)</a:t>
                       </a:r>
                     </a:p>
                   </a:txBody>
@@ -9198,7 +9198,7 @@
                         </a:defRPr>
                       </a:pPr>
                       <a:r>
-                        <a:t>202604</a:t>
+                        <a:t>20260410</a:t>
                       </a:r>
                     </a:p>
                   </a:txBody>
@@ -9221,7 +9221,7 @@
                         </a:defRPr>
                       </a:pPr>
                       <a:r>
-                        <a:t>22.35</a:t>
+                        <a:t>15.32</a:t>
                       </a:r>
                     </a:p>
                   </a:txBody>
@@ -9244,7 +9244,7 @@
                         </a:defRPr>
                       </a:pPr>
                       <a:r>
-                        <a:t>18.82</a:t>
+                        <a:t>16.90</a:t>
                       </a:r>
                     </a:p>
                   </a:txBody>
@@ -9262,12 +9262,12 @@
                       <a:pPr algn="ctr">
                         <a:defRPr sz="800">
                           <a:solidFill>
-                            <a:srgbClr val="10B981"/>
-                          </a:solidFill>
-                        </a:defRPr>
-                      </a:pPr>
-                      <a:r>
-                        <a:t>+3.53</a:t>
+                            <a:srgbClr val="EF4444"/>
+                          </a:solidFill>
+                        </a:defRPr>
+                      </a:pPr>
+                      <a:r>
+                        <a:t>-1.58</a:t>
                       </a:r>
                     </a:p>
                   </a:txBody>
@@ -9285,12 +9285,12 @@
                       <a:pPr algn="ctr">
                         <a:defRPr sz="800">
                           <a:solidFill>
-                            <a:srgbClr val="10B981"/>
-                          </a:solidFill>
-                        </a:defRPr>
-                      </a:pPr>
-                      <a:r>
-                        <a:t>+18.76%</a:t>
+                            <a:srgbClr val="EF4444"/>
+                          </a:solidFill>
+                        </a:defRPr>
+                      </a:pPr>
+                      <a:r>
+                        <a:t>-9.35%</a:t>
                       </a:r>
                     </a:p>
                   </a:txBody>
@@ -9315,145 +9315,145 @@
                         </a:defRPr>
                       </a:pPr>
                       <a:r>
-                        <a:t>FUT_EEB_260629</a:t>
-                      </a:r>
-                    </a:p>
-                  </a:txBody>
-                  <a:tcPr anchor="ctr">
-                    <a:solidFill>
-                      <a:srgbClr val="141820"/>
-                    </a:solidFill>
-                  </a:tcPr>
-                </a:tc>
-                <a:tc>
-                  <a:txBody>
-                    <a:bodyPr/>
-                    <a:lstStyle/>
-                    <a:p>
-                      <a:pPr algn="ctr">
-                        <a:defRPr sz="800">
-                          <a:solidFill>
-                            <a:srgbClr val="F0F2F5"/>
-                          </a:solidFill>
-                        </a:defRPr>
-                      </a:pPr>
-                      <a:r>
-                        <a:t>Power East Base (Monthly)</a:t>
-                      </a:r>
-                    </a:p>
-                  </a:txBody>
-                  <a:tcPr anchor="ctr">
-                    <a:solidFill>
-                      <a:srgbClr val="141820"/>
-                    </a:solidFill>
-                  </a:tcPr>
-                </a:tc>
-                <a:tc>
-                  <a:txBody>
-                    <a:bodyPr/>
-                    <a:lstStyle/>
-                    <a:p>
-                      <a:pPr algn="ctr">
-                        <a:defRPr sz="800">
-                          <a:solidFill>
-                            <a:srgbClr val="F0F2F5"/>
-                          </a:solidFill>
-                        </a:defRPr>
-                      </a:pPr>
-                      <a:r>
-                        <a:t>202606</a:t>
-                      </a:r>
-                    </a:p>
-                  </a:txBody>
-                  <a:tcPr anchor="ctr">
-                    <a:solidFill>
-                      <a:srgbClr val="141820"/>
-                    </a:solidFill>
-                  </a:tcPr>
-                </a:tc>
-                <a:tc>
-                  <a:txBody>
-                    <a:bodyPr/>
-                    <a:lstStyle/>
-                    <a:p>
-                      <a:pPr algn="ctr">
-                        <a:defRPr sz="800">
-                          <a:solidFill>
-                            <a:srgbClr val="F0F2F5"/>
-                          </a:solidFill>
-                        </a:defRPr>
-                      </a:pPr>
-                      <a:r>
-                        <a:t>23.42</a:t>
-                      </a:r>
-                    </a:p>
-                  </a:txBody>
-                  <a:tcPr anchor="ctr">
-                    <a:solidFill>
-                      <a:srgbClr val="141820"/>
-                    </a:solidFill>
-                  </a:tcPr>
-                </a:tc>
-                <a:tc>
-                  <a:txBody>
-                    <a:bodyPr/>
-                    <a:lstStyle/>
-                    <a:p>
-                      <a:pPr algn="ctr">
-                        <a:defRPr sz="800">
-                          <a:solidFill>
-                            <a:srgbClr val="F0F2F5"/>
-                          </a:solidFill>
-                        </a:defRPr>
-                      </a:pPr>
-                      <a:r>
-                        <a:t>19.89</a:t>
-                      </a:r>
-                    </a:p>
-                  </a:txBody>
-                  <a:tcPr anchor="ctr">
-                    <a:solidFill>
-                      <a:srgbClr val="141820"/>
-                    </a:solidFill>
-                  </a:tcPr>
-                </a:tc>
-                <a:tc>
-                  <a:txBody>
-                    <a:bodyPr/>
-                    <a:lstStyle/>
-                    <a:p>
-                      <a:pPr algn="ctr">
-                        <a:defRPr sz="800">
-                          <a:solidFill>
-                            <a:srgbClr val="10B981"/>
-                          </a:solidFill>
-                        </a:defRPr>
-                      </a:pPr>
-                      <a:r>
-                        <a:t>+3.53</a:t>
-                      </a:r>
-                    </a:p>
-                  </a:txBody>
-                  <a:tcPr anchor="ctr">
-                    <a:solidFill>
-                      <a:srgbClr val="141820"/>
-                    </a:solidFill>
-                  </a:tcPr>
-                </a:tc>
-                <a:tc>
-                  <a:txBody>
-                    <a:bodyPr/>
-                    <a:lstStyle/>
-                    <a:p>
-                      <a:pPr algn="ctr">
-                        <a:defRPr sz="800">
-                          <a:solidFill>
-                            <a:srgbClr val="10B981"/>
-                          </a:solidFill>
-                        </a:defRPr>
-                      </a:pPr>
-                      <a:r>
-                        <a:t>+17.75%</a:t>
+                        <a:t>FUT_EWB_261230</a:t>
+                      </a:r>
+                    </a:p>
+                  </a:txBody>
+                  <a:tcPr anchor="ctr">
+                    <a:solidFill>
+                      <a:srgbClr val="141820"/>
+                    </a:solidFill>
+                  </a:tcPr>
+                </a:tc>
+                <a:tc>
+                  <a:txBody>
+                    <a:bodyPr/>
+                    <a:lstStyle/>
+                    <a:p>
+                      <a:pPr algn="ctr">
+                        <a:defRPr sz="800">
+                          <a:solidFill>
+                            <a:srgbClr val="F0F2F5"/>
+                          </a:solidFill>
+                        </a:defRPr>
+                      </a:pPr>
+                      <a:r>
+                        <a:t>Power West Base (Monthly)</a:t>
+                      </a:r>
+                    </a:p>
+                  </a:txBody>
+                  <a:tcPr anchor="ctr">
+                    <a:solidFill>
+                      <a:srgbClr val="141820"/>
+                    </a:solidFill>
+                  </a:tcPr>
+                </a:tc>
+                <a:tc>
+                  <a:txBody>
+                    <a:bodyPr/>
+                    <a:lstStyle/>
+                    <a:p>
+                      <a:pPr algn="ctr">
+                        <a:defRPr sz="800">
+                          <a:solidFill>
+                            <a:srgbClr val="F0F2F5"/>
+                          </a:solidFill>
+                        </a:defRPr>
+                      </a:pPr>
+                      <a:r>
+                        <a:t>202612</a:t>
+                      </a:r>
+                    </a:p>
+                  </a:txBody>
+                  <a:tcPr anchor="ctr">
+                    <a:solidFill>
+                      <a:srgbClr val="141820"/>
+                    </a:solidFill>
+                  </a:tcPr>
+                </a:tc>
+                <a:tc>
+                  <a:txBody>
+                    <a:bodyPr/>
+                    <a:lstStyle/>
+                    <a:p>
+                      <a:pPr algn="ctr">
+                        <a:defRPr sz="800">
+                          <a:solidFill>
+                            <a:srgbClr val="F0F2F5"/>
+                          </a:solidFill>
+                        </a:defRPr>
+                      </a:pPr>
+                      <a:r>
+                        <a:t>18.66</a:t>
+                      </a:r>
+                    </a:p>
+                  </a:txBody>
+                  <a:tcPr anchor="ctr">
+                    <a:solidFill>
+                      <a:srgbClr val="141820"/>
+                    </a:solidFill>
+                  </a:tcPr>
+                </a:tc>
+                <a:tc>
+                  <a:txBody>
+                    <a:bodyPr/>
+                    <a:lstStyle/>
+                    <a:p>
+                      <a:pPr algn="ctr">
+                        <a:defRPr sz="800">
+                          <a:solidFill>
+                            <a:srgbClr val="F0F2F5"/>
+                          </a:solidFill>
+                        </a:defRPr>
+                      </a:pPr>
+                      <a:r>
+                        <a:t>20.15</a:t>
+                      </a:r>
+                    </a:p>
+                  </a:txBody>
+                  <a:tcPr anchor="ctr">
+                    <a:solidFill>
+                      <a:srgbClr val="141820"/>
+                    </a:solidFill>
+                  </a:tcPr>
+                </a:tc>
+                <a:tc>
+                  <a:txBody>
+                    <a:bodyPr/>
+                    <a:lstStyle/>
+                    <a:p>
+                      <a:pPr algn="ctr">
+                        <a:defRPr sz="800">
+                          <a:solidFill>
+                            <a:srgbClr val="EF4444"/>
+                          </a:solidFill>
+                        </a:defRPr>
+                      </a:pPr>
+                      <a:r>
+                        <a:t>-1.49</a:t>
+                      </a:r>
+                    </a:p>
+                  </a:txBody>
+                  <a:tcPr anchor="ctr">
+                    <a:solidFill>
+                      <a:srgbClr val="141820"/>
+                    </a:solidFill>
+                  </a:tcPr>
+                </a:tc>
+                <a:tc>
+                  <a:txBody>
+                    <a:bodyPr/>
+                    <a:lstStyle/>
+                    <a:p>
+                      <a:pPr algn="ctr">
+                        <a:defRPr sz="800">
+                          <a:solidFill>
+                            <a:srgbClr val="EF4444"/>
+                          </a:solidFill>
+                        </a:defRPr>
+                      </a:pPr>
+                      <a:r>
+                        <a:t>-7.39%</a:t>
                       </a:r>
                     </a:p>
                   </a:txBody>
@@ -9478,7 +9478,7 @@
                         </a:defRPr>
                       </a:pPr>
                       <a:r>
-                        <a:t>FUT_EEB_260730</a:t>
+                        <a:t>FUT_EWB_260428</a:t>
                       </a:r>
                     </a:p>
                   </a:txBody>
@@ -9501,7 +9501,7 @@
                         </a:defRPr>
                       </a:pPr>
                       <a:r>
-                        <a:t>Power East Base (Monthly)</a:t>
+                        <a:t>Power West Base (Monthly)</a:t>
                       </a:r>
                     </a:p>
                   </a:txBody>
@@ -9524,7 +9524,7 @@
                         </a:defRPr>
                       </a:pPr>
                       <a:r>
-                        <a:t>202607</a:t>
+                        <a:t>202604</a:t>
                       </a:r>
                     </a:p>
                   </a:txBody>
@@ -9547,7 +9547,7 @@
                         </a:defRPr>
                       </a:pPr>
                       <a:r>
-                        <a:t>23.04</a:t>
+                        <a:t>15.57</a:t>
                       </a:r>
                     </a:p>
                   </a:txBody>
@@ -9570,7 +9570,7 @@
                         </a:defRPr>
                       </a:pPr>
                       <a:r>
-                        <a:t>19.52</a:t>
+                        <a:t>17.04</a:t>
                       </a:r>
                     </a:p>
                   </a:txBody>
@@ -9588,12 +9588,12 @@
                       <a:pPr algn="ctr">
                         <a:defRPr sz="800">
                           <a:solidFill>
-                            <a:srgbClr val="10B981"/>
-                          </a:solidFill>
-                        </a:defRPr>
-                      </a:pPr>
-                      <a:r>
-                        <a:t>+3.52</a:t>
+                            <a:srgbClr val="EF4444"/>
+                          </a:solidFill>
+                        </a:defRPr>
+                      </a:pPr>
+                      <a:r>
+                        <a:t>-1.47</a:t>
                       </a:r>
                     </a:p>
                   </a:txBody>
@@ -9611,12 +9611,12 @@
                       <a:pPr algn="ctr">
                         <a:defRPr sz="800">
                           <a:solidFill>
-                            <a:srgbClr val="10B981"/>
-                          </a:solidFill>
-                        </a:defRPr>
-                      </a:pPr>
-                      <a:r>
-                        <a:t>+18.03%</a:t>
+                            <a:srgbClr val="EF4444"/>
+                          </a:solidFill>
+                        </a:defRPr>
+                      </a:pPr>
+                      <a:r>
+                        <a:t>-8.63%</a:t>
                       </a:r>
                     </a:p>
                   </a:txBody>
@@ -9641,145 +9641,145 @@
                         </a:defRPr>
                       </a:pPr>
                       <a:r>
-                        <a:t>FUT_EEB_260529</a:t>
-                      </a:r>
-                    </a:p>
-                  </a:txBody>
-                  <a:tcPr anchor="ctr">
-                    <a:solidFill>
-                      <a:srgbClr val="141820"/>
-                    </a:solidFill>
-                  </a:tcPr>
-                </a:tc>
-                <a:tc>
-                  <a:txBody>
-                    <a:bodyPr/>
-                    <a:lstStyle/>
-                    <a:p>
-                      <a:pPr algn="ctr">
-                        <a:defRPr sz="800">
-                          <a:solidFill>
-                            <a:srgbClr val="F0F2F5"/>
-                          </a:solidFill>
-                        </a:defRPr>
-                      </a:pPr>
-                      <a:r>
-                        <a:t>Power East Base (Monthly)</a:t>
-                      </a:r>
-                    </a:p>
-                  </a:txBody>
-                  <a:tcPr anchor="ctr">
-                    <a:solidFill>
-                      <a:srgbClr val="141820"/>
-                    </a:solidFill>
-                  </a:tcPr>
-                </a:tc>
-                <a:tc>
-                  <a:txBody>
-                    <a:bodyPr/>
-                    <a:lstStyle/>
-                    <a:p>
-                      <a:pPr algn="ctr">
-                        <a:defRPr sz="800">
-                          <a:solidFill>
-                            <a:srgbClr val="F0F2F5"/>
-                          </a:solidFill>
-                        </a:defRPr>
-                      </a:pPr>
-                      <a:r>
-                        <a:t>202605</a:t>
-                      </a:r>
-                    </a:p>
-                  </a:txBody>
-                  <a:tcPr anchor="ctr">
-                    <a:solidFill>
-                      <a:srgbClr val="141820"/>
-                    </a:solidFill>
-                  </a:tcPr>
-                </a:tc>
-                <a:tc>
-                  <a:txBody>
-                    <a:bodyPr/>
-                    <a:lstStyle/>
-                    <a:p>
-                      <a:pPr algn="ctr">
-                        <a:defRPr sz="800">
-                          <a:solidFill>
-                            <a:srgbClr val="F0F2F5"/>
-                          </a:solidFill>
-                        </a:defRPr>
-                      </a:pPr>
-                      <a:r>
-                        <a:t>22.14</a:t>
-                      </a:r>
-                    </a:p>
-                  </a:txBody>
-                  <a:tcPr anchor="ctr">
-                    <a:solidFill>
-                      <a:srgbClr val="141820"/>
-                    </a:solidFill>
-                  </a:tcPr>
-                </a:tc>
-                <a:tc>
-                  <a:txBody>
-                    <a:bodyPr/>
-                    <a:lstStyle/>
-                    <a:p>
-                      <a:pPr algn="ctr">
-                        <a:defRPr sz="800">
-                          <a:solidFill>
-                            <a:srgbClr val="F0F2F5"/>
-                          </a:solidFill>
-                        </a:defRPr>
-                      </a:pPr>
-                      <a:r>
-                        <a:t>18.65</a:t>
-                      </a:r>
-                    </a:p>
-                  </a:txBody>
-                  <a:tcPr anchor="ctr">
-                    <a:solidFill>
-                      <a:srgbClr val="141820"/>
-                    </a:solidFill>
-                  </a:tcPr>
-                </a:tc>
-                <a:tc>
-                  <a:txBody>
-                    <a:bodyPr/>
-                    <a:lstStyle/>
-                    <a:p>
-                      <a:pPr algn="ctr">
-                        <a:defRPr sz="800">
-                          <a:solidFill>
-                            <a:srgbClr val="10B981"/>
-                          </a:solidFill>
-                        </a:defRPr>
-                      </a:pPr>
-                      <a:r>
-                        <a:t>+3.49</a:t>
-                      </a:r>
-                    </a:p>
-                  </a:txBody>
-                  <a:tcPr anchor="ctr">
-                    <a:solidFill>
-                      <a:srgbClr val="141820"/>
-                    </a:solidFill>
-                  </a:tcPr>
-                </a:tc>
-                <a:tc>
-                  <a:txBody>
-                    <a:bodyPr/>
-                    <a:lstStyle/>
-                    <a:p>
-                      <a:pPr algn="ctr">
-                        <a:defRPr sz="800">
-                          <a:solidFill>
-                            <a:srgbClr val="10B981"/>
-                          </a:solidFill>
-                        </a:defRPr>
-                      </a:pPr>
-                      <a:r>
-                        <a:t>+18.71%</a:t>
+                        <a:t>FUT_EWP_260428</a:t>
+                      </a:r>
+                    </a:p>
+                  </a:txBody>
+                  <a:tcPr anchor="ctr">
+                    <a:solidFill>
+                      <a:srgbClr val="141820"/>
+                    </a:solidFill>
+                  </a:tcPr>
+                </a:tc>
+                <a:tc>
+                  <a:txBody>
+                    <a:bodyPr/>
+                    <a:lstStyle/>
+                    <a:p>
+                      <a:pPr algn="ctr">
+                        <a:defRPr sz="800">
+                          <a:solidFill>
+                            <a:srgbClr val="F0F2F5"/>
+                          </a:solidFill>
+                        </a:defRPr>
+                      </a:pPr>
+                      <a:r>
+                        <a:t>Power West Peak (Monthly)</a:t>
+                      </a:r>
+                    </a:p>
+                  </a:txBody>
+                  <a:tcPr anchor="ctr">
+                    <a:solidFill>
+                      <a:srgbClr val="141820"/>
+                    </a:solidFill>
+                  </a:tcPr>
+                </a:tc>
+                <a:tc>
+                  <a:txBody>
+                    <a:bodyPr/>
+                    <a:lstStyle/>
+                    <a:p>
+                      <a:pPr algn="ctr">
+                        <a:defRPr sz="800">
+                          <a:solidFill>
+                            <a:srgbClr val="F0F2F5"/>
+                          </a:solidFill>
+                        </a:defRPr>
+                      </a:pPr>
+                      <a:r>
+                        <a:t>202604</a:t>
+                      </a:r>
+                    </a:p>
+                  </a:txBody>
+                  <a:tcPr anchor="ctr">
+                    <a:solidFill>
+                      <a:srgbClr val="141820"/>
+                    </a:solidFill>
+                  </a:tcPr>
+                </a:tc>
+                <a:tc>
+                  <a:txBody>
+                    <a:bodyPr/>
+                    <a:lstStyle/>
+                    <a:p>
+                      <a:pPr algn="ctr">
+                        <a:defRPr sz="800">
+                          <a:solidFill>
+                            <a:srgbClr val="F0F2F5"/>
+                          </a:solidFill>
+                        </a:defRPr>
+                      </a:pPr>
+                      <a:r>
+                        <a:t>16.17</a:t>
+                      </a:r>
+                    </a:p>
+                  </a:txBody>
+                  <a:tcPr anchor="ctr">
+                    <a:solidFill>
+                      <a:srgbClr val="141820"/>
+                    </a:solidFill>
+                  </a:tcPr>
+                </a:tc>
+                <a:tc>
+                  <a:txBody>
+                    <a:bodyPr/>
+                    <a:lstStyle/>
+                    <a:p>
+                      <a:pPr algn="ctr">
+                        <a:defRPr sz="800">
+                          <a:solidFill>
+                            <a:srgbClr val="F0F2F5"/>
+                          </a:solidFill>
+                        </a:defRPr>
+                      </a:pPr>
+                      <a:r>
+                        <a:t>17.60</a:t>
+                      </a:r>
+                    </a:p>
+                  </a:txBody>
+                  <a:tcPr anchor="ctr">
+                    <a:solidFill>
+                      <a:srgbClr val="141820"/>
+                    </a:solidFill>
+                  </a:tcPr>
+                </a:tc>
+                <a:tc>
+                  <a:txBody>
+                    <a:bodyPr/>
+                    <a:lstStyle/>
+                    <a:p>
+                      <a:pPr algn="ctr">
+                        <a:defRPr sz="800">
+                          <a:solidFill>
+                            <a:srgbClr val="EF4444"/>
+                          </a:solidFill>
+                        </a:defRPr>
+                      </a:pPr>
+                      <a:r>
+                        <a:t>-1.43</a:t>
+                      </a:r>
+                    </a:p>
+                  </a:txBody>
+                  <a:tcPr anchor="ctr">
+                    <a:solidFill>
+                      <a:srgbClr val="141820"/>
+                    </a:solidFill>
+                  </a:tcPr>
+                </a:tc>
+                <a:tc>
+                  <a:txBody>
+                    <a:bodyPr/>
+                    <a:lstStyle/>
+                    <a:p>
+                      <a:pPr algn="ctr">
+                        <a:defRPr sz="800">
+                          <a:solidFill>
+                            <a:srgbClr val="EF4444"/>
+                          </a:solidFill>
+                        </a:defRPr>
+                      </a:pPr>
+                      <a:r>
+                        <a:t>-8.12%</a:t>
                       </a:r>
                     </a:p>
                   </a:txBody>
@@ -9804,7 +9804,7 @@
                         </a:defRPr>
                       </a:pPr>
                       <a:r>
-                        <a:t>FUT_EEB_260828</a:t>
+                        <a:t>FUT_EEBW_260416</a:t>
                       </a:r>
                     </a:p>
                   </a:txBody>
@@ -9827,7 +9827,7 @@
                         </a:defRPr>
                       </a:pPr>
                       <a:r>
-                        <a:t>Power East Base (Monthly)</a:t>
+                        <a:t>Power East Base (Weekly)</a:t>
                       </a:r>
                     </a:p>
                   </a:txBody>
@@ -9850,7 +9850,7 @@
                         </a:defRPr>
                       </a:pPr>
                       <a:r>
-                        <a:t>202608</a:t>
+                        <a:t>20260417</a:t>
                       </a:r>
                     </a:p>
                   </a:txBody>
@@ -9873,7 +9873,7 @@
                         </a:defRPr>
                       </a:pPr>
                       <a:r>
-                        <a:t>23.23</a:t>
+                        <a:t>19.54</a:t>
                       </a:r>
                     </a:p>
                   </a:txBody>
@@ -9896,7 +9896,7 @@
                         </a:defRPr>
                       </a:pPr>
                       <a:r>
-                        <a:t>19.85</a:t>
+                        <a:t>20.95</a:t>
                       </a:r>
                     </a:p>
                   </a:txBody>
@@ -9914,12 +9914,12 @@
                       <a:pPr algn="ctr">
                         <a:defRPr sz="800">
                           <a:solidFill>
-                            <a:srgbClr val="10B981"/>
-                          </a:solidFill>
-                        </a:defRPr>
-                      </a:pPr>
-                      <a:r>
-                        <a:t>+3.38</a:t>
+                            <a:srgbClr val="EF4444"/>
+                          </a:solidFill>
+                        </a:defRPr>
+                      </a:pPr>
+                      <a:r>
+                        <a:t>-1.41</a:t>
                       </a:r>
                     </a:p>
                   </a:txBody>
@@ -9937,12 +9937,12 @@
                       <a:pPr algn="ctr">
                         <a:defRPr sz="800">
                           <a:solidFill>
-                            <a:srgbClr val="10B981"/>
-                          </a:solidFill>
-                        </a:defRPr>
-                      </a:pPr>
-                      <a:r>
-                        <a:t>+17.03%</a:t>
+                            <a:srgbClr val="EF4444"/>
+                          </a:solidFill>
+                        </a:defRPr>
+                      </a:pPr>
+                      <a:r>
+                        <a:t>-6.73%</a:t>
                       </a:r>
                     </a:p>
                   </a:txBody>
@@ -9967,145 +9967,145 @@
                         </a:defRPr>
                       </a:pPr>
                       <a:r>
-                        <a:t>FUT_EEP_260629</a:t>
-                      </a:r>
-                    </a:p>
-                  </a:txBody>
-                  <a:tcPr anchor="ctr">
-                    <a:solidFill>
-                      <a:srgbClr val="141820"/>
-                    </a:solidFill>
-                  </a:tcPr>
-                </a:tc>
-                <a:tc>
-                  <a:txBody>
-                    <a:bodyPr/>
-                    <a:lstStyle/>
-                    <a:p>
-                      <a:pPr algn="ctr">
-                        <a:defRPr sz="800">
-                          <a:solidFill>
-                            <a:srgbClr val="F0F2F5"/>
-                          </a:solidFill>
-                        </a:defRPr>
-                      </a:pPr>
-                      <a:r>
-                        <a:t>Power East Peak (Monthly)</a:t>
-                      </a:r>
-                    </a:p>
-                  </a:txBody>
-                  <a:tcPr anchor="ctr">
-                    <a:solidFill>
-                      <a:srgbClr val="141820"/>
-                    </a:solidFill>
-                  </a:tcPr>
-                </a:tc>
-                <a:tc>
-                  <a:txBody>
-                    <a:bodyPr/>
-                    <a:lstStyle/>
-                    <a:p>
-                      <a:pPr algn="ctr">
-                        <a:defRPr sz="800">
-                          <a:solidFill>
-                            <a:srgbClr val="F0F2F5"/>
-                          </a:solidFill>
-                        </a:defRPr>
-                      </a:pPr>
-                      <a:r>
-                        <a:t>202606</a:t>
-                      </a:r>
-                    </a:p>
-                  </a:txBody>
-                  <a:tcPr anchor="ctr">
-                    <a:solidFill>
-                      <a:srgbClr val="141820"/>
-                    </a:solidFill>
-                  </a:tcPr>
-                </a:tc>
-                <a:tc>
-                  <a:txBody>
-                    <a:bodyPr/>
-                    <a:lstStyle/>
-                    <a:p>
-                      <a:pPr algn="ctr">
-                        <a:defRPr sz="800">
-                          <a:solidFill>
-                            <a:srgbClr val="F0F2F5"/>
-                          </a:solidFill>
-                        </a:defRPr>
-                      </a:pPr>
-                      <a:r>
-                        <a:t>26.36</a:t>
-                      </a:r>
-                    </a:p>
-                  </a:txBody>
-                  <a:tcPr anchor="ctr">
-                    <a:solidFill>
-                      <a:srgbClr val="141820"/>
-                    </a:solidFill>
-                  </a:tcPr>
-                </a:tc>
-                <a:tc>
-                  <a:txBody>
-                    <a:bodyPr/>
-                    <a:lstStyle/>
-                    <a:p>
-                      <a:pPr algn="ctr">
-                        <a:defRPr sz="800">
-                          <a:solidFill>
-                            <a:srgbClr val="F0F2F5"/>
-                          </a:solidFill>
-                        </a:defRPr>
-                      </a:pPr>
-                      <a:r>
-                        <a:t>23.00</a:t>
-                      </a:r>
-                    </a:p>
-                  </a:txBody>
-                  <a:tcPr anchor="ctr">
-                    <a:solidFill>
-                      <a:srgbClr val="141820"/>
-                    </a:solidFill>
-                  </a:tcPr>
-                </a:tc>
-                <a:tc>
-                  <a:txBody>
-                    <a:bodyPr/>
-                    <a:lstStyle/>
-                    <a:p>
-                      <a:pPr algn="ctr">
-                        <a:defRPr sz="800">
-                          <a:solidFill>
-                            <a:srgbClr val="10B981"/>
-                          </a:solidFill>
-                        </a:defRPr>
-                      </a:pPr>
-                      <a:r>
-                        <a:t>+3.36</a:t>
-                      </a:r>
-                    </a:p>
-                  </a:txBody>
-                  <a:tcPr anchor="ctr">
-                    <a:solidFill>
-                      <a:srgbClr val="141820"/>
-                    </a:solidFill>
-                  </a:tcPr>
-                </a:tc>
-                <a:tc>
-                  <a:txBody>
-                    <a:bodyPr/>
-                    <a:lstStyle/>
-                    <a:p>
-                      <a:pPr algn="ctr">
-                        <a:defRPr sz="800">
-                          <a:solidFill>
-                            <a:srgbClr val="10B981"/>
-                          </a:solidFill>
-                        </a:defRPr>
-                      </a:pPr>
-                      <a:r>
-                        <a:t>+14.61%</a:t>
+                        <a:t>FUT_EWB_260529</a:t>
+                      </a:r>
+                    </a:p>
+                  </a:txBody>
+                  <a:tcPr anchor="ctr">
+                    <a:solidFill>
+                      <a:srgbClr val="141820"/>
+                    </a:solidFill>
+                  </a:tcPr>
+                </a:tc>
+                <a:tc>
+                  <a:txBody>
+                    <a:bodyPr/>
+                    <a:lstStyle/>
+                    <a:p>
+                      <a:pPr algn="ctr">
+                        <a:defRPr sz="800">
+                          <a:solidFill>
+                            <a:srgbClr val="F0F2F5"/>
+                          </a:solidFill>
+                        </a:defRPr>
+                      </a:pPr>
+                      <a:r>
+                        <a:t>Power West Base (Monthly)</a:t>
+                      </a:r>
+                    </a:p>
+                  </a:txBody>
+                  <a:tcPr anchor="ctr">
+                    <a:solidFill>
+                      <a:srgbClr val="141820"/>
+                    </a:solidFill>
+                  </a:tcPr>
+                </a:tc>
+                <a:tc>
+                  <a:txBody>
+                    <a:bodyPr/>
+                    <a:lstStyle/>
+                    <a:p>
+                      <a:pPr algn="ctr">
+                        <a:defRPr sz="800">
+                          <a:solidFill>
+                            <a:srgbClr val="F0F2F5"/>
+                          </a:solidFill>
+                        </a:defRPr>
+                      </a:pPr>
+                      <a:r>
+                        <a:t>202605</a:t>
+                      </a:r>
+                    </a:p>
+                  </a:txBody>
+                  <a:tcPr anchor="ctr">
+                    <a:solidFill>
+                      <a:srgbClr val="141820"/>
+                    </a:solidFill>
+                  </a:tcPr>
+                </a:tc>
+                <a:tc>
+                  <a:txBody>
+                    <a:bodyPr/>
+                    <a:lstStyle/>
+                    <a:p>
+                      <a:pPr algn="ctr">
+                        <a:defRPr sz="800">
+                          <a:solidFill>
+                            <a:srgbClr val="F0F2F5"/>
+                          </a:solidFill>
+                        </a:defRPr>
+                      </a:pPr>
+                      <a:r>
+                        <a:t>15.45</a:t>
+                      </a:r>
+                    </a:p>
+                  </a:txBody>
+                  <a:tcPr anchor="ctr">
+                    <a:solidFill>
+                      <a:srgbClr val="141820"/>
+                    </a:solidFill>
+                  </a:tcPr>
+                </a:tc>
+                <a:tc>
+                  <a:txBody>
+                    <a:bodyPr/>
+                    <a:lstStyle/>
+                    <a:p>
+                      <a:pPr algn="ctr">
+                        <a:defRPr sz="800">
+                          <a:solidFill>
+                            <a:srgbClr val="F0F2F5"/>
+                          </a:solidFill>
+                        </a:defRPr>
+                      </a:pPr>
+                      <a:r>
+                        <a:t>16.82</a:t>
+                      </a:r>
+                    </a:p>
+                  </a:txBody>
+                  <a:tcPr anchor="ctr">
+                    <a:solidFill>
+                      <a:srgbClr val="141820"/>
+                    </a:solidFill>
+                  </a:tcPr>
+                </a:tc>
+                <a:tc>
+                  <a:txBody>
+                    <a:bodyPr/>
+                    <a:lstStyle/>
+                    <a:p>
+                      <a:pPr algn="ctr">
+                        <a:defRPr sz="800">
+                          <a:solidFill>
+                            <a:srgbClr val="EF4444"/>
+                          </a:solidFill>
+                        </a:defRPr>
+                      </a:pPr>
+                      <a:r>
+                        <a:t>-1.37</a:t>
+                      </a:r>
+                    </a:p>
+                  </a:txBody>
+                  <a:tcPr anchor="ctr">
+                    <a:solidFill>
+                      <a:srgbClr val="141820"/>
+                    </a:solidFill>
+                  </a:tcPr>
+                </a:tc>
+                <a:tc>
+                  <a:txBody>
+                    <a:bodyPr/>
+                    <a:lstStyle/>
+                    <a:p>
+                      <a:pPr algn="ctr">
+                        <a:defRPr sz="800">
+                          <a:solidFill>
+                            <a:srgbClr val="EF4444"/>
+                          </a:solidFill>
+                        </a:defRPr>
+                      </a:pPr>
+                      <a:r>
+                        <a:t>-8.15%</a:t>
                       </a:r>
                     </a:p>
                   </a:txBody>

--- a/docs/chartpack/latest.pptx
+++ b/docs/chartpack/latest.pptx
@@ -3210,7 +3210,7 @@
               </a:defRPr>
             </a:pPr>
             <a:r>
-              <a:t>Trade Date: 2026-03-24</a:t>
+              <a:t>Trade Date: 2026-03-25</a:t>
             </a:r>
           </a:p>
         </p:txBody>
@@ -3505,7 +3505,7 @@
               </a:defRPr>
             </a:pPr>
             <a:r>
-              <a:t>East/West Base &amp; Peak monthly contracts (2026-03-24)</a:t>
+              <a:t>East/West Base &amp; Peak monthly contracts (2026-03-25)</a:t>
             </a:r>
           </a:p>
         </p:txBody>
@@ -3711,7 +3711,7 @@
               </a:defRPr>
             </a:pPr>
             <a:r>
-              <a:t>Front-month settlement prices as of 2026-03-24</a:t>
+              <a:t>Front-month settlement prices as of 2026-03-25</a:t>
             </a:r>
           </a:p>
         </p:txBody>
@@ -4030,35 +4030,35 @@
                       <a:pPr algn="ctr">
                         <a:defRPr sz="800">
                           <a:solidFill>
-                            <a:srgbClr val="EF4444"/>
-                          </a:solidFill>
-                        </a:defRPr>
-                      </a:pPr>
-                      <a:r>
-                        <a:t>-3000.00</a:t>
-                      </a:r>
-                    </a:p>
-                  </a:txBody>
-                  <a:tcPr anchor="ctr">
-                    <a:solidFill>
-                      <a:srgbClr val="141820"/>
-                    </a:solidFill>
-                  </a:tcPr>
-                </a:tc>
-                <a:tc>
-                  <a:txBody>
-                    <a:bodyPr/>
-                    <a:lstStyle/>
-                    <a:p>
-                      <a:pPr algn="ctr">
-                        <a:defRPr sz="800">
-                          <a:solidFill>
-                            <a:srgbClr val="EF4444"/>
-                          </a:solidFill>
-                        </a:defRPr>
-                      </a:pPr>
-                      <a:r>
-                        <a:t>-2.59%</a:t>
+                            <a:srgbClr val="F0F2F5"/>
+                          </a:solidFill>
+                        </a:defRPr>
+                      </a:pPr>
+                      <a:r>
+                        <a:t>+0.00</a:t>
+                      </a:r>
+                    </a:p>
+                  </a:txBody>
+                  <a:tcPr anchor="ctr">
+                    <a:solidFill>
+                      <a:srgbClr val="141820"/>
+                    </a:solidFill>
+                  </a:tcPr>
+                </a:tc>
+                <a:tc>
+                  <a:txBody>
+                    <a:bodyPr/>
+                    <a:lstStyle/>
+                    <a:p>
+                      <a:pPr algn="ctr">
+                        <a:defRPr sz="800">
+                          <a:solidFill>
+                            <a:srgbClr val="F0F2F5"/>
+                          </a:solidFill>
+                        </a:defRPr>
+                      </a:pPr>
+                      <a:r>
+                        <a:t>+0.00%</a:t>
                       </a:r>
                     </a:p>
                   </a:txBody>
@@ -4804,7 +4804,7 @@
                         </a:defRPr>
                       </a:pPr>
                       <a:r>
-                        <a:t>134,680.00</a:t>
+                        <a:t>135,080.00</a:t>
                       </a:r>
                     </a:p>
                   </a:txBody>
@@ -4845,12 +4845,12 @@
                       <a:pPr algn="ctr">
                         <a:defRPr sz="800">
                           <a:solidFill>
-                            <a:srgbClr val="EF4444"/>
-                          </a:solidFill>
-                        </a:defRPr>
-                      </a:pPr>
-                      <a:r>
-                        <a:t>-1380.00</a:t>
+                            <a:srgbClr val="10B981"/>
+                          </a:solidFill>
+                        </a:defRPr>
+                      </a:pPr>
+                      <a:r>
+                        <a:t>+400.00</a:t>
                       </a:r>
                     </a:p>
                   </a:txBody>
@@ -4868,12 +4868,12 @@
                       <a:pPr algn="ctr">
                         <a:defRPr sz="800">
                           <a:solidFill>
-                            <a:srgbClr val="EF4444"/>
-                          </a:solidFill>
-                        </a:defRPr>
-                      </a:pPr>
-                      <a:r>
-                        <a:t>-1.01%</a:t>
+                            <a:srgbClr val="10B981"/>
+                          </a:solidFill>
+                        </a:defRPr>
+                      </a:pPr>
+                      <a:r>
+                        <a:t>+0.30%</a:t>
                       </a:r>
                     </a:p>
                   </a:txBody>
@@ -4967,7 +4967,7 @@
                         </a:defRPr>
                       </a:pPr>
                       <a:r>
-                        <a:t>3,335.00</a:t>
+                        <a:t>3,189.00</a:t>
                       </a:r>
                     </a:p>
                   </a:txBody>
@@ -5013,7 +5013,7 @@
                         </a:defRPr>
                       </a:pPr>
                       <a:r>
-                        <a:t>-132.00</a:t>
+                        <a:t>-146.00</a:t>
                       </a:r>
                     </a:p>
                   </a:txBody>
@@ -5036,7 +5036,7 @@
                         </a:defRPr>
                       </a:pPr>
                       <a:r>
-                        <a:t>-3.81%</a:t>
+                        <a:t>-4.38%</a:t>
                       </a:r>
                     </a:p>
                   </a:txBody>
@@ -5130,7 +5130,7 @@
                         </a:defRPr>
                       </a:pPr>
                       <a:r>
-                        <a:t>22,396.00</a:t>
+                        <a:t>23,142.00</a:t>
                       </a:r>
                     </a:p>
                   </a:txBody>
@@ -5176,7 +5176,7 @@
                         </a:defRPr>
                       </a:pPr>
                       <a:r>
-                        <a:t>+713.00</a:t>
+                        <a:t>+746.00</a:t>
                       </a:r>
                     </a:p>
                   </a:txBody>
@@ -5199,7 +5199,7 @@
                         </a:defRPr>
                       </a:pPr>
                       <a:r>
-                        <a:t>+3.29%</a:t>
+                        <a:t>+3.33%</a:t>
                       </a:r>
                     </a:p>
                   </a:txBody>
@@ -5293,7 +5293,7 @@
                         </a:defRPr>
                       </a:pPr>
                       <a:r>
-                        <a:t>7,200.00</a:t>
+                        <a:t>7,500.00</a:t>
                       </a:r>
                     </a:p>
                   </a:txBody>
@@ -5334,35 +5334,35 @@
                       <a:pPr algn="ctr">
                         <a:defRPr sz="800">
                           <a:solidFill>
-                            <a:srgbClr val="F0F2F5"/>
-                          </a:solidFill>
-                        </a:defRPr>
-                      </a:pPr>
-                      <a:r>
-                        <a:t>+0.00</a:t>
-                      </a:r>
-                    </a:p>
-                  </a:txBody>
-                  <a:tcPr anchor="ctr">
-                    <a:solidFill>
-                      <a:srgbClr val="141820"/>
-                    </a:solidFill>
-                  </a:tcPr>
-                </a:tc>
-                <a:tc>
-                  <a:txBody>
-                    <a:bodyPr/>
-                    <a:lstStyle/>
-                    <a:p>
-                      <a:pPr algn="ctr">
-                        <a:defRPr sz="800">
-                          <a:solidFill>
-                            <a:srgbClr val="F0F2F5"/>
-                          </a:solidFill>
-                        </a:defRPr>
-                      </a:pPr>
-                      <a:r>
-                        <a:t>+0.00%</a:t>
+                            <a:srgbClr val="10B981"/>
+                          </a:solidFill>
+                        </a:defRPr>
+                      </a:pPr>
+                      <a:r>
+                        <a:t>+300.00</a:t>
+                      </a:r>
+                    </a:p>
+                  </a:txBody>
+                  <a:tcPr anchor="ctr">
+                    <a:solidFill>
+                      <a:srgbClr val="141820"/>
+                    </a:solidFill>
+                  </a:tcPr>
+                </a:tc>
+                <a:tc>
+                  <a:txBody>
+                    <a:bodyPr/>
+                    <a:lstStyle/>
+                    <a:p>
+                      <a:pPr algn="ctr">
+                        <a:defRPr sz="800">
+                          <a:solidFill>
+                            <a:srgbClr val="10B981"/>
+                          </a:solidFill>
+                        </a:defRPr>
+                      </a:pPr>
+                      <a:r>
+                        <a:t>+4.17%</a:t>
                       </a:r>
                     </a:p>
                   </a:txBody>
@@ -5456,7 +5456,7 @@
                         </a:defRPr>
                       </a:pPr>
                       <a:r>
-                        <a:t>9,165.00</a:t>
+                        <a:t>9,817.00</a:t>
                       </a:r>
                     </a:p>
                   </a:txBody>
@@ -5502,7 +5502,7 @@
                         </a:defRPr>
                       </a:pPr>
                       <a:r>
-                        <a:t>+389.00</a:t>
+                        <a:t>+652.00</a:t>
                       </a:r>
                     </a:p>
                   </a:txBody>
@@ -5525,7 +5525,7 @@
                         </a:defRPr>
                       </a:pPr>
                       <a:r>
-                        <a:t>+4.43%</a:t>
+                        <a:t>+7.11%</a:t>
                       </a:r>
                     </a:p>
                   </a:txBody>
@@ -5619,7 +5619,7 @@
                         </a:defRPr>
                       </a:pPr>
                       <a:r>
-                        <a:t>350.00</a:t>
+                        <a:t>360.00</a:t>
                       </a:r>
                     </a:p>
                   </a:txBody>
@@ -5660,35 +5660,35 @@
                       <a:pPr algn="ctr">
                         <a:defRPr sz="800">
                           <a:solidFill>
-                            <a:srgbClr val="F0F2F5"/>
-                          </a:solidFill>
-                        </a:defRPr>
-                      </a:pPr>
-                      <a:r>
-                        <a:t>+0.00</a:t>
-                      </a:r>
-                    </a:p>
-                  </a:txBody>
-                  <a:tcPr anchor="ctr">
-                    <a:solidFill>
-                      <a:srgbClr val="141820"/>
-                    </a:solidFill>
-                  </a:tcPr>
-                </a:tc>
-                <a:tc>
-                  <a:txBody>
-                    <a:bodyPr/>
-                    <a:lstStyle/>
-                    <a:p>
-                      <a:pPr algn="ctr">
-                        <a:defRPr sz="800">
-                          <a:solidFill>
-                            <a:srgbClr val="F0F2F5"/>
-                          </a:solidFill>
-                        </a:defRPr>
-                      </a:pPr>
-                      <a:r>
-                        <a:t>+0.00%</a:t>
+                            <a:srgbClr val="10B981"/>
+                          </a:solidFill>
+                        </a:defRPr>
+                      </a:pPr>
+                      <a:r>
+                        <a:t>+10.00</a:t>
+                      </a:r>
+                    </a:p>
+                  </a:txBody>
+                  <a:tcPr anchor="ctr">
+                    <a:solidFill>
+                      <a:srgbClr val="141820"/>
+                    </a:solidFill>
+                  </a:tcPr>
+                </a:tc>
+                <a:tc>
+                  <a:txBody>
+                    <a:bodyPr/>
+                    <a:lstStyle/>
+                    <a:p>
+                      <a:pPr algn="ctr">
+                        <a:defRPr sz="800">
+                          <a:solidFill>
+                            <a:srgbClr val="10B981"/>
+                          </a:solidFill>
+                        </a:defRPr>
+                      </a:pPr>
+                      <a:r>
+                        <a:t>+2.86%</a:t>
                       </a:r>
                     </a:p>
                   </a:txBody>
@@ -5782,7 +5782,7 @@
                         </a:defRPr>
                       </a:pPr>
                       <a:r>
-                        <a:t>370.00</a:t>
+                        <a:t>364.80</a:t>
                       </a:r>
                     </a:p>
                   </a:txBody>
@@ -5823,12 +5823,12 @@
                       <a:pPr algn="ctr">
                         <a:defRPr sz="800">
                           <a:solidFill>
-                            <a:srgbClr val="F0F2F5"/>
-                          </a:solidFill>
-                        </a:defRPr>
-                      </a:pPr>
-                      <a:r>
-                        <a:t>+0.00</a:t>
+                            <a:srgbClr val="EF4444"/>
+                          </a:solidFill>
+                        </a:defRPr>
+                      </a:pPr>
+                      <a:r>
+                        <a:t>-5.20</a:t>
                       </a:r>
                     </a:p>
                   </a:txBody>
@@ -5846,12 +5846,12 @@
                       <a:pPr algn="ctr">
                         <a:defRPr sz="800">
                           <a:solidFill>
-                            <a:srgbClr val="F0F2F5"/>
-                          </a:solidFill>
-                        </a:defRPr>
-                      </a:pPr>
-                      <a:r>
-                        <a:t>+0.00%</a:t>
+                            <a:srgbClr val="EF4444"/>
+                          </a:solidFill>
+                        </a:defRPr>
+                      </a:pPr>
+                      <a:r>
+                        <a:t>-1.41%</a:t>
                       </a:r>
                     </a:p>
                   </a:txBody>
@@ -6108,7 +6108,7 @@
                         </a:defRPr>
                       </a:pPr>
                       <a:r>
-                        <a:t>16,245.00</a:t>
+                        <a:t>16,460.00</a:t>
                       </a:r>
                     </a:p>
                   </a:txBody>
@@ -6154,7 +6154,7 @@
                         </a:defRPr>
                       </a:pPr>
                       <a:r>
-                        <a:t>+115.00</a:t>
+                        <a:t>+215.00</a:t>
                       </a:r>
                     </a:p>
                   </a:txBody>
@@ -6177,7 +6177,7 @@
                         </a:defRPr>
                       </a:pPr>
                       <a:r>
-                        <a:t>+0.71%</a:t>
+                        <a:t>+1.32%</a:t>
                       </a:r>
                     </a:p>
                   </a:txBody>
@@ -6858,7 +6858,7 @@
               </a:defRPr>
             </a:pPr>
             <a:r>
-              <a:t>Gold &amp; Platinum (2026-03-24)</a:t>
+              <a:t>Gold &amp; Platinum (2026-03-25)</a:t>
             </a:r>
           </a:p>
         </p:txBody>
@@ -7064,7 +7064,7 @@
               </a:defRPr>
             </a:pPr>
             <a:r>
-              <a:t>Dubai Crude Oil &amp; LNG Platts JKM (2026-03-24)</a:t>
+              <a:t>Dubai Crude Oil &amp; LNG Platts JKM (2026-03-25)</a:t>
             </a:r>
           </a:p>
         </p:txBody>
@@ -7476,7 +7476,7 @@
               </a:defRPr>
             </a:pPr>
             <a:r>
-              <a:t>Largest absolute settlement price changes vs previous day (2026-03-24)</a:t>
+              <a:t>Largest absolute settlement price changes vs previous day (2026-03-25)</a:t>
             </a:r>
           </a:p>
         </p:txBody>
@@ -7685,99 +7685,99 @@
                         </a:defRPr>
                       </a:pPr>
                       <a:r>
-                        <a:t>FUT_EWB_260730</a:t>
-                      </a:r>
-                    </a:p>
-                  </a:txBody>
-                  <a:tcPr anchor="ctr">
-                    <a:solidFill>
-                      <a:srgbClr val="141820"/>
-                    </a:solidFill>
-                  </a:tcPr>
-                </a:tc>
-                <a:tc>
-                  <a:txBody>
-                    <a:bodyPr/>
-                    <a:lstStyle/>
-                    <a:p>
-                      <a:pPr algn="ctr">
-                        <a:defRPr sz="800">
-                          <a:solidFill>
-                            <a:srgbClr val="F0F2F5"/>
-                          </a:solidFill>
-                        </a:defRPr>
-                      </a:pPr>
-                      <a:r>
-                        <a:t>Power West Base (Monthly)</a:t>
-                      </a:r>
-                    </a:p>
-                  </a:txBody>
-                  <a:tcPr anchor="ctr">
-                    <a:solidFill>
-                      <a:srgbClr val="141820"/>
-                    </a:solidFill>
-                  </a:tcPr>
-                </a:tc>
-                <a:tc>
-                  <a:txBody>
-                    <a:bodyPr/>
-                    <a:lstStyle/>
-                    <a:p>
-                      <a:pPr algn="ctr">
-                        <a:defRPr sz="800">
-                          <a:solidFill>
-                            <a:srgbClr val="F0F2F5"/>
-                          </a:solidFill>
-                        </a:defRPr>
-                      </a:pPr>
-                      <a:r>
-                        <a:t>202607</a:t>
-                      </a:r>
-                    </a:p>
-                  </a:txBody>
-                  <a:tcPr anchor="ctr">
-                    <a:solidFill>
-                      <a:srgbClr val="141820"/>
-                    </a:solidFill>
-                  </a:tcPr>
-                </a:tc>
-                <a:tc>
-                  <a:txBody>
-                    <a:bodyPr/>
-                    <a:lstStyle/>
-                    <a:p>
-                      <a:pPr algn="ctr">
-                        <a:defRPr sz="800">
-                          <a:solidFill>
-                            <a:srgbClr val="F0F2F5"/>
-                          </a:solidFill>
-                        </a:defRPr>
-                      </a:pPr>
-                      <a:r>
-                        <a:t>19.82</a:t>
-                      </a:r>
-                    </a:p>
-                  </a:txBody>
-                  <a:tcPr anchor="ctr">
-                    <a:solidFill>
-                      <a:srgbClr val="141820"/>
-                    </a:solidFill>
-                  </a:tcPr>
-                </a:tc>
-                <a:tc>
-                  <a:txBody>
-                    <a:bodyPr/>
-                    <a:lstStyle/>
-                    <a:p>
-                      <a:pPr algn="ctr">
-                        <a:defRPr sz="800">
-                          <a:solidFill>
-                            <a:srgbClr val="F0F2F5"/>
-                          </a:solidFill>
-                        </a:defRPr>
-                      </a:pPr>
-                      <a:r>
-                        <a:t>21.69</a:t>
+                        <a:t>FUT_EEP_260929</a:t>
+                      </a:r>
+                    </a:p>
+                  </a:txBody>
+                  <a:tcPr anchor="ctr">
+                    <a:solidFill>
+                      <a:srgbClr val="141820"/>
+                    </a:solidFill>
+                  </a:tcPr>
+                </a:tc>
+                <a:tc>
+                  <a:txBody>
+                    <a:bodyPr/>
+                    <a:lstStyle/>
+                    <a:p>
+                      <a:pPr algn="ctr">
+                        <a:defRPr sz="800">
+                          <a:solidFill>
+                            <a:srgbClr val="F0F2F5"/>
+                          </a:solidFill>
+                        </a:defRPr>
+                      </a:pPr>
+                      <a:r>
+                        <a:t>Power East Peak (Monthly)</a:t>
+                      </a:r>
+                    </a:p>
+                  </a:txBody>
+                  <a:tcPr anchor="ctr">
+                    <a:solidFill>
+                      <a:srgbClr val="141820"/>
+                    </a:solidFill>
+                  </a:tcPr>
+                </a:tc>
+                <a:tc>
+                  <a:txBody>
+                    <a:bodyPr/>
+                    <a:lstStyle/>
+                    <a:p>
+                      <a:pPr algn="ctr">
+                        <a:defRPr sz="800">
+                          <a:solidFill>
+                            <a:srgbClr val="F0F2F5"/>
+                          </a:solidFill>
+                        </a:defRPr>
+                      </a:pPr>
+                      <a:r>
+                        <a:t>202609</a:t>
+                      </a:r>
+                    </a:p>
+                  </a:txBody>
+                  <a:tcPr anchor="ctr">
+                    <a:solidFill>
+                      <a:srgbClr val="141820"/>
+                    </a:solidFill>
+                  </a:tcPr>
+                </a:tc>
+                <a:tc>
+                  <a:txBody>
+                    <a:bodyPr/>
+                    <a:lstStyle/>
+                    <a:p>
+                      <a:pPr algn="ctr">
+                        <a:defRPr sz="800">
+                          <a:solidFill>
+                            <a:srgbClr val="F0F2F5"/>
+                          </a:solidFill>
+                        </a:defRPr>
+                      </a:pPr>
+                      <a:r>
+                        <a:t>27.21</a:t>
+                      </a:r>
+                    </a:p>
+                  </a:txBody>
+                  <a:tcPr anchor="ctr">
+                    <a:solidFill>
+                      <a:srgbClr val="141820"/>
+                    </a:solidFill>
+                  </a:tcPr>
+                </a:tc>
+                <a:tc>
+                  <a:txBody>
+                    <a:bodyPr/>
+                    <a:lstStyle/>
+                    <a:p>
+                      <a:pPr algn="ctr">
+                        <a:defRPr sz="800">
+                          <a:solidFill>
+                            <a:srgbClr val="F0F2F5"/>
+                          </a:solidFill>
+                        </a:defRPr>
+                      </a:pPr>
+                      <a:r>
+                        <a:t>28.83</a:t>
                       </a:r>
                     </a:p>
                   </a:txBody>
@@ -7800,7 +7800,7 @@
                         </a:defRPr>
                       </a:pPr>
                       <a:r>
-                        <a:t>-1.87</a:t>
+                        <a:t>-1.62</a:t>
                       </a:r>
                     </a:p>
                   </a:txBody>
@@ -7823,7 +7823,7 @@
                         </a:defRPr>
                       </a:pPr>
                       <a:r>
-                        <a:t>-8.62%</a:t>
+                        <a:t>-5.62%</a:t>
                       </a:r>
                     </a:p>
                   </a:txBody>
@@ -7848,7 +7848,7 @@
                         </a:defRPr>
                       </a:pPr>
                       <a:r>
-                        <a:t>FUT_EWB_270129</a:t>
+                        <a:t>FUT_EEP_260828</a:t>
                       </a:r>
                     </a:p>
                   </a:txBody>
@@ -7871,7 +7871,7 @@
                         </a:defRPr>
                       </a:pPr>
                       <a:r>
-                        <a:t>Power West Base (Monthly)</a:t>
+                        <a:t>Power East Peak (Monthly)</a:t>
                       </a:r>
                     </a:p>
                   </a:txBody>
@@ -7894,7 +7894,7 @@
                         </a:defRPr>
                       </a:pPr>
                       <a:r>
-                        <a:t>202701</a:t>
+                        <a:t>202608</a:t>
                       </a:r>
                     </a:p>
                   </a:txBody>
@@ -7917,7 +7917,7 @@
                         </a:defRPr>
                       </a:pPr>
                       <a:r>
-                        <a:t>18.89</a:t>
+                        <a:t>27.65</a:t>
                       </a:r>
                     </a:p>
                   </a:txBody>
@@ -7940,7 +7940,7 @@
                         </a:defRPr>
                       </a:pPr>
                       <a:r>
-                        <a:t>20.76</a:t>
+                        <a:t>29.08</a:t>
                       </a:r>
                     </a:p>
                   </a:txBody>
@@ -7963,7 +7963,7 @@
                         </a:defRPr>
                       </a:pPr>
                       <a:r>
-                        <a:t>-1.87</a:t>
+                        <a:t>-1.43</a:t>
                       </a:r>
                     </a:p>
                   </a:txBody>
@@ -7986,7 +7986,7 @@
                         </a:defRPr>
                       </a:pPr>
                       <a:r>
-                        <a:t>-9.01%</a:t>
+                        <a:t>-4.92%</a:t>
                       </a:r>
                     </a:p>
                   </a:txBody>
@@ -8011,99 +8011,99 @@
                         </a:defRPr>
                       </a:pPr>
                       <a:r>
-                        <a:t>FUT_EWB_270226</a:t>
-                      </a:r>
-                    </a:p>
-                  </a:txBody>
-                  <a:tcPr anchor="ctr">
-                    <a:solidFill>
-                      <a:srgbClr val="141820"/>
-                    </a:solidFill>
-                  </a:tcPr>
-                </a:tc>
-                <a:tc>
-                  <a:txBody>
-                    <a:bodyPr/>
-                    <a:lstStyle/>
-                    <a:p>
-                      <a:pPr algn="ctr">
-                        <a:defRPr sz="800">
-                          <a:solidFill>
-                            <a:srgbClr val="F0F2F5"/>
-                          </a:solidFill>
-                        </a:defRPr>
-                      </a:pPr>
-                      <a:r>
-                        <a:t>Power West Base (Monthly)</a:t>
-                      </a:r>
-                    </a:p>
-                  </a:txBody>
-                  <a:tcPr anchor="ctr">
-                    <a:solidFill>
-                      <a:srgbClr val="141820"/>
-                    </a:solidFill>
-                  </a:tcPr>
-                </a:tc>
-                <a:tc>
-                  <a:txBody>
-                    <a:bodyPr/>
-                    <a:lstStyle/>
-                    <a:p>
-                      <a:pPr algn="ctr">
-                        <a:defRPr sz="800">
-                          <a:solidFill>
-                            <a:srgbClr val="F0F2F5"/>
-                          </a:solidFill>
-                        </a:defRPr>
-                      </a:pPr>
-                      <a:r>
-                        <a:t>202702</a:t>
-                      </a:r>
-                    </a:p>
-                  </a:txBody>
-                  <a:tcPr anchor="ctr">
-                    <a:solidFill>
-                      <a:srgbClr val="141820"/>
-                    </a:solidFill>
-                  </a:tcPr>
-                </a:tc>
-                <a:tc>
-                  <a:txBody>
-                    <a:bodyPr/>
-                    <a:lstStyle/>
-                    <a:p>
-                      <a:pPr algn="ctr">
-                        <a:defRPr sz="800">
-                          <a:solidFill>
-                            <a:srgbClr val="F0F2F5"/>
-                          </a:solidFill>
-                        </a:defRPr>
-                      </a:pPr>
-                      <a:r>
-                        <a:t>18.92</a:t>
-                      </a:r>
-                    </a:p>
-                  </a:txBody>
-                  <a:tcPr anchor="ctr">
-                    <a:solidFill>
-                      <a:srgbClr val="141820"/>
-                    </a:solidFill>
-                  </a:tcPr>
-                </a:tc>
-                <a:tc>
-                  <a:txBody>
-                    <a:bodyPr/>
-                    <a:lstStyle/>
-                    <a:p>
-                      <a:pPr algn="ctr">
-                        <a:defRPr sz="800">
-                          <a:solidFill>
-                            <a:srgbClr val="F0F2F5"/>
-                          </a:solidFill>
-                        </a:defRPr>
-                      </a:pPr>
-                      <a:r>
-                        <a:t>20.77</a:t>
+                        <a:t>FUT_EEP_260730</a:t>
+                      </a:r>
+                    </a:p>
+                  </a:txBody>
+                  <a:tcPr anchor="ctr">
+                    <a:solidFill>
+                      <a:srgbClr val="141820"/>
+                    </a:solidFill>
+                  </a:tcPr>
+                </a:tc>
+                <a:tc>
+                  <a:txBody>
+                    <a:bodyPr/>
+                    <a:lstStyle/>
+                    <a:p>
+                      <a:pPr algn="ctr">
+                        <a:defRPr sz="800">
+                          <a:solidFill>
+                            <a:srgbClr val="F0F2F5"/>
+                          </a:solidFill>
+                        </a:defRPr>
+                      </a:pPr>
+                      <a:r>
+                        <a:t>Power East Peak (Monthly)</a:t>
+                      </a:r>
+                    </a:p>
+                  </a:txBody>
+                  <a:tcPr anchor="ctr">
+                    <a:solidFill>
+                      <a:srgbClr val="141820"/>
+                    </a:solidFill>
+                  </a:tcPr>
+                </a:tc>
+                <a:tc>
+                  <a:txBody>
+                    <a:bodyPr/>
+                    <a:lstStyle/>
+                    <a:p>
+                      <a:pPr algn="ctr">
+                        <a:defRPr sz="800">
+                          <a:solidFill>
+                            <a:srgbClr val="F0F2F5"/>
+                          </a:solidFill>
+                        </a:defRPr>
+                      </a:pPr>
+                      <a:r>
+                        <a:t>202607</a:t>
+                      </a:r>
+                    </a:p>
+                  </a:txBody>
+                  <a:tcPr anchor="ctr">
+                    <a:solidFill>
+                      <a:srgbClr val="141820"/>
+                    </a:solidFill>
+                  </a:tcPr>
+                </a:tc>
+                <a:tc>
+                  <a:txBody>
+                    <a:bodyPr/>
+                    <a:lstStyle/>
+                    <a:p>
+                      <a:pPr algn="ctr">
+                        <a:defRPr sz="800">
+                          <a:solidFill>
+                            <a:srgbClr val="F0F2F5"/>
+                          </a:solidFill>
+                        </a:defRPr>
+                      </a:pPr>
+                      <a:r>
+                        <a:t>27.77</a:t>
+                      </a:r>
+                    </a:p>
+                  </a:txBody>
+                  <a:tcPr anchor="ctr">
+                    <a:solidFill>
+                      <a:srgbClr val="141820"/>
+                    </a:solidFill>
+                  </a:tcPr>
+                </a:tc>
+                <a:tc>
+                  <a:txBody>
+                    <a:bodyPr/>
+                    <a:lstStyle/>
+                    <a:p>
+                      <a:pPr algn="ctr">
+                        <a:defRPr sz="800">
+                          <a:solidFill>
+                            <a:srgbClr val="F0F2F5"/>
+                          </a:solidFill>
+                        </a:defRPr>
+                      </a:pPr>
+                      <a:r>
+                        <a:t>29.18</a:t>
                       </a:r>
                     </a:p>
                   </a:txBody>
@@ -8126,7 +8126,7 @@
                         </a:defRPr>
                       </a:pPr>
                       <a:r>
-                        <a:t>-1.85</a:t>
+                        <a:t>-1.41</a:t>
                       </a:r>
                     </a:p>
                   </a:txBody>
@@ -8149,7 +8149,7 @@
                         </a:defRPr>
                       </a:pPr>
                       <a:r>
-                        <a:t>-8.91%</a:t>
+                        <a:t>-4.83%</a:t>
                       </a:r>
                     </a:p>
                   </a:txBody>
@@ -8174,7 +8174,7 @@
                         </a:defRPr>
                       </a:pPr>
                       <a:r>
-                        <a:t>FUT_EWB_260828</a:t>
+                        <a:t>FUT_EEB_260929</a:t>
                       </a:r>
                     </a:p>
                   </a:txBody>
@@ -8197,7 +8197,7 @@
                         </a:defRPr>
                       </a:pPr>
                       <a:r>
-                        <a:t>Power West Base (Monthly)</a:t>
+                        <a:t>Power East Base (Monthly)</a:t>
                       </a:r>
                     </a:p>
                   </a:txBody>
@@ -8220,7 +8220,7 @@
                         </a:defRPr>
                       </a:pPr>
                       <a:r>
-                        <a:t>202608</a:t>
+                        <a:t>202609</a:t>
                       </a:r>
                     </a:p>
                   </a:txBody>
@@ -8243,7 +8243,7 @@
                         </a:defRPr>
                       </a:pPr>
                       <a:r>
-                        <a:t>20.20</a:t>
+                        <a:t>21.75</a:t>
                       </a:r>
                     </a:p>
                   </a:txBody>
@@ -8266,7 +8266,7 @@
                         </a:defRPr>
                       </a:pPr>
                       <a:r>
-                        <a:t>21.91</a:t>
+                        <a:t>23.01</a:t>
                       </a:r>
                     </a:p>
                   </a:txBody>
@@ -8289,7 +8289,7 @@
                         </a:defRPr>
                       </a:pPr>
                       <a:r>
-                        <a:t>-1.71</a:t>
+                        <a:t>-1.26</a:t>
                       </a:r>
                     </a:p>
                   </a:txBody>
@@ -8312,7 +8312,7 @@
                         </a:defRPr>
                       </a:pPr>
                       <a:r>
-                        <a:t>-7.80%</a:t>
+                        <a:t>-5.48%</a:t>
                       </a:r>
                     </a:p>
                   </a:txBody>
@@ -8337,7 +8337,7 @@
                         </a:defRPr>
                       </a:pPr>
                       <a:r>
-                        <a:t>FUT_EEB_260428</a:t>
+                        <a:t>FUT_EEB_270330</a:t>
                       </a:r>
                     </a:p>
                   </a:txBody>
@@ -8383,53 +8383,53 @@
                         </a:defRPr>
                       </a:pPr>
                       <a:r>
-                        <a:t>202604</a:t>
-                      </a:r>
-                    </a:p>
-                  </a:txBody>
-                  <a:tcPr anchor="ctr">
-                    <a:solidFill>
-                      <a:srgbClr val="141820"/>
-                    </a:solidFill>
-                  </a:tcPr>
-                </a:tc>
-                <a:tc>
-                  <a:txBody>
-                    <a:bodyPr/>
-                    <a:lstStyle/>
-                    <a:p>
-                      <a:pPr algn="ctr">
-                        <a:defRPr sz="800">
-                          <a:solidFill>
-                            <a:srgbClr val="F0F2F5"/>
-                          </a:solidFill>
-                        </a:defRPr>
-                      </a:pPr>
-                      <a:r>
-                        <a:t>20.66</a:t>
-                      </a:r>
-                    </a:p>
-                  </a:txBody>
-                  <a:tcPr anchor="ctr">
-                    <a:solidFill>
-                      <a:srgbClr val="141820"/>
-                    </a:solidFill>
-                  </a:tcPr>
-                </a:tc>
-                <a:tc>
-                  <a:txBody>
-                    <a:bodyPr/>
-                    <a:lstStyle/>
-                    <a:p>
-                      <a:pPr algn="ctr">
-                        <a:defRPr sz="800">
-                          <a:solidFill>
-                            <a:srgbClr val="F0F2F5"/>
-                          </a:solidFill>
-                        </a:defRPr>
-                      </a:pPr>
-                      <a:r>
-                        <a:t>22.35</a:t>
+                        <a:t>202703</a:t>
+                      </a:r>
+                    </a:p>
+                  </a:txBody>
+                  <a:tcPr anchor="ctr">
+                    <a:solidFill>
+                      <a:srgbClr val="141820"/>
+                    </a:solidFill>
+                  </a:tcPr>
+                </a:tc>
+                <a:tc>
+                  <a:txBody>
+                    <a:bodyPr/>
+                    <a:lstStyle/>
+                    <a:p>
+                      <a:pPr algn="ctr">
+                        <a:defRPr sz="800">
+                          <a:solidFill>
+                            <a:srgbClr val="F0F2F5"/>
+                          </a:solidFill>
+                        </a:defRPr>
+                      </a:pPr>
+                      <a:r>
+                        <a:t>17.98</a:t>
+                      </a:r>
+                    </a:p>
+                  </a:txBody>
+                  <a:tcPr anchor="ctr">
+                    <a:solidFill>
+                      <a:srgbClr val="141820"/>
+                    </a:solidFill>
+                  </a:tcPr>
+                </a:tc>
+                <a:tc>
+                  <a:txBody>
+                    <a:bodyPr/>
+                    <a:lstStyle/>
+                    <a:p>
+                      <a:pPr algn="ctr">
+                        <a:defRPr sz="800">
+                          <a:solidFill>
+                            <a:srgbClr val="F0F2F5"/>
+                          </a:solidFill>
+                        </a:defRPr>
+                      </a:pPr>
+                      <a:r>
+                        <a:t>19.23</a:t>
                       </a:r>
                     </a:p>
                   </a:txBody>
@@ -8452,7 +8452,7 @@
                         </a:defRPr>
                       </a:pPr>
                       <a:r>
-                        <a:t>-1.69</a:t>
+                        <a:t>-1.25</a:t>
                       </a:r>
                     </a:p>
                   </a:txBody>
@@ -8475,7 +8475,7 @@
                         </a:defRPr>
                       </a:pPr>
                       <a:r>
-                        <a:t>-7.56%</a:t>
+                        <a:t>-6.50%</a:t>
                       </a:r>
                     </a:p>
                   </a:txBody>
@@ -8500,7 +8500,7 @@
                         </a:defRPr>
                       </a:pPr>
                       <a:r>
-                        <a:t>FUT_EEP_260428</a:t>
+                        <a:t>FUT_EWB_260929</a:t>
                       </a:r>
                     </a:p>
                   </a:txBody>
@@ -8523,7 +8523,7 @@
                         </a:defRPr>
                       </a:pPr>
                       <a:r>
-                        <a:t>Power East Peak (Monthly)</a:t>
+                        <a:t>Power West Base (Monthly)</a:t>
                       </a:r>
                     </a:p>
                   </a:txBody>
@@ -8546,7 +8546,7 @@
                         </a:defRPr>
                       </a:pPr>
                       <a:r>
-                        <a:t>202604</a:t>
+                        <a:t>202609</a:t>
                       </a:r>
                     </a:p>
                   </a:txBody>
@@ -8569,7 +8569,7 @@
                         </a:defRPr>
                       </a:pPr>
                       <a:r>
-                        <a:t>22.47</a:t>
+                        <a:t>18.75</a:t>
                       </a:r>
                     </a:p>
                   </a:txBody>
@@ -8592,7 +8592,7 @@
                         </a:defRPr>
                       </a:pPr>
                       <a:r>
-                        <a:t>24.14</a:t>
+                        <a:t>19.98</a:t>
                       </a:r>
                     </a:p>
                   </a:txBody>
@@ -8615,7 +8615,7 @@
                         </a:defRPr>
                       </a:pPr>
                       <a:r>
-                        <a:t>-1.67</a:t>
+                        <a:t>-1.23</a:t>
                       </a:r>
                     </a:p>
                   </a:txBody>
@@ -8638,7 +8638,7 @@
                         </a:defRPr>
                       </a:pPr>
                       <a:r>
-                        <a:t>-6.92%</a:t>
+                        <a:t>-6.16%</a:t>
                       </a:r>
                     </a:p>
                   </a:txBody>
@@ -8663,99 +8663,99 @@
                         </a:defRPr>
                       </a:pPr>
                       <a:r>
-                        <a:t>FUT_EWB_260929</a:t>
-                      </a:r>
-                    </a:p>
-                  </a:txBody>
-                  <a:tcPr anchor="ctr">
-                    <a:solidFill>
-                      <a:srgbClr val="141820"/>
-                    </a:solidFill>
-                  </a:tcPr>
-                </a:tc>
-                <a:tc>
-                  <a:txBody>
-                    <a:bodyPr/>
-                    <a:lstStyle/>
-                    <a:p>
-                      <a:pPr algn="ctr">
-                        <a:defRPr sz="800">
-                          <a:solidFill>
-                            <a:srgbClr val="F0F2F5"/>
-                          </a:solidFill>
-                        </a:defRPr>
-                      </a:pPr>
-                      <a:r>
-                        <a:t>Power West Base (Monthly)</a:t>
-                      </a:r>
-                    </a:p>
-                  </a:txBody>
-                  <a:tcPr anchor="ctr">
-                    <a:solidFill>
-                      <a:srgbClr val="141820"/>
-                    </a:solidFill>
-                  </a:tcPr>
-                </a:tc>
-                <a:tc>
-                  <a:txBody>
-                    <a:bodyPr/>
-                    <a:lstStyle/>
-                    <a:p>
-                      <a:pPr algn="ctr">
-                        <a:defRPr sz="800">
-                          <a:solidFill>
-                            <a:srgbClr val="F0F2F5"/>
-                          </a:solidFill>
-                        </a:defRPr>
-                      </a:pPr>
-                      <a:r>
-                        <a:t>202609</a:t>
-                      </a:r>
-                    </a:p>
-                  </a:txBody>
-                  <a:tcPr anchor="ctr">
-                    <a:solidFill>
-                      <a:srgbClr val="141820"/>
-                    </a:solidFill>
-                  </a:tcPr>
-                </a:tc>
-                <a:tc>
-                  <a:txBody>
-                    <a:bodyPr/>
-                    <a:lstStyle/>
-                    <a:p>
-                      <a:pPr algn="ctr">
-                        <a:defRPr sz="800">
-                          <a:solidFill>
-                            <a:srgbClr val="F0F2F5"/>
-                          </a:solidFill>
-                        </a:defRPr>
-                      </a:pPr>
-                      <a:r>
-                        <a:t>19.98</a:t>
-                      </a:r>
-                    </a:p>
-                  </a:txBody>
-                  <a:tcPr anchor="ctr">
-                    <a:solidFill>
-                      <a:srgbClr val="141820"/>
-                    </a:solidFill>
-                  </a:tcPr>
-                </a:tc>
-                <a:tc>
-                  <a:txBody>
-                    <a:bodyPr/>
-                    <a:lstStyle/>
-                    <a:p>
-                      <a:pPr algn="ctr">
-                        <a:defRPr sz="800">
-                          <a:solidFill>
-                            <a:srgbClr val="F0F2F5"/>
-                          </a:solidFill>
-                        </a:defRPr>
-                      </a:pPr>
-                      <a:r>
-                        <a:t>21.65</a:t>
+                        <a:t>FUT_EEP_270330</a:t>
+                      </a:r>
+                    </a:p>
+                  </a:txBody>
+                  <a:tcPr anchor="ctr">
+                    <a:solidFill>
+                      <a:srgbClr val="141820"/>
+                    </a:solidFill>
+                  </a:tcPr>
+                </a:tc>
+                <a:tc>
+                  <a:txBody>
+                    <a:bodyPr/>
+                    <a:lstStyle/>
+                    <a:p>
+                      <a:pPr algn="ctr">
+                        <a:defRPr sz="800">
+                          <a:solidFill>
+                            <a:srgbClr val="F0F2F5"/>
+                          </a:solidFill>
+                        </a:defRPr>
+                      </a:pPr>
+                      <a:r>
+                        <a:t>Power East Peak (Monthly)</a:t>
+                      </a:r>
+                    </a:p>
+                  </a:txBody>
+                  <a:tcPr anchor="ctr">
+                    <a:solidFill>
+                      <a:srgbClr val="141820"/>
+                    </a:solidFill>
+                  </a:tcPr>
+                </a:tc>
+                <a:tc>
+                  <a:txBody>
+                    <a:bodyPr/>
+                    <a:lstStyle/>
+                    <a:p>
+                      <a:pPr algn="ctr">
+                        <a:defRPr sz="800">
+                          <a:solidFill>
+                            <a:srgbClr val="F0F2F5"/>
+                          </a:solidFill>
+                        </a:defRPr>
+                      </a:pPr>
+                      <a:r>
+                        <a:t>202703</a:t>
+                      </a:r>
+                    </a:p>
+                  </a:txBody>
+                  <a:tcPr anchor="ctr">
+                    <a:solidFill>
+                      <a:srgbClr val="141820"/>
+                    </a:solidFill>
+                  </a:tcPr>
+                </a:tc>
+                <a:tc>
+                  <a:txBody>
+                    <a:bodyPr/>
+                    <a:lstStyle/>
+                    <a:p>
+                      <a:pPr algn="ctr">
+                        <a:defRPr sz="800">
+                          <a:solidFill>
+                            <a:srgbClr val="F0F2F5"/>
+                          </a:solidFill>
+                        </a:defRPr>
+                      </a:pPr>
+                      <a:r>
+                        <a:t>21.19</a:t>
+                      </a:r>
+                    </a:p>
+                  </a:txBody>
+                  <a:tcPr anchor="ctr">
+                    <a:solidFill>
+                      <a:srgbClr val="141820"/>
+                    </a:solidFill>
+                  </a:tcPr>
+                </a:tc>
+                <a:tc>
+                  <a:txBody>
+                    <a:bodyPr/>
+                    <a:lstStyle/>
+                    <a:p>
+                      <a:pPr algn="ctr">
+                        <a:defRPr sz="800">
+                          <a:solidFill>
+                            <a:srgbClr val="F0F2F5"/>
+                          </a:solidFill>
+                        </a:defRPr>
+                      </a:pPr>
+                      <a:r>
+                        <a:t>22.38</a:t>
                       </a:r>
                     </a:p>
                   </a:txBody>
@@ -8778,7 +8778,7 @@
                         </a:defRPr>
                       </a:pPr>
                       <a:r>
-                        <a:t>-1.67</a:t>
+                        <a:t>-1.19</a:t>
                       </a:r>
                     </a:p>
                   </a:txBody>
@@ -8801,7 +8801,7 @@
                         </a:defRPr>
                       </a:pPr>
                       <a:r>
-                        <a:t>-7.71%</a:t>
+                        <a:t>-5.32%</a:t>
                       </a:r>
                     </a:p>
                   </a:txBody>
@@ -8826,7 +8826,7 @@
                         </a:defRPr>
                       </a:pPr>
                       <a:r>
-                        <a:t>FUT_EEP_260528</a:t>
+                        <a:t>FUT_EWB_260828</a:t>
                       </a:r>
                     </a:p>
                   </a:txBody>
@@ -8849,7 +8849,7 @@
                         </a:defRPr>
                       </a:pPr>
                       <a:r>
-                        <a:t>Power East Peak (Monthly)</a:t>
+                        <a:t>Power West Base (Monthly)</a:t>
                       </a:r>
                     </a:p>
                   </a:txBody>
@@ -8872,7 +8872,7 @@
                         </a:defRPr>
                       </a:pPr>
                       <a:r>
-                        <a:t>202605</a:t>
+                        <a:t>202608</a:t>
                       </a:r>
                     </a:p>
                   </a:txBody>
@@ -8895,7 +8895,7 @@
                         </a:defRPr>
                       </a:pPr>
                       <a:r>
-                        <a:t>22.84</a:t>
+                        <a:t>19.01</a:t>
                       </a:r>
                     </a:p>
                   </a:txBody>
@@ -8918,7 +8918,7 @@
                         </a:defRPr>
                       </a:pPr>
                       <a:r>
-                        <a:t>24.48</a:t>
+                        <a:t>20.20</a:t>
                       </a:r>
                     </a:p>
                   </a:txBody>
@@ -8941,7 +8941,7 @@
                         </a:defRPr>
                       </a:pPr>
                       <a:r>
-                        <a:t>-1.64</a:t>
+                        <a:t>-1.19</a:t>
                       </a:r>
                     </a:p>
                   </a:txBody>
@@ -8964,7 +8964,7 @@
                         </a:defRPr>
                       </a:pPr>
                       <a:r>
-                        <a:t>-6.70%</a:t>
+                        <a:t>-5.89%</a:t>
                       </a:r>
                     </a:p>
                   </a:txBody>
@@ -8989,99 +8989,99 @@
                         </a:defRPr>
                       </a:pPr>
                       <a:r>
-                        <a:t>FUT_EEB_260529</a:t>
-                      </a:r>
-                    </a:p>
-                  </a:txBody>
-                  <a:tcPr anchor="ctr">
-                    <a:solidFill>
-                      <a:srgbClr val="141820"/>
-                    </a:solidFill>
-                  </a:tcPr>
-                </a:tc>
-                <a:tc>
-                  <a:txBody>
-                    <a:bodyPr/>
-                    <a:lstStyle/>
-                    <a:p>
-                      <a:pPr algn="ctr">
-                        <a:defRPr sz="800">
-                          <a:solidFill>
-                            <a:srgbClr val="F0F2F5"/>
-                          </a:solidFill>
-                        </a:defRPr>
-                      </a:pPr>
-                      <a:r>
-                        <a:t>Power East Base (Monthly)</a:t>
-                      </a:r>
-                    </a:p>
-                  </a:txBody>
-                  <a:tcPr anchor="ctr">
-                    <a:solidFill>
-                      <a:srgbClr val="141820"/>
-                    </a:solidFill>
-                  </a:tcPr>
-                </a:tc>
-                <a:tc>
-                  <a:txBody>
-                    <a:bodyPr/>
-                    <a:lstStyle/>
-                    <a:p>
-                      <a:pPr algn="ctr">
-                        <a:defRPr sz="800">
-                          <a:solidFill>
-                            <a:srgbClr val="F0F2F5"/>
-                          </a:solidFill>
-                        </a:defRPr>
-                      </a:pPr>
-                      <a:r>
-                        <a:t>202605</a:t>
-                      </a:r>
-                    </a:p>
-                  </a:txBody>
-                  <a:tcPr anchor="ctr">
-                    <a:solidFill>
-                      <a:srgbClr val="141820"/>
-                    </a:solidFill>
-                  </a:tcPr>
-                </a:tc>
-                <a:tc>
-                  <a:txBody>
-                    <a:bodyPr/>
-                    <a:lstStyle/>
-                    <a:p>
-                      <a:pPr algn="ctr">
-                        <a:defRPr sz="800">
-                          <a:solidFill>
-                            <a:srgbClr val="F0F2F5"/>
-                          </a:solidFill>
-                        </a:defRPr>
-                      </a:pPr>
-                      <a:r>
-                        <a:t>20.51</a:t>
-                      </a:r>
-                    </a:p>
-                  </a:txBody>
-                  <a:tcPr anchor="ctr">
-                    <a:solidFill>
-                      <a:srgbClr val="141820"/>
-                    </a:solidFill>
-                  </a:tcPr>
-                </a:tc>
-                <a:tc>
-                  <a:txBody>
-                    <a:bodyPr/>
-                    <a:lstStyle/>
-                    <a:p>
-                      <a:pPr algn="ctr">
-                        <a:defRPr sz="800">
-                          <a:solidFill>
-                            <a:srgbClr val="F0F2F5"/>
-                          </a:solidFill>
-                        </a:defRPr>
-                      </a:pPr>
-                      <a:r>
-                        <a:t>22.14</a:t>
+                        <a:t>FUT_EEP_261029</a:t>
+                      </a:r>
+                    </a:p>
+                  </a:txBody>
+                  <a:tcPr anchor="ctr">
+                    <a:solidFill>
+                      <a:srgbClr val="141820"/>
+                    </a:solidFill>
+                  </a:tcPr>
+                </a:tc>
+                <a:tc>
+                  <a:txBody>
+                    <a:bodyPr/>
+                    <a:lstStyle/>
+                    <a:p>
+                      <a:pPr algn="ctr">
+                        <a:defRPr sz="800">
+                          <a:solidFill>
+                            <a:srgbClr val="F0F2F5"/>
+                          </a:solidFill>
+                        </a:defRPr>
+                      </a:pPr>
+                      <a:r>
+                        <a:t>Power East Peak (Monthly)</a:t>
+                      </a:r>
+                    </a:p>
+                  </a:txBody>
+                  <a:tcPr anchor="ctr">
+                    <a:solidFill>
+                      <a:srgbClr val="141820"/>
+                    </a:solidFill>
+                  </a:tcPr>
+                </a:tc>
+                <a:tc>
+                  <a:txBody>
+                    <a:bodyPr/>
+                    <a:lstStyle/>
+                    <a:p>
+                      <a:pPr algn="ctr">
+                        <a:defRPr sz="800">
+                          <a:solidFill>
+                            <a:srgbClr val="F0F2F5"/>
+                          </a:solidFill>
+                        </a:defRPr>
+                      </a:pPr>
+                      <a:r>
+                        <a:t>202610</a:t>
+                      </a:r>
+                    </a:p>
+                  </a:txBody>
+                  <a:tcPr anchor="ctr">
+                    <a:solidFill>
+                      <a:srgbClr val="141820"/>
+                    </a:solidFill>
+                  </a:tcPr>
+                </a:tc>
+                <a:tc>
+                  <a:txBody>
+                    <a:bodyPr/>
+                    <a:lstStyle/>
+                    <a:p>
+                      <a:pPr algn="ctr">
+                        <a:defRPr sz="800">
+                          <a:solidFill>
+                            <a:srgbClr val="F0F2F5"/>
+                          </a:solidFill>
+                        </a:defRPr>
+                      </a:pPr>
+                      <a:r>
+                        <a:t>22.52</a:t>
+                      </a:r>
+                    </a:p>
+                  </a:txBody>
+                  <a:tcPr anchor="ctr">
+                    <a:solidFill>
+                      <a:srgbClr val="141820"/>
+                    </a:solidFill>
+                  </a:tcPr>
+                </a:tc>
+                <a:tc>
+                  <a:txBody>
+                    <a:bodyPr/>
+                    <a:lstStyle/>
+                    <a:p>
+                      <a:pPr algn="ctr">
+                        <a:defRPr sz="800">
+                          <a:solidFill>
+                            <a:srgbClr val="F0F2F5"/>
+                          </a:solidFill>
+                        </a:defRPr>
+                      </a:pPr>
+                      <a:r>
+                        <a:t>23.67</a:t>
                       </a:r>
                     </a:p>
                   </a:txBody>
@@ -9104,7 +9104,7 @@
                         </a:defRPr>
                       </a:pPr>
                       <a:r>
-                        <a:t>-1.63</a:t>
+                        <a:t>-1.15</a:t>
                       </a:r>
                     </a:p>
                   </a:txBody>
@@ -9127,7 +9127,7 @@
                         </a:defRPr>
                       </a:pPr>
                       <a:r>
-                        <a:t>-7.36%</a:t>
+                        <a:t>-4.86%</a:t>
                       </a:r>
                     </a:p>
                   </a:txBody>
@@ -9152,7 +9152,7 @@
                         </a:defRPr>
                       </a:pPr>
                       <a:r>
-                        <a:t>FUT_EWBW_260409</a:t>
+                        <a:t>FUT_EEB_261030</a:t>
                       </a:r>
                     </a:p>
                   </a:txBody>
@@ -9175,7 +9175,7 @@
                         </a:defRPr>
                       </a:pPr>
                       <a:r>
-                        <a:t>Power West Base (Weekly)</a:t>
+                        <a:t>Power East Base (Monthly)</a:t>
                       </a:r>
                     </a:p>
                   </a:txBody>
@@ -9198,7 +9198,7 @@
                         </a:defRPr>
                       </a:pPr>
                       <a:r>
-                        <a:t>20260410</a:t>
+                        <a:t>202610</a:t>
                       </a:r>
                     </a:p>
                   </a:txBody>
@@ -9221,7 +9221,7 @@
                         </a:defRPr>
                       </a:pPr>
                       <a:r>
-                        <a:t>15.32</a:t>
+                        <a:t>19.62</a:t>
                       </a:r>
                     </a:p>
                   </a:txBody>
@@ -9244,7 +9244,7 @@
                         </a:defRPr>
                       </a:pPr>
                       <a:r>
-                        <a:t>16.90</a:t>
+                        <a:t>20.71</a:t>
                       </a:r>
                     </a:p>
                   </a:txBody>
@@ -9267,7 +9267,7 @@
                         </a:defRPr>
                       </a:pPr>
                       <a:r>
-                        <a:t>-1.58</a:t>
+                        <a:t>-1.09</a:t>
                       </a:r>
                     </a:p>
                   </a:txBody>
@@ -9290,7 +9290,7 @@
                         </a:defRPr>
                       </a:pPr>
                       <a:r>
-                        <a:t>-9.35%</a:t>
+                        <a:t>-5.26%</a:t>
                       </a:r>
                     </a:p>
                   </a:txBody>
@@ -9315,7 +9315,7 @@
                         </a:defRPr>
                       </a:pPr>
                       <a:r>
-                        <a:t>FUT_EWB_261230</a:t>
+                        <a:t>FUT_EWB_261030</a:t>
                       </a:r>
                     </a:p>
                   </a:txBody>
@@ -9361,53 +9361,53 @@
                         </a:defRPr>
                       </a:pPr>
                       <a:r>
-                        <a:t>202612</a:t>
-                      </a:r>
-                    </a:p>
-                  </a:txBody>
-                  <a:tcPr anchor="ctr">
-                    <a:solidFill>
-                      <a:srgbClr val="141820"/>
-                    </a:solidFill>
-                  </a:tcPr>
-                </a:tc>
-                <a:tc>
-                  <a:txBody>
-                    <a:bodyPr/>
-                    <a:lstStyle/>
-                    <a:p>
-                      <a:pPr algn="ctr">
-                        <a:defRPr sz="800">
-                          <a:solidFill>
-                            <a:srgbClr val="F0F2F5"/>
-                          </a:solidFill>
-                        </a:defRPr>
-                      </a:pPr>
-                      <a:r>
-                        <a:t>18.66</a:t>
-                      </a:r>
-                    </a:p>
-                  </a:txBody>
-                  <a:tcPr anchor="ctr">
-                    <a:solidFill>
-                      <a:srgbClr val="141820"/>
-                    </a:solidFill>
-                  </a:tcPr>
-                </a:tc>
-                <a:tc>
-                  <a:txBody>
-                    <a:bodyPr/>
-                    <a:lstStyle/>
-                    <a:p>
-                      <a:pPr algn="ctr">
-                        <a:defRPr sz="800">
-                          <a:solidFill>
-                            <a:srgbClr val="F0F2F5"/>
-                          </a:solidFill>
-                        </a:defRPr>
-                      </a:pPr>
-                      <a:r>
-                        <a:t>20.15</a:t>
+                        <a:t>202610</a:t>
+                      </a:r>
+                    </a:p>
+                  </a:txBody>
+                  <a:tcPr anchor="ctr">
+                    <a:solidFill>
+                      <a:srgbClr val="141820"/>
+                    </a:solidFill>
+                  </a:tcPr>
+                </a:tc>
+                <a:tc>
+                  <a:txBody>
+                    <a:bodyPr/>
+                    <a:lstStyle/>
+                    <a:p>
+                      <a:pPr algn="ctr">
+                        <a:defRPr sz="800">
+                          <a:solidFill>
+                            <a:srgbClr val="F0F2F5"/>
+                          </a:solidFill>
+                        </a:defRPr>
+                      </a:pPr>
+                      <a:r>
+                        <a:t>16.72</a:t>
+                      </a:r>
+                    </a:p>
+                  </a:txBody>
+                  <a:tcPr anchor="ctr">
+                    <a:solidFill>
+                      <a:srgbClr val="141820"/>
+                    </a:solidFill>
+                  </a:tcPr>
+                </a:tc>
+                <a:tc>
+                  <a:txBody>
+                    <a:bodyPr/>
+                    <a:lstStyle/>
+                    <a:p>
+                      <a:pPr algn="ctr">
+                        <a:defRPr sz="800">
+                          <a:solidFill>
+                            <a:srgbClr val="F0F2F5"/>
+                          </a:solidFill>
+                        </a:defRPr>
+                      </a:pPr>
+                      <a:r>
+                        <a:t>17.81</a:t>
                       </a:r>
                     </a:p>
                   </a:txBody>
@@ -9430,7 +9430,7 @@
                         </a:defRPr>
                       </a:pPr>
                       <a:r>
-                        <a:t>-1.49</a:t>
+                        <a:t>-1.09</a:t>
                       </a:r>
                     </a:p>
                   </a:txBody>
@@ -9453,7 +9453,7 @@
                         </a:defRPr>
                       </a:pPr>
                       <a:r>
-                        <a:t>-7.39%</a:t>
+                        <a:t>-6.12%</a:t>
                       </a:r>
                     </a:p>
                   </a:txBody>
@@ -9478,7 +9478,7 @@
                         </a:defRPr>
                       </a:pPr>
                       <a:r>
-                        <a:t>FUT_EWB_260428</a:t>
+                        <a:t>FUT_EEB_260828</a:t>
                       </a:r>
                     </a:p>
                   </a:txBody>
@@ -9501,7 +9501,7 @@
                         </a:defRPr>
                       </a:pPr>
                       <a:r>
-                        <a:t>Power West Base (Monthly)</a:t>
+                        <a:t>Power East Base (Monthly)</a:t>
                       </a:r>
                     </a:p>
                   </a:txBody>
@@ -9524,7 +9524,7 @@
                         </a:defRPr>
                       </a:pPr>
                       <a:r>
-                        <a:t>202604</a:t>
+                        <a:t>202608</a:t>
                       </a:r>
                     </a:p>
                   </a:txBody>
@@ -9547,7 +9547,7 @@
                         </a:defRPr>
                       </a:pPr>
                       <a:r>
-                        <a:t>15.57</a:t>
+                        <a:t>22.14</a:t>
                       </a:r>
                     </a:p>
                   </a:txBody>
@@ -9570,7 +9570,7 @@
                         </a:defRPr>
                       </a:pPr>
                       <a:r>
-                        <a:t>17.04</a:t>
+                        <a:t>23.19</a:t>
                       </a:r>
                     </a:p>
                   </a:txBody>
@@ -9593,7 +9593,7 @@
                         </a:defRPr>
                       </a:pPr>
                       <a:r>
-                        <a:t>-1.47</a:t>
+                        <a:t>-1.05</a:t>
                       </a:r>
                     </a:p>
                   </a:txBody>
@@ -9616,7 +9616,7 @@
                         </a:defRPr>
                       </a:pPr>
                       <a:r>
-                        <a:t>-8.63%</a:t>
+                        <a:t>-4.53%</a:t>
                       </a:r>
                     </a:p>
                   </a:txBody>
@@ -9641,30 +9641,30 @@
                         </a:defRPr>
                       </a:pPr>
                       <a:r>
-                        <a:t>FUT_EWP_260428</a:t>
-                      </a:r>
-                    </a:p>
-                  </a:txBody>
-                  <a:tcPr anchor="ctr">
-                    <a:solidFill>
-                      <a:srgbClr val="141820"/>
-                    </a:solidFill>
-                  </a:tcPr>
-                </a:tc>
-                <a:tc>
-                  <a:txBody>
-                    <a:bodyPr/>
-                    <a:lstStyle/>
-                    <a:p>
-                      <a:pPr algn="ctr">
-                        <a:defRPr sz="800">
-                          <a:solidFill>
-                            <a:srgbClr val="F0F2F5"/>
-                          </a:solidFill>
-                        </a:defRPr>
-                      </a:pPr>
-                      <a:r>
-                        <a:t>Power West Peak (Monthly)</a:t>
+                        <a:t>FUT_EEPY_260326</a:t>
+                      </a:r>
+                    </a:p>
+                  </a:txBody>
+                  <a:tcPr anchor="ctr">
+                    <a:solidFill>
+                      <a:srgbClr val="141820"/>
+                    </a:solidFill>
+                  </a:tcPr>
+                </a:tc>
+                <a:tc>
+                  <a:txBody>
+                    <a:bodyPr/>
+                    <a:lstStyle/>
+                    <a:p>
+                      <a:pPr algn="ctr">
+                        <a:defRPr sz="800">
+                          <a:solidFill>
+                            <a:srgbClr val="F0F2F5"/>
+                          </a:solidFill>
+                        </a:defRPr>
+                      </a:pPr>
+                      <a:r>
+                        <a:t>Power East Peak (Yearly)</a:t>
                       </a:r>
                     </a:p>
                   </a:txBody>
@@ -9710,30 +9710,30 @@
                         </a:defRPr>
                       </a:pPr>
                       <a:r>
-                        <a:t>16.17</a:t>
-                      </a:r>
-                    </a:p>
-                  </a:txBody>
-                  <a:tcPr anchor="ctr">
-                    <a:solidFill>
-                      <a:srgbClr val="141820"/>
-                    </a:solidFill>
-                  </a:tcPr>
-                </a:tc>
-                <a:tc>
-                  <a:txBody>
-                    <a:bodyPr/>
-                    <a:lstStyle/>
-                    <a:p>
-                      <a:pPr algn="ctr">
-                        <a:defRPr sz="800">
-                          <a:solidFill>
-                            <a:srgbClr val="F0F2F5"/>
-                          </a:solidFill>
-                        </a:defRPr>
-                      </a:pPr>
-                      <a:r>
-                        <a:t>17.60</a:t>
+                        <a:t>24.23</a:t>
+                      </a:r>
+                    </a:p>
+                  </a:txBody>
+                  <a:tcPr anchor="ctr">
+                    <a:solidFill>
+                      <a:srgbClr val="141820"/>
+                    </a:solidFill>
+                  </a:tcPr>
+                </a:tc>
+                <a:tc>
+                  <a:txBody>
+                    <a:bodyPr/>
+                    <a:lstStyle/>
+                    <a:p>
+                      <a:pPr algn="ctr">
+                        <a:defRPr sz="800">
+                          <a:solidFill>
+                            <a:srgbClr val="F0F2F5"/>
+                          </a:solidFill>
+                        </a:defRPr>
+                      </a:pPr>
+                      <a:r>
+                        <a:t>25.23</a:t>
                       </a:r>
                     </a:p>
                   </a:txBody>
@@ -9756,7 +9756,7 @@
                         </a:defRPr>
                       </a:pPr>
                       <a:r>
-                        <a:t>-1.43</a:t>
+                        <a:t>-1.00</a:t>
                       </a:r>
                     </a:p>
                   </a:txBody>
@@ -9779,7 +9779,7 @@
                         </a:defRPr>
                       </a:pPr>
                       <a:r>
-                        <a:t>-8.12%</a:t>
+                        <a:t>-3.96%</a:t>
                       </a:r>
                     </a:p>
                   </a:txBody>
@@ -9804,7 +9804,7 @@
                         </a:defRPr>
                       </a:pPr>
                       <a:r>
-                        <a:t>FUT_EEBW_260416</a:t>
+                        <a:t>FUT_EEP_270225</a:t>
                       </a:r>
                     </a:p>
                   </a:txBody>
@@ -9827,7 +9827,7 @@
                         </a:defRPr>
                       </a:pPr>
                       <a:r>
-                        <a:t>Power East Base (Weekly)</a:t>
+                        <a:t>Power East Peak (Monthly)</a:t>
                       </a:r>
                     </a:p>
                   </a:txBody>
@@ -9850,7 +9850,7 @@
                         </a:defRPr>
                       </a:pPr>
                       <a:r>
-                        <a:t>20260417</a:t>
+                        <a:t>202702</a:t>
                       </a:r>
                     </a:p>
                   </a:txBody>
@@ -9873,7 +9873,7 @@
                         </a:defRPr>
                       </a:pPr>
                       <a:r>
-                        <a:t>19.54</a:t>
+                        <a:t>23.89</a:t>
                       </a:r>
                     </a:p>
                   </a:txBody>
@@ -9896,7 +9896,7 @@
                         </a:defRPr>
                       </a:pPr>
                       <a:r>
-                        <a:t>20.95</a:t>
+                        <a:t>24.89</a:t>
                       </a:r>
                     </a:p>
                   </a:txBody>
@@ -9919,7 +9919,7 @@
                         </a:defRPr>
                       </a:pPr>
                       <a:r>
-                        <a:t>-1.41</a:t>
+                        <a:t>-1.00</a:t>
                       </a:r>
                     </a:p>
                   </a:txBody>
@@ -9942,7 +9942,7 @@
                         </a:defRPr>
                       </a:pPr>
                       <a:r>
-                        <a:t>-6.73%</a:t>
+                        <a:t>-4.02%</a:t>
                       </a:r>
                     </a:p>
                   </a:txBody>
@@ -9967,7 +9967,7 @@
                         </a:defRPr>
                       </a:pPr>
                       <a:r>
-                        <a:t>FUT_EWB_260529</a:t>
+                        <a:t>FUT_EWB_261127</a:t>
                       </a:r>
                     </a:p>
                   </a:txBody>
@@ -10013,53 +10013,53 @@
                         </a:defRPr>
                       </a:pPr>
                       <a:r>
-                        <a:t>202605</a:t>
-                      </a:r>
-                    </a:p>
-                  </a:txBody>
-                  <a:tcPr anchor="ctr">
-                    <a:solidFill>
-                      <a:srgbClr val="141820"/>
-                    </a:solidFill>
-                  </a:tcPr>
-                </a:tc>
-                <a:tc>
-                  <a:txBody>
-                    <a:bodyPr/>
-                    <a:lstStyle/>
-                    <a:p>
-                      <a:pPr algn="ctr">
-                        <a:defRPr sz="800">
-                          <a:solidFill>
-                            <a:srgbClr val="F0F2F5"/>
-                          </a:solidFill>
-                        </a:defRPr>
-                      </a:pPr>
-                      <a:r>
-                        <a:t>15.45</a:t>
-                      </a:r>
-                    </a:p>
-                  </a:txBody>
-                  <a:tcPr anchor="ctr">
-                    <a:solidFill>
-                      <a:srgbClr val="141820"/>
-                    </a:solidFill>
-                  </a:tcPr>
-                </a:tc>
-                <a:tc>
-                  <a:txBody>
-                    <a:bodyPr/>
-                    <a:lstStyle/>
-                    <a:p>
-                      <a:pPr algn="ctr">
-                        <a:defRPr sz="800">
-                          <a:solidFill>
-                            <a:srgbClr val="F0F2F5"/>
-                          </a:solidFill>
-                        </a:defRPr>
-                      </a:pPr>
-                      <a:r>
-                        <a:t>16.82</a:t>
+                        <a:t>202611</a:t>
+                      </a:r>
+                    </a:p>
+                  </a:txBody>
+                  <a:tcPr anchor="ctr">
+                    <a:solidFill>
+                      <a:srgbClr val="141820"/>
+                    </a:solidFill>
+                  </a:tcPr>
+                </a:tc>
+                <a:tc>
+                  <a:txBody>
+                    <a:bodyPr/>
+                    <a:lstStyle/>
+                    <a:p>
+                      <a:pPr algn="ctr">
+                        <a:defRPr sz="800">
+                          <a:solidFill>
+                            <a:srgbClr val="F0F2F5"/>
+                          </a:solidFill>
+                        </a:defRPr>
+                      </a:pPr>
+                      <a:r>
+                        <a:t>16.77</a:t>
+                      </a:r>
+                    </a:p>
+                  </a:txBody>
+                  <a:tcPr anchor="ctr">
+                    <a:solidFill>
+                      <a:srgbClr val="141820"/>
+                    </a:solidFill>
+                  </a:tcPr>
+                </a:tc>
+                <a:tc>
+                  <a:txBody>
+                    <a:bodyPr/>
+                    <a:lstStyle/>
+                    <a:p>
+                      <a:pPr algn="ctr">
+                        <a:defRPr sz="800">
+                          <a:solidFill>
+                            <a:srgbClr val="F0F2F5"/>
+                          </a:solidFill>
+                        </a:defRPr>
+                      </a:pPr>
+                      <a:r>
+                        <a:t>17.77</a:t>
                       </a:r>
                     </a:p>
                   </a:txBody>
@@ -10082,7 +10082,7 @@
                         </a:defRPr>
                       </a:pPr>
                       <a:r>
-                        <a:t>-1.37</a:t>
+                        <a:t>-1.00</a:t>
                       </a:r>
                     </a:p>
                   </a:txBody>
@@ -10105,7 +10105,7 @@
                         </a:defRPr>
                       </a:pPr>
                       <a:r>
-                        <a:t>-8.15%</a:t>
+                        <a:t>-5.63%</a:t>
                       </a:r>
                     </a:p>
                   </a:txBody>

--- a/docs/chartpack/latest.pptx
+++ b/docs/chartpack/latest.pptx
@@ -3210,7 +3210,7 @@
               </a:defRPr>
             </a:pPr>
             <a:r>
-              <a:t>Trade Date: 2026-03-25</a:t>
+              <a:t>Trade Date: 2026-03-26</a:t>
             </a:r>
           </a:p>
         </p:txBody>
@@ -3505,7 +3505,7 @@
               </a:defRPr>
             </a:pPr>
             <a:r>
-              <a:t>East/West Base &amp; Peak monthly contracts (2026-03-25)</a:t>
+              <a:t>East/West Base &amp; Peak monthly contracts (2026-03-26)</a:t>
             </a:r>
           </a:p>
         </p:txBody>
@@ -3711,7 +3711,7 @@
               </a:defRPr>
             </a:pPr>
             <a:r>
-              <a:t>Front-month settlement prices as of 2026-03-25</a:t>
+              <a:t>Front-month settlement prices as of 2026-03-26</a:t>
             </a:r>
           </a:p>
         </p:txBody>
@@ -3966,30 +3966,30 @@
                         </a:defRPr>
                       </a:pPr>
                       <a:r>
-                        <a:t>202604</a:t>
-                      </a:r>
-                    </a:p>
-                  </a:txBody>
-                  <a:tcPr anchor="ctr">
-                    <a:solidFill>
-                      <a:srgbClr val="141820"/>
-                    </a:solidFill>
-                  </a:tcPr>
-                </a:tc>
-                <a:tc>
-                  <a:txBody>
-                    <a:bodyPr/>
-                    <a:lstStyle/>
-                    <a:p>
-                      <a:pPr algn="ctr">
-                        <a:defRPr sz="800">
-                          <a:solidFill>
-                            <a:srgbClr val="F0F2F5"/>
-                          </a:solidFill>
-                        </a:defRPr>
-                      </a:pPr>
-                      <a:r>
-                        <a:t>112,900.00</a:t>
+                        <a:t>202605</a:t>
+                      </a:r>
+                    </a:p>
+                  </a:txBody>
+                  <a:tcPr anchor="ctr">
+                    <a:solidFill>
+                      <a:srgbClr val="141820"/>
+                    </a:solidFill>
+                  </a:tcPr>
+                </a:tc>
+                <a:tc>
+                  <a:txBody>
+                    <a:bodyPr/>
+                    <a:lstStyle/>
+                    <a:p>
+                      <a:pPr algn="ctr">
+                        <a:defRPr sz="800">
+                          <a:solidFill>
+                            <a:srgbClr val="F0F2F5"/>
+                          </a:solidFill>
+                        </a:defRPr>
+                      </a:pPr>
+                      <a:r>
+                        <a:t>108,200.00</a:t>
                       </a:r>
                     </a:p>
                   </a:txBody>
@@ -4030,35 +4030,35 @@
                       <a:pPr algn="ctr">
                         <a:defRPr sz="800">
                           <a:solidFill>
-                            <a:srgbClr val="F0F2F5"/>
-                          </a:solidFill>
-                        </a:defRPr>
-                      </a:pPr>
-                      <a:r>
-                        <a:t>+0.00</a:t>
-                      </a:r>
-                    </a:p>
-                  </a:txBody>
-                  <a:tcPr anchor="ctr">
-                    <a:solidFill>
-                      <a:srgbClr val="141820"/>
-                    </a:solidFill>
-                  </a:tcPr>
-                </a:tc>
-                <a:tc>
-                  <a:txBody>
-                    <a:bodyPr/>
-                    <a:lstStyle/>
-                    <a:p>
-                      <a:pPr algn="ctr">
-                        <a:defRPr sz="800">
-                          <a:solidFill>
-                            <a:srgbClr val="F0F2F5"/>
-                          </a:solidFill>
-                        </a:defRPr>
-                      </a:pPr>
-                      <a:r>
-                        <a:t>+0.00%</a:t>
+                            <a:srgbClr val="EF4444"/>
+                          </a:solidFill>
+                        </a:defRPr>
+                      </a:pPr>
+                      <a:r>
+                        <a:t>-4700.00</a:t>
+                      </a:r>
+                    </a:p>
+                  </a:txBody>
+                  <a:tcPr anchor="ctr">
+                    <a:solidFill>
+                      <a:srgbClr val="141820"/>
+                    </a:solidFill>
+                  </a:tcPr>
+                </a:tc>
+                <a:tc>
+                  <a:txBody>
+                    <a:bodyPr/>
+                    <a:lstStyle/>
+                    <a:p>
+                      <a:pPr algn="ctr">
+                        <a:defRPr sz="800">
+                          <a:solidFill>
+                            <a:srgbClr val="EF4444"/>
+                          </a:solidFill>
+                        </a:defRPr>
+                      </a:pPr>
+                      <a:r>
+                        <a:t>-4.16%</a:t>
                       </a:r>
                     </a:p>
                   </a:txBody>
@@ -4129,7 +4129,7 @@
                         </a:defRPr>
                       </a:pPr>
                       <a:r>
-                        <a:t>202604</a:t>
+                        <a:t>202605</a:t>
                       </a:r>
                     </a:p>
                   </a:txBody>
@@ -4292,7 +4292,7 @@
                         </a:defRPr>
                       </a:pPr>
                       <a:r>
-                        <a:t>202604</a:t>
+                        <a:t>202605</a:t>
                       </a:r>
                     </a:p>
                   </a:txBody>
@@ -4455,7 +4455,7 @@
                         </a:defRPr>
                       </a:pPr>
                       <a:r>
-                        <a:t>202604</a:t>
+                        <a:t>202605</a:t>
                       </a:r>
                     </a:p>
                   </a:txBody>
@@ -4618,7 +4618,7 @@
                         </a:defRPr>
                       </a:pPr>
                       <a:r>
-                        <a:t>202604</a:t>
+                        <a:t>202605</a:t>
                       </a:r>
                     </a:p>
                   </a:txBody>
@@ -4804,7 +4804,7 @@
                         </a:defRPr>
                       </a:pPr>
                       <a:r>
-                        <a:t>135,080.00</a:t>
+                        <a:t>132,650.00</a:t>
                       </a:r>
                     </a:p>
                   </a:txBody>
@@ -4845,12 +4845,12 @@
                       <a:pPr algn="ctr">
                         <a:defRPr sz="800">
                           <a:solidFill>
-                            <a:srgbClr val="10B981"/>
-                          </a:solidFill>
-                        </a:defRPr>
-                      </a:pPr>
-                      <a:r>
-                        <a:t>+400.00</a:t>
+                            <a:srgbClr val="EF4444"/>
+                          </a:solidFill>
+                        </a:defRPr>
+                      </a:pPr>
+                      <a:r>
+                        <a:t>-2430.00</a:t>
                       </a:r>
                     </a:p>
                   </a:txBody>
@@ -4868,12 +4868,12 @@
                       <a:pPr algn="ctr">
                         <a:defRPr sz="800">
                           <a:solidFill>
-                            <a:srgbClr val="10B981"/>
-                          </a:solidFill>
-                        </a:defRPr>
-                      </a:pPr>
-                      <a:r>
-                        <a:t>+0.30%</a:t>
+                            <a:srgbClr val="EF4444"/>
+                          </a:solidFill>
+                        </a:defRPr>
+                      </a:pPr>
+                      <a:r>
+                        <a:t>-1.80%</a:t>
                       </a:r>
                     </a:p>
                   </a:txBody>
@@ -4967,7 +4967,7 @@
                         </a:defRPr>
                       </a:pPr>
                       <a:r>
-                        <a:t>3,189.00</a:t>
+                        <a:t>3,102.00</a:t>
                       </a:r>
                     </a:p>
                   </a:txBody>
@@ -5013,7 +5013,7 @@
                         </a:defRPr>
                       </a:pPr>
                       <a:r>
-                        <a:t>-146.00</a:t>
+                        <a:t>-87.00</a:t>
                       </a:r>
                     </a:p>
                   </a:txBody>
@@ -5036,7 +5036,7 @@
                         </a:defRPr>
                       </a:pPr>
                       <a:r>
-                        <a:t>-4.38%</a:t>
+                        <a:t>-2.73%</a:t>
                       </a:r>
                     </a:p>
                   </a:txBody>
@@ -5130,7 +5130,7 @@
                         </a:defRPr>
                       </a:pPr>
                       <a:r>
-                        <a:t>23,142.00</a:t>
+                        <a:t>23,379.00</a:t>
                       </a:r>
                     </a:p>
                   </a:txBody>
@@ -5176,7 +5176,7 @@
                         </a:defRPr>
                       </a:pPr>
                       <a:r>
-                        <a:t>+746.00</a:t>
+                        <a:t>+237.00</a:t>
                       </a:r>
                     </a:p>
                   </a:txBody>
@@ -5199,7 +5199,7 @@
                         </a:defRPr>
                       </a:pPr>
                       <a:r>
-                        <a:t>+3.33%</a:t>
+                        <a:t>+1.02%</a:t>
                       </a:r>
                     </a:p>
                   </a:txBody>
@@ -5334,35 +5334,35 @@
                       <a:pPr algn="ctr">
                         <a:defRPr sz="800">
                           <a:solidFill>
-                            <a:srgbClr val="10B981"/>
-                          </a:solidFill>
-                        </a:defRPr>
-                      </a:pPr>
-                      <a:r>
-                        <a:t>+300.00</a:t>
-                      </a:r>
-                    </a:p>
-                  </a:txBody>
-                  <a:tcPr anchor="ctr">
-                    <a:solidFill>
-                      <a:srgbClr val="141820"/>
-                    </a:solidFill>
-                  </a:tcPr>
-                </a:tc>
-                <a:tc>
-                  <a:txBody>
-                    <a:bodyPr/>
-                    <a:lstStyle/>
-                    <a:p>
-                      <a:pPr algn="ctr">
-                        <a:defRPr sz="800">
-                          <a:solidFill>
-                            <a:srgbClr val="10B981"/>
-                          </a:solidFill>
-                        </a:defRPr>
-                      </a:pPr>
-                      <a:r>
-                        <a:t>+4.17%</a:t>
+                            <a:srgbClr val="F0F2F5"/>
+                          </a:solidFill>
+                        </a:defRPr>
+                      </a:pPr>
+                      <a:r>
+                        <a:t>+0.00</a:t>
+                      </a:r>
+                    </a:p>
+                  </a:txBody>
+                  <a:tcPr anchor="ctr">
+                    <a:solidFill>
+                      <a:srgbClr val="141820"/>
+                    </a:solidFill>
+                  </a:tcPr>
+                </a:tc>
+                <a:tc>
+                  <a:txBody>
+                    <a:bodyPr/>
+                    <a:lstStyle/>
+                    <a:p>
+                      <a:pPr algn="ctr">
+                        <a:defRPr sz="800">
+                          <a:solidFill>
+                            <a:srgbClr val="F0F2F5"/>
+                          </a:solidFill>
+                        </a:defRPr>
+                      </a:pPr>
+                      <a:r>
+                        <a:t>+0.00%</a:t>
                       </a:r>
                     </a:p>
                   </a:txBody>
@@ -5456,7 +5456,7 @@
                         </a:defRPr>
                       </a:pPr>
                       <a:r>
-                        <a:t>9,817.00</a:t>
+                        <a:t>9,368.00</a:t>
                       </a:r>
                     </a:p>
                   </a:txBody>
@@ -5497,12 +5497,12 @@
                       <a:pPr algn="ctr">
                         <a:defRPr sz="800">
                           <a:solidFill>
-                            <a:srgbClr val="10B981"/>
-                          </a:solidFill>
-                        </a:defRPr>
-                      </a:pPr>
-                      <a:r>
-                        <a:t>+652.00</a:t>
+                            <a:srgbClr val="EF4444"/>
+                          </a:solidFill>
+                        </a:defRPr>
+                      </a:pPr>
+                      <a:r>
+                        <a:t>-449.00</a:t>
                       </a:r>
                     </a:p>
                   </a:txBody>
@@ -5520,12 +5520,12 @@
                       <a:pPr algn="ctr">
                         <a:defRPr sz="800">
                           <a:solidFill>
-                            <a:srgbClr val="10B981"/>
-                          </a:solidFill>
-                        </a:defRPr>
-                      </a:pPr>
-                      <a:r>
-                        <a:t>+7.11%</a:t>
+                            <a:srgbClr val="EF4444"/>
+                          </a:solidFill>
+                        </a:defRPr>
+                      </a:pPr>
+                      <a:r>
+                        <a:t>-4.57%</a:t>
                       </a:r>
                     </a:p>
                   </a:txBody>
@@ -5660,35 +5660,35 @@
                       <a:pPr algn="ctr">
                         <a:defRPr sz="800">
                           <a:solidFill>
-                            <a:srgbClr val="10B981"/>
-                          </a:solidFill>
-                        </a:defRPr>
-                      </a:pPr>
-                      <a:r>
-                        <a:t>+10.00</a:t>
-                      </a:r>
-                    </a:p>
-                  </a:txBody>
-                  <a:tcPr anchor="ctr">
-                    <a:solidFill>
-                      <a:srgbClr val="141820"/>
-                    </a:solidFill>
-                  </a:tcPr>
-                </a:tc>
-                <a:tc>
-                  <a:txBody>
-                    <a:bodyPr/>
-                    <a:lstStyle/>
-                    <a:p>
-                      <a:pPr algn="ctr">
-                        <a:defRPr sz="800">
-                          <a:solidFill>
-                            <a:srgbClr val="10B981"/>
-                          </a:solidFill>
-                        </a:defRPr>
-                      </a:pPr>
-                      <a:r>
-                        <a:t>+2.86%</a:t>
+                            <a:srgbClr val="F0F2F5"/>
+                          </a:solidFill>
+                        </a:defRPr>
+                      </a:pPr>
+                      <a:r>
+                        <a:t>+0.00</a:t>
+                      </a:r>
+                    </a:p>
+                  </a:txBody>
+                  <a:tcPr anchor="ctr">
+                    <a:solidFill>
+                      <a:srgbClr val="141820"/>
+                    </a:solidFill>
+                  </a:tcPr>
+                </a:tc>
+                <a:tc>
+                  <a:txBody>
+                    <a:bodyPr/>
+                    <a:lstStyle/>
+                    <a:p>
+                      <a:pPr algn="ctr">
+                        <a:defRPr sz="800">
+                          <a:solidFill>
+                            <a:srgbClr val="F0F2F5"/>
+                          </a:solidFill>
+                        </a:defRPr>
+                      </a:pPr>
+                      <a:r>
+                        <a:t>+0.00%</a:t>
                       </a:r>
                     </a:p>
                   </a:txBody>
@@ -5759,7 +5759,7 @@
                         </a:defRPr>
                       </a:pPr>
                       <a:r>
-                        <a:t>202603</a:t>
+                        <a:t>202604</a:t>
                       </a:r>
                     </a:p>
                   </a:txBody>
@@ -5782,7 +5782,7 @@
                         </a:defRPr>
                       </a:pPr>
                       <a:r>
-                        <a:t>364.80</a:t>
+                        <a:t>361.00</a:t>
                       </a:r>
                     </a:p>
                   </a:txBody>
@@ -5828,7 +5828,7 @@
                         </a:defRPr>
                       </a:pPr>
                       <a:r>
-                        <a:t>-5.20</a:t>
+                        <a:t>-3.80</a:t>
                       </a:r>
                     </a:p>
                   </a:txBody>
@@ -5851,7 +5851,7 @@
                         </a:defRPr>
                       </a:pPr>
                       <a:r>
-                        <a:t>-1.41%</a:t>
+                        <a:t>-1.04%</a:t>
                       </a:r>
                     </a:p>
                   </a:txBody>
@@ -6108,7 +6108,7 @@
                         </a:defRPr>
                       </a:pPr>
                       <a:r>
-                        <a:t>16,460.00</a:t>
+                        <a:t>16,470.00</a:t>
                       </a:r>
                     </a:p>
                   </a:txBody>
@@ -6154,7 +6154,7 @@
                         </a:defRPr>
                       </a:pPr>
                       <a:r>
-                        <a:t>+215.00</a:t>
+                        <a:t>+10.00</a:t>
                       </a:r>
                     </a:p>
                   </a:txBody>
@@ -6177,7 +6177,7 @@
                         </a:defRPr>
                       </a:pPr>
                       <a:r>
-                        <a:t>+1.32%</a:t>
+                        <a:t>+0.06%</a:t>
                       </a:r>
                     </a:p>
                   </a:txBody>
@@ -6858,7 +6858,7 @@
               </a:defRPr>
             </a:pPr>
             <a:r>
-              <a:t>Gold &amp; Platinum (2026-03-25)</a:t>
+              <a:t>Gold &amp; Platinum (2026-03-26)</a:t>
             </a:r>
           </a:p>
         </p:txBody>
@@ -7064,7 +7064,7 @@
               </a:defRPr>
             </a:pPr>
             <a:r>
-              <a:t>Dubai Crude Oil &amp; LNG Platts JKM (2026-03-25)</a:t>
+              <a:t>Dubai Crude Oil &amp; LNG Platts JKM (2026-03-26)</a:t>
             </a:r>
           </a:p>
         </p:txBody>
@@ -7476,7 +7476,7 @@
               </a:defRPr>
             </a:pPr>
             <a:r>
-              <a:t>Largest absolute settlement price changes vs previous day (2026-03-25)</a:t>
+              <a:t>Largest absolute settlement price changes vs previous day (2026-03-26)</a:t>
             </a:r>
           </a:p>
         </p:txBody>
@@ -7685,99 +7685,99 @@
                         </a:defRPr>
                       </a:pPr>
                       <a:r>
-                        <a:t>FUT_EEP_260929</a:t>
-                      </a:r>
-                    </a:p>
-                  </a:txBody>
-                  <a:tcPr anchor="ctr">
-                    <a:solidFill>
-                      <a:srgbClr val="141820"/>
-                    </a:solidFill>
-                  </a:tcPr>
-                </a:tc>
-                <a:tc>
-                  <a:txBody>
-                    <a:bodyPr/>
-                    <a:lstStyle/>
-                    <a:p>
-                      <a:pPr algn="ctr">
-                        <a:defRPr sz="800">
-                          <a:solidFill>
-                            <a:srgbClr val="F0F2F5"/>
-                          </a:solidFill>
-                        </a:defRPr>
-                      </a:pPr>
-                      <a:r>
-                        <a:t>Power East Peak (Monthly)</a:t>
-                      </a:r>
-                    </a:p>
-                  </a:txBody>
-                  <a:tcPr anchor="ctr">
-                    <a:solidFill>
-                      <a:srgbClr val="141820"/>
-                    </a:solidFill>
-                  </a:tcPr>
-                </a:tc>
-                <a:tc>
-                  <a:txBody>
-                    <a:bodyPr/>
-                    <a:lstStyle/>
-                    <a:p>
-                      <a:pPr algn="ctr">
-                        <a:defRPr sz="800">
-                          <a:solidFill>
-                            <a:srgbClr val="F0F2F5"/>
-                          </a:solidFill>
-                        </a:defRPr>
-                      </a:pPr>
-                      <a:r>
-                        <a:t>202609</a:t>
-                      </a:r>
-                    </a:p>
-                  </a:txBody>
-                  <a:tcPr anchor="ctr">
-                    <a:solidFill>
-                      <a:srgbClr val="141820"/>
-                    </a:solidFill>
-                  </a:tcPr>
-                </a:tc>
-                <a:tc>
-                  <a:txBody>
-                    <a:bodyPr/>
-                    <a:lstStyle/>
-                    <a:p>
-                      <a:pPr algn="ctr">
-                        <a:defRPr sz="800">
-                          <a:solidFill>
-                            <a:srgbClr val="F0F2F5"/>
-                          </a:solidFill>
-                        </a:defRPr>
-                      </a:pPr>
-                      <a:r>
-                        <a:t>27.21</a:t>
-                      </a:r>
-                    </a:p>
-                  </a:txBody>
-                  <a:tcPr anchor="ctr">
-                    <a:solidFill>
-                      <a:srgbClr val="141820"/>
-                    </a:solidFill>
-                  </a:tcPr>
-                </a:tc>
-                <a:tc>
-                  <a:txBody>
-                    <a:bodyPr/>
-                    <a:lstStyle/>
-                    <a:p>
-                      <a:pPr algn="ctr">
-                        <a:defRPr sz="800">
-                          <a:solidFill>
-                            <a:srgbClr val="F0F2F5"/>
-                          </a:solidFill>
-                        </a:defRPr>
-                      </a:pPr>
-                      <a:r>
-                        <a:t>28.83</a:t>
+                        <a:t>FUT_EEB_261230</a:t>
+                      </a:r>
+                    </a:p>
+                  </a:txBody>
+                  <a:tcPr anchor="ctr">
+                    <a:solidFill>
+                      <a:srgbClr val="141820"/>
+                    </a:solidFill>
+                  </a:tcPr>
+                </a:tc>
+                <a:tc>
+                  <a:txBody>
+                    <a:bodyPr/>
+                    <a:lstStyle/>
+                    <a:p>
+                      <a:pPr algn="ctr">
+                        <a:defRPr sz="800">
+                          <a:solidFill>
+                            <a:srgbClr val="F0F2F5"/>
+                          </a:solidFill>
+                        </a:defRPr>
+                      </a:pPr>
+                      <a:r>
+                        <a:t>Power East Base (Monthly)</a:t>
+                      </a:r>
+                    </a:p>
+                  </a:txBody>
+                  <a:tcPr anchor="ctr">
+                    <a:solidFill>
+                      <a:srgbClr val="141820"/>
+                    </a:solidFill>
+                  </a:tcPr>
+                </a:tc>
+                <a:tc>
+                  <a:txBody>
+                    <a:bodyPr/>
+                    <a:lstStyle/>
+                    <a:p>
+                      <a:pPr algn="ctr">
+                        <a:defRPr sz="800">
+                          <a:solidFill>
+                            <a:srgbClr val="F0F2F5"/>
+                          </a:solidFill>
+                        </a:defRPr>
+                      </a:pPr>
+                      <a:r>
+                        <a:t>202612</a:t>
+                      </a:r>
+                    </a:p>
+                  </a:txBody>
+                  <a:tcPr anchor="ctr">
+                    <a:solidFill>
+                      <a:srgbClr val="141820"/>
+                    </a:solidFill>
+                  </a:tcPr>
+                </a:tc>
+                <a:tc>
+                  <a:txBody>
+                    <a:bodyPr/>
+                    <a:lstStyle/>
+                    <a:p>
+                      <a:pPr algn="ctr">
+                        <a:defRPr sz="800">
+                          <a:solidFill>
+                            <a:srgbClr val="F0F2F5"/>
+                          </a:solidFill>
+                        </a:defRPr>
+                      </a:pPr>
+                      <a:r>
+                        <a:t>19.07</a:t>
+                      </a:r>
+                    </a:p>
+                  </a:txBody>
+                  <a:tcPr anchor="ctr">
+                    <a:solidFill>
+                      <a:srgbClr val="141820"/>
+                    </a:solidFill>
+                  </a:tcPr>
+                </a:tc>
+                <a:tc>
+                  <a:txBody>
+                    <a:bodyPr/>
+                    <a:lstStyle/>
+                    <a:p>
+                      <a:pPr algn="ctr">
+                        <a:defRPr sz="800">
+                          <a:solidFill>
+                            <a:srgbClr val="F0F2F5"/>
+                          </a:solidFill>
+                        </a:defRPr>
+                      </a:pPr>
+                      <a:r>
+                        <a:t>21.10</a:t>
                       </a:r>
                     </a:p>
                   </a:txBody>
@@ -7800,7 +7800,7 @@
                         </a:defRPr>
                       </a:pPr>
                       <a:r>
-                        <a:t>-1.62</a:t>
+                        <a:t>-2.03</a:t>
                       </a:r>
                     </a:p>
                   </a:txBody>
@@ -7823,7 +7823,7 @@
                         </a:defRPr>
                       </a:pPr>
                       <a:r>
-                        <a:t>-5.62%</a:t>
+                        <a:t>-9.62%</a:t>
                       </a:r>
                     </a:p>
                   </a:txBody>
@@ -7848,7 +7848,7 @@
                         </a:defRPr>
                       </a:pPr>
                       <a:r>
-                        <a:t>FUT_EEP_260828</a:t>
+                        <a:t>FUT_EEB_270129</a:t>
                       </a:r>
                     </a:p>
                   </a:txBody>
@@ -7871,7 +7871,7 @@
                         </a:defRPr>
                       </a:pPr>
                       <a:r>
-                        <a:t>Power East Peak (Monthly)</a:t>
+                        <a:t>Power East Base (Monthly)</a:t>
                       </a:r>
                     </a:p>
                   </a:txBody>
@@ -7894,7 +7894,7 @@
                         </a:defRPr>
                       </a:pPr>
                       <a:r>
-                        <a:t>202608</a:t>
+                        <a:t>202701</a:t>
                       </a:r>
                     </a:p>
                   </a:txBody>
@@ -7917,7 +7917,7 @@
                         </a:defRPr>
                       </a:pPr>
                       <a:r>
-                        <a:t>27.65</a:t>
+                        <a:t>19.41</a:t>
                       </a:r>
                     </a:p>
                   </a:txBody>
@@ -7940,7 +7940,7 @@
                         </a:defRPr>
                       </a:pPr>
                       <a:r>
-                        <a:t>29.08</a:t>
+                        <a:t>21.21</a:t>
                       </a:r>
                     </a:p>
                   </a:txBody>
@@ -7963,7 +7963,7 @@
                         </a:defRPr>
                       </a:pPr>
                       <a:r>
-                        <a:t>-1.43</a:t>
+                        <a:t>-1.80</a:t>
                       </a:r>
                     </a:p>
                   </a:txBody>
@@ -7986,7 +7986,7 @@
                         </a:defRPr>
                       </a:pPr>
                       <a:r>
-                        <a:t>-4.92%</a:t>
+                        <a:t>-8.49%</a:t>
                       </a:r>
                     </a:p>
                   </a:txBody>
@@ -8011,99 +8011,99 @@
                         </a:defRPr>
                       </a:pPr>
                       <a:r>
-                        <a:t>FUT_EEP_260730</a:t>
-                      </a:r>
-                    </a:p>
-                  </a:txBody>
-                  <a:tcPr anchor="ctr">
-                    <a:solidFill>
-                      <a:srgbClr val="141820"/>
-                    </a:solidFill>
-                  </a:tcPr>
-                </a:tc>
-                <a:tc>
-                  <a:txBody>
-                    <a:bodyPr/>
-                    <a:lstStyle/>
-                    <a:p>
-                      <a:pPr algn="ctr">
-                        <a:defRPr sz="800">
-                          <a:solidFill>
-                            <a:srgbClr val="F0F2F5"/>
-                          </a:solidFill>
-                        </a:defRPr>
-                      </a:pPr>
-                      <a:r>
-                        <a:t>Power East Peak (Monthly)</a:t>
-                      </a:r>
-                    </a:p>
-                  </a:txBody>
-                  <a:tcPr anchor="ctr">
-                    <a:solidFill>
-                      <a:srgbClr val="141820"/>
-                    </a:solidFill>
-                  </a:tcPr>
-                </a:tc>
-                <a:tc>
-                  <a:txBody>
-                    <a:bodyPr/>
-                    <a:lstStyle/>
-                    <a:p>
-                      <a:pPr algn="ctr">
-                        <a:defRPr sz="800">
-                          <a:solidFill>
-                            <a:srgbClr val="F0F2F5"/>
-                          </a:solidFill>
-                        </a:defRPr>
-                      </a:pPr>
-                      <a:r>
-                        <a:t>202607</a:t>
-                      </a:r>
-                    </a:p>
-                  </a:txBody>
-                  <a:tcPr anchor="ctr">
-                    <a:solidFill>
-                      <a:srgbClr val="141820"/>
-                    </a:solidFill>
-                  </a:tcPr>
-                </a:tc>
-                <a:tc>
-                  <a:txBody>
-                    <a:bodyPr/>
-                    <a:lstStyle/>
-                    <a:p>
-                      <a:pPr algn="ctr">
-                        <a:defRPr sz="800">
-                          <a:solidFill>
-                            <a:srgbClr val="F0F2F5"/>
-                          </a:solidFill>
-                        </a:defRPr>
-                      </a:pPr>
-                      <a:r>
-                        <a:t>27.77</a:t>
-                      </a:r>
-                    </a:p>
-                  </a:txBody>
-                  <a:tcPr anchor="ctr">
-                    <a:solidFill>
-                      <a:srgbClr val="141820"/>
-                    </a:solidFill>
-                  </a:tcPr>
-                </a:tc>
-                <a:tc>
-                  <a:txBody>
-                    <a:bodyPr/>
-                    <a:lstStyle/>
-                    <a:p>
-                      <a:pPr algn="ctr">
-                        <a:defRPr sz="800">
-                          <a:solidFill>
-                            <a:srgbClr val="F0F2F5"/>
-                          </a:solidFill>
-                        </a:defRPr>
-                      </a:pPr>
-                      <a:r>
-                        <a:t>29.18</a:t>
+                        <a:t>FUT_EEB_270226</a:t>
+                      </a:r>
+                    </a:p>
+                  </a:txBody>
+                  <a:tcPr anchor="ctr">
+                    <a:solidFill>
+                      <a:srgbClr val="141820"/>
+                    </a:solidFill>
+                  </a:tcPr>
+                </a:tc>
+                <a:tc>
+                  <a:txBody>
+                    <a:bodyPr/>
+                    <a:lstStyle/>
+                    <a:p>
+                      <a:pPr algn="ctr">
+                        <a:defRPr sz="800">
+                          <a:solidFill>
+                            <a:srgbClr val="F0F2F5"/>
+                          </a:solidFill>
+                        </a:defRPr>
+                      </a:pPr>
+                      <a:r>
+                        <a:t>Power East Base (Monthly)</a:t>
+                      </a:r>
+                    </a:p>
+                  </a:txBody>
+                  <a:tcPr anchor="ctr">
+                    <a:solidFill>
+                      <a:srgbClr val="141820"/>
+                    </a:solidFill>
+                  </a:tcPr>
+                </a:tc>
+                <a:tc>
+                  <a:txBody>
+                    <a:bodyPr/>
+                    <a:lstStyle/>
+                    <a:p>
+                      <a:pPr algn="ctr">
+                        <a:defRPr sz="800">
+                          <a:solidFill>
+                            <a:srgbClr val="F0F2F5"/>
+                          </a:solidFill>
+                        </a:defRPr>
+                      </a:pPr>
+                      <a:r>
+                        <a:t>202702</a:t>
+                      </a:r>
+                    </a:p>
+                  </a:txBody>
+                  <a:tcPr anchor="ctr">
+                    <a:solidFill>
+                      <a:srgbClr val="141820"/>
+                    </a:solidFill>
+                  </a:tcPr>
+                </a:tc>
+                <a:tc>
+                  <a:txBody>
+                    <a:bodyPr/>
+                    <a:lstStyle/>
+                    <a:p>
+                      <a:pPr algn="ctr">
+                        <a:defRPr sz="800">
+                          <a:solidFill>
+                            <a:srgbClr val="F0F2F5"/>
+                          </a:solidFill>
+                        </a:defRPr>
+                      </a:pPr>
+                      <a:r>
+                        <a:t>19.67</a:t>
+                      </a:r>
+                    </a:p>
+                  </a:txBody>
+                  <a:tcPr anchor="ctr">
+                    <a:solidFill>
+                      <a:srgbClr val="141820"/>
+                    </a:solidFill>
+                  </a:tcPr>
+                </a:tc>
+                <a:tc>
+                  <a:txBody>
+                    <a:bodyPr/>
+                    <a:lstStyle/>
+                    <a:p>
+                      <a:pPr algn="ctr">
+                        <a:defRPr sz="800">
+                          <a:solidFill>
+                            <a:srgbClr val="F0F2F5"/>
+                          </a:solidFill>
+                        </a:defRPr>
+                      </a:pPr>
+                      <a:r>
+                        <a:t>21.46</a:t>
                       </a:r>
                     </a:p>
                   </a:txBody>
@@ -8126,7 +8126,7 @@
                         </a:defRPr>
                       </a:pPr>
                       <a:r>
-                        <a:t>-1.41</a:t>
+                        <a:t>-1.79</a:t>
                       </a:r>
                     </a:p>
                   </a:txBody>
@@ -8149,7 +8149,7 @@
                         </a:defRPr>
                       </a:pPr>
                       <a:r>
-                        <a:t>-4.83%</a:t>
+                        <a:t>-8.34%</a:t>
                       </a:r>
                     </a:p>
                   </a:txBody>
@@ -8174,7 +8174,7 @@
                         </a:defRPr>
                       </a:pPr>
                       <a:r>
-                        <a:t>FUT_EEB_260929</a:t>
+                        <a:t>FUT_EEB_260629</a:t>
                       </a:r>
                     </a:p>
                   </a:txBody>
@@ -8220,7 +8220,7 @@
                         </a:defRPr>
                       </a:pPr>
                       <a:r>
-                        <a:t>202609</a:t>
+                        <a:t>202606</a:t>
                       </a:r>
                     </a:p>
                   </a:txBody>
@@ -8243,7 +8243,7 @@
                         </a:defRPr>
                       </a:pPr>
                       <a:r>
-                        <a:t>21.75</a:t>
+                        <a:t>20.58</a:t>
                       </a:r>
                     </a:p>
                   </a:txBody>
@@ -8266,7 +8266,7 @@
                         </a:defRPr>
                       </a:pPr>
                       <a:r>
-                        <a:t>23.01</a:t>
+                        <a:t>21.97</a:t>
                       </a:r>
                     </a:p>
                   </a:txBody>
@@ -8289,7 +8289,7 @@
                         </a:defRPr>
                       </a:pPr>
                       <a:r>
-                        <a:t>-1.26</a:t>
+                        <a:t>-1.39</a:t>
                       </a:r>
                     </a:p>
                   </a:txBody>
@@ -8312,7 +8312,7 @@
                         </a:defRPr>
                       </a:pPr>
                       <a:r>
-                        <a:t>-5.48%</a:t>
+                        <a:t>-6.33%</a:t>
                       </a:r>
                     </a:p>
                   </a:txBody>
@@ -8337,99 +8337,99 @@
                         </a:defRPr>
                       </a:pPr>
                       <a:r>
-                        <a:t>FUT_EEB_270330</a:t>
-                      </a:r>
-                    </a:p>
-                  </a:txBody>
-                  <a:tcPr anchor="ctr">
-                    <a:solidFill>
-                      <a:srgbClr val="141820"/>
-                    </a:solidFill>
-                  </a:tcPr>
-                </a:tc>
-                <a:tc>
-                  <a:txBody>
-                    <a:bodyPr/>
-                    <a:lstStyle/>
-                    <a:p>
-                      <a:pPr algn="ctr">
-                        <a:defRPr sz="800">
-                          <a:solidFill>
-                            <a:srgbClr val="F0F2F5"/>
-                          </a:solidFill>
-                        </a:defRPr>
-                      </a:pPr>
-                      <a:r>
-                        <a:t>Power East Base (Monthly)</a:t>
-                      </a:r>
-                    </a:p>
-                  </a:txBody>
-                  <a:tcPr anchor="ctr">
-                    <a:solidFill>
-                      <a:srgbClr val="141820"/>
-                    </a:solidFill>
-                  </a:tcPr>
-                </a:tc>
-                <a:tc>
-                  <a:txBody>
-                    <a:bodyPr/>
-                    <a:lstStyle/>
-                    <a:p>
-                      <a:pPr algn="ctr">
-                        <a:defRPr sz="800">
-                          <a:solidFill>
-                            <a:srgbClr val="F0F2F5"/>
-                          </a:solidFill>
-                        </a:defRPr>
-                      </a:pPr>
-                      <a:r>
-                        <a:t>202703</a:t>
-                      </a:r>
-                    </a:p>
-                  </a:txBody>
-                  <a:tcPr anchor="ctr">
-                    <a:solidFill>
-                      <a:srgbClr val="141820"/>
-                    </a:solidFill>
-                  </a:tcPr>
-                </a:tc>
-                <a:tc>
-                  <a:txBody>
-                    <a:bodyPr/>
-                    <a:lstStyle/>
-                    <a:p>
-                      <a:pPr algn="ctr">
-                        <a:defRPr sz="800">
-                          <a:solidFill>
-                            <a:srgbClr val="F0F2F5"/>
-                          </a:solidFill>
-                        </a:defRPr>
-                      </a:pPr>
-                      <a:r>
-                        <a:t>17.98</a:t>
-                      </a:r>
-                    </a:p>
-                  </a:txBody>
-                  <a:tcPr anchor="ctr">
-                    <a:solidFill>
-                      <a:srgbClr val="141820"/>
-                    </a:solidFill>
-                  </a:tcPr>
-                </a:tc>
-                <a:tc>
-                  <a:txBody>
-                    <a:bodyPr/>
-                    <a:lstStyle/>
-                    <a:p>
-                      <a:pPr algn="ctr">
-                        <a:defRPr sz="800">
-                          <a:solidFill>
-                            <a:srgbClr val="F0F2F5"/>
-                          </a:solidFill>
-                        </a:defRPr>
-                      </a:pPr>
-                      <a:r>
-                        <a:t>19.23</a:t>
+                        <a:t>FUT_EWPW_260326</a:t>
+                      </a:r>
+                    </a:p>
+                  </a:txBody>
+                  <a:tcPr anchor="ctr">
+                    <a:solidFill>
+                      <a:srgbClr val="141820"/>
+                    </a:solidFill>
+                  </a:tcPr>
+                </a:tc>
+                <a:tc>
+                  <a:txBody>
+                    <a:bodyPr/>
+                    <a:lstStyle/>
+                    <a:p>
+                      <a:pPr algn="ctr">
+                        <a:defRPr sz="800">
+                          <a:solidFill>
+                            <a:srgbClr val="F0F2F5"/>
+                          </a:solidFill>
+                        </a:defRPr>
+                      </a:pPr>
+                      <a:r>
+                        <a:t>Power West Peak (Weekly)</a:t>
+                      </a:r>
+                    </a:p>
+                  </a:txBody>
+                  <a:tcPr anchor="ctr">
+                    <a:solidFill>
+                      <a:srgbClr val="141820"/>
+                    </a:solidFill>
+                  </a:tcPr>
+                </a:tc>
+                <a:tc>
+                  <a:txBody>
+                    <a:bodyPr/>
+                    <a:lstStyle/>
+                    <a:p>
+                      <a:pPr algn="ctr">
+                        <a:defRPr sz="800">
+                          <a:solidFill>
+                            <a:srgbClr val="F0F2F5"/>
+                          </a:solidFill>
+                        </a:defRPr>
+                      </a:pPr>
+                      <a:r>
+                        <a:t>20260327</a:t>
+                      </a:r>
+                    </a:p>
+                  </a:txBody>
+                  <a:tcPr anchor="ctr">
+                    <a:solidFill>
+                      <a:srgbClr val="141820"/>
+                    </a:solidFill>
+                  </a:tcPr>
+                </a:tc>
+                <a:tc>
+                  <a:txBody>
+                    <a:bodyPr/>
+                    <a:lstStyle/>
+                    <a:p>
+                      <a:pPr algn="ctr">
+                        <a:defRPr sz="800">
+                          <a:solidFill>
+                            <a:srgbClr val="F0F2F5"/>
+                          </a:solidFill>
+                        </a:defRPr>
+                      </a:pPr>
+                      <a:r>
+                        <a:t>13.74</a:t>
+                      </a:r>
+                    </a:p>
+                  </a:txBody>
+                  <a:tcPr anchor="ctr">
+                    <a:solidFill>
+                      <a:srgbClr val="141820"/>
+                    </a:solidFill>
+                  </a:tcPr>
+                </a:tc>
+                <a:tc>
+                  <a:txBody>
+                    <a:bodyPr/>
+                    <a:lstStyle/>
+                    <a:p>
+                      <a:pPr algn="ctr">
+                        <a:defRPr sz="800">
+                          <a:solidFill>
+                            <a:srgbClr val="F0F2F5"/>
+                          </a:solidFill>
+                        </a:defRPr>
+                      </a:pPr>
+                      <a:r>
+                        <a:t>15.01</a:t>
                       </a:r>
                     </a:p>
                   </a:txBody>
@@ -8452,7 +8452,7 @@
                         </a:defRPr>
                       </a:pPr>
                       <a:r>
-                        <a:t>-1.25</a:t>
+                        <a:t>-1.27</a:t>
                       </a:r>
                     </a:p>
                   </a:txBody>
@@ -8475,7 +8475,7 @@
                         </a:defRPr>
                       </a:pPr>
                       <a:r>
-                        <a:t>-6.50%</a:t>
+                        <a:t>-8.46%</a:t>
                       </a:r>
                     </a:p>
                   </a:txBody>
@@ -8500,7 +8500,7 @@
                         </a:defRPr>
                       </a:pPr>
                       <a:r>
-                        <a:t>FUT_EWB_260929</a:t>
+                        <a:t>FUT_EEP_260629</a:t>
                       </a:r>
                     </a:p>
                   </a:txBody>
@@ -8523,7 +8523,7 @@
                         </a:defRPr>
                       </a:pPr>
                       <a:r>
-                        <a:t>Power West Base (Monthly)</a:t>
+                        <a:t>Power East Peak (Monthly)</a:t>
                       </a:r>
                     </a:p>
                   </a:txBody>
@@ -8546,7 +8546,7 @@
                         </a:defRPr>
                       </a:pPr>
                       <a:r>
-                        <a:t>202609</a:t>
+                        <a:t>202606</a:t>
                       </a:r>
                     </a:p>
                   </a:txBody>
@@ -8569,7 +8569,7 @@
                         </a:defRPr>
                       </a:pPr>
                       <a:r>
-                        <a:t>18.75</a:t>
+                        <a:t>23.74</a:t>
                       </a:r>
                     </a:p>
                   </a:txBody>
@@ -8592,7 +8592,7 @@
                         </a:defRPr>
                       </a:pPr>
                       <a:r>
-                        <a:t>19.98</a:t>
+                        <a:t>25.00</a:t>
                       </a:r>
                     </a:p>
                   </a:txBody>
@@ -8615,7 +8615,7 @@
                         </a:defRPr>
                       </a:pPr>
                       <a:r>
-                        <a:t>-1.23</a:t>
+                        <a:t>-1.26</a:t>
                       </a:r>
                     </a:p>
                   </a:txBody>
@@ -8638,7 +8638,7 @@
                         </a:defRPr>
                       </a:pPr>
                       <a:r>
-                        <a:t>-6.16%</a:t>
+                        <a:t>-5.04%</a:t>
                       </a:r>
                     </a:p>
                   </a:txBody>
@@ -8663,99 +8663,99 @@
                         </a:defRPr>
                       </a:pPr>
                       <a:r>
-                        <a:t>FUT_EEP_270330</a:t>
-                      </a:r>
-                    </a:p>
-                  </a:txBody>
-                  <a:tcPr anchor="ctr">
-                    <a:solidFill>
-                      <a:srgbClr val="141820"/>
-                    </a:solidFill>
-                  </a:tcPr>
-                </a:tc>
-                <a:tc>
-                  <a:txBody>
-                    <a:bodyPr/>
-                    <a:lstStyle/>
-                    <a:p>
-                      <a:pPr algn="ctr">
-                        <a:defRPr sz="800">
-                          <a:solidFill>
-                            <a:srgbClr val="F0F2F5"/>
-                          </a:solidFill>
-                        </a:defRPr>
-                      </a:pPr>
-                      <a:r>
-                        <a:t>Power East Peak (Monthly)</a:t>
-                      </a:r>
-                    </a:p>
-                  </a:txBody>
-                  <a:tcPr anchor="ctr">
-                    <a:solidFill>
-                      <a:srgbClr val="141820"/>
-                    </a:solidFill>
-                  </a:tcPr>
-                </a:tc>
-                <a:tc>
-                  <a:txBody>
-                    <a:bodyPr/>
-                    <a:lstStyle/>
-                    <a:p>
-                      <a:pPr algn="ctr">
-                        <a:defRPr sz="800">
-                          <a:solidFill>
-                            <a:srgbClr val="F0F2F5"/>
-                          </a:solidFill>
-                        </a:defRPr>
-                      </a:pPr>
-                      <a:r>
-                        <a:t>202703</a:t>
-                      </a:r>
-                    </a:p>
-                  </a:txBody>
-                  <a:tcPr anchor="ctr">
-                    <a:solidFill>
-                      <a:srgbClr val="141820"/>
-                    </a:solidFill>
-                  </a:tcPr>
-                </a:tc>
-                <a:tc>
-                  <a:txBody>
-                    <a:bodyPr/>
-                    <a:lstStyle/>
-                    <a:p>
-                      <a:pPr algn="ctr">
-                        <a:defRPr sz="800">
-                          <a:solidFill>
-                            <a:srgbClr val="F0F2F5"/>
-                          </a:solidFill>
-                        </a:defRPr>
-                      </a:pPr>
-                      <a:r>
-                        <a:t>21.19</a:t>
-                      </a:r>
-                    </a:p>
-                  </a:txBody>
-                  <a:tcPr anchor="ctr">
-                    <a:solidFill>
-                      <a:srgbClr val="141820"/>
-                    </a:solidFill>
-                  </a:tcPr>
-                </a:tc>
-                <a:tc>
-                  <a:txBody>
-                    <a:bodyPr/>
-                    <a:lstStyle/>
-                    <a:p>
-                      <a:pPr algn="ctr">
-                        <a:defRPr sz="800">
-                          <a:solidFill>
-                            <a:srgbClr val="F0F2F5"/>
-                          </a:solidFill>
-                        </a:defRPr>
-                      </a:pPr>
-                      <a:r>
-                        <a:t>22.38</a:t>
+                        <a:t>FUT_EEB_261127</a:t>
+                      </a:r>
+                    </a:p>
+                  </a:txBody>
+                  <a:tcPr anchor="ctr">
+                    <a:solidFill>
+                      <a:srgbClr val="141820"/>
+                    </a:solidFill>
+                  </a:tcPr>
+                </a:tc>
+                <a:tc>
+                  <a:txBody>
+                    <a:bodyPr/>
+                    <a:lstStyle/>
+                    <a:p>
+                      <a:pPr algn="ctr">
+                        <a:defRPr sz="800">
+                          <a:solidFill>
+                            <a:srgbClr val="F0F2F5"/>
+                          </a:solidFill>
+                        </a:defRPr>
+                      </a:pPr>
+                      <a:r>
+                        <a:t>Power East Base (Monthly)</a:t>
+                      </a:r>
+                    </a:p>
+                  </a:txBody>
+                  <a:tcPr anchor="ctr">
+                    <a:solidFill>
+                      <a:srgbClr val="141820"/>
+                    </a:solidFill>
+                  </a:tcPr>
+                </a:tc>
+                <a:tc>
+                  <a:txBody>
+                    <a:bodyPr/>
+                    <a:lstStyle/>
+                    <a:p>
+                      <a:pPr algn="ctr">
+                        <a:defRPr sz="800">
+                          <a:solidFill>
+                            <a:srgbClr val="F0F2F5"/>
+                          </a:solidFill>
+                        </a:defRPr>
+                      </a:pPr>
+                      <a:r>
+                        <a:t>202611</a:t>
+                      </a:r>
+                    </a:p>
+                  </a:txBody>
+                  <a:tcPr anchor="ctr">
+                    <a:solidFill>
+                      <a:srgbClr val="141820"/>
+                    </a:solidFill>
+                  </a:tcPr>
+                </a:tc>
+                <a:tc>
+                  <a:txBody>
+                    <a:bodyPr/>
+                    <a:lstStyle/>
+                    <a:p>
+                      <a:pPr algn="ctr">
+                        <a:defRPr sz="800">
+                          <a:solidFill>
+                            <a:srgbClr val="F0F2F5"/>
+                          </a:solidFill>
+                        </a:defRPr>
+                      </a:pPr>
+                      <a:r>
+                        <a:t>18.72</a:t>
+                      </a:r>
+                    </a:p>
+                  </a:txBody>
+                  <a:tcPr anchor="ctr">
+                    <a:solidFill>
+                      <a:srgbClr val="141820"/>
+                    </a:solidFill>
+                  </a:tcPr>
+                </a:tc>
+                <a:tc>
+                  <a:txBody>
+                    <a:bodyPr/>
+                    <a:lstStyle/>
+                    <a:p>
+                      <a:pPr algn="ctr">
+                        <a:defRPr sz="800">
+                          <a:solidFill>
+                            <a:srgbClr val="F0F2F5"/>
+                          </a:solidFill>
+                        </a:defRPr>
+                      </a:pPr>
+                      <a:r>
+                        <a:t>19.96</a:t>
                       </a:r>
                     </a:p>
                   </a:txBody>
@@ -8778,7 +8778,7 @@
                         </a:defRPr>
                       </a:pPr>
                       <a:r>
-                        <a:t>-1.19</a:t>
+                        <a:t>-1.24</a:t>
                       </a:r>
                     </a:p>
                   </a:txBody>
@@ -8801,7 +8801,7 @@
                         </a:defRPr>
                       </a:pPr>
                       <a:r>
-                        <a:t>-5.32%</a:t>
+                        <a:t>-6.21%</a:t>
                       </a:r>
                     </a:p>
                   </a:txBody>
@@ -8826,7 +8826,7 @@
                         </a:defRPr>
                       </a:pPr>
                       <a:r>
-                        <a:t>FUT_EWB_260828</a:t>
+                        <a:t>FUT_EEBY_260326</a:t>
                       </a:r>
                     </a:p>
                   </a:txBody>
@@ -8849,7 +8849,7 @@
                         </a:defRPr>
                       </a:pPr>
                       <a:r>
-                        <a:t>Power West Base (Monthly)</a:t>
+                        <a:t>Power East Base (Yearly)</a:t>
                       </a:r>
                     </a:p>
                   </a:txBody>
@@ -8872,7 +8872,7 @@
                         </a:defRPr>
                       </a:pPr>
                       <a:r>
-                        <a:t>202608</a:t>
+                        <a:t>202604</a:t>
                       </a:r>
                     </a:p>
                   </a:txBody>
@@ -8895,7 +8895,7 @@
                         </a:defRPr>
                       </a:pPr>
                       <a:r>
-                        <a:t>19.01</a:t>
+                        <a:t>19.48</a:t>
                       </a:r>
                     </a:p>
                   </a:txBody>
@@ -8918,7 +8918,7 @@
                         </a:defRPr>
                       </a:pPr>
                       <a:r>
-                        <a:t>20.20</a:t>
+                        <a:t>20.71</a:t>
                       </a:r>
                     </a:p>
                   </a:txBody>
@@ -8941,7 +8941,7 @@
                         </a:defRPr>
                       </a:pPr>
                       <a:r>
-                        <a:t>-1.19</a:t>
+                        <a:t>-1.23</a:t>
                       </a:r>
                     </a:p>
                   </a:txBody>
@@ -8964,7 +8964,7 @@
                         </a:defRPr>
                       </a:pPr>
                       <a:r>
-                        <a:t>-5.89%</a:t>
+                        <a:t>-5.94%</a:t>
                       </a:r>
                     </a:p>
                   </a:txBody>
@@ -8989,99 +8989,99 @@
                         </a:defRPr>
                       </a:pPr>
                       <a:r>
-                        <a:t>FUT_EEP_261029</a:t>
-                      </a:r>
-                    </a:p>
-                  </a:txBody>
-                  <a:tcPr anchor="ctr">
-                    <a:solidFill>
-                      <a:srgbClr val="141820"/>
-                    </a:solidFill>
-                  </a:tcPr>
-                </a:tc>
-                <a:tc>
-                  <a:txBody>
-                    <a:bodyPr/>
-                    <a:lstStyle/>
-                    <a:p>
-                      <a:pPr algn="ctr">
-                        <a:defRPr sz="800">
-                          <a:solidFill>
-                            <a:srgbClr val="F0F2F5"/>
-                          </a:solidFill>
-                        </a:defRPr>
-                      </a:pPr>
-                      <a:r>
-                        <a:t>Power East Peak (Monthly)</a:t>
-                      </a:r>
-                    </a:p>
-                  </a:txBody>
-                  <a:tcPr anchor="ctr">
-                    <a:solidFill>
-                      <a:srgbClr val="141820"/>
-                    </a:solidFill>
-                  </a:tcPr>
-                </a:tc>
-                <a:tc>
-                  <a:txBody>
-                    <a:bodyPr/>
-                    <a:lstStyle/>
-                    <a:p>
-                      <a:pPr algn="ctr">
-                        <a:defRPr sz="800">
-                          <a:solidFill>
-                            <a:srgbClr val="F0F2F5"/>
-                          </a:solidFill>
-                        </a:defRPr>
-                      </a:pPr>
-                      <a:r>
-                        <a:t>202610</a:t>
-                      </a:r>
-                    </a:p>
-                  </a:txBody>
-                  <a:tcPr anchor="ctr">
-                    <a:solidFill>
-                      <a:srgbClr val="141820"/>
-                    </a:solidFill>
-                  </a:tcPr>
-                </a:tc>
-                <a:tc>
-                  <a:txBody>
-                    <a:bodyPr/>
-                    <a:lstStyle/>
-                    <a:p>
-                      <a:pPr algn="ctr">
-                        <a:defRPr sz="800">
-                          <a:solidFill>
-                            <a:srgbClr val="F0F2F5"/>
-                          </a:solidFill>
-                        </a:defRPr>
-                      </a:pPr>
-                      <a:r>
-                        <a:t>22.52</a:t>
-                      </a:r>
-                    </a:p>
-                  </a:txBody>
-                  <a:tcPr anchor="ctr">
-                    <a:solidFill>
-                      <a:srgbClr val="141820"/>
-                    </a:solidFill>
-                  </a:tcPr>
-                </a:tc>
-                <a:tc>
-                  <a:txBody>
-                    <a:bodyPr/>
-                    <a:lstStyle/>
-                    <a:p>
-                      <a:pPr algn="ctr">
-                        <a:defRPr sz="800">
-                          <a:solidFill>
-                            <a:srgbClr val="F0F2F5"/>
-                          </a:solidFill>
-                        </a:defRPr>
-                      </a:pPr>
-                      <a:r>
-                        <a:t>23.67</a:t>
+                        <a:t>FUT_EEB_270330</a:t>
+                      </a:r>
+                    </a:p>
+                  </a:txBody>
+                  <a:tcPr anchor="ctr">
+                    <a:solidFill>
+                      <a:srgbClr val="141820"/>
+                    </a:solidFill>
+                  </a:tcPr>
+                </a:tc>
+                <a:tc>
+                  <a:txBody>
+                    <a:bodyPr/>
+                    <a:lstStyle/>
+                    <a:p>
+                      <a:pPr algn="ctr">
+                        <a:defRPr sz="800">
+                          <a:solidFill>
+                            <a:srgbClr val="F0F2F5"/>
+                          </a:solidFill>
+                        </a:defRPr>
+                      </a:pPr>
+                      <a:r>
+                        <a:t>Power East Base (Monthly)</a:t>
+                      </a:r>
+                    </a:p>
+                  </a:txBody>
+                  <a:tcPr anchor="ctr">
+                    <a:solidFill>
+                      <a:srgbClr val="141820"/>
+                    </a:solidFill>
+                  </a:tcPr>
+                </a:tc>
+                <a:tc>
+                  <a:txBody>
+                    <a:bodyPr/>
+                    <a:lstStyle/>
+                    <a:p>
+                      <a:pPr algn="ctr">
+                        <a:defRPr sz="800">
+                          <a:solidFill>
+                            <a:srgbClr val="F0F2F5"/>
+                          </a:solidFill>
+                        </a:defRPr>
+                      </a:pPr>
+                      <a:r>
+                        <a:t>202703</a:t>
+                      </a:r>
+                    </a:p>
+                  </a:txBody>
+                  <a:tcPr anchor="ctr">
+                    <a:solidFill>
+                      <a:srgbClr val="141820"/>
+                    </a:solidFill>
+                  </a:tcPr>
+                </a:tc>
+                <a:tc>
+                  <a:txBody>
+                    <a:bodyPr/>
+                    <a:lstStyle/>
+                    <a:p>
+                      <a:pPr algn="ctr">
+                        <a:defRPr sz="800">
+                          <a:solidFill>
+                            <a:srgbClr val="F0F2F5"/>
+                          </a:solidFill>
+                        </a:defRPr>
+                      </a:pPr>
+                      <a:r>
+                        <a:t>16.78</a:t>
+                      </a:r>
+                    </a:p>
+                  </a:txBody>
+                  <a:tcPr anchor="ctr">
+                    <a:solidFill>
+                      <a:srgbClr val="141820"/>
+                    </a:solidFill>
+                  </a:tcPr>
+                </a:tc>
+                <a:tc>
+                  <a:txBody>
+                    <a:bodyPr/>
+                    <a:lstStyle/>
+                    <a:p>
+                      <a:pPr algn="ctr">
+                        <a:defRPr sz="800">
+                          <a:solidFill>
+                            <a:srgbClr val="F0F2F5"/>
+                          </a:solidFill>
+                        </a:defRPr>
+                      </a:pPr>
+                      <a:r>
+                        <a:t>17.98</a:t>
                       </a:r>
                     </a:p>
                   </a:txBody>
@@ -9104,7 +9104,7 @@
                         </a:defRPr>
                       </a:pPr>
                       <a:r>
-                        <a:t>-1.15</a:t>
+                        <a:t>-1.20</a:t>
                       </a:r>
                     </a:p>
                   </a:txBody>
@@ -9127,7 +9127,7 @@
                         </a:defRPr>
                       </a:pPr>
                       <a:r>
-                        <a:t>-4.86%</a:t>
+                        <a:t>-6.67%</a:t>
                       </a:r>
                     </a:p>
                   </a:txBody>
@@ -9152,7 +9152,7 @@
                         </a:defRPr>
                       </a:pPr>
                       <a:r>
-                        <a:t>FUT_EEB_261030</a:t>
+                        <a:t>FUT_EEP_260428</a:t>
                       </a:r>
                     </a:p>
                   </a:txBody>
@@ -9175,7 +9175,7 @@
                         </a:defRPr>
                       </a:pPr>
                       <a:r>
-                        <a:t>Power East Base (Monthly)</a:t>
+                        <a:t>Power East Peak (Monthly)</a:t>
                       </a:r>
                     </a:p>
                   </a:txBody>
@@ -9198,7 +9198,7 @@
                         </a:defRPr>
                       </a:pPr>
                       <a:r>
-                        <a:t>202610</a:t>
+                        <a:t>202604</a:t>
                       </a:r>
                     </a:p>
                   </a:txBody>
@@ -9221,7 +9221,7 @@
                         </a:defRPr>
                       </a:pPr>
                       <a:r>
-                        <a:t>19.62</a:t>
+                        <a:t>20.80</a:t>
                       </a:r>
                     </a:p>
                   </a:txBody>
@@ -9244,7 +9244,7 @@
                         </a:defRPr>
                       </a:pPr>
                       <a:r>
-                        <a:t>20.71</a:t>
+                        <a:t>22.00</a:t>
                       </a:r>
                     </a:p>
                   </a:txBody>
@@ -9267,7 +9267,7 @@
                         </a:defRPr>
                       </a:pPr>
                       <a:r>
-                        <a:t>-1.09</a:t>
+                        <a:t>-1.20</a:t>
                       </a:r>
                     </a:p>
                   </a:txBody>
@@ -9290,7 +9290,7 @@
                         </a:defRPr>
                       </a:pPr>
                       <a:r>
-                        <a:t>-5.26%</a:t>
+                        <a:t>-5.45%</a:t>
                       </a:r>
                     </a:p>
                   </a:txBody>
@@ -9315,7 +9315,7 @@
                         </a:defRPr>
                       </a:pPr>
                       <a:r>
-                        <a:t>FUT_EWB_261030</a:t>
+                        <a:t>FUT_EWB_270129</a:t>
                       </a:r>
                     </a:p>
                   </a:txBody>
@@ -9361,53 +9361,53 @@
                         </a:defRPr>
                       </a:pPr>
                       <a:r>
-                        <a:t>202610</a:t>
-                      </a:r>
-                    </a:p>
-                  </a:txBody>
-                  <a:tcPr anchor="ctr">
-                    <a:solidFill>
-                      <a:srgbClr val="141820"/>
-                    </a:solidFill>
-                  </a:tcPr>
-                </a:tc>
-                <a:tc>
-                  <a:txBody>
-                    <a:bodyPr/>
-                    <a:lstStyle/>
-                    <a:p>
-                      <a:pPr algn="ctr">
-                        <a:defRPr sz="800">
-                          <a:solidFill>
-                            <a:srgbClr val="F0F2F5"/>
-                          </a:solidFill>
-                        </a:defRPr>
-                      </a:pPr>
-                      <a:r>
-                        <a:t>16.72</a:t>
-                      </a:r>
-                    </a:p>
-                  </a:txBody>
-                  <a:tcPr anchor="ctr">
-                    <a:solidFill>
-                      <a:srgbClr val="141820"/>
-                    </a:solidFill>
-                  </a:tcPr>
-                </a:tc>
-                <a:tc>
-                  <a:txBody>
-                    <a:bodyPr/>
-                    <a:lstStyle/>
-                    <a:p>
-                      <a:pPr algn="ctr">
-                        <a:defRPr sz="800">
-                          <a:solidFill>
-                            <a:srgbClr val="F0F2F5"/>
-                          </a:solidFill>
-                        </a:defRPr>
-                      </a:pPr>
-                      <a:r>
-                        <a:t>17.81</a:t>
+                        <a:t>202701</a:t>
+                      </a:r>
+                    </a:p>
+                  </a:txBody>
+                  <a:tcPr anchor="ctr">
+                    <a:solidFill>
+                      <a:srgbClr val="141820"/>
+                    </a:solidFill>
+                  </a:tcPr>
+                </a:tc>
+                <a:tc>
+                  <a:txBody>
+                    <a:bodyPr/>
+                    <a:lstStyle/>
+                    <a:p>
+                      <a:pPr algn="ctr">
+                        <a:defRPr sz="800">
+                          <a:solidFill>
+                            <a:srgbClr val="F0F2F5"/>
+                          </a:solidFill>
+                        </a:defRPr>
+                      </a:pPr>
+                      <a:r>
+                        <a:t>17.02</a:t>
+                      </a:r>
+                    </a:p>
+                  </a:txBody>
+                  <a:tcPr anchor="ctr">
+                    <a:solidFill>
+                      <a:srgbClr val="141820"/>
+                    </a:solidFill>
+                  </a:tcPr>
+                </a:tc>
+                <a:tc>
+                  <a:txBody>
+                    <a:bodyPr/>
+                    <a:lstStyle/>
+                    <a:p>
+                      <a:pPr algn="ctr">
+                        <a:defRPr sz="800">
+                          <a:solidFill>
+                            <a:srgbClr val="F0F2F5"/>
+                          </a:solidFill>
+                        </a:defRPr>
+                      </a:pPr>
+                      <a:r>
+                        <a:t>18.22</a:t>
                       </a:r>
                     </a:p>
                   </a:txBody>
@@ -9430,7 +9430,7 @@
                         </a:defRPr>
                       </a:pPr>
                       <a:r>
-                        <a:t>-1.09</a:t>
+                        <a:t>-1.20</a:t>
                       </a:r>
                     </a:p>
                   </a:txBody>
@@ -9453,7 +9453,7 @@
                         </a:defRPr>
                       </a:pPr>
                       <a:r>
-                        <a:t>-6.12%</a:t>
+                        <a:t>-6.59%</a:t>
                       </a:r>
                     </a:p>
                   </a:txBody>
@@ -9478,7 +9478,7 @@
                         </a:defRPr>
                       </a:pPr>
                       <a:r>
-                        <a:t>FUT_EEB_260828</a:t>
+                        <a:t>FUT_EWB_270226</a:t>
                       </a:r>
                     </a:p>
                   </a:txBody>
@@ -9501,7 +9501,7 @@
                         </a:defRPr>
                       </a:pPr>
                       <a:r>
-                        <a:t>Power East Base (Monthly)</a:t>
+                        <a:t>Power West Base (Monthly)</a:t>
                       </a:r>
                     </a:p>
                   </a:txBody>
@@ -9524,7 +9524,7 @@
                         </a:defRPr>
                       </a:pPr>
                       <a:r>
-                        <a:t>202608</a:t>
+                        <a:t>202702</a:t>
                       </a:r>
                     </a:p>
                   </a:txBody>
@@ -9547,7 +9547,7 @@
                         </a:defRPr>
                       </a:pPr>
                       <a:r>
-                        <a:t>22.14</a:t>
+                        <a:t>16.96</a:t>
                       </a:r>
                     </a:p>
                   </a:txBody>
@@ -9570,7 +9570,7 @@
                         </a:defRPr>
                       </a:pPr>
                       <a:r>
-                        <a:t>23.19</a:t>
+                        <a:t>18.16</a:t>
                       </a:r>
                     </a:p>
                   </a:txBody>
@@ -9593,7 +9593,7 @@
                         </a:defRPr>
                       </a:pPr>
                       <a:r>
-                        <a:t>-1.05</a:t>
+                        <a:t>-1.20</a:t>
                       </a:r>
                     </a:p>
                   </a:txBody>
@@ -9616,7 +9616,7 @@
                         </a:defRPr>
                       </a:pPr>
                       <a:r>
-                        <a:t>-4.53%</a:t>
+                        <a:t>-6.61%</a:t>
                       </a:r>
                     </a:p>
                   </a:txBody>
@@ -9641,99 +9641,99 @@
                         </a:defRPr>
                       </a:pPr>
                       <a:r>
-                        <a:t>FUT_EEPY_260326</a:t>
-                      </a:r>
-                    </a:p>
-                  </a:txBody>
-                  <a:tcPr anchor="ctr">
-                    <a:solidFill>
-                      <a:srgbClr val="141820"/>
-                    </a:solidFill>
-                  </a:tcPr>
-                </a:tc>
-                <a:tc>
-                  <a:txBody>
-                    <a:bodyPr/>
-                    <a:lstStyle/>
-                    <a:p>
-                      <a:pPr algn="ctr">
-                        <a:defRPr sz="800">
-                          <a:solidFill>
-                            <a:srgbClr val="F0F2F5"/>
-                          </a:solidFill>
-                        </a:defRPr>
-                      </a:pPr>
-                      <a:r>
-                        <a:t>Power East Peak (Yearly)</a:t>
-                      </a:r>
-                    </a:p>
-                  </a:txBody>
-                  <a:tcPr anchor="ctr">
-                    <a:solidFill>
-                      <a:srgbClr val="141820"/>
-                    </a:solidFill>
-                  </a:tcPr>
-                </a:tc>
-                <a:tc>
-                  <a:txBody>
-                    <a:bodyPr/>
-                    <a:lstStyle/>
-                    <a:p>
-                      <a:pPr algn="ctr">
-                        <a:defRPr sz="800">
-                          <a:solidFill>
-                            <a:srgbClr val="F0F2F5"/>
-                          </a:solidFill>
-                        </a:defRPr>
-                      </a:pPr>
-                      <a:r>
-                        <a:t>202604</a:t>
-                      </a:r>
-                    </a:p>
-                  </a:txBody>
-                  <a:tcPr anchor="ctr">
-                    <a:solidFill>
-                      <a:srgbClr val="141820"/>
-                    </a:solidFill>
-                  </a:tcPr>
-                </a:tc>
-                <a:tc>
-                  <a:txBody>
-                    <a:bodyPr/>
-                    <a:lstStyle/>
-                    <a:p>
-                      <a:pPr algn="ctr">
-                        <a:defRPr sz="800">
-                          <a:solidFill>
-                            <a:srgbClr val="F0F2F5"/>
-                          </a:solidFill>
-                        </a:defRPr>
-                      </a:pPr>
-                      <a:r>
-                        <a:t>24.23</a:t>
-                      </a:r>
-                    </a:p>
-                  </a:txBody>
-                  <a:tcPr anchor="ctr">
-                    <a:solidFill>
-                      <a:srgbClr val="141820"/>
-                    </a:solidFill>
-                  </a:tcPr>
-                </a:tc>
-                <a:tc>
-                  <a:txBody>
-                    <a:bodyPr/>
-                    <a:lstStyle/>
-                    <a:p>
-                      <a:pPr algn="ctr">
-                        <a:defRPr sz="800">
-                          <a:solidFill>
-                            <a:srgbClr val="F0F2F5"/>
-                          </a:solidFill>
-                        </a:defRPr>
-                      </a:pPr>
-                      <a:r>
-                        <a:t>25.23</a:t>
+                        <a:t>FUT_EWB_270330</a:t>
+                      </a:r>
+                    </a:p>
+                  </a:txBody>
+                  <a:tcPr anchor="ctr">
+                    <a:solidFill>
+                      <a:srgbClr val="141820"/>
+                    </a:solidFill>
+                  </a:tcPr>
+                </a:tc>
+                <a:tc>
+                  <a:txBody>
+                    <a:bodyPr/>
+                    <a:lstStyle/>
+                    <a:p>
+                      <a:pPr algn="ctr">
+                        <a:defRPr sz="800">
+                          <a:solidFill>
+                            <a:srgbClr val="F0F2F5"/>
+                          </a:solidFill>
+                        </a:defRPr>
+                      </a:pPr>
+                      <a:r>
+                        <a:t>Power West Base (Monthly)</a:t>
+                      </a:r>
+                    </a:p>
+                  </a:txBody>
+                  <a:tcPr anchor="ctr">
+                    <a:solidFill>
+                      <a:srgbClr val="141820"/>
+                    </a:solidFill>
+                  </a:tcPr>
+                </a:tc>
+                <a:tc>
+                  <a:txBody>
+                    <a:bodyPr/>
+                    <a:lstStyle/>
+                    <a:p>
+                      <a:pPr algn="ctr">
+                        <a:defRPr sz="800">
+                          <a:solidFill>
+                            <a:srgbClr val="F0F2F5"/>
+                          </a:solidFill>
+                        </a:defRPr>
+                      </a:pPr>
+                      <a:r>
+                        <a:t>202703</a:t>
+                      </a:r>
+                    </a:p>
+                  </a:txBody>
+                  <a:tcPr anchor="ctr">
+                    <a:solidFill>
+                      <a:srgbClr val="141820"/>
+                    </a:solidFill>
+                  </a:tcPr>
+                </a:tc>
+                <a:tc>
+                  <a:txBody>
+                    <a:bodyPr/>
+                    <a:lstStyle/>
+                    <a:p>
+                      <a:pPr algn="ctr">
+                        <a:defRPr sz="800">
+                          <a:solidFill>
+                            <a:srgbClr val="F0F2F5"/>
+                          </a:solidFill>
+                        </a:defRPr>
+                      </a:pPr>
+                      <a:r>
+                        <a:t>15.02</a:t>
+                      </a:r>
+                    </a:p>
+                  </a:txBody>
+                  <a:tcPr anchor="ctr">
+                    <a:solidFill>
+                      <a:srgbClr val="141820"/>
+                    </a:solidFill>
+                  </a:tcPr>
+                </a:tc>
+                <a:tc>
+                  <a:txBody>
+                    <a:bodyPr/>
+                    <a:lstStyle/>
+                    <a:p>
+                      <a:pPr algn="ctr">
+                        <a:defRPr sz="800">
+                          <a:solidFill>
+                            <a:srgbClr val="F0F2F5"/>
+                          </a:solidFill>
+                        </a:defRPr>
+                      </a:pPr>
+                      <a:r>
+                        <a:t>16.14</a:t>
                       </a:r>
                     </a:p>
                   </a:txBody>
@@ -9756,7 +9756,7 @@
                         </a:defRPr>
                       </a:pPr>
                       <a:r>
-                        <a:t>-1.00</a:t>
+                        <a:t>-1.12</a:t>
                       </a:r>
                     </a:p>
                   </a:txBody>
@@ -9779,7 +9779,7 @@
                         </a:defRPr>
                       </a:pPr>
                       <a:r>
-                        <a:t>-3.96%</a:t>
+                        <a:t>-6.94%</a:t>
                       </a:r>
                     </a:p>
                   </a:txBody>
@@ -9804,7 +9804,7 @@
                         </a:defRPr>
                       </a:pPr>
                       <a:r>
-                        <a:t>FUT_EEP_270225</a:t>
+                        <a:t>FUT_EWB_260929</a:t>
                       </a:r>
                     </a:p>
                   </a:txBody>
@@ -9827,7 +9827,7 @@
                         </a:defRPr>
                       </a:pPr>
                       <a:r>
-                        <a:t>Power East Peak (Monthly)</a:t>
+                        <a:t>Power West Base (Monthly)</a:t>
                       </a:r>
                     </a:p>
                   </a:txBody>
@@ -9850,7 +9850,7 @@
                         </a:defRPr>
                       </a:pPr>
                       <a:r>
-                        <a:t>202702</a:t>
+                        <a:t>202609</a:t>
                       </a:r>
                     </a:p>
                   </a:txBody>
@@ -9873,7 +9873,7 @@
                         </a:defRPr>
                       </a:pPr>
                       <a:r>
-                        <a:t>23.89</a:t>
+                        <a:t>17.65</a:t>
                       </a:r>
                     </a:p>
                   </a:txBody>
@@ -9896,7 +9896,7 @@
                         </a:defRPr>
                       </a:pPr>
                       <a:r>
-                        <a:t>24.89</a:t>
+                        <a:t>18.75</a:t>
                       </a:r>
                     </a:p>
                   </a:txBody>
@@ -9919,7 +9919,7 @@
                         </a:defRPr>
                       </a:pPr>
                       <a:r>
-                        <a:t>-1.00</a:t>
+                        <a:t>-1.10</a:t>
                       </a:r>
                     </a:p>
                   </a:txBody>
@@ -9942,7 +9942,7 @@
                         </a:defRPr>
                       </a:pPr>
                       <a:r>
-                        <a:t>-4.02%</a:t>
+                        <a:t>-5.87%</a:t>
                       </a:r>
                     </a:p>
                   </a:txBody>
@@ -9967,99 +9967,99 @@
                         </a:defRPr>
                       </a:pPr>
                       <a:r>
-                        <a:t>FUT_EWB_261127</a:t>
-                      </a:r>
-                    </a:p>
-                  </a:txBody>
-                  <a:tcPr anchor="ctr">
-                    <a:solidFill>
-                      <a:srgbClr val="141820"/>
-                    </a:solidFill>
-                  </a:tcPr>
-                </a:tc>
-                <a:tc>
-                  <a:txBody>
-                    <a:bodyPr/>
-                    <a:lstStyle/>
-                    <a:p>
-                      <a:pPr algn="ctr">
-                        <a:defRPr sz="800">
-                          <a:solidFill>
-                            <a:srgbClr val="F0F2F5"/>
-                          </a:solidFill>
-                        </a:defRPr>
-                      </a:pPr>
-                      <a:r>
-                        <a:t>Power West Base (Monthly)</a:t>
-                      </a:r>
-                    </a:p>
-                  </a:txBody>
-                  <a:tcPr anchor="ctr">
-                    <a:solidFill>
-                      <a:srgbClr val="141820"/>
-                    </a:solidFill>
-                  </a:tcPr>
-                </a:tc>
-                <a:tc>
-                  <a:txBody>
-                    <a:bodyPr/>
-                    <a:lstStyle/>
-                    <a:p>
-                      <a:pPr algn="ctr">
-                        <a:defRPr sz="800">
-                          <a:solidFill>
-                            <a:srgbClr val="F0F2F5"/>
-                          </a:solidFill>
-                        </a:defRPr>
-                      </a:pPr>
-                      <a:r>
-                        <a:t>202611</a:t>
-                      </a:r>
-                    </a:p>
-                  </a:txBody>
-                  <a:tcPr anchor="ctr">
-                    <a:solidFill>
-                      <a:srgbClr val="141820"/>
-                    </a:solidFill>
-                  </a:tcPr>
-                </a:tc>
-                <a:tc>
-                  <a:txBody>
-                    <a:bodyPr/>
-                    <a:lstStyle/>
-                    <a:p>
-                      <a:pPr algn="ctr">
-                        <a:defRPr sz="800">
-                          <a:solidFill>
-                            <a:srgbClr val="F0F2F5"/>
-                          </a:solidFill>
-                        </a:defRPr>
-                      </a:pPr>
-                      <a:r>
-                        <a:t>16.77</a:t>
-                      </a:r>
-                    </a:p>
-                  </a:txBody>
-                  <a:tcPr anchor="ctr">
-                    <a:solidFill>
-                      <a:srgbClr val="141820"/>
-                    </a:solidFill>
-                  </a:tcPr>
-                </a:tc>
-                <a:tc>
-                  <a:txBody>
-                    <a:bodyPr/>
-                    <a:lstStyle/>
-                    <a:p>
-                      <a:pPr algn="ctr">
-                        <a:defRPr sz="800">
-                          <a:solidFill>
-                            <a:srgbClr val="F0F2F5"/>
-                          </a:solidFill>
-                        </a:defRPr>
-                      </a:pPr>
-                      <a:r>
-                        <a:t>17.77</a:t>
+                        <a:t>FUT_EEB_260929</a:t>
+                      </a:r>
+                    </a:p>
+                  </a:txBody>
+                  <a:tcPr anchor="ctr">
+                    <a:solidFill>
+                      <a:srgbClr val="141820"/>
+                    </a:solidFill>
+                  </a:tcPr>
+                </a:tc>
+                <a:tc>
+                  <a:txBody>
+                    <a:bodyPr/>
+                    <a:lstStyle/>
+                    <a:p>
+                      <a:pPr algn="ctr">
+                        <a:defRPr sz="800">
+                          <a:solidFill>
+                            <a:srgbClr val="F0F2F5"/>
+                          </a:solidFill>
+                        </a:defRPr>
+                      </a:pPr>
+                      <a:r>
+                        <a:t>Power East Base (Monthly)</a:t>
+                      </a:r>
+                    </a:p>
+                  </a:txBody>
+                  <a:tcPr anchor="ctr">
+                    <a:solidFill>
+                      <a:srgbClr val="141820"/>
+                    </a:solidFill>
+                  </a:tcPr>
+                </a:tc>
+                <a:tc>
+                  <a:txBody>
+                    <a:bodyPr/>
+                    <a:lstStyle/>
+                    <a:p>
+                      <a:pPr algn="ctr">
+                        <a:defRPr sz="800">
+                          <a:solidFill>
+                            <a:srgbClr val="F0F2F5"/>
+                          </a:solidFill>
+                        </a:defRPr>
+                      </a:pPr>
+                      <a:r>
+                        <a:t>202609</a:t>
+                      </a:r>
+                    </a:p>
+                  </a:txBody>
+                  <a:tcPr anchor="ctr">
+                    <a:solidFill>
+                      <a:srgbClr val="141820"/>
+                    </a:solidFill>
+                  </a:tcPr>
+                </a:tc>
+                <a:tc>
+                  <a:txBody>
+                    <a:bodyPr/>
+                    <a:lstStyle/>
+                    <a:p>
+                      <a:pPr algn="ctr">
+                        <a:defRPr sz="800">
+                          <a:solidFill>
+                            <a:srgbClr val="F0F2F5"/>
+                          </a:solidFill>
+                        </a:defRPr>
+                      </a:pPr>
+                      <a:r>
+                        <a:t>20.67</a:t>
+                      </a:r>
+                    </a:p>
+                  </a:txBody>
+                  <a:tcPr anchor="ctr">
+                    <a:solidFill>
+                      <a:srgbClr val="141820"/>
+                    </a:solidFill>
+                  </a:tcPr>
+                </a:tc>
+                <a:tc>
+                  <a:txBody>
+                    <a:bodyPr/>
+                    <a:lstStyle/>
+                    <a:p>
+                      <a:pPr algn="ctr">
+                        <a:defRPr sz="800">
+                          <a:solidFill>
+                            <a:srgbClr val="F0F2F5"/>
+                          </a:solidFill>
+                        </a:defRPr>
+                      </a:pPr>
+                      <a:r>
+                        <a:t>21.75</a:t>
                       </a:r>
                     </a:p>
                   </a:txBody>
@@ -10082,7 +10082,7 @@
                         </a:defRPr>
                       </a:pPr>
                       <a:r>
-                        <a:t>-1.00</a:t>
+                        <a:t>-1.08</a:t>
                       </a:r>
                     </a:p>
                   </a:txBody>
@@ -10105,7 +10105,7 @@
                         </a:defRPr>
                       </a:pPr>
                       <a:r>
-                        <a:t>-5.63%</a:t>
+                        <a:t>-4.97%</a:t>
                       </a:r>
                     </a:p>
                   </a:txBody>

--- a/docs/chartpack/latest.pptx
+++ b/docs/chartpack/latest.pptx
@@ -3210,7 +3210,7 @@
               </a:defRPr>
             </a:pPr>
             <a:r>
-              <a:t>Trade Date: 2026-03-26</a:t>
+              <a:t>Trade Date: 2026-03-27</a:t>
             </a:r>
           </a:p>
         </p:txBody>
@@ -3505,7 +3505,7 @@
               </a:defRPr>
             </a:pPr>
             <a:r>
-              <a:t>East/West Base &amp; Peak monthly contracts (2026-03-26)</a:t>
+              <a:t>East/West Base &amp; Peak monthly contracts (2026-03-27)</a:t>
             </a:r>
           </a:p>
         </p:txBody>
@@ -3711,7 +3711,7 @@
               </a:defRPr>
             </a:pPr>
             <a:r>
-              <a:t>Front-month settlement prices as of 2026-03-26</a:t>
+              <a:t>Front-month settlement prices as of 2026-03-27</a:t>
             </a:r>
           </a:p>
         </p:txBody>
@@ -3989,7 +3989,7 @@
                         </a:defRPr>
                       </a:pPr>
                       <a:r>
-                        <a:t>108,200.00</a:t>
+                        <a:t>104,900.00</a:t>
                       </a:r>
                     </a:p>
                   </a:txBody>
@@ -4035,7 +4035,7 @@
                         </a:defRPr>
                       </a:pPr>
                       <a:r>
-                        <a:t>-4700.00</a:t>
+                        <a:t>-3300.00</a:t>
                       </a:r>
                     </a:p>
                   </a:txBody>
@@ -4058,7 +4058,7 @@
                         </a:defRPr>
                       </a:pPr>
                       <a:r>
-                        <a:t>-4.16%</a:t>
+                        <a:t>-3.05%</a:t>
                       </a:r>
                     </a:p>
                   </a:txBody>
@@ -4804,7 +4804,7 @@
                         </a:defRPr>
                       </a:pPr>
                       <a:r>
-                        <a:t>132,650.00</a:t>
+                        <a:t>127,670.00</a:t>
                       </a:r>
                     </a:p>
                   </a:txBody>
@@ -4850,7 +4850,7 @@
                         </a:defRPr>
                       </a:pPr>
                       <a:r>
-                        <a:t>-2430.00</a:t>
+                        <a:t>-4980.00</a:t>
                       </a:r>
                     </a:p>
                   </a:txBody>
@@ -4873,7 +4873,7 @@
                         </a:defRPr>
                       </a:pPr>
                       <a:r>
-                        <a:t>-1.80%</a:t>
+                        <a:t>-3.75%</a:t>
                       </a:r>
                     </a:p>
                   </a:txBody>
@@ -4967,7 +4967,7 @@
                         </a:defRPr>
                       </a:pPr>
                       <a:r>
-                        <a:t>3,102.00</a:t>
+                        <a:t>3,194.00</a:t>
                       </a:r>
                     </a:p>
                   </a:txBody>
@@ -5008,35 +5008,35 @@
                       <a:pPr algn="ctr">
                         <a:defRPr sz="800">
                           <a:solidFill>
-                            <a:srgbClr val="EF4444"/>
-                          </a:solidFill>
-                        </a:defRPr>
-                      </a:pPr>
-                      <a:r>
-                        <a:t>-87.00</a:t>
-                      </a:r>
-                    </a:p>
-                  </a:txBody>
-                  <a:tcPr anchor="ctr">
-                    <a:solidFill>
-                      <a:srgbClr val="141820"/>
-                    </a:solidFill>
-                  </a:tcPr>
-                </a:tc>
-                <a:tc>
-                  <a:txBody>
-                    <a:bodyPr/>
-                    <a:lstStyle/>
-                    <a:p>
-                      <a:pPr algn="ctr">
-                        <a:defRPr sz="800">
-                          <a:solidFill>
-                            <a:srgbClr val="EF4444"/>
-                          </a:solidFill>
-                        </a:defRPr>
-                      </a:pPr>
-                      <a:r>
-                        <a:t>-2.73%</a:t>
+                            <a:srgbClr val="10B981"/>
+                          </a:solidFill>
+                        </a:defRPr>
+                      </a:pPr>
+                      <a:r>
+                        <a:t>+92.00</a:t>
+                      </a:r>
+                    </a:p>
+                  </a:txBody>
+                  <a:tcPr anchor="ctr">
+                    <a:solidFill>
+                      <a:srgbClr val="141820"/>
+                    </a:solidFill>
+                  </a:tcPr>
+                </a:tc>
+                <a:tc>
+                  <a:txBody>
+                    <a:bodyPr/>
+                    <a:lstStyle/>
+                    <a:p>
+                      <a:pPr algn="ctr">
+                        <a:defRPr sz="800">
+                          <a:solidFill>
+                            <a:srgbClr val="10B981"/>
+                          </a:solidFill>
+                        </a:defRPr>
+                      </a:pPr>
+                      <a:r>
+                        <a:t>+2.97%</a:t>
                       </a:r>
                     </a:p>
                   </a:txBody>
@@ -5130,7 +5130,7 @@
                         </a:defRPr>
                       </a:pPr>
                       <a:r>
-                        <a:t>23,379.00</a:t>
+                        <a:t>22,703.00</a:t>
                       </a:r>
                     </a:p>
                   </a:txBody>
@@ -5171,12 +5171,12 @@
                       <a:pPr algn="ctr">
                         <a:defRPr sz="800">
                           <a:solidFill>
-                            <a:srgbClr val="10B981"/>
-                          </a:solidFill>
-                        </a:defRPr>
-                      </a:pPr>
-                      <a:r>
-                        <a:t>+237.00</a:t>
+                            <a:srgbClr val="EF4444"/>
+                          </a:solidFill>
+                        </a:defRPr>
+                      </a:pPr>
+                      <a:r>
+                        <a:t>-676.00</a:t>
                       </a:r>
                     </a:p>
                   </a:txBody>
@@ -5194,12 +5194,12 @@
                       <a:pPr algn="ctr">
                         <a:defRPr sz="800">
                           <a:solidFill>
-                            <a:srgbClr val="10B981"/>
-                          </a:solidFill>
-                        </a:defRPr>
-                      </a:pPr>
-                      <a:r>
-                        <a:t>+1.02%</a:t>
+                            <a:srgbClr val="EF4444"/>
+                          </a:solidFill>
+                        </a:defRPr>
+                      </a:pPr>
+                      <a:r>
+                        <a:t>-2.89%</a:t>
                       </a:r>
                     </a:p>
                   </a:txBody>
@@ -5293,7 +5293,7 @@
                         </a:defRPr>
                       </a:pPr>
                       <a:r>
-                        <a:t>7,500.00</a:t>
+                        <a:t>7,200.00</a:t>
                       </a:r>
                     </a:p>
                   </a:txBody>
@@ -5334,35 +5334,35 @@
                       <a:pPr algn="ctr">
                         <a:defRPr sz="800">
                           <a:solidFill>
-                            <a:srgbClr val="F0F2F5"/>
-                          </a:solidFill>
-                        </a:defRPr>
-                      </a:pPr>
-                      <a:r>
-                        <a:t>+0.00</a:t>
-                      </a:r>
-                    </a:p>
-                  </a:txBody>
-                  <a:tcPr anchor="ctr">
-                    <a:solidFill>
-                      <a:srgbClr val="141820"/>
-                    </a:solidFill>
-                  </a:tcPr>
-                </a:tc>
-                <a:tc>
-                  <a:txBody>
-                    <a:bodyPr/>
-                    <a:lstStyle/>
-                    <a:p>
-                      <a:pPr algn="ctr">
-                        <a:defRPr sz="800">
-                          <a:solidFill>
-                            <a:srgbClr val="F0F2F5"/>
-                          </a:solidFill>
-                        </a:defRPr>
-                      </a:pPr>
-                      <a:r>
-                        <a:t>+0.00%</a:t>
+                            <a:srgbClr val="EF4444"/>
+                          </a:solidFill>
+                        </a:defRPr>
+                      </a:pPr>
+                      <a:r>
+                        <a:t>-300.00</a:t>
+                      </a:r>
+                    </a:p>
+                  </a:txBody>
+                  <a:tcPr anchor="ctr">
+                    <a:solidFill>
+                      <a:srgbClr val="141820"/>
+                    </a:solidFill>
+                  </a:tcPr>
+                </a:tc>
+                <a:tc>
+                  <a:txBody>
+                    <a:bodyPr/>
+                    <a:lstStyle/>
+                    <a:p>
+                      <a:pPr algn="ctr">
+                        <a:defRPr sz="800">
+                          <a:solidFill>
+                            <a:srgbClr val="EF4444"/>
+                          </a:solidFill>
+                        </a:defRPr>
+                      </a:pPr>
+                      <a:r>
+                        <a:t>-4.00%</a:t>
                       </a:r>
                     </a:p>
                   </a:txBody>
@@ -5456,7 +5456,7 @@
                         </a:defRPr>
                       </a:pPr>
                       <a:r>
-                        <a:t>9,368.00</a:t>
+                        <a:t>9,333.00</a:t>
                       </a:r>
                     </a:p>
                   </a:txBody>
@@ -5502,7 +5502,7 @@
                         </a:defRPr>
                       </a:pPr>
                       <a:r>
-                        <a:t>-449.00</a:t>
+                        <a:t>-35.00</a:t>
                       </a:r>
                     </a:p>
                   </a:txBody>
@@ -5525,7 +5525,7 @@
                         </a:defRPr>
                       </a:pPr>
                       <a:r>
-                        <a:t>-4.57%</a:t>
+                        <a:t>-0.37%</a:t>
                       </a:r>
                     </a:p>
                   </a:txBody>
@@ -5782,7 +5782,7 @@
                         </a:defRPr>
                       </a:pPr>
                       <a:r>
-                        <a:t>361.00</a:t>
+                        <a:t>365.00</a:t>
                       </a:r>
                     </a:p>
                   </a:txBody>
@@ -5823,12 +5823,12 @@
                       <a:pPr algn="ctr">
                         <a:defRPr sz="800">
                           <a:solidFill>
-                            <a:srgbClr val="EF4444"/>
-                          </a:solidFill>
-                        </a:defRPr>
-                      </a:pPr>
-                      <a:r>
-                        <a:t>-3.80</a:t>
+                            <a:srgbClr val="10B981"/>
+                          </a:solidFill>
+                        </a:defRPr>
+                      </a:pPr>
+                      <a:r>
+                        <a:t>+4.00</a:t>
                       </a:r>
                     </a:p>
                   </a:txBody>
@@ -5846,12 +5846,12 @@
                       <a:pPr algn="ctr">
                         <a:defRPr sz="800">
                           <a:solidFill>
-                            <a:srgbClr val="EF4444"/>
-                          </a:solidFill>
-                        </a:defRPr>
-                      </a:pPr>
-                      <a:r>
-                        <a:t>-1.04%</a:t>
+                            <a:srgbClr val="10B981"/>
+                          </a:solidFill>
+                        </a:defRPr>
+                      </a:pPr>
+                      <a:r>
+                        <a:t>+1.11%</a:t>
                       </a:r>
                     </a:p>
                   </a:txBody>
@@ -5945,7 +5945,7 @@
                         </a:defRPr>
                       </a:pPr>
                       <a:r>
-                        <a:t>307.00</a:t>
+                        <a:t>312.00</a:t>
                       </a:r>
                     </a:p>
                   </a:txBody>
@@ -5986,35 +5986,35 @@
                       <a:pPr algn="ctr">
                         <a:defRPr sz="800">
                           <a:solidFill>
-                            <a:srgbClr val="F0F2F5"/>
-                          </a:solidFill>
-                        </a:defRPr>
-                      </a:pPr>
-                      <a:r>
-                        <a:t>+0.00</a:t>
-                      </a:r>
-                    </a:p>
-                  </a:txBody>
-                  <a:tcPr anchor="ctr">
-                    <a:solidFill>
-                      <a:srgbClr val="141820"/>
-                    </a:solidFill>
-                  </a:tcPr>
-                </a:tc>
-                <a:tc>
-                  <a:txBody>
-                    <a:bodyPr/>
-                    <a:lstStyle/>
-                    <a:p>
-                      <a:pPr algn="ctr">
-                        <a:defRPr sz="800">
-                          <a:solidFill>
-                            <a:srgbClr val="F0F2F5"/>
-                          </a:solidFill>
-                        </a:defRPr>
-                      </a:pPr>
-                      <a:r>
-                        <a:t>+0.00%</a:t>
+                            <a:srgbClr val="10B981"/>
+                          </a:solidFill>
+                        </a:defRPr>
+                      </a:pPr>
+                      <a:r>
+                        <a:t>+5.00</a:t>
+                      </a:r>
+                    </a:p>
+                  </a:txBody>
+                  <a:tcPr anchor="ctr">
+                    <a:solidFill>
+                      <a:srgbClr val="141820"/>
+                    </a:solidFill>
+                  </a:tcPr>
+                </a:tc>
+                <a:tc>
+                  <a:txBody>
+                    <a:bodyPr/>
+                    <a:lstStyle/>
+                    <a:p>
+                      <a:pPr algn="ctr">
+                        <a:defRPr sz="800">
+                          <a:solidFill>
+                            <a:srgbClr val="10B981"/>
+                          </a:solidFill>
+                        </a:defRPr>
+                      </a:pPr>
+                      <a:r>
+                        <a:t>+1.63%</a:t>
                       </a:r>
                     </a:p>
                   </a:txBody>
@@ -6108,7 +6108,7 @@
                         </a:defRPr>
                       </a:pPr>
                       <a:r>
-                        <a:t>16,470.00</a:t>
+                        <a:t>16,535.00</a:t>
                       </a:r>
                     </a:p>
                   </a:txBody>
@@ -6154,7 +6154,7 @@
                         </a:defRPr>
                       </a:pPr>
                       <a:r>
-                        <a:t>+10.00</a:t>
+                        <a:t>+65.00</a:t>
                       </a:r>
                     </a:p>
                   </a:txBody>
@@ -6177,7 +6177,7 @@
                         </a:defRPr>
                       </a:pPr>
                       <a:r>
-                        <a:t>+0.06%</a:t>
+                        <a:t>+0.39%</a:t>
                       </a:r>
                     </a:p>
                   </a:txBody>
@@ -6248,7 +6248,7 @@
                         </a:defRPr>
                       </a:pPr>
                       <a:r>
-                        <a:t>202603</a:t>
+                        <a:t>202604</a:t>
                       </a:r>
                     </a:p>
                   </a:txBody>
@@ -6858,7 +6858,7 @@
               </a:defRPr>
             </a:pPr>
             <a:r>
-              <a:t>Gold &amp; Platinum (2026-03-26)</a:t>
+              <a:t>Gold &amp; Platinum (2026-03-27)</a:t>
             </a:r>
           </a:p>
         </p:txBody>
@@ -7064,7 +7064,7 @@
               </a:defRPr>
             </a:pPr>
             <a:r>
-              <a:t>Dubai Crude Oil &amp; LNG Platts JKM (2026-03-26)</a:t>
+              <a:t>Dubai Crude Oil &amp; LNG Platts JKM (2026-03-27)</a:t>
             </a:r>
           </a:p>
         </p:txBody>
@@ -7476,7 +7476,7 @@
               </a:defRPr>
             </a:pPr>
             <a:r>
-              <a:t>Largest absolute settlement price changes vs previous day (2026-03-26)</a:t>
+              <a:t>Largest absolute settlement price changes vs previous day (2026-03-27)</a:t>
             </a:r>
           </a:p>
         </p:txBody>
@@ -7685,145 +7685,145 @@
                         </a:defRPr>
                       </a:pPr>
                       <a:r>
-                        <a:t>FUT_EEB_261230</a:t>
-                      </a:r>
-                    </a:p>
-                  </a:txBody>
-                  <a:tcPr anchor="ctr">
-                    <a:solidFill>
-                      <a:srgbClr val="141820"/>
-                    </a:solidFill>
-                  </a:tcPr>
-                </a:tc>
-                <a:tc>
-                  <a:txBody>
-                    <a:bodyPr/>
-                    <a:lstStyle/>
-                    <a:p>
-                      <a:pPr algn="ctr">
-                        <a:defRPr sz="800">
-                          <a:solidFill>
-                            <a:srgbClr val="F0F2F5"/>
-                          </a:solidFill>
-                        </a:defRPr>
-                      </a:pPr>
-                      <a:r>
-                        <a:t>Power East Base (Monthly)</a:t>
-                      </a:r>
-                    </a:p>
-                  </a:txBody>
-                  <a:tcPr anchor="ctr">
-                    <a:solidFill>
-                      <a:srgbClr val="141820"/>
-                    </a:solidFill>
-                  </a:tcPr>
-                </a:tc>
-                <a:tc>
-                  <a:txBody>
-                    <a:bodyPr/>
-                    <a:lstStyle/>
-                    <a:p>
-                      <a:pPr algn="ctr">
-                        <a:defRPr sz="800">
-                          <a:solidFill>
-                            <a:srgbClr val="F0F2F5"/>
-                          </a:solidFill>
-                        </a:defRPr>
-                      </a:pPr>
-                      <a:r>
-                        <a:t>202612</a:t>
-                      </a:r>
-                    </a:p>
-                  </a:txBody>
-                  <a:tcPr anchor="ctr">
-                    <a:solidFill>
-                      <a:srgbClr val="141820"/>
-                    </a:solidFill>
-                  </a:tcPr>
-                </a:tc>
-                <a:tc>
-                  <a:txBody>
-                    <a:bodyPr/>
-                    <a:lstStyle/>
-                    <a:p>
-                      <a:pPr algn="ctr">
-                        <a:defRPr sz="800">
-                          <a:solidFill>
-                            <a:srgbClr val="F0F2F5"/>
-                          </a:solidFill>
-                        </a:defRPr>
-                      </a:pPr>
-                      <a:r>
-                        <a:t>19.07</a:t>
-                      </a:r>
-                    </a:p>
-                  </a:txBody>
-                  <a:tcPr anchor="ctr">
-                    <a:solidFill>
-                      <a:srgbClr val="141820"/>
-                    </a:solidFill>
-                  </a:tcPr>
-                </a:tc>
-                <a:tc>
-                  <a:txBody>
-                    <a:bodyPr/>
-                    <a:lstStyle/>
-                    <a:p>
-                      <a:pPr algn="ctr">
-                        <a:defRPr sz="800">
-                          <a:solidFill>
-                            <a:srgbClr val="F0F2F5"/>
-                          </a:solidFill>
-                        </a:defRPr>
-                      </a:pPr>
-                      <a:r>
-                        <a:t>21.10</a:t>
-                      </a:r>
-                    </a:p>
-                  </a:txBody>
-                  <a:tcPr anchor="ctr">
-                    <a:solidFill>
-                      <a:srgbClr val="141820"/>
-                    </a:solidFill>
-                  </a:tcPr>
-                </a:tc>
-                <a:tc>
-                  <a:txBody>
-                    <a:bodyPr/>
-                    <a:lstStyle/>
-                    <a:p>
-                      <a:pPr algn="ctr">
-                        <a:defRPr sz="800">
-                          <a:solidFill>
-                            <a:srgbClr val="EF4444"/>
-                          </a:solidFill>
-                        </a:defRPr>
-                      </a:pPr>
-                      <a:r>
-                        <a:t>-2.03</a:t>
-                      </a:r>
-                    </a:p>
-                  </a:txBody>
-                  <a:tcPr anchor="ctr">
-                    <a:solidFill>
-                      <a:srgbClr val="141820"/>
-                    </a:solidFill>
-                  </a:tcPr>
-                </a:tc>
-                <a:tc>
-                  <a:txBody>
-                    <a:bodyPr/>
-                    <a:lstStyle/>
-                    <a:p>
-                      <a:pPr algn="ctr">
-                        <a:defRPr sz="800">
-                          <a:solidFill>
-                            <a:srgbClr val="EF4444"/>
-                          </a:solidFill>
-                        </a:defRPr>
-                      </a:pPr>
-                      <a:r>
-                        <a:t>-9.62%</a:t>
+                        <a:t>FUT_EEP_260828</a:t>
+                      </a:r>
+                    </a:p>
+                  </a:txBody>
+                  <a:tcPr anchor="ctr">
+                    <a:solidFill>
+                      <a:srgbClr val="141820"/>
+                    </a:solidFill>
+                  </a:tcPr>
+                </a:tc>
+                <a:tc>
+                  <a:txBody>
+                    <a:bodyPr/>
+                    <a:lstStyle/>
+                    <a:p>
+                      <a:pPr algn="ctr">
+                        <a:defRPr sz="800">
+                          <a:solidFill>
+                            <a:srgbClr val="F0F2F5"/>
+                          </a:solidFill>
+                        </a:defRPr>
+                      </a:pPr>
+                      <a:r>
+                        <a:t>Power East Peak (Monthly)</a:t>
+                      </a:r>
+                    </a:p>
+                  </a:txBody>
+                  <a:tcPr anchor="ctr">
+                    <a:solidFill>
+                      <a:srgbClr val="141820"/>
+                    </a:solidFill>
+                  </a:tcPr>
+                </a:tc>
+                <a:tc>
+                  <a:txBody>
+                    <a:bodyPr/>
+                    <a:lstStyle/>
+                    <a:p>
+                      <a:pPr algn="ctr">
+                        <a:defRPr sz="800">
+                          <a:solidFill>
+                            <a:srgbClr val="F0F2F5"/>
+                          </a:solidFill>
+                        </a:defRPr>
+                      </a:pPr>
+                      <a:r>
+                        <a:t>202608</a:t>
+                      </a:r>
+                    </a:p>
+                  </a:txBody>
+                  <a:tcPr anchor="ctr">
+                    <a:solidFill>
+                      <a:srgbClr val="141820"/>
+                    </a:solidFill>
+                  </a:tcPr>
+                </a:tc>
+                <a:tc>
+                  <a:txBody>
+                    <a:bodyPr/>
+                    <a:lstStyle/>
+                    <a:p>
+                      <a:pPr algn="ctr">
+                        <a:defRPr sz="800">
+                          <a:solidFill>
+                            <a:srgbClr val="F0F2F5"/>
+                          </a:solidFill>
+                        </a:defRPr>
+                      </a:pPr>
+                      <a:r>
+                        <a:t>28.29</a:t>
+                      </a:r>
+                    </a:p>
+                  </a:txBody>
+                  <a:tcPr anchor="ctr">
+                    <a:solidFill>
+                      <a:srgbClr val="141820"/>
+                    </a:solidFill>
+                  </a:tcPr>
+                </a:tc>
+                <a:tc>
+                  <a:txBody>
+                    <a:bodyPr/>
+                    <a:lstStyle/>
+                    <a:p>
+                      <a:pPr algn="ctr">
+                        <a:defRPr sz="800">
+                          <a:solidFill>
+                            <a:srgbClr val="F0F2F5"/>
+                          </a:solidFill>
+                        </a:defRPr>
+                      </a:pPr>
+                      <a:r>
+                        <a:t>26.79</a:t>
+                      </a:r>
+                    </a:p>
+                  </a:txBody>
+                  <a:tcPr anchor="ctr">
+                    <a:solidFill>
+                      <a:srgbClr val="141820"/>
+                    </a:solidFill>
+                  </a:tcPr>
+                </a:tc>
+                <a:tc>
+                  <a:txBody>
+                    <a:bodyPr/>
+                    <a:lstStyle/>
+                    <a:p>
+                      <a:pPr algn="ctr">
+                        <a:defRPr sz="800">
+                          <a:solidFill>
+                            <a:srgbClr val="10B981"/>
+                          </a:solidFill>
+                        </a:defRPr>
+                      </a:pPr>
+                      <a:r>
+                        <a:t>+1.50</a:t>
+                      </a:r>
+                    </a:p>
+                  </a:txBody>
+                  <a:tcPr anchor="ctr">
+                    <a:solidFill>
+                      <a:srgbClr val="141820"/>
+                    </a:solidFill>
+                  </a:tcPr>
+                </a:tc>
+                <a:tc>
+                  <a:txBody>
+                    <a:bodyPr/>
+                    <a:lstStyle/>
+                    <a:p>
+                      <a:pPr algn="ctr">
+                        <a:defRPr sz="800">
+                          <a:solidFill>
+                            <a:srgbClr val="10B981"/>
+                          </a:solidFill>
+                        </a:defRPr>
+                      </a:pPr>
+                      <a:r>
+                        <a:t>+5.60%</a:t>
                       </a:r>
                     </a:p>
                   </a:txBody>
@@ -7848,7 +7848,7 @@
                         </a:defRPr>
                       </a:pPr>
                       <a:r>
-                        <a:t>FUT_EEB_270129</a:t>
+                        <a:t>FUT_EEP_260929</a:t>
                       </a:r>
                     </a:p>
                   </a:txBody>
@@ -7871,7 +7871,7 @@
                         </a:defRPr>
                       </a:pPr>
                       <a:r>
-                        <a:t>Power East Base (Monthly)</a:t>
+                        <a:t>Power East Peak (Monthly)</a:t>
                       </a:r>
                     </a:p>
                   </a:txBody>
@@ -7894,7 +7894,7 @@
                         </a:defRPr>
                       </a:pPr>
                       <a:r>
-                        <a:t>202701</a:t>
+                        <a:t>202609</a:t>
                       </a:r>
                     </a:p>
                   </a:txBody>
@@ -7917,7 +7917,7 @@
                         </a:defRPr>
                       </a:pPr>
                       <a:r>
-                        <a:t>19.41</a:t>
+                        <a:t>27.78</a:t>
                       </a:r>
                     </a:p>
                   </a:txBody>
@@ -7940,7 +7940,7 @@
                         </a:defRPr>
                       </a:pPr>
                       <a:r>
-                        <a:t>21.21</a:t>
+                        <a:t>26.31</a:t>
                       </a:r>
                     </a:p>
                   </a:txBody>
@@ -7958,12 +7958,12 @@
                       <a:pPr algn="ctr">
                         <a:defRPr sz="800">
                           <a:solidFill>
-                            <a:srgbClr val="EF4444"/>
-                          </a:solidFill>
-                        </a:defRPr>
-                      </a:pPr>
-                      <a:r>
-                        <a:t>-1.80</a:t>
+                            <a:srgbClr val="10B981"/>
+                          </a:solidFill>
+                        </a:defRPr>
+                      </a:pPr>
+                      <a:r>
+                        <a:t>+1.47</a:t>
                       </a:r>
                     </a:p>
                   </a:txBody>
@@ -7981,12 +7981,12 @@
                       <a:pPr algn="ctr">
                         <a:defRPr sz="800">
                           <a:solidFill>
-                            <a:srgbClr val="EF4444"/>
-                          </a:solidFill>
-                        </a:defRPr>
-                      </a:pPr>
-                      <a:r>
-                        <a:t>-8.49%</a:t>
+                            <a:srgbClr val="10B981"/>
+                          </a:solidFill>
+                        </a:defRPr>
+                      </a:pPr>
+                      <a:r>
+                        <a:t>+5.59%</a:t>
                       </a:r>
                     </a:p>
                   </a:txBody>
@@ -8011,145 +8011,145 @@
                         </a:defRPr>
                       </a:pPr>
                       <a:r>
-                        <a:t>FUT_EEB_270226</a:t>
-                      </a:r>
-                    </a:p>
-                  </a:txBody>
-                  <a:tcPr anchor="ctr">
-                    <a:solidFill>
-                      <a:srgbClr val="141820"/>
-                    </a:solidFill>
-                  </a:tcPr>
-                </a:tc>
-                <a:tc>
-                  <a:txBody>
-                    <a:bodyPr/>
-                    <a:lstStyle/>
-                    <a:p>
-                      <a:pPr algn="ctr">
-                        <a:defRPr sz="800">
-                          <a:solidFill>
-                            <a:srgbClr val="F0F2F5"/>
-                          </a:solidFill>
-                        </a:defRPr>
-                      </a:pPr>
-                      <a:r>
-                        <a:t>Power East Base (Monthly)</a:t>
-                      </a:r>
-                    </a:p>
-                  </a:txBody>
-                  <a:tcPr anchor="ctr">
-                    <a:solidFill>
-                      <a:srgbClr val="141820"/>
-                    </a:solidFill>
-                  </a:tcPr>
-                </a:tc>
-                <a:tc>
-                  <a:txBody>
-                    <a:bodyPr/>
-                    <a:lstStyle/>
-                    <a:p>
-                      <a:pPr algn="ctr">
-                        <a:defRPr sz="800">
-                          <a:solidFill>
-                            <a:srgbClr val="F0F2F5"/>
-                          </a:solidFill>
-                        </a:defRPr>
-                      </a:pPr>
-                      <a:r>
-                        <a:t>202702</a:t>
-                      </a:r>
-                    </a:p>
-                  </a:txBody>
-                  <a:tcPr anchor="ctr">
-                    <a:solidFill>
-                      <a:srgbClr val="141820"/>
-                    </a:solidFill>
-                  </a:tcPr>
-                </a:tc>
-                <a:tc>
-                  <a:txBody>
-                    <a:bodyPr/>
-                    <a:lstStyle/>
-                    <a:p>
-                      <a:pPr algn="ctr">
-                        <a:defRPr sz="800">
-                          <a:solidFill>
-                            <a:srgbClr val="F0F2F5"/>
-                          </a:solidFill>
-                        </a:defRPr>
-                      </a:pPr>
-                      <a:r>
-                        <a:t>19.67</a:t>
-                      </a:r>
-                    </a:p>
-                  </a:txBody>
-                  <a:tcPr anchor="ctr">
-                    <a:solidFill>
-                      <a:srgbClr val="141820"/>
-                    </a:solidFill>
-                  </a:tcPr>
-                </a:tc>
-                <a:tc>
-                  <a:txBody>
-                    <a:bodyPr/>
-                    <a:lstStyle/>
-                    <a:p>
-                      <a:pPr algn="ctr">
-                        <a:defRPr sz="800">
-                          <a:solidFill>
-                            <a:srgbClr val="F0F2F5"/>
-                          </a:solidFill>
-                        </a:defRPr>
-                      </a:pPr>
-                      <a:r>
-                        <a:t>21.46</a:t>
-                      </a:r>
-                    </a:p>
-                  </a:txBody>
-                  <a:tcPr anchor="ctr">
-                    <a:solidFill>
-                      <a:srgbClr val="141820"/>
-                    </a:solidFill>
-                  </a:tcPr>
-                </a:tc>
-                <a:tc>
-                  <a:txBody>
-                    <a:bodyPr/>
-                    <a:lstStyle/>
-                    <a:p>
-                      <a:pPr algn="ctr">
-                        <a:defRPr sz="800">
-                          <a:solidFill>
-                            <a:srgbClr val="EF4444"/>
-                          </a:solidFill>
-                        </a:defRPr>
-                      </a:pPr>
-                      <a:r>
-                        <a:t>-1.79</a:t>
-                      </a:r>
-                    </a:p>
-                  </a:txBody>
-                  <a:tcPr anchor="ctr">
-                    <a:solidFill>
-                      <a:srgbClr val="141820"/>
-                    </a:solidFill>
-                  </a:tcPr>
-                </a:tc>
-                <a:tc>
-                  <a:txBody>
-                    <a:bodyPr/>
-                    <a:lstStyle/>
-                    <a:p>
-                      <a:pPr algn="ctr">
-                        <a:defRPr sz="800">
-                          <a:solidFill>
-                            <a:srgbClr val="EF4444"/>
-                          </a:solidFill>
-                        </a:defRPr>
-                      </a:pPr>
-                      <a:r>
-                        <a:t>-8.34%</a:t>
+                        <a:t>FUT_EEP_260730</a:t>
+                      </a:r>
+                    </a:p>
+                  </a:txBody>
+                  <a:tcPr anchor="ctr">
+                    <a:solidFill>
+                      <a:srgbClr val="141820"/>
+                    </a:solidFill>
+                  </a:tcPr>
+                </a:tc>
+                <a:tc>
+                  <a:txBody>
+                    <a:bodyPr/>
+                    <a:lstStyle/>
+                    <a:p>
+                      <a:pPr algn="ctr">
+                        <a:defRPr sz="800">
+                          <a:solidFill>
+                            <a:srgbClr val="F0F2F5"/>
+                          </a:solidFill>
+                        </a:defRPr>
+                      </a:pPr>
+                      <a:r>
+                        <a:t>Power East Peak (Monthly)</a:t>
+                      </a:r>
+                    </a:p>
+                  </a:txBody>
+                  <a:tcPr anchor="ctr">
+                    <a:solidFill>
+                      <a:srgbClr val="141820"/>
+                    </a:solidFill>
+                  </a:tcPr>
+                </a:tc>
+                <a:tc>
+                  <a:txBody>
+                    <a:bodyPr/>
+                    <a:lstStyle/>
+                    <a:p>
+                      <a:pPr algn="ctr">
+                        <a:defRPr sz="800">
+                          <a:solidFill>
+                            <a:srgbClr val="F0F2F5"/>
+                          </a:solidFill>
+                        </a:defRPr>
+                      </a:pPr>
+                      <a:r>
+                        <a:t>202607</a:t>
+                      </a:r>
+                    </a:p>
+                  </a:txBody>
+                  <a:tcPr anchor="ctr">
+                    <a:solidFill>
+                      <a:srgbClr val="141820"/>
+                    </a:solidFill>
+                  </a:tcPr>
+                </a:tc>
+                <a:tc>
+                  <a:txBody>
+                    <a:bodyPr/>
+                    <a:lstStyle/>
+                    <a:p>
+                      <a:pPr algn="ctr">
+                        <a:defRPr sz="800">
+                          <a:solidFill>
+                            <a:srgbClr val="F0F2F5"/>
+                          </a:solidFill>
+                        </a:defRPr>
+                      </a:pPr>
+                      <a:r>
+                        <a:t>28.26</a:t>
+                      </a:r>
+                    </a:p>
+                  </a:txBody>
+                  <a:tcPr anchor="ctr">
+                    <a:solidFill>
+                      <a:srgbClr val="141820"/>
+                    </a:solidFill>
+                  </a:tcPr>
+                </a:tc>
+                <a:tc>
+                  <a:txBody>
+                    <a:bodyPr/>
+                    <a:lstStyle/>
+                    <a:p>
+                      <a:pPr algn="ctr">
+                        <a:defRPr sz="800">
+                          <a:solidFill>
+                            <a:srgbClr val="F0F2F5"/>
+                          </a:solidFill>
+                        </a:defRPr>
+                      </a:pPr>
+                      <a:r>
+                        <a:t>26.91</a:t>
+                      </a:r>
+                    </a:p>
+                  </a:txBody>
+                  <a:tcPr anchor="ctr">
+                    <a:solidFill>
+                      <a:srgbClr val="141820"/>
+                    </a:solidFill>
+                  </a:tcPr>
+                </a:tc>
+                <a:tc>
+                  <a:txBody>
+                    <a:bodyPr/>
+                    <a:lstStyle/>
+                    <a:p>
+                      <a:pPr algn="ctr">
+                        <a:defRPr sz="800">
+                          <a:solidFill>
+                            <a:srgbClr val="10B981"/>
+                          </a:solidFill>
+                        </a:defRPr>
+                      </a:pPr>
+                      <a:r>
+                        <a:t>+1.35</a:t>
+                      </a:r>
+                    </a:p>
+                  </a:txBody>
+                  <a:tcPr anchor="ctr">
+                    <a:solidFill>
+                      <a:srgbClr val="141820"/>
+                    </a:solidFill>
+                  </a:tcPr>
+                </a:tc>
+                <a:tc>
+                  <a:txBody>
+                    <a:bodyPr/>
+                    <a:lstStyle/>
+                    <a:p>
+                      <a:pPr algn="ctr">
+                        <a:defRPr sz="800">
+                          <a:solidFill>
+                            <a:srgbClr val="10B981"/>
+                          </a:solidFill>
+                        </a:defRPr>
+                      </a:pPr>
+                      <a:r>
+                        <a:t>+5.02%</a:t>
                       </a:r>
                     </a:p>
                   </a:txBody>
@@ -8174,7 +8174,7 @@
                         </a:defRPr>
                       </a:pPr>
                       <a:r>
-                        <a:t>FUT_EEB_260629</a:t>
+                        <a:t>FUT_EWP_261127</a:t>
                       </a:r>
                     </a:p>
                   </a:txBody>
@@ -8197,7 +8197,7 @@
                         </a:defRPr>
                       </a:pPr>
                       <a:r>
-                        <a:t>Power East Base (Monthly)</a:t>
+                        <a:t>Power West Peak (Monthly)</a:t>
                       </a:r>
                     </a:p>
                   </a:txBody>
@@ -8220,7 +8220,7 @@
                         </a:defRPr>
                       </a:pPr>
                       <a:r>
-                        <a:t>202606</a:t>
+                        <a:t>202611</a:t>
                       </a:r>
                     </a:p>
                   </a:txBody>
@@ -8243,7 +8243,7 @@
                         </a:defRPr>
                       </a:pPr>
                       <a:r>
-                        <a:t>20.58</a:t>
+                        <a:t>19.62</a:t>
                       </a:r>
                     </a:p>
                   </a:txBody>
@@ -8266,7 +8266,7 @@
                         </a:defRPr>
                       </a:pPr>
                       <a:r>
-                        <a:t>21.97</a:t>
+                        <a:t>18.33</a:t>
                       </a:r>
                     </a:p>
                   </a:txBody>
@@ -8284,12 +8284,12 @@
                       <a:pPr algn="ctr">
                         <a:defRPr sz="800">
                           <a:solidFill>
-                            <a:srgbClr val="EF4444"/>
-                          </a:solidFill>
-                        </a:defRPr>
-                      </a:pPr>
-                      <a:r>
-                        <a:t>-1.39</a:t>
+                            <a:srgbClr val="10B981"/>
+                          </a:solidFill>
+                        </a:defRPr>
+                      </a:pPr>
+                      <a:r>
+                        <a:t>+1.29</a:t>
                       </a:r>
                     </a:p>
                   </a:txBody>
@@ -8307,12 +8307,12 @@
                       <a:pPr algn="ctr">
                         <a:defRPr sz="800">
                           <a:solidFill>
-                            <a:srgbClr val="EF4444"/>
-                          </a:solidFill>
-                        </a:defRPr>
-                      </a:pPr>
-                      <a:r>
-                        <a:t>-6.33%</a:t>
+                            <a:srgbClr val="10B981"/>
+                          </a:solidFill>
+                        </a:defRPr>
+                      </a:pPr>
+                      <a:r>
+                        <a:t>+7.04%</a:t>
                       </a:r>
                     </a:p>
                   </a:txBody>
@@ -8337,145 +8337,145 @@
                         </a:defRPr>
                       </a:pPr>
                       <a:r>
-                        <a:t>FUT_EWPW_260326</a:t>
-                      </a:r>
-                    </a:p>
-                  </a:txBody>
-                  <a:tcPr anchor="ctr">
-                    <a:solidFill>
-                      <a:srgbClr val="141820"/>
-                    </a:solidFill>
-                  </a:tcPr>
-                </a:tc>
-                <a:tc>
-                  <a:txBody>
-                    <a:bodyPr/>
-                    <a:lstStyle/>
-                    <a:p>
-                      <a:pPr algn="ctr">
-                        <a:defRPr sz="800">
-                          <a:solidFill>
-                            <a:srgbClr val="F0F2F5"/>
-                          </a:solidFill>
-                        </a:defRPr>
-                      </a:pPr>
-                      <a:r>
-                        <a:t>Power West Peak (Weekly)</a:t>
-                      </a:r>
-                    </a:p>
-                  </a:txBody>
-                  <a:tcPr anchor="ctr">
-                    <a:solidFill>
-                      <a:srgbClr val="141820"/>
-                    </a:solidFill>
-                  </a:tcPr>
-                </a:tc>
-                <a:tc>
-                  <a:txBody>
-                    <a:bodyPr/>
-                    <a:lstStyle/>
-                    <a:p>
-                      <a:pPr algn="ctr">
-                        <a:defRPr sz="800">
-                          <a:solidFill>
-                            <a:srgbClr val="F0F2F5"/>
-                          </a:solidFill>
-                        </a:defRPr>
-                      </a:pPr>
-                      <a:r>
-                        <a:t>20260327</a:t>
-                      </a:r>
-                    </a:p>
-                  </a:txBody>
-                  <a:tcPr anchor="ctr">
-                    <a:solidFill>
-                      <a:srgbClr val="141820"/>
-                    </a:solidFill>
-                  </a:tcPr>
-                </a:tc>
-                <a:tc>
-                  <a:txBody>
-                    <a:bodyPr/>
-                    <a:lstStyle/>
-                    <a:p>
-                      <a:pPr algn="ctr">
-                        <a:defRPr sz="800">
-                          <a:solidFill>
-                            <a:srgbClr val="F0F2F5"/>
-                          </a:solidFill>
-                        </a:defRPr>
-                      </a:pPr>
-                      <a:r>
-                        <a:t>13.74</a:t>
-                      </a:r>
-                    </a:p>
-                  </a:txBody>
-                  <a:tcPr anchor="ctr">
-                    <a:solidFill>
-                      <a:srgbClr val="141820"/>
-                    </a:solidFill>
-                  </a:tcPr>
-                </a:tc>
-                <a:tc>
-                  <a:txBody>
-                    <a:bodyPr/>
-                    <a:lstStyle/>
-                    <a:p>
-                      <a:pPr algn="ctr">
-                        <a:defRPr sz="800">
-                          <a:solidFill>
-                            <a:srgbClr val="F0F2F5"/>
-                          </a:solidFill>
-                        </a:defRPr>
-                      </a:pPr>
-                      <a:r>
-                        <a:t>15.01</a:t>
-                      </a:r>
-                    </a:p>
-                  </a:txBody>
-                  <a:tcPr anchor="ctr">
-                    <a:solidFill>
-                      <a:srgbClr val="141820"/>
-                    </a:solidFill>
-                  </a:tcPr>
-                </a:tc>
-                <a:tc>
-                  <a:txBody>
-                    <a:bodyPr/>
-                    <a:lstStyle/>
-                    <a:p>
-                      <a:pPr algn="ctr">
-                        <a:defRPr sz="800">
-                          <a:solidFill>
-                            <a:srgbClr val="EF4444"/>
-                          </a:solidFill>
-                        </a:defRPr>
-                      </a:pPr>
-                      <a:r>
-                        <a:t>-1.27</a:t>
-                      </a:r>
-                    </a:p>
-                  </a:txBody>
-                  <a:tcPr anchor="ctr">
-                    <a:solidFill>
-                      <a:srgbClr val="141820"/>
-                    </a:solidFill>
-                  </a:tcPr>
-                </a:tc>
-                <a:tc>
-                  <a:txBody>
-                    <a:bodyPr/>
-                    <a:lstStyle/>
-                    <a:p>
-                      <a:pPr algn="ctr">
-                        <a:defRPr sz="800">
-                          <a:solidFill>
-                            <a:srgbClr val="EF4444"/>
-                          </a:solidFill>
-                        </a:defRPr>
-                      </a:pPr>
-                      <a:r>
-                        <a:t>-8.46%</a:t>
+                        <a:t>FUT_EWP_261029</a:t>
+                      </a:r>
+                    </a:p>
+                  </a:txBody>
+                  <a:tcPr anchor="ctr">
+                    <a:solidFill>
+                      <a:srgbClr val="141820"/>
+                    </a:solidFill>
+                  </a:tcPr>
+                </a:tc>
+                <a:tc>
+                  <a:txBody>
+                    <a:bodyPr/>
+                    <a:lstStyle/>
+                    <a:p>
+                      <a:pPr algn="ctr">
+                        <a:defRPr sz="800">
+                          <a:solidFill>
+                            <a:srgbClr val="F0F2F5"/>
+                          </a:solidFill>
+                        </a:defRPr>
+                      </a:pPr>
+                      <a:r>
+                        <a:t>Power West Peak (Monthly)</a:t>
+                      </a:r>
+                    </a:p>
+                  </a:txBody>
+                  <a:tcPr anchor="ctr">
+                    <a:solidFill>
+                      <a:srgbClr val="141820"/>
+                    </a:solidFill>
+                  </a:tcPr>
+                </a:tc>
+                <a:tc>
+                  <a:txBody>
+                    <a:bodyPr/>
+                    <a:lstStyle/>
+                    <a:p>
+                      <a:pPr algn="ctr">
+                        <a:defRPr sz="800">
+                          <a:solidFill>
+                            <a:srgbClr val="F0F2F5"/>
+                          </a:solidFill>
+                        </a:defRPr>
+                      </a:pPr>
+                      <a:r>
+                        <a:t>202610</a:t>
+                      </a:r>
+                    </a:p>
+                  </a:txBody>
+                  <a:tcPr anchor="ctr">
+                    <a:solidFill>
+                      <a:srgbClr val="141820"/>
+                    </a:solidFill>
+                  </a:tcPr>
+                </a:tc>
+                <a:tc>
+                  <a:txBody>
+                    <a:bodyPr/>
+                    <a:lstStyle/>
+                    <a:p>
+                      <a:pPr algn="ctr">
+                        <a:defRPr sz="800">
+                          <a:solidFill>
+                            <a:srgbClr val="F0F2F5"/>
+                          </a:solidFill>
+                        </a:defRPr>
+                      </a:pPr>
+                      <a:r>
+                        <a:t>19.56</a:t>
+                      </a:r>
+                    </a:p>
+                  </a:txBody>
+                  <a:tcPr anchor="ctr">
+                    <a:solidFill>
+                      <a:srgbClr val="141820"/>
+                    </a:solidFill>
+                  </a:tcPr>
+                </a:tc>
+                <a:tc>
+                  <a:txBody>
+                    <a:bodyPr/>
+                    <a:lstStyle/>
+                    <a:p>
+                      <a:pPr algn="ctr">
+                        <a:defRPr sz="800">
+                          <a:solidFill>
+                            <a:srgbClr val="F0F2F5"/>
+                          </a:solidFill>
+                        </a:defRPr>
+                      </a:pPr>
+                      <a:r>
+                        <a:t>18.32</a:t>
+                      </a:r>
+                    </a:p>
+                  </a:txBody>
+                  <a:tcPr anchor="ctr">
+                    <a:solidFill>
+                      <a:srgbClr val="141820"/>
+                    </a:solidFill>
+                  </a:tcPr>
+                </a:tc>
+                <a:tc>
+                  <a:txBody>
+                    <a:bodyPr/>
+                    <a:lstStyle/>
+                    <a:p>
+                      <a:pPr algn="ctr">
+                        <a:defRPr sz="800">
+                          <a:solidFill>
+                            <a:srgbClr val="10B981"/>
+                          </a:solidFill>
+                        </a:defRPr>
+                      </a:pPr>
+                      <a:r>
+                        <a:t>+1.24</a:t>
+                      </a:r>
+                    </a:p>
+                  </a:txBody>
+                  <a:tcPr anchor="ctr">
+                    <a:solidFill>
+                      <a:srgbClr val="141820"/>
+                    </a:solidFill>
+                  </a:tcPr>
+                </a:tc>
+                <a:tc>
+                  <a:txBody>
+                    <a:bodyPr/>
+                    <a:lstStyle/>
+                    <a:p>
+                      <a:pPr algn="ctr">
+                        <a:defRPr sz="800">
+                          <a:solidFill>
+                            <a:srgbClr val="10B981"/>
+                          </a:solidFill>
+                        </a:defRPr>
+                      </a:pPr>
+                      <a:r>
+                        <a:t>+6.77%</a:t>
                       </a:r>
                     </a:p>
                   </a:txBody>
@@ -8500,7 +8500,7 @@
                         </a:defRPr>
                       </a:pPr>
                       <a:r>
-                        <a:t>FUT_EEP_260629</a:t>
+                        <a:t>FUT_EWB_261030</a:t>
                       </a:r>
                     </a:p>
                   </a:txBody>
@@ -8523,7 +8523,7 @@
                         </a:defRPr>
                       </a:pPr>
                       <a:r>
-                        <a:t>Power East Peak (Monthly)</a:t>
+                        <a:t>Power West Base (Monthly)</a:t>
                       </a:r>
                     </a:p>
                   </a:txBody>
@@ -8546,7 +8546,7 @@
                         </a:defRPr>
                       </a:pPr>
                       <a:r>
-                        <a:t>202606</a:t>
+                        <a:t>202610</a:t>
                       </a:r>
                     </a:p>
                   </a:txBody>
@@ -8569,7 +8569,7 @@
                         </a:defRPr>
                       </a:pPr>
                       <a:r>
-                        <a:t>23.74</a:t>
+                        <a:t>16.96</a:t>
                       </a:r>
                     </a:p>
                   </a:txBody>
@@ -8592,7 +8592,7 @@
                         </a:defRPr>
                       </a:pPr>
                       <a:r>
-                        <a:t>25.00</a:t>
+                        <a:t>15.73</a:t>
                       </a:r>
                     </a:p>
                   </a:txBody>
@@ -8610,12 +8610,12 @@
                       <a:pPr algn="ctr">
                         <a:defRPr sz="800">
                           <a:solidFill>
-                            <a:srgbClr val="EF4444"/>
-                          </a:solidFill>
-                        </a:defRPr>
-                      </a:pPr>
-                      <a:r>
-                        <a:t>-1.26</a:t>
+                            <a:srgbClr val="10B981"/>
+                          </a:solidFill>
+                        </a:defRPr>
+                      </a:pPr>
+                      <a:r>
+                        <a:t>+1.23</a:t>
                       </a:r>
                     </a:p>
                   </a:txBody>
@@ -8633,12 +8633,12 @@
                       <a:pPr algn="ctr">
                         <a:defRPr sz="800">
                           <a:solidFill>
-                            <a:srgbClr val="EF4444"/>
-                          </a:solidFill>
-                        </a:defRPr>
-                      </a:pPr>
-                      <a:r>
-                        <a:t>-5.04%</a:t>
+                            <a:srgbClr val="10B981"/>
+                          </a:solidFill>
+                        </a:defRPr>
+                      </a:pPr>
+                      <a:r>
+                        <a:t>+7.82%</a:t>
                       </a:r>
                     </a:p>
                   </a:txBody>
@@ -8663,30 +8663,30 @@
                         </a:defRPr>
                       </a:pPr>
                       <a:r>
-                        <a:t>FUT_EEB_261127</a:t>
-                      </a:r>
-                    </a:p>
-                  </a:txBody>
-                  <a:tcPr anchor="ctr">
-                    <a:solidFill>
-                      <a:srgbClr val="141820"/>
-                    </a:solidFill>
-                  </a:tcPr>
-                </a:tc>
-                <a:tc>
-                  <a:txBody>
-                    <a:bodyPr/>
-                    <a:lstStyle/>
-                    <a:p>
-                      <a:pPr algn="ctr">
-                        <a:defRPr sz="800">
-                          <a:solidFill>
-                            <a:srgbClr val="F0F2F5"/>
-                          </a:solidFill>
-                        </a:defRPr>
-                      </a:pPr>
-                      <a:r>
-                        <a:t>Power East Base (Monthly)</a:t>
+                        <a:t>FUT_EWB_261127</a:t>
+                      </a:r>
+                    </a:p>
+                  </a:txBody>
+                  <a:tcPr anchor="ctr">
+                    <a:solidFill>
+                      <a:srgbClr val="141820"/>
+                    </a:solidFill>
+                  </a:tcPr>
+                </a:tc>
+                <a:tc>
+                  <a:txBody>
+                    <a:bodyPr/>
+                    <a:lstStyle/>
+                    <a:p>
+                      <a:pPr algn="ctr">
+                        <a:defRPr sz="800">
+                          <a:solidFill>
+                            <a:srgbClr val="F0F2F5"/>
+                          </a:solidFill>
+                        </a:defRPr>
+                      </a:pPr>
+                      <a:r>
+                        <a:t>Power West Base (Monthly)</a:t>
                       </a:r>
                     </a:p>
                   </a:txBody>
@@ -8732,76 +8732,76 @@
                         </a:defRPr>
                       </a:pPr>
                       <a:r>
-                        <a:t>18.72</a:t>
-                      </a:r>
-                    </a:p>
-                  </a:txBody>
-                  <a:tcPr anchor="ctr">
-                    <a:solidFill>
-                      <a:srgbClr val="141820"/>
-                    </a:solidFill>
-                  </a:tcPr>
-                </a:tc>
-                <a:tc>
-                  <a:txBody>
-                    <a:bodyPr/>
-                    <a:lstStyle/>
-                    <a:p>
-                      <a:pPr algn="ctr">
-                        <a:defRPr sz="800">
-                          <a:solidFill>
-                            <a:srgbClr val="F0F2F5"/>
-                          </a:solidFill>
-                        </a:defRPr>
-                      </a:pPr>
-                      <a:r>
-                        <a:t>19.96</a:t>
-                      </a:r>
-                    </a:p>
-                  </a:txBody>
-                  <a:tcPr anchor="ctr">
-                    <a:solidFill>
-                      <a:srgbClr val="141820"/>
-                    </a:solidFill>
-                  </a:tcPr>
-                </a:tc>
-                <a:tc>
-                  <a:txBody>
-                    <a:bodyPr/>
-                    <a:lstStyle/>
-                    <a:p>
-                      <a:pPr algn="ctr">
-                        <a:defRPr sz="800">
-                          <a:solidFill>
-                            <a:srgbClr val="EF4444"/>
-                          </a:solidFill>
-                        </a:defRPr>
-                      </a:pPr>
-                      <a:r>
-                        <a:t>-1.24</a:t>
-                      </a:r>
-                    </a:p>
-                  </a:txBody>
-                  <a:tcPr anchor="ctr">
-                    <a:solidFill>
-                      <a:srgbClr val="141820"/>
-                    </a:solidFill>
-                  </a:tcPr>
-                </a:tc>
-                <a:tc>
-                  <a:txBody>
-                    <a:bodyPr/>
-                    <a:lstStyle/>
-                    <a:p>
-                      <a:pPr algn="ctr">
-                        <a:defRPr sz="800">
-                          <a:solidFill>
-                            <a:srgbClr val="EF4444"/>
-                          </a:solidFill>
-                        </a:defRPr>
-                      </a:pPr>
-                      <a:r>
-                        <a:t>-6.21%</a:t>
+                        <a:t>16.96</a:t>
+                      </a:r>
+                    </a:p>
+                  </a:txBody>
+                  <a:tcPr anchor="ctr">
+                    <a:solidFill>
+                      <a:srgbClr val="141820"/>
+                    </a:solidFill>
+                  </a:tcPr>
+                </a:tc>
+                <a:tc>
+                  <a:txBody>
+                    <a:bodyPr/>
+                    <a:lstStyle/>
+                    <a:p>
+                      <a:pPr algn="ctr">
+                        <a:defRPr sz="800">
+                          <a:solidFill>
+                            <a:srgbClr val="F0F2F5"/>
+                          </a:solidFill>
+                        </a:defRPr>
+                      </a:pPr>
+                      <a:r>
+                        <a:t>15.74</a:t>
+                      </a:r>
+                    </a:p>
+                  </a:txBody>
+                  <a:tcPr anchor="ctr">
+                    <a:solidFill>
+                      <a:srgbClr val="141820"/>
+                    </a:solidFill>
+                  </a:tcPr>
+                </a:tc>
+                <a:tc>
+                  <a:txBody>
+                    <a:bodyPr/>
+                    <a:lstStyle/>
+                    <a:p>
+                      <a:pPr algn="ctr">
+                        <a:defRPr sz="800">
+                          <a:solidFill>
+                            <a:srgbClr val="10B981"/>
+                          </a:solidFill>
+                        </a:defRPr>
+                      </a:pPr>
+                      <a:r>
+                        <a:t>+1.22</a:t>
+                      </a:r>
+                    </a:p>
+                  </a:txBody>
+                  <a:tcPr anchor="ctr">
+                    <a:solidFill>
+                      <a:srgbClr val="141820"/>
+                    </a:solidFill>
+                  </a:tcPr>
+                </a:tc>
+                <a:tc>
+                  <a:txBody>
+                    <a:bodyPr/>
+                    <a:lstStyle/>
+                    <a:p>
+                      <a:pPr algn="ctr">
+                        <a:defRPr sz="800">
+                          <a:solidFill>
+                            <a:srgbClr val="10B981"/>
+                          </a:solidFill>
+                        </a:defRPr>
+                      </a:pPr>
+                      <a:r>
+                        <a:t>+7.75%</a:t>
                       </a:r>
                     </a:p>
                   </a:txBody>
@@ -8826,7 +8826,7 @@
                         </a:defRPr>
                       </a:pPr>
                       <a:r>
-                        <a:t>FUT_EEBY_260326</a:t>
+                        <a:t>FUT_EEB_260828</a:t>
                       </a:r>
                     </a:p>
                   </a:txBody>
@@ -8849,7 +8849,7 @@
                         </a:defRPr>
                       </a:pPr>
                       <a:r>
-                        <a:t>Power East Base (Yearly)</a:t>
+                        <a:t>Power East Base (Monthly)</a:t>
                       </a:r>
                     </a:p>
                   </a:txBody>
@@ -8872,7 +8872,7 @@
                         </a:defRPr>
                       </a:pPr>
                       <a:r>
-                        <a:t>202604</a:t>
+                        <a:t>202608</a:t>
                       </a:r>
                     </a:p>
                   </a:txBody>
@@ -8895,7 +8895,7 @@
                         </a:defRPr>
                       </a:pPr>
                       <a:r>
-                        <a:t>19.48</a:t>
+                        <a:t>22.24</a:t>
                       </a:r>
                     </a:p>
                   </a:txBody>
@@ -8918,7 +8918,7 @@
                         </a:defRPr>
                       </a:pPr>
                       <a:r>
-                        <a:t>20.71</a:t>
+                        <a:t>21.08</a:t>
                       </a:r>
                     </a:p>
                   </a:txBody>
@@ -8936,12 +8936,12 @@
                       <a:pPr algn="ctr">
                         <a:defRPr sz="800">
                           <a:solidFill>
-                            <a:srgbClr val="EF4444"/>
-                          </a:solidFill>
-                        </a:defRPr>
-                      </a:pPr>
-                      <a:r>
-                        <a:t>-1.23</a:t>
+                            <a:srgbClr val="10B981"/>
+                          </a:solidFill>
+                        </a:defRPr>
+                      </a:pPr>
+                      <a:r>
+                        <a:t>+1.16</a:t>
                       </a:r>
                     </a:p>
                   </a:txBody>
@@ -8959,12 +8959,12 @@
                       <a:pPr algn="ctr">
                         <a:defRPr sz="800">
                           <a:solidFill>
-                            <a:srgbClr val="EF4444"/>
-                          </a:solidFill>
-                        </a:defRPr>
-                      </a:pPr>
-                      <a:r>
-                        <a:t>-5.94%</a:t>
+                            <a:srgbClr val="10B981"/>
+                          </a:solidFill>
+                        </a:defRPr>
+                      </a:pPr>
+                      <a:r>
+                        <a:t>+5.50%</a:t>
                       </a:r>
                     </a:p>
                   </a:txBody>
@@ -8989,7 +8989,7 @@
                         </a:defRPr>
                       </a:pPr>
                       <a:r>
-                        <a:t>FUT_EEB_270330</a:t>
+                        <a:t>FUT_EEB_260730</a:t>
                       </a:r>
                     </a:p>
                   </a:txBody>
@@ -9035,99 +9035,99 @@
                         </a:defRPr>
                       </a:pPr>
                       <a:r>
-                        <a:t>202703</a:t>
-                      </a:r>
-                    </a:p>
-                  </a:txBody>
-                  <a:tcPr anchor="ctr">
-                    <a:solidFill>
-                      <a:srgbClr val="141820"/>
-                    </a:solidFill>
-                  </a:tcPr>
-                </a:tc>
-                <a:tc>
-                  <a:txBody>
-                    <a:bodyPr/>
-                    <a:lstStyle/>
-                    <a:p>
-                      <a:pPr algn="ctr">
-                        <a:defRPr sz="800">
-                          <a:solidFill>
-                            <a:srgbClr val="F0F2F5"/>
-                          </a:solidFill>
-                        </a:defRPr>
-                      </a:pPr>
-                      <a:r>
-                        <a:t>16.78</a:t>
-                      </a:r>
-                    </a:p>
-                  </a:txBody>
-                  <a:tcPr anchor="ctr">
-                    <a:solidFill>
-                      <a:srgbClr val="141820"/>
-                    </a:solidFill>
-                  </a:tcPr>
-                </a:tc>
-                <a:tc>
-                  <a:txBody>
-                    <a:bodyPr/>
-                    <a:lstStyle/>
-                    <a:p>
-                      <a:pPr algn="ctr">
-                        <a:defRPr sz="800">
-                          <a:solidFill>
-                            <a:srgbClr val="F0F2F5"/>
-                          </a:solidFill>
-                        </a:defRPr>
-                      </a:pPr>
-                      <a:r>
-                        <a:t>17.98</a:t>
-                      </a:r>
-                    </a:p>
-                  </a:txBody>
-                  <a:tcPr anchor="ctr">
-                    <a:solidFill>
-                      <a:srgbClr val="141820"/>
-                    </a:solidFill>
-                  </a:tcPr>
-                </a:tc>
-                <a:tc>
-                  <a:txBody>
-                    <a:bodyPr/>
-                    <a:lstStyle/>
-                    <a:p>
-                      <a:pPr algn="ctr">
-                        <a:defRPr sz="800">
-                          <a:solidFill>
-                            <a:srgbClr val="EF4444"/>
-                          </a:solidFill>
-                        </a:defRPr>
-                      </a:pPr>
-                      <a:r>
-                        <a:t>-1.20</a:t>
-                      </a:r>
-                    </a:p>
-                  </a:txBody>
-                  <a:tcPr anchor="ctr">
-                    <a:solidFill>
-                      <a:srgbClr val="141820"/>
-                    </a:solidFill>
-                  </a:tcPr>
-                </a:tc>
-                <a:tc>
-                  <a:txBody>
-                    <a:bodyPr/>
-                    <a:lstStyle/>
-                    <a:p>
-                      <a:pPr algn="ctr">
-                        <a:defRPr sz="800">
-                          <a:solidFill>
-                            <a:srgbClr val="EF4444"/>
-                          </a:solidFill>
-                        </a:defRPr>
-                      </a:pPr>
-                      <a:r>
-                        <a:t>-6.67%</a:t>
+                        <a:t>202607</a:t>
+                      </a:r>
+                    </a:p>
+                  </a:txBody>
+                  <a:tcPr anchor="ctr">
+                    <a:solidFill>
+                      <a:srgbClr val="141820"/>
+                    </a:solidFill>
+                  </a:tcPr>
+                </a:tc>
+                <a:tc>
+                  <a:txBody>
+                    <a:bodyPr/>
+                    <a:lstStyle/>
+                    <a:p>
+                      <a:pPr algn="ctr">
+                        <a:defRPr sz="800">
+                          <a:solidFill>
+                            <a:srgbClr val="F0F2F5"/>
+                          </a:solidFill>
+                        </a:defRPr>
+                      </a:pPr>
+                      <a:r>
+                        <a:t>22.07</a:t>
+                      </a:r>
+                    </a:p>
+                  </a:txBody>
+                  <a:tcPr anchor="ctr">
+                    <a:solidFill>
+                      <a:srgbClr val="141820"/>
+                    </a:solidFill>
+                  </a:tcPr>
+                </a:tc>
+                <a:tc>
+                  <a:txBody>
+                    <a:bodyPr/>
+                    <a:lstStyle/>
+                    <a:p>
+                      <a:pPr algn="ctr">
+                        <a:defRPr sz="800">
+                          <a:solidFill>
+                            <a:srgbClr val="F0F2F5"/>
+                          </a:solidFill>
+                        </a:defRPr>
+                      </a:pPr>
+                      <a:r>
+                        <a:t>20.92</a:t>
+                      </a:r>
+                    </a:p>
+                  </a:txBody>
+                  <a:tcPr anchor="ctr">
+                    <a:solidFill>
+                      <a:srgbClr val="141820"/>
+                    </a:solidFill>
+                  </a:tcPr>
+                </a:tc>
+                <a:tc>
+                  <a:txBody>
+                    <a:bodyPr/>
+                    <a:lstStyle/>
+                    <a:p>
+                      <a:pPr algn="ctr">
+                        <a:defRPr sz="800">
+                          <a:solidFill>
+                            <a:srgbClr val="10B981"/>
+                          </a:solidFill>
+                        </a:defRPr>
+                      </a:pPr>
+                      <a:r>
+                        <a:t>+1.15</a:t>
+                      </a:r>
+                    </a:p>
+                  </a:txBody>
+                  <a:tcPr anchor="ctr">
+                    <a:solidFill>
+                      <a:srgbClr val="141820"/>
+                    </a:solidFill>
+                  </a:tcPr>
+                </a:tc>
+                <a:tc>
+                  <a:txBody>
+                    <a:bodyPr/>
+                    <a:lstStyle/>
+                    <a:p>
+                      <a:pPr algn="ctr">
+                        <a:defRPr sz="800">
+                          <a:solidFill>
+                            <a:srgbClr val="10B981"/>
+                          </a:solidFill>
+                        </a:defRPr>
+                      </a:pPr>
+                      <a:r>
+                        <a:t>+5.50%</a:t>
                       </a:r>
                     </a:p>
                   </a:txBody>
@@ -9152,7 +9152,7 @@
                         </a:defRPr>
                       </a:pPr>
                       <a:r>
-                        <a:t>FUT_EEP_260428</a:t>
+                        <a:t>FUT_EWB_261230</a:t>
                       </a:r>
                     </a:p>
                   </a:txBody>
@@ -9175,7 +9175,7 @@
                         </a:defRPr>
                       </a:pPr>
                       <a:r>
-                        <a:t>Power East Peak (Monthly)</a:t>
+                        <a:t>Power West Base (Monthly)</a:t>
                       </a:r>
                     </a:p>
                   </a:txBody>
@@ -9198,7 +9198,7 @@
                         </a:defRPr>
                       </a:pPr>
                       <a:r>
-                        <a:t>202604</a:t>
+                        <a:t>202612</a:t>
                       </a:r>
                     </a:p>
                   </a:txBody>
@@ -9221,7 +9221,7 @@
                         </a:defRPr>
                       </a:pPr>
                       <a:r>
-                        <a:t>20.80</a:t>
+                        <a:t>17.98</a:t>
                       </a:r>
                     </a:p>
                   </a:txBody>
@@ -9244,7 +9244,7 @@
                         </a:defRPr>
                       </a:pPr>
                       <a:r>
-                        <a:t>22.00</a:t>
+                        <a:t>16.83</a:t>
                       </a:r>
                     </a:p>
                   </a:txBody>
@@ -9262,12 +9262,12 @@
                       <a:pPr algn="ctr">
                         <a:defRPr sz="800">
                           <a:solidFill>
-                            <a:srgbClr val="EF4444"/>
-                          </a:solidFill>
-                        </a:defRPr>
-                      </a:pPr>
-                      <a:r>
-                        <a:t>-1.20</a:t>
+                            <a:srgbClr val="10B981"/>
+                          </a:solidFill>
+                        </a:defRPr>
+                      </a:pPr>
+                      <a:r>
+                        <a:t>+1.15</a:t>
                       </a:r>
                     </a:p>
                   </a:txBody>
@@ -9285,12 +9285,12 @@
                       <a:pPr algn="ctr">
                         <a:defRPr sz="800">
                           <a:solidFill>
-                            <a:srgbClr val="EF4444"/>
-                          </a:solidFill>
-                        </a:defRPr>
-                      </a:pPr>
-                      <a:r>
-                        <a:t>-5.45%</a:t>
+                            <a:srgbClr val="10B981"/>
+                          </a:solidFill>
+                        </a:defRPr>
+                      </a:pPr>
+                      <a:r>
+                        <a:t>+6.83%</a:t>
                       </a:r>
                     </a:p>
                   </a:txBody>
@@ -9384,6 +9384,29 @@
                         </a:defRPr>
                       </a:pPr>
                       <a:r>
+                        <a:t>18.14</a:t>
+                      </a:r>
+                    </a:p>
+                  </a:txBody>
+                  <a:tcPr anchor="ctr">
+                    <a:solidFill>
+                      <a:srgbClr val="141820"/>
+                    </a:solidFill>
+                  </a:tcPr>
+                </a:tc>
+                <a:tc>
+                  <a:txBody>
+                    <a:bodyPr/>
+                    <a:lstStyle/>
+                    <a:p>
+                      <a:pPr algn="ctr">
+                        <a:defRPr sz="800">
+                          <a:solidFill>
+                            <a:srgbClr val="F0F2F5"/>
+                          </a:solidFill>
+                        </a:defRPr>
+                      </a:pPr>
+                      <a:r>
                         <a:t>17.02</a:t>
                       </a:r>
                     </a:p>
@@ -9402,58 +9425,35 @@
                       <a:pPr algn="ctr">
                         <a:defRPr sz="800">
                           <a:solidFill>
-                            <a:srgbClr val="F0F2F5"/>
-                          </a:solidFill>
-                        </a:defRPr>
-                      </a:pPr>
-                      <a:r>
-                        <a:t>18.22</a:t>
-                      </a:r>
-                    </a:p>
-                  </a:txBody>
-                  <a:tcPr anchor="ctr">
-                    <a:solidFill>
-                      <a:srgbClr val="141820"/>
-                    </a:solidFill>
-                  </a:tcPr>
-                </a:tc>
-                <a:tc>
-                  <a:txBody>
-                    <a:bodyPr/>
-                    <a:lstStyle/>
-                    <a:p>
-                      <a:pPr algn="ctr">
-                        <a:defRPr sz="800">
-                          <a:solidFill>
-                            <a:srgbClr val="EF4444"/>
-                          </a:solidFill>
-                        </a:defRPr>
-                      </a:pPr>
-                      <a:r>
-                        <a:t>-1.20</a:t>
-                      </a:r>
-                    </a:p>
-                  </a:txBody>
-                  <a:tcPr anchor="ctr">
-                    <a:solidFill>
-                      <a:srgbClr val="141820"/>
-                    </a:solidFill>
-                  </a:tcPr>
-                </a:tc>
-                <a:tc>
-                  <a:txBody>
-                    <a:bodyPr/>
-                    <a:lstStyle/>
-                    <a:p>
-                      <a:pPr algn="ctr">
-                        <a:defRPr sz="800">
-                          <a:solidFill>
-                            <a:srgbClr val="EF4444"/>
-                          </a:solidFill>
-                        </a:defRPr>
-                      </a:pPr>
-                      <a:r>
-                        <a:t>-6.59%</a:t>
+                            <a:srgbClr val="10B981"/>
+                          </a:solidFill>
+                        </a:defRPr>
+                      </a:pPr>
+                      <a:r>
+                        <a:t>+1.12</a:t>
+                      </a:r>
+                    </a:p>
+                  </a:txBody>
+                  <a:tcPr anchor="ctr">
+                    <a:solidFill>
+                      <a:srgbClr val="141820"/>
+                    </a:solidFill>
+                  </a:tcPr>
+                </a:tc>
+                <a:tc>
+                  <a:txBody>
+                    <a:bodyPr/>
+                    <a:lstStyle/>
+                    <a:p>
+                      <a:pPr algn="ctr">
+                        <a:defRPr sz="800">
+                          <a:solidFill>
+                            <a:srgbClr val="10B981"/>
+                          </a:solidFill>
+                        </a:defRPr>
+                      </a:pPr>
+                      <a:r>
+                        <a:t>+6.58%</a:t>
                       </a:r>
                     </a:p>
                   </a:txBody>
@@ -9478,7 +9478,7 @@
                         </a:defRPr>
                       </a:pPr>
                       <a:r>
-                        <a:t>FUT_EWB_270226</a:t>
+                        <a:t>FUT_EEB_260929</a:t>
                       </a:r>
                     </a:p>
                   </a:txBody>
@@ -9501,7 +9501,7 @@
                         </a:defRPr>
                       </a:pPr>
                       <a:r>
-                        <a:t>Power West Base (Monthly)</a:t>
+                        <a:t>Power East Base (Monthly)</a:t>
                       </a:r>
                     </a:p>
                   </a:txBody>
@@ -9524,7 +9524,7 @@
                         </a:defRPr>
                       </a:pPr>
                       <a:r>
-                        <a:t>202702</a:t>
+                        <a:t>202609</a:t>
                       </a:r>
                     </a:p>
                   </a:txBody>
@@ -9547,7 +9547,7 @@
                         </a:defRPr>
                       </a:pPr>
                       <a:r>
-                        <a:t>16.96</a:t>
+                        <a:t>21.77</a:t>
                       </a:r>
                     </a:p>
                   </a:txBody>
@@ -9570,7 +9570,7 @@
                         </a:defRPr>
                       </a:pPr>
                       <a:r>
-                        <a:t>18.16</a:t>
+                        <a:t>20.67</a:t>
                       </a:r>
                     </a:p>
                   </a:txBody>
@@ -9588,12 +9588,12 @@
                       <a:pPr algn="ctr">
                         <a:defRPr sz="800">
                           <a:solidFill>
-                            <a:srgbClr val="EF4444"/>
-                          </a:solidFill>
-                        </a:defRPr>
-                      </a:pPr>
-                      <a:r>
-                        <a:t>-1.20</a:t>
+                            <a:srgbClr val="10B981"/>
+                          </a:solidFill>
+                        </a:defRPr>
+                      </a:pPr>
+                      <a:r>
+                        <a:t>+1.10</a:t>
                       </a:r>
                     </a:p>
                   </a:txBody>
@@ -9611,12 +9611,12 @@
                       <a:pPr algn="ctr">
                         <a:defRPr sz="800">
                           <a:solidFill>
-                            <a:srgbClr val="EF4444"/>
-                          </a:solidFill>
-                        </a:defRPr>
-                      </a:pPr>
-                      <a:r>
-                        <a:t>-6.61%</a:t>
+                            <a:srgbClr val="10B981"/>
+                          </a:solidFill>
+                        </a:defRPr>
+                      </a:pPr>
+                      <a:r>
+                        <a:t>+5.32%</a:t>
                       </a:r>
                     </a:p>
                   </a:txBody>
@@ -9641,145 +9641,145 @@
                         </a:defRPr>
                       </a:pPr>
                       <a:r>
-                        <a:t>FUT_EWB_270330</a:t>
-                      </a:r>
-                    </a:p>
-                  </a:txBody>
-                  <a:tcPr anchor="ctr">
-                    <a:solidFill>
-                      <a:srgbClr val="141820"/>
-                    </a:solidFill>
-                  </a:tcPr>
-                </a:tc>
-                <a:tc>
-                  <a:txBody>
-                    <a:bodyPr/>
-                    <a:lstStyle/>
-                    <a:p>
-                      <a:pPr algn="ctr">
-                        <a:defRPr sz="800">
-                          <a:solidFill>
-                            <a:srgbClr val="F0F2F5"/>
-                          </a:solidFill>
-                        </a:defRPr>
-                      </a:pPr>
-                      <a:r>
-                        <a:t>Power West Base (Monthly)</a:t>
-                      </a:r>
-                    </a:p>
-                  </a:txBody>
-                  <a:tcPr anchor="ctr">
-                    <a:solidFill>
-                      <a:srgbClr val="141820"/>
-                    </a:solidFill>
-                  </a:tcPr>
-                </a:tc>
-                <a:tc>
-                  <a:txBody>
-                    <a:bodyPr/>
-                    <a:lstStyle/>
-                    <a:p>
-                      <a:pPr algn="ctr">
-                        <a:defRPr sz="800">
-                          <a:solidFill>
-                            <a:srgbClr val="F0F2F5"/>
-                          </a:solidFill>
-                        </a:defRPr>
-                      </a:pPr>
-                      <a:r>
-                        <a:t>202703</a:t>
-                      </a:r>
-                    </a:p>
-                  </a:txBody>
-                  <a:tcPr anchor="ctr">
-                    <a:solidFill>
-                      <a:srgbClr val="141820"/>
-                    </a:solidFill>
-                  </a:tcPr>
-                </a:tc>
-                <a:tc>
-                  <a:txBody>
-                    <a:bodyPr/>
-                    <a:lstStyle/>
-                    <a:p>
-                      <a:pPr algn="ctr">
-                        <a:defRPr sz="800">
-                          <a:solidFill>
-                            <a:srgbClr val="F0F2F5"/>
-                          </a:solidFill>
-                        </a:defRPr>
-                      </a:pPr>
-                      <a:r>
-                        <a:t>15.02</a:t>
-                      </a:r>
-                    </a:p>
-                  </a:txBody>
-                  <a:tcPr anchor="ctr">
-                    <a:solidFill>
-                      <a:srgbClr val="141820"/>
-                    </a:solidFill>
-                  </a:tcPr>
-                </a:tc>
-                <a:tc>
-                  <a:txBody>
-                    <a:bodyPr/>
-                    <a:lstStyle/>
-                    <a:p>
-                      <a:pPr algn="ctr">
-                        <a:defRPr sz="800">
-                          <a:solidFill>
-                            <a:srgbClr val="F0F2F5"/>
-                          </a:solidFill>
-                        </a:defRPr>
-                      </a:pPr>
-                      <a:r>
-                        <a:t>16.14</a:t>
-                      </a:r>
-                    </a:p>
-                  </a:txBody>
-                  <a:tcPr anchor="ctr">
-                    <a:solidFill>
-                      <a:srgbClr val="141820"/>
-                    </a:solidFill>
-                  </a:tcPr>
-                </a:tc>
-                <a:tc>
-                  <a:txBody>
-                    <a:bodyPr/>
-                    <a:lstStyle/>
-                    <a:p>
-                      <a:pPr algn="ctr">
-                        <a:defRPr sz="800">
-                          <a:solidFill>
-                            <a:srgbClr val="EF4444"/>
-                          </a:solidFill>
-                        </a:defRPr>
-                      </a:pPr>
-                      <a:r>
-                        <a:t>-1.12</a:t>
-                      </a:r>
-                    </a:p>
-                  </a:txBody>
-                  <a:tcPr anchor="ctr">
-                    <a:solidFill>
-                      <a:srgbClr val="141820"/>
-                    </a:solidFill>
-                  </a:tcPr>
-                </a:tc>
-                <a:tc>
-                  <a:txBody>
-                    <a:bodyPr/>
-                    <a:lstStyle/>
-                    <a:p>
-                      <a:pPr algn="ctr">
-                        <a:defRPr sz="800">
-                          <a:solidFill>
-                            <a:srgbClr val="EF4444"/>
-                          </a:solidFill>
-                        </a:defRPr>
-                      </a:pPr>
-                      <a:r>
-                        <a:t>-6.94%</a:t>
+                        <a:t>FUT_EEB_261230</a:t>
+                      </a:r>
+                    </a:p>
+                  </a:txBody>
+                  <a:tcPr anchor="ctr">
+                    <a:solidFill>
+                      <a:srgbClr val="141820"/>
+                    </a:solidFill>
+                  </a:tcPr>
+                </a:tc>
+                <a:tc>
+                  <a:txBody>
+                    <a:bodyPr/>
+                    <a:lstStyle/>
+                    <a:p>
+                      <a:pPr algn="ctr">
+                        <a:defRPr sz="800">
+                          <a:solidFill>
+                            <a:srgbClr val="F0F2F5"/>
+                          </a:solidFill>
+                        </a:defRPr>
+                      </a:pPr>
+                      <a:r>
+                        <a:t>Power East Base (Monthly)</a:t>
+                      </a:r>
+                    </a:p>
+                  </a:txBody>
+                  <a:tcPr anchor="ctr">
+                    <a:solidFill>
+                      <a:srgbClr val="141820"/>
+                    </a:solidFill>
+                  </a:tcPr>
+                </a:tc>
+                <a:tc>
+                  <a:txBody>
+                    <a:bodyPr/>
+                    <a:lstStyle/>
+                    <a:p>
+                      <a:pPr algn="ctr">
+                        <a:defRPr sz="800">
+                          <a:solidFill>
+                            <a:srgbClr val="F0F2F5"/>
+                          </a:solidFill>
+                        </a:defRPr>
+                      </a:pPr>
+                      <a:r>
+                        <a:t>202612</a:t>
+                      </a:r>
+                    </a:p>
+                  </a:txBody>
+                  <a:tcPr anchor="ctr">
+                    <a:solidFill>
+                      <a:srgbClr val="141820"/>
+                    </a:solidFill>
+                  </a:tcPr>
+                </a:tc>
+                <a:tc>
+                  <a:txBody>
+                    <a:bodyPr/>
+                    <a:lstStyle/>
+                    <a:p>
+                      <a:pPr algn="ctr">
+                        <a:defRPr sz="800">
+                          <a:solidFill>
+                            <a:srgbClr val="F0F2F5"/>
+                          </a:solidFill>
+                        </a:defRPr>
+                      </a:pPr>
+                      <a:r>
+                        <a:t>20.14</a:t>
+                      </a:r>
+                    </a:p>
+                  </a:txBody>
+                  <a:tcPr anchor="ctr">
+                    <a:solidFill>
+                      <a:srgbClr val="141820"/>
+                    </a:solidFill>
+                  </a:tcPr>
+                </a:tc>
+                <a:tc>
+                  <a:txBody>
+                    <a:bodyPr/>
+                    <a:lstStyle/>
+                    <a:p>
+                      <a:pPr algn="ctr">
+                        <a:defRPr sz="800">
+                          <a:solidFill>
+                            <a:srgbClr val="F0F2F5"/>
+                          </a:solidFill>
+                        </a:defRPr>
+                      </a:pPr>
+                      <a:r>
+                        <a:t>19.07</a:t>
+                      </a:r>
+                    </a:p>
+                  </a:txBody>
+                  <a:tcPr anchor="ctr">
+                    <a:solidFill>
+                      <a:srgbClr val="141820"/>
+                    </a:solidFill>
+                  </a:tcPr>
+                </a:tc>
+                <a:tc>
+                  <a:txBody>
+                    <a:bodyPr/>
+                    <a:lstStyle/>
+                    <a:p>
+                      <a:pPr algn="ctr">
+                        <a:defRPr sz="800">
+                          <a:solidFill>
+                            <a:srgbClr val="10B981"/>
+                          </a:solidFill>
+                        </a:defRPr>
+                      </a:pPr>
+                      <a:r>
+                        <a:t>+1.07</a:t>
+                      </a:r>
+                    </a:p>
+                  </a:txBody>
+                  <a:tcPr anchor="ctr">
+                    <a:solidFill>
+                      <a:srgbClr val="141820"/>
+                    </a:solidFill>
+                  </a:tcPr>
+                </a:tc>
+                <a:tc>
+                  <a:txBody>
+                    <a:bodyPr/>
+                    <a:lstStyle/>
+                    <a:p>
+                      <a:pPr algn="ctr">
+                        <a:defRPr sz="800">
+                          <a:solidFill>
+                            <a:srgbClr val="10B981"/>
+                          </a:solidFill>
+                        </a:defRPr>
+                      </a:pPr>
+                      <a:r>
+                        <a:t>+5.61%</a:t>
                       </a:r>
                     </a:p>
                   </a:txBody>
@@ -9804,7 +9804,7 @@
                         </a:defRPr>
                       </a:pPr>
                       <a:r>
-                        <a:t>FUT_EWB_260929</a:t>
+                        <a:t>FUT_EWP_270330</a:t>
                       </a:r>
                     </a:p>
                   </a:txBody>
@@ -9827,7 +9827,7 @@
                         </a:defRPr>
                       </a:pPr>
                       <a:r>
-                        <a:t>Power West Base (Monthly)</a:t>
+                        <a:t>Power West Peak (Monthly)</a:t>
                       </a:r>
                     </a:p>
                   </a:txBody>
@@ -9850,7 +9850,7 @@
                         </a:defRPr>
                       </a:pPr>
                       <a:r>
-                        <a:t>202609</a:t>
+                        <a:t>202703</a:t>
                       </a:r>
                     </a:p>
                   </a:txBody>
@@ -9873,7 +9873,7 @@
                         </a:defRPr>
                       </a:pPr>
                       <a:r>
-                        <a:t>17.65</a:t>
+                        <a:t>18.20</a:t>
                       </a:r>
                     </a:p>
                   </a:txBody>
@@ -9896,7 +9896,7 @@
                         </a:defRPr>
                       </a:pPr>
                       <a:r>
-                        <a:t>18.75</a:t>
+                        <a:t>17.14</a:t>
                       </a:r>
                     </a:p>
                   </a:txBody>
@@ -9914,12 +9914,12 @@
                       <a:pPr algn="ctr">
                         <a:defRPr sz="800">
                           <a:solidFill>
-                            <a:srgbClr val="EF4444"/>
-                          </a:solidFill>
-                        </a:defRPr>
-                      </a:pPr>
-                      <a:r>
-                        <a:t>-1.10</a:t>
+                            <a:srgbClr val="10B981"/>
+                          </a:solidFill>
+                        </a:defRPr>
+                      </a:pPr>
+                      <a:r>
+                        <a:t>+1.06</a:t>
                       </a:r>
                     </a:p>
                   </a:txBody>
@@ -9937,12 +9937,12 @@
                       <a:pPr algn="ctr">
                         <a:defRPr sz="800">
                           <a:solidFill>
-                            <a:srgbClr val="EF4444"/>
-                          </a:solidFill>
-                        </a:defRPr>
-                      </a:pPr>
-                      <a:r>
-                        <a:t>-5.87%</a:t>
+                            <a:srgbClr val="10B981"/>
+                          </a:solidFill>
+                        </a:defRPr>
+                      </a:pPr>
+                      <a:r>
+                        <a:t>+6.18%</a:t>
                       </a:r>
                     </a:p>
                   </a:txBody>
@@ -9967,7 +9967,7 @@
                         </a:defRPr>
                       </a:pPr>
                       <a:r>
-                        <a:t>FUT_EEB_260929</a:t>
+                        <a:t>FUT_EEB_261127</a:t>
                       </a:r>
                     </a:p>
                   </a:txBody>
@@ -10013,99 +10013,99 @@
                         </a:defRPr>
                       </a:pPr>
                       <a:r>
-                        <a:t>202609</a:t>
-                      </a:r>
-                    </a:p>
-                  </a:txBody>
-                  <a:tcPr anchor="ctr">
-                    <a:solidFill>
-                      <a:srgbClr val="141820"/>
-                    </a:solidFill>
-                  </a:tcPr>
-                </a:tc>
-                <a:tc>
-                  <a:txBody>
-                    <a:bodyPr/>
-                    <a:lstStyle/>
-                    <a:p>
-                      <a:pPr algn="ctr">
-                        <a:defRPr sz="800">
-                          <a:solidFill>
-                            <a:srgbClr val="F0F2F5"/>
-                          </a:solidFill>
-                        </a:defRPr>
-                      </a:pPr>
-                      <a:r>
-                        <a:t>20.67</a:t>
-                      </a:r>
-                    </a:p>
-                  </a:txBody>
-                  <a:tcPr anchor="ctr">
-                    <a:solidFill>
-                      <a:srgbClr val="141820"/>
-                    </a:solidFill>
-                  </a:tcPr>
-                </a:tc>
-                <a:tc>
-                  <a:txBody>
-                    <a:bodyPr/>
-                    <a:lstStyle/>
-                    <a:p>
-                      <a:pPr algn="ctr">
-                        <a:defRPr sz="800">
-                          <a:solidFill>
-                            <a:srgbClr val="F0F2F5"/>
-                          </a:solidFill>
-                        </a:defRPr>
-                      </a:pPr>
-                      <a:r>
-                        <a:t>21.75</a:t>
-                      </a:r>
-                    </a:p>
-                  </a:txBody>
-                  <a:tcPr anchor="ctr">
-                    <a:solidFill>
-                      <a:srgbClr val="141820"/>
-                    </a:solidFill>
-                  </a:tcPr>
-                </a:tc>
-                <a:tc>
-                  <a:txBody>
-                    <a:bodyPr/>
-                    <a:lstStyle/>
-                    <a:p>
-                      <a:pPr algn="ctr">
-                        <a:defRPr sz="800">
-                          <a:solidFill>
-                            <a:srgbClr val="EF4444"/>
-                          </a:solidFill>
-                        </a:defRPr>
-                      </a:pPr>
-                      <a:r>
-                        <a:t>-1.08</a:t>
-                      </a:r>
-                    </a:p>
-                  </a:txBody>
-                  <a:tcPr anchor="ctr">
-                    <a:solidFill>
-                      <a:srgbClr val="141820"/>
-                    </a:solidFill>
-                  </a:tcPr>
-                </a:tc>
-                <a:tc>
-                  <a:txBody>
-                    <a:bodyPr/>
-                    <a:lstStyle/>
-                    <a:p>
-                      <a:pPr algn="ctr">
-                        <a:defRPr sz="800">
-                          <a:solidFill>
-                            <a:srgbClr val="EF4444"/>
-                          </a:solidFill>
-                        </a:defRPr>
-                      </a:pPr>
-                      <a:r>
-                        <a:t>-4.97%</a:t>
+                        <a:t>202611</a:t>
+                      </a:r>
+                    </a:p>
+                  </a:txBody>
+                  <a:tcPr anchor="ctr">
+                    <a:solidFill>
+                      <a:srgbClr val="141820"/>
+                    </a:solidFill>
+                  </a:tcPr>
+                </a:tc>
+                <a:tc>
+                  <a:txBody>
+                    <a:bodyPr/>
+                    <a:lstStyle/>
+                    <a:p>
+                      <a:pPr algn="ctr">
+                        <a:defRPr sz="800">
+                          <a:solidFill>
+                            <a:srgbClr val="F0F2F5"/>
+                          </a:solidFill>
+                        </a:defRPr>
+                      </a:pPr>
+                      <a:r>
+                        <a:t>19.76</a:t>
+                      </a:r>
+                    </a:p>
+                  </a:txBody>
+                  <a:tcPr anchor="ctr">
+                    <a:solidFill>
+                      <a:srgbClr val="141820"/>
+                    </a:solidFill>
+                  </a:tcPr>
+                </a:tc>
+                <a:tc>
+                  <a:txBody>
+                    <a:bodyPr/>
+                    <a:lstStyle/>
+                    <a:p>
+                      <a:pPr algn="ctr">
+                        <a:defRPr sz="800">
+                          <a:solidFill>
+                            <a:srgbClr val="F0F2F5"/>
+                          </a:solidFill>
+                        </a:defRPr>
+                      </a:pPr>
+                      <a:r>
+                        <a:t>18.72</a:t>
+                      </a:r>
+                    </a:p>
+                  </a:txBody>
+                  <a:tcPr anchor="ctr">
+                    <a:solidFill>
+                      <a:srgbClr val="141820"/>
+                    </a:solidFill>
+                  </a:tcPr>
+                </a:tc>
+                <a:tc>
+                  <a:txBody>
+                    <a:bodyPr/>
+                    <a:lstStyle/>
+                    <a:p>
+                      <a:pPr algn="ctr">
+                        <a:defRPr sz="800">
+                          <a:solidFill>
+                            <a:srgbClr val="10B981"/>
+                          </a:solidFill>
+                        </a:defRPr>
+                      </a:pPr>
+                      <a:r>
+                        <a:t>+1.04</a:t>
+                      </a:r>
+                    </a:p>
+                  </a:txBody>
+                  <a:tcPr anchor="ctr">
+                    <a:solidFill>
+                      <a:srgbClr val="141820"/>
+                    </a:solidFill>
+                  </a:tcPr>
+                </a:tc>
+                <a:tc>
+                  <a:txBody>
+                    <a:bodyPr/>
+                    <a:lstStyle/>
+                    <a:p>
+                      <a:pPr algn="ctr">
+                        <a:defRPr sz="800">
+                          <a:solidFill>
+                            <a:srgbClr val="10B981"/>
+                          </a:solidFill>
+                        </a:defRPr>
+                      </a:pPr>
+                      <a:r>
+                        <a:t>+5.56%</a:t>
                       </a:r>
                     </a:p>
                   </a:txBody>
